--- a/GenAI/wk4-embedding-vectorDB-SemanticSearch-RAG/3_vectorDB_chunking.pptx
+++ b/GenAI/wk4-embedding-vectorDB-SemanticSearch-RAG/3_vectorDB_chunking.pptx
@@ -223,7 +223,7 @@
           <a:p>
             <a:fld id="{7BAEECA8-D063-486F-AE31-5020270C1449}" type="datetimeFigureOut">
               <a:rPr lang="en-US" smtClean="0"/>
-              <a:t>9/5/2026</a:t>
+              <a:t>9/13/2026</a:t>
             </a:fld>
             <a:endParaRPr lang="en-US"/>
           </a:p>
@@ -370,15 +370,15 @@
           <inkml:channelProperty channel="OE" name="resolution" value="1000" units="1/deg"/>
         </inkml:channelProperties>
       </inkml:inkSource>
-      <inkml:timestamp xml:id="ts0" timeString="2026-03-19T18:28:13.133"/>
+      <inkml:timestamp xml:id="ts0" timeString="2026-03-19T18:36:31.411"/>
     </inkml:context>
     <inkml:brush xml:id="br0">
       <inkml:brushProperty name="width" value="0.2" units="cm"/>
       <inkml:brushProperty name="height" value="0.2" units="cm"/>
-      <inkml:brushProperty name="color" value="#66CC00"/>
+      <inkml:brushProperty name="color" value="#FFC114"/>
     </inkml:brush>
   </inkml:definitions>
-  <inkml:trace contextRef="#ctx0" brushRef="#br0">81 28 3796 0 0,'-61'-19'1876'0'0,"58"19"-1519"0"0,-5-3-94 0 0,-1 0 230 0 0,10 1-478 0 0,728 26-326 0 0,-629-14 246 0 0,-98-9 43 0 0,43 15-426 0 0,-43-15 407 0 0,3 44-175 0 0,-7-6 113 0 0,-13 68 1 0 0,-1 4 10 0 0,9 79 29 0 0,25 277 1 0 0,-3-216 44 0 0,37 376-66 0 0,-18-438 109 0 0,59 187-1 0 0,-82-303 891 0 0,-10-71-603 0 0,-28 9 752 0 0,-10-11-757 0 0,0-1 0 0 0,-40-8 0 0 0,4 1-102 0 0,-432-25 541 0 0,397 24-630 0 0,105 8-159 0 0,-4 0-200 0 0,-14-4-1097 0 0</inkml:trace>
+  <inkml:trace contextRef="#ctx0" brushRef="#br0">25 114 4420 0 0,'-22'-21'-298'0'0,"22"21"301"0"0,-1-1 0 0 0,1 1 0 0 0,0-1 0 0 0,0 1 0 0 0,-1-1 0 0 0,1 1 0 0 0,0-1 0 0 0,0 1 0 0 0,0-1 0 0 0,0 1 0 0 0,0-1 0 0 0,-1 1-1 0 0,1-1 1 0 0,0 0 0 0 0,0 1 0 0 0,0-1 0 0 0,1 1 0 0 0,-1-1 0 0 0,0 1 0 0 0,0-1 0 0 0,0 1 0 0 0,0-1 0 0 0,0 1 0 0 0,1-1 0 0 0,-1 1 0 0 0,1-2 0 0 0,2-1 3 0 0,1 0 1 0 0,0 1 0 0 0,0-1 0 0 0,0 1-1 0 0,0-1 1 0 0,1 1 0 0 0,-1 0 0 0 0,8-1-1 0 0,33-11-54 0 0,0 3-1 0 0,0 1 0 0 0,1 3 1 0 0,86-3-1 0 0,-128 10 44 0 0,20-2-121 0 0,0 1-1 0 0,1 1 0 0 0,-1 1 0 0 0,24 5 0 0 0,-46-5 118 0 0,-1 0-1 0 0,1 0 1 0 0,0-1-1 0 0,-1 1 0 0 0,1 1 1 0 0,0-1-1 0 0,-1 0 1 0 0,0 0-1 0 0,1 1 0 0 0,-1-1 1 0 0,0 0-1 0 0,0 1 1 0 0,1-1-1 0 0,-1 1 1 0 0,0 0-1 0 0,-1-1 0 0 0,1 1 1 0 0,0 0-1 0 0,0 0 1 0 0,-1-1-1 0 0,1 1 0 0 0,-1 0 1 0 0,1 0-1 0 0,-1 0 1 0 0,0 0-1 0 0,0 0 1 0 0,0 0-1 0 0,0-1 0 0 0,0 1 1 0 0,-1 2-1 0 0,-8 64-146 0 0,7-60 133 0 0,-44 192-109 0 0,-24 128-23 0 0,59-256 132 0 0,3 0-1 0 0,3 1 1 0 0,4-1 0 0 0,2 1 0 0 0,4 0-1 0 0,3-1 1 0 0,26 111 0 0 0,69 129 1 0 0,11 49 113 0 0,-110-344-77 0 0,0-1 0 0 0,-2 1 0 0 0,0 0-1 0 0,-1 0 1 0 0,-1 0 0 0 0,-3 33 0 0 0,1-41 14 0 0,0 0 0 0 0,-1 0 0 0 0,0 0 0 0 0,0 0 0 0 0,-1 0 0 0 0,0-1 0 0 0,0 0 0 0 0,-1 1 0 0 0,0-2 0 0 0,0 1 0 0 0,-1-1 1 0 0,0 1-1 0 0,-13 10 0 0 0,9-10 95 0 0,1-1 0 0 0,-1-1 0 0 0,0 0 0 0 0,-1 0 0 0 0,0-1 0 0 0,1 0 1 0 0,-1-1-1 0 0,-1 0 0 0 0,1-1 0 0 0,-1 0 0 0 0,1-1 0 0 0,-1-1 0 0 0,0 1 0 0 0,-12-2 1 0 0,-3 0 336 0 0,-1-1 0 0 0,0-1 0 0 0,1-2 0 0 0,-51-14 0 0 0,76 18-586 0 0,0 0 0 0 0,0-1 1 0 0,0 1-1 0 0,0-1 1 0 0,0 0-1 0 0,0 1 1 0 0,0-1-1 0 0,0 0 0 0 0,0 0 1 0 0,1-1-1 0 0,-1 1 1 0 0,0 0-1 0 0,1 0 0 0 0,-1-1 1 0 0,1 1-1 0 0,-1-1 1 0 0,1 0-1 0 0,0 1 0 0 0,0-1 1 0 0,-1 0-1 0 0,1 0 1 0 0,0 1-1 0 0,1-1 1 0 0,-1 0-1 0 0,0 0 0 0 0,0 0 1 0 0,1 0-1 0 0,-1 0 1 0 0,1-4-1 0 0,0-6-1387 0 0</inkml:trace>
 </inkml:ink>
 </file>
 
@@ -402,15 +402,15 @@
           <inkml:channelProperty channel="OE" name="resolution" value="1000" units="1/deg"/>
         </inkml:channelProperties>
       </inkml:inkSource>
-      <inkml:timestamp xml:id="ts0" timeString="2026-03-19T18:28:17.588"/>
+      <inkml:timestamp xml:id="ts0" timeString="2026-03-19T18:36:36.428"/>
     </inkml:context>
     <inkml:brush xml:id="br0">
       <inkml:brushProperty name="width" value="0.2" units="cm"/>
       <inkml:brushProperty name="height" value="0.2" units="cm"/>
-      <inkml:brushProperty name="color" value="#66CC00"/>
+      <inkml:brushProperty name="color" value="#FFC114"/>
     </inkml:brush>
   </inkml:definitions>
-  <inkml:trace contextRef="#ctx0" brushRef="#br0">381 764 5348 0 0,'0'0'-255'0'0,"9"-24"354"0"0,-12 21-99 0 0,0 1 0 0 0,-1 0 0 0 0,1-1-1 0 0,-1 1 1 0 0,0 0 0 0 0,0 1-1 0 0,1-1 1 0 0,-1 1 0 0 0,0 0-1 0 0,0 0 1 0 0,-1 0 0 0 0,1 0 0 0 0,0 1-1 0 0,0-1 1 0 0,0 1 0 0 0,0 0-1 0 0,-1 1 1 0 0,-5 0 0 0 0,-9 1-41 0 0,0 1 1 0 0,-33 10-1 0 0,36-8 12 0 0,0 2 0 0 0,1-1 0 0 0,0 2 1 0 0,1 0-1 0 0,0 1 0 0 0,0 1 0 0 0,0 0 0 0 0,1 0 0 0 0,1 1 0 0 0,0 1 0 0 0,-15 19 0 0 0,22-25 9 0 0,1 0 0 0 0,0 0-1 0 0,0 0 1 0 0,1 1-1 0 0,0 0 1 0 0,0-1 0 0 0,1 1-1 0 0,-1 0 1 0 0,1 0-1 0 0,1 1 1 0 0,0-1 0 0 0,-1 10-1 0 0,2-12 12 0 0,1 1 1 0 0,-1 0-1 0 0,1 0 0 0 0,0 0 0 0 0,1-1 0 0 0,0 1 0 0 0,0-1 0 0 0,0 1 1 0 0,0-1-1 0 0,1 0 0 0 0,0 0 0 0 0,0 0 0 0 0,0 0 0 0 0,1 0 0 0 0,0-1 0 0 0,-1 1 1 0 0,7 4-1 0 0,11 9-2 0 0,0-2 1 0 0,2 0 0 0 0,-1-1 0 0 0,2-2-1 0 0,0 0 1 0 0,0-1 0 0 0,1-2 0 0 0,0 0-1 0 0,52 11 1 0 0,-10-8-4 0 0,1-2 1 0 0,118 4-1 0 0,-167-15 71 0 0,-1 0 1 0 0,1 0-1 0 0,-1-2 1 0 0,1 0-1 0 0,-1-2 1 0 0,0 0-1 0 0,0 0 1 0 0,0-2-1 0 0,19-8 1 0 0,-27 8 10 0 0,-1 1 1 0 0,1-1-1 0 0,-1-1 0 0 0,0 1 1 0 0,0-1-1 0 0,-1-1 0 0 0,0 0 1 0 0,-1 0-1 0 0,1-1 1 0 0,-2 1-1 0 0,1-2 0 0 0,-1 1 1 0 0,-1-1-1 0 0,1 0 0 0 0,-2 0 1 0 0,5-13-1 0 0,2-13 16 0 0,-2 0 1 0 0,-1-1-1 0 0,-2 0 0 0 0,-2-1 0 0 0,-2 1 1 0 0,-1 0-1 0 0,-1-1 0 0 0,-2 1 0 0 0,-2-1 1 0 0,-9-38-1 0 0,-5-2 45 0 0,-3 1 0 0 0,-3 2 0 0 0,-58-125 0 0 0,12 37 891 0 0,61 147-1456 0 0,7 25-397 0 0,6 32-142 0 0,-3-36 1136 0 0,62 493-1025 0 0,5-168 802 0 0,-43-221 90 0 0,-21-90-25 0 0,5 20-38 0 0,-1 1 0 0 0,4 69 0 0 0,-12-106 49 0 0,8 18 4666 0 0,-11-57-3964 0 0,2-20-521 0 0,0 24-179 0 0,1 0 0 0 0,1 0 0 0 0,11-62 0 0 0,-7 82-199 0 0,0 0 0 0 0,0 0-1 0 0,1 0 1 0 0,1 1 0 0 0,0 0-1 0 0,0 0 1 0 0,1 0 0 0 0,0 1-1 0 0,1 0 1 0 0,0 1-1 0 0,12-10 1 0 0,9-10-591 0 0,-28 27 657 0 0,-1 0 0 0 0,1 1 0 0 0,-1-1 0 0 0,1 1-1 0 0,0 0 1 0 0,0 0 0 0 0,-1-1 0 0 0,1 1 0 0 0,0 0 0 0 0,0 0 0 0 0,0 1 0 0 0,0-1-1 0 0,0 0 1 0 0,0 1 0 0 0,0-1 0 0 0,1 1 0 0 0,-1 0 0 0 0,0 0 0 0 0,0 0 0 0 0,0 0-1 0 0,0 0 1 0 0,0 0 0 0 0,0 0 0 0 0,1 1 0 0 0,-1-1 0 0 0,3 2 0 0 0,-1-1-1 0 0,21 34-557 0 0,-18-13 590 0 0,-2 1-1 0 0,-1 0 1 0 0,-1 0-1 0 0,-1 0 1 0 0,-1 37-1 0 0,4 42-118 0 0,-2-94 223 0 0,-1 0 0 0 0,1 0 0 0 0,0 0 0 0 0,1 0 0 0 0,-1 0 0 0 0,2-1 0 0 0,-1 0 0 0 0,1 0 0 0 0,0 0 0 0 0,1 0 0 0 0,-1-1 0 0 0,1 0 0 0 0,1 0 0 0 0,-1 0 0 0 0,1-1 0 0 0,0 0 0 0 0,0 0 0 0 0,0-1 0 0 0,1 0 0 0 0,-1 0 0 0 0,17 4 0 0 0,-21-7 72 0 0,1-3-62 0 0,6-2 27 0 0,-1 0 1 0 0,0-1-1 0 0,-1 0 1 0 0,1-1-1 0 0,-1 0 1 0 0,0-1-1 0 0,0 1 1 0 0,11-14-1 0 0,-6 3 1 0 0,0-1 0 0 0,-2 0-1 0 0,1-1 1 0 0,-2-1-1 0 0,15-39 1 0 0,22-108 1401 0 0,-37 124-420 0 0,1-20 31 0 0,-11 61-1117 0 0,-5 23-279 0 0,0 0 147 0 0,1 1 0 0 0,2-1 1 0 0,-1 29-1 0 0,3-24 42 0 0,0 0 0 0 0,2 0 1 0 0,1 0-1 0 0,2-1 0 0 0,0 1 0 0 0,10 27 1 0 0,-13-46 116 0 0,1 0 1 0 0,0 1-1 0 0,1-1 0 0 0,0 0 1 0 0,0-1-1 0 0,0 1 0 0 0,1-1 1 0 0,0 1-1 0 0,0-1 1 0 0,0-1-1 0 0,1 1 0 0 0,0-1 1 0 0,0 0-1 0 0,0 0 0 0 0,1-1 1 0 0,0 0-1 0 0,0 0 1 0 0,0-1-1 0 0,0 1 0 0 0,0-1 1 0 0,1-1-1 0 0,-1 0 0 0 0,1 0 1 0 0,10 1-1 0 0,-11-3 27 0 0,0 0 0 0 0,0 0 1 0 0,1-1-1 0 0,-1 0 0 0 0,0 0 0 0 0,0-1 0 0 0,0 0 0 0 0,-1 0 1 0 0,1-1-1 0 0,0 0 0 0 0,-1 0 0 0 0,0 0 0 0 0,1-1 0 0 0,-2 0 0 0 0,1 0 1 0 0,0-1-1 0 0,6-6 0 0 0,1-1 14 0 0,0-2 0 0 0,0 1 0 0 0,-2-2-1 0 0,0 1 1 0 0,14-26 0 0 0,13-45 506 0 0,-12 22 556 0 0,-16 38-706 0 0,-15 32-494 0 0,-17 46-144 0 0,18-35 168 0 0,1 1 1 0 0,1 0-1 0 0,1 0 0 0 0,1 0 0 0 0,0 0 0 0 0,1-1 0 0 0,2 1 1 0 0,-1 0-1 0 0,10 31 0 0 0,-6-35 37 0 0,-1-1 0 0 0,2 0 1 0 0,0 0-1 0 0,0 0 0 0 0,1-1 1 0 0,1 0-1 0 0,0 0 0 0 0,1-1 1 0 0,1-1-1 0 0,0 0 0 0 0,0 0 1 0 0,17 12-1 0 0,-21-18 34 0 0,-1 1 42 0 0,0-1 0 0 0,1 0 0 0 0,0-1 1 0 0,0 0-1 0 0,0 0 0 0 0,0 0 1 0 0,0-1-1 0 0,1 0 0 0 0,0 0 0 0 0,13 2 1 0 0,-19-5 0 0 0,1 0 0 0 0,0 0 0 0 0,-1-1 0 0 0,1 1 0 0 0,-1-1 0 0 0,1 0 0 0 0,-1 0 0 0 0,0 0 0 0 0,1 0 0 0 0,-1 0 0 0 0,0 0 0 0 0,1-1 0 0 0,-1 1 0 0 0,0-1 0 0 0,0 0 0 0 0,0 1 0 0 0,-1-1 0 0 0,1 0 0 0 0,3-4 0 0 0,24-40 207 0 0,-14 11-48 0 0,-1-1 1 0 0,-2-1-1 0 0,-1 0 1 0 0,-3-1-1 0 0,0 0 1 0 0,2-50-1 0 0,0-3 650 0 0,-10 90-817 0 0,5-30-72 0 0,-4 30 26 0 0,20 208-2901 0 0,1-61 2659 0 0,-16-82 4741 0 0,-7-70-4182 0 0,-1-9-297 0 0,1-1 0 0 0,0 1 0 0 0,2 0 0 0 0,-1 0 0 0 0,2 0 0 0 0,0-1 0 0 0,1 2 1 0 0,0-1-1 0 0,2 0 0 0 0,-1 1 0 0 0,9-17 0 0 0,-2 5-165 0 0,1 0-1 0 0,2 1 1 0 0,0 1-1 0 0,2 0 1 0 0,23-28-1 0 0,-38 50 169 0 0,23-24-400 0 0,33-31 0 0 0,-52 52 280 0 0,0 1-1 0 0,1-1 1 0 0,0 1-1 0 0,0 0 1 0 0,0 0 0 0 0,0 1-1 0 0,0-1 1 0 0,1 1-1 0 0,0 1 1 0 0,-1 0-1 0 0,1-1 1 0 0,0 2 0 0 0,10-2-1 0 0,-13 3 74 0 0,0 1-1 0 0,0-1 1 0 0,0 1-1 0 0,0 0 0 0 0,0 0 1 0 0,0 1-1 0 0,0-1 1 0 0,-1 1-1 0 0,1 0 1 0 0,0 0-1 0 0,-1 0 0 0 0,0 0 1 0 0,1 1-1 0 0,-1-1 1 0 0,0 1-1 0 0,0 0 1 0 0,0 0-1 0 0,-1 0 0 0 0,1 0 1 0 0,-1 0-1 0 0,1 1 1 0 0,-1-1-1 0 0,0 1 1 0 0,1 4-1 0 0,2 3-37 0 0,0 0 1 0 0,-1 1-1 0 0,-1-1 0 0 0,0 1 0 0 0,0 0 1 0 0,1 20-1 0 0,-2 21-133 0 0,-1-29 105 0 0,0 1 0 0 0,2-1 0 0 0,6 28 0 0 0,-7-45 110 0 0,0 1-1 0 0,1 0 0 0 0,0-1 1 0 0,0 0-1 0 0,1 0 0 0 0,0 0 1 0 0,0 0-1 0 0,1 0 0 0 0,-1-1 1 0 0,2 0-1 0 0,-1 0 0 0 0,1 0 1 0 0,10 8-1 0 0,0-2 90 0 0,0-1 0 0 0,1-1 0 0 0,0 0 0 0 0,1-1 0 0 0,-1-1 0 0 0,2-1 0 0 0,-1-1 0 0 0,36 8 0 0 0,-51-14-8 0 0,0 0 0 0 0,0 0 0 0 0,1 0 0 0 0,-1 0 0 0 0,0-1 0 0 0,0 1 0 0 0,0-1-1 0 0,0 0 1 0 0,0 0 0 0 0,0 0 0 0 0,0 0 0 0 0,0 0 0 0 0,0-1 0 0 0,0 0 0 0 0,-1 1 0 0 0,1-1-1 0 0,-1 0 1 0 0,1 0 0 0 0,-1 0 0 0 0,0-1 0 0 0,1 1 0 0 0,-1 0 0 0 0,0-1 0 0 0,-1 0-1 0 0,1 1 1 0 0,0-1 0 0 0,-1 0 0 0 0,0 0 0 0 0,1 0 0 0 0,-1 0 0 0 0,1-6 0 0 0,3-7 68 0 0,-1-1 0 0 0,0 0 0 0 0,-1 0 0 0 0,0-24 0 0 0,-1-358 595 0 0,-6 180-112 0 0,-2 119-1110 0 0,6 99 296 0 0,-1 7-849 0 0,-4 21 920 0 0,2 1 0 0 0,0 0-1 0 0,2 1 1 0 0,4 49 0 0 0,22 119-80 0 0,-23-188 194 0 0,13 87-61 0 0,5-1 0 0 0,51 151 0 0 0,-54-189 2959 0 0,-18-63-2571 0 0,-3-21-51 0 0,-8-42-192 0 0,2-1 0 0 0,4 0 0 0 0,4-92 0 0 0,3 155-158 0 0,0-1 0 0 0,0 1-1 0 0,0 1 1 0 0,1-1 0 0 0,0 0 0 0 0,1 0 0 0 0,0 1 0 0 0,0-1-1 0 0,0 1 1 0 0,1 0 0 0 0,0 0 0 0 0,0 0 0 0 0,0 0 0 0 0,1 1-1 0 0,6-7 1 0 0,-2 5-70 0 0,0 0-1 0 0,0 0 1 0 0,0 1-1 0 0,1 0 1 0 0,0 1-1 0 0,0 0 1 0 0,1 0-1 0 0,-1 1 0 0 0,14-3 1 0 0,-10 4 16 0 0,-1 0-1 0 0,0 0 1 0 0,0 1 0 0 0,1 1-1 0 0,-1 0 1 0 0,1 1 0 0 0,-1 1 0 0 0,1 0-1 0 0,-1 1 1 0 0,1 0 0 0 0,-1 1-1 0 0,0 0 1 0 0,0 1 0 0 0,0 1 0 0 0,-1 0-1 0 0,21 11 1 0 0,-28-13 104 0 0,0 1 0 0 0,0-1 0 0 0,-1 1 0 0 0,1 0 1 0 0,-1 0-1 0 0,0 0 0 0 0,0 1 0 0 0,0 0 0 0 0,-1-1 0 0 0,0 1 0 0 0,1 0 0 0 0,-2 1 1 0 0,1-1-1 0 0,-1 0 0 0 0,1 1 0 0 0,-2 0 0 0 0,1-1 0 0 0,1 9 0 0 0,-3-12 33 0 0,-1 1 0 0 0,0-1 0 0 0,1 0 0 0 0,-1 0 0 0 0,0 0 0 0 0,0 0 0 0 0,0 0 0 0 0,-1 0 1 0 0,1 0-1 0 0,0 0 0 0 0,-1 0 0 0 0,1 0 0 0 0,-1-1 0 0 0,0 1 0 0 0,1 0 0 0 0,-1-1 0 0 0,0 0 0 0 0,0 1 0 0 0,0-1 0 0 0,0 0 0 0 0,-4 2 0 0 0,-48 18-12 0 0,51-20 10 0 0,-54 18 271 0 0,-1-4-1 0 0,0-1 1 0 0,-64 5 0 0 0,55-12 1356 0 0,65-6-1335 0 0,10-1-264 0 0,19 4-44 0 0,-1 1 1 0 0,1 1 0 0 0,-2 1-1 0 0,1 1 1 0 0,-1 1 0 0 0,0 2-1 0 0,-1 0 1 0 0,25 16 0 0 0,-18-7-118 0 0,-1 1 0 0 0,-1 1 1 0 0,0 2-1 0 0,-2 0 0 0 0,39 47 0 0 0,-58-61 87 0 0,-5-6-18 0 0,-1-1-1 0 0,1 1 1 0 0,0-1 0 0 0,0 0 0 0 0,1 0 0 0 0,-1 0 0 0 0,1 0 0 0 0,5 3-1 0 0,-7-5-309 0 0,31-8-1730 0 0</inkml:trace>
+  <inkml:trace contextRef="#ctx0" brushRef="#br0">30 55 2496 0 0,'0'0'-31'0'0,"-19"1"67"0"0,8-2 205 0 0,13-2 343 0 0,31-7-572 0 0,0 2 1 0 0,1 1-1 0 0,1 1 1 0 0,-1 2-1 0 0,51 1 1 0 0,10-3-59 0 0,-78 4 49 0 0,15-1-68 0 0,-1 1-1 0 0,62 4 1 0 0,-90-2 34 0 0,1 7-15 0 0,5 13-79 0 0,-10 3 56 0 0,-2-1 0 0 0,0 1 0 0 0,-12 36-1 0 0,-6 44-51 0 0,16-35 62 0 0,3 1 1 0 0,4-1 0 0 0,2 0 0 0 0,26 132-1 0 0,94 263-42 0 0,-50-211 18 0 0,-23-60 102 0 0,41 297 0 0 0,-90-475 17 0 0,-1 0-1 0 0,0 0 1 0 0,-1 0-1 0 0,-1 0 1 0 0,0 0-1 0 0,-1 0 1 0 0,-5 22-1 0 0,5-31 32 0 0,0 0-1 0 0,0 0 1 0 0,-1 0-1 0 0,1 0 0 0 0,-1 0 1 0 0,0-1-1 0 0,0 1 0 0 0,-1-1 1 0 0,0 0-1 0 0,1 0 1 0 0,-1 0-1 0 0,-1 0 0 0 0,1-1 1 0 0,0 0-1 0 0,-1 0 0 0 0,0 0 1 0 0,0 0-1 0 0,0-1 1 0 0,0 0-1 0 0,0 0 0 0 0,0 0 1 0 0,-7 1-1 0 0,-15 3 285 0 0,-1-1 0 0 0,0-2-1 0 0,0 0 1 0 0,-52-4 0 0 0,-115-19 648 0 0,154 15-844 0 0,35 4-197 0 0,-40-8-295 0 0,44 9 152 0 0,0-1 0 0 0,0 1 0 0 0,0-1 0 0 0,0 0-1 0 0,0 0 1 0 0,0 0 0 0 0,1 0 0 0 0,-1 0 0 0 0,0 0 0 0 0,0-1 0 0 0,1 1-1 0 0,-1 0 1 0 0,1-1 0 0 0,-1 1 0 0 0,1-1 0 0 0,0 0 0 0 0,0 1-1 0 0,-2-4 1 0 0,0-7-905 0 0</inkml:trace>
 </inkml:ink>
 </file>
 
@@ -434,15 +434,15 @@
           <inkml:channelProperty channel="OE" name="resolution" value="1000" units="1/deg"/>
         </inkml:channelProperties>
       </inkml:inkSource>
-      <inkml:timestamp xml:id="ts0" timeString="2026-03-19T18:28:18.530"/>
+      <inkml:timestamp xml:id="ts0" timeString="2026-03-19T18:41:11.109"/>
     </inkml:context>
     <inkml:brush xml:id="br0">
       <inkml:brushProperty name="width" value="0.2" units="cm"/>
       <inkml:brushProperty name="height" value="0.2" units="cm"/>
-      <inkml:brushProperty name="color" value="#66CC00"/>
+      <inkml:brushProperty name="color" value="#FFC114"/>
     </inkml:brush>
   </inkml:definitions>
-  <inkml:trace contextRef="#ctx0" brushRef="#br0">25 59 2776 0 0,'0'0'-58'0'0,"-18"-11"470"0"0,12 2 54 0 0,15 4-467 0 0,1-1 1 0 0,0 2 0 0 0,0-1 0 0 0,0 1-1 0 0,1 1 1 0 0,0 0 0 0 0,0 0 0 0 0,-1 1 0 0 0,1 0-1 0 0,0 1 1 0 0,1 1 0 0 0,13 0 0 0 0,-3 1-22 0 0,-1 0 0 0 0,1 2 0 0 0,-1 0 0 0 0,0 2 0 0 0,33 11 1 0 0,-8 5-35 0 0,-44-20 51 0 0,0 0-1 0 0,0 1 0 0 0,-1-1 1 0 0,1 0-1 0 0,-1 0 0 0 0,1 1 0 0 0,-1-1 1 0 0,1 1-1 0 0,-1 0 0 0 0,0-1 1 0 0,0 1-1 0 0,0 0 0 0 0,0 0 1 0 0,0-1-1 0 0,0 1 0 0 0,0 0 1 0 0,0 0-1 0 0,-1 0 0 0 0,1 0 1 0 0,0 4-1 0 0,-2-3 2 0 0,0-1 0 0 0,0 0 0 0 0,0 1-1 0 0,0-1 1 0 0,0 0 0 0 0,0 0 0 0 0,0 1 0 0 0,-1-1 0 0 0,1 0 0 0 0,-1 0-1 0 0,0-1 1 0 0,1 1 0 0 0,-1 0 0 0 0,-2 1 0 0 0,-27 22-7 0 0,-8 0-37 0 0,-44 21 1 0 0,-26 16 708 0 0,107-61-585 0 0,0 1-8 0 0,2-2-66 0 0,0 0 0 0 0,0 0 0 0 0,0 0 0 0 0,0 0 1 0 0,-1 0-1 0 0,1 0 0 0 0,0 0 0 0 0,0 0 1 0 0,0 0-1 0 0,0 0 0 0 0,0 0 0 0 0,-1 0 0 0 0,1 0 1 0 0,0 1-1 0 0,0-1 0 0 0,0 0 0 0 0,0 0 1 0 0,0 0-1 0 0,0 0 0 0 0,-1 0 0 0 0,1 0 0 0 0,0 0 1 0 0,0 1-1 0 0,0-1 0 0 0,0 0 0 0 0,0 0 1 0 0,0 0-1 0 0,0 0 0 0 0,0 1 0 0 0,0-1 1 0 0,0 0-1 0 0,0 0 0 0 0,0 0 0 0 0,0 0 0 0 0,0 0 1 0 0,0 1-1 0 0,0-1 0 0 0,0 0 0 0 0,0 0 1 0 0,0 0-1 0 0,0 0 0 0 0,0 1 0 0 0,0-1 0 0 0,0 0 1 0 0,0 0-1 0 0,0 0 0 0 0,0 0 0 0 0,0 0 1 0 0,0 1-1 0 0,0-1 0 0 0,0 0 0 0 0,1 0 0 0 0,-1 0 1 0 0,0 0-1 0 0,0 0 0 0 0,0 1 0 0 0,39 10 94 0 0,163 57 149 0 0,-177-58-248 0 0,0 2 1 0 0,0 1 0 0 0,-1 1 0 0 0,-1 1-1 0 0,37 31 1 0 0,-57-44-3 0 0,0 1 0 0 0,0-1 1 0 0,0 1-1 0 0,-1-1 0 0 0,1 1 0 0 0,-1 0 0 0 0,0 0 1 0 0,0 0-1 0 0,0 1 0 0 0,0-1 0 0 0,0 0 0 0 0,-1 1 0 0 0,1-1 1 0 0,-1 1-1 0 0,0 0 0 0 0,0-1 0 0 0,-1 1 0 0 0,1 5 1 0 0,-1-7 18 0 0,-1 1 1 0 0,0 0 0 0 0,0-1-1 0 0,0 1 1 0 0,0-1 0 0 0,-1 1-1 0 0,1-1 1 0 0,-1 0 0 0 0,1 0 0 0 0,-1 1-1 0 0,0-1 1 0 0,0 0 0 0 0,0-1-1 0 0,0 1 1 0 0,0 0 0 0 0,0 0-1 0 0,0-1 1 0 0,-1 1 0 0 0,1-1 0 0 0,0 0-1 0 0,-1 0 1 0 0,1 0 0 0 0,-1 0-1 0 0,0 0 1 0 0,-4 1 0 0 0,-23 4 445 0 0,1 0 0 0 0,-1-1 0 0 0,0-2 0 0 0,-57-2 1 0 0,83-1-451 0 0,1 0 1 0 0,-1 0 0 0 0,0-1-1 0 0,0 0 1 0 0,0 0 0 0 0,1 0 0 0 0,-1 0-1 0 0,0-1 1 0 0,1 1 0 0 0,-4-3-1 0 0,-16-12-3182 0 0</inkml:trace>
+  <inkml:trace contextRef="#ctx0" brushRef="#br0">174 1 5461 0 0,'0'0'-290'0'0,"-23"0"429"0"0,265 2 168 0 0,-179 0-349 0 0,-60-1 30 0 0,1-1-18 0 0,10 0 14 0 0,-10 0 5 0 0,-1 0-6 0 0,8 0 12 0 0,-9 0 1 0 0,38 6-304 0 0,-39-5 264 0 0,5 32-98 0 0,-11 3 117 0 0,-44 391-123 0 0,45-345 148 0 0,3 0 1 0 0,4-1 0 0 0,17 106-1 0 0,29 53 36 0 0,4 29 111 0 0,-46-229-122 0 0,-3-20 96 0 0,0 0 0 0 0,0 29 437 0 0,-5-48-509 0 0,1 0-1 0 0,-1 1 0 0 0,0-1 0 0 0,1 0 1 0 0,-1 0-1 0 0,0 1 0 0 0,0-1 1 0 0,0 0-1 0 0,0 0 0 0 0,0 0 1 0 0,0 0-1 0 0,0 0 0 0 0,0 0 1 0 0,-1-1-1 0 0,1 1 0 0 0,0 0 1 0 0,0 0-1 0 0,-1-1 0 0 0,1 1 1 0 0,-1-1-1 0 0,1 1 0 0 0,0-1 1 0 0,-4 1-1 0 0,-41 3 264 0 0,24-3-161 0 0,-380 35 605 0 0,309-31-851 0 0,57-11-3985 0 0</inkml:trace>
 </inkml:ink>
 </file>
 
@@ -466,7 +466,7 @@
           <inkml:channelProperty channel="OE" name="resolution" value="1000" units="1/deg"/>
         </inkml:channelProperties>
       </inkml:inkSource>
-      <inkml:timestamp xml:id="ts0" timeString="2026-03-19T18:36:03.247"/>
+      <inkml:timestamp xml:id="ts0" timeString="2026-03-19T18:41:13.712"/>
     </inkml:context>
     <inkml:brush xml:id="br0">
       <inkml:brushProperty name="width" value="0.2" units="cm"/>
@@ -474,7 +474,7 @@
       <inkml:brushProperty name="color" value="#FFC114"/>
     </inkml:brush>
   </inkml:definitions>
-  <inkml:trace contextRef="#ctx0" brushRef="#br0">285 50 5813 0 0,'0'0'-226'0'0,"-4"-2"70"0"0,0 19 309 0 0,4 34 85 0 0,0-115 131 0 0,7 63-408 0 0,75-14 55 0 0,120-18 37 0 0,-137 30-623 0 0,-62 3 575 0 0,-1 24-421 0 0,-7-4 410 0 0,1 1 1 0 0,-2 26-1 0 0,0 2-7 0 0,-3 1-17 0 0,2 1 1 0 0,1 54 0 0 0,1-46-49 0 0,4-58 78 0 0,-1 40-17 0 0,2-40 6 0 0,0 34-62 0 0,-14 320-10 0 0,11-45 7 0 0,-2-103 14 0 0,-11 44 126 0 0,-3 33-110 0 0,16-239 35 0 0,2 1 0 0 0,7 52 0 0 0,-1 18 5 0 0,11 100 7 0 0,4-68-5 0 0,-17-103 88 0 0,-3-43-63 0 0,0-1 0 0 0,0 1-1 0 0,0-1 1 0 0,0 0 0 0 0,0 1-1 0 0,0-1 1 0 0,0 0 0 0 0,0 1-1 0 0,-1-1 1 0 0,1 1-1 0 0,-1-1 1 0 0,1 0 0 0 0,-1 1-1 0 0,1-1 1 0 0,-1 0 0 0 0,0 0-1 0 0,1 0 1 0 0,-1 1-1 0 0,0-1 1 0 0,0 0 0 0 0,0 0-1 0 0,-1 1 1 0 0,-37 6 696 0 0,33-7-691 0 0,-375 23 1630 0 0,280-26-905 0 0,98 2-613 0 0,0 0-114 0 0,-12 0-2 0 0,12 0 134 0 0,-10 2-112 0 0</inkml:trace>
+  <inkml:trace contextRef="#ctx0" brushRef="#br0">3 30 5240 0 0,'0'0'-166'0'0,"-2"-19"226"0"0,1 9 215 0 0,105 457-1020 0 0,-22-161 837 0 0,-73-237 3693 0 0,-12-54-3568 0 0,0-5-183 0 0,-1 0 0 0 0,2 0 0 0 0,-1 0-1 0 0,1 0 1 0 0,1-1 0 0 0,0 1 0 0 0,0-1 0 0 0,1 1-1 0 0,0-1 1 0 0,1 1 0 0 0,0-1 0 0 0,1 1 0 0 0,0 0 0 0 0,1 0-1 0 0,0-1 1 0 0,5-10 0 0 0,-5 12-101 0 0,1 0 1 0 0,1 0-1 0 0,-1 0 1 0 0,1 1-1 0 0,1 0 1 0 0,0 0 0 0 0,0 0-1 0 0,0 0 1 0 0,1 1-1 0 0,0 0 1 0 0,1 1-1 0 0,0 0 1 0 0,0 0-1 0 0,0 0 1 0 0,0 1-1 0 0,1 0 1 0 0,17-6-1 0 0,-18 8 14 0 0,1 0-1 0 0,1 1 1 0 0,-1 0 0 0 0,0 0-1 0 0,0 1 1 0 0,1 0 0 0 0,-1 1-1 0 0,1 0 1 0 0,-1 1-1 0 0,0 0 1 0 0,1 0 0 0 0,-1 1-1 0 0,0 0 1 0 0,0 0 0 0 0,0 1-1 0 0,0 1 1 0 0,0-1 0 0 0,-1 1-1 0 0,0 1 1 0 0,1 0 0 0 0,-2 0-1 0 0,1 0 1 0 0,-1 1-1 0 0,1 0 1 0 0,-1 1 0 0 0,-1-1-1 0 0,0 1 1 0 0,0 1 0 0 0,5 7-1 0 0,5 12-17 0 0,-1 0 1 0 0,-1 1-1 0 0,-2 1 0 0 0,13 40 0 0 0,-7-16 8 0 0,-12-35 106 0 0,1 5-160 0 0</inkml:trace>
 </inkml:ink>
 </file>
 
@@ -498,7 +498,7 @@
           <inkml:channelProperty channel="OE" name="resolution" value="1000" units="1/deg"/>
         </inkml:channelProperties>
       </inkml:inkSource>
-      <inkml:timestamp xml:id="ts0" timeString="2026-03-19T18:36:04.932"/>
+      <inkml:timestamp xml:id="ts0" timeString="2026-03-19T18:41:14.294"/>
     </inkml:context>
     <inkml:brush xml:id="br0">
       <inkml:brushProperty name="width" value="0.2" units="cm"/>
@@ -506,7 +506,7 @@
       <inkml:brushProperty name="color" value="#FFC114"/>
     </inkml:brush>
   </inkml:definitions>
-  <inkml:trace contextRef="#ctx0" brushRef="#br0">1 0 5985 0 0</inkml:trace>
+  <inkml:trace contextRef="#ctx0" brushRef="#br0">57 252 3800 0 0,'0'0'-186'0'0,"15"4"-342"0"0,9-9 567 0 0,1-1 1 0 0,-1-2 0 0 0,-1 0 0 0 0,29-14 0 0 0,-43 17 46 0 0,-1 0-1 0 0,0 0 1 0 0,0 0 0 0 0,-1-1 0 0 0,0 0-1 0 0,11-12 1 0 0,-15 15-17 0 0,0-1-1 0 0,-1 1 0 0 0,1-1 1 0 0,-1 0-1 0 0,0 0 1 0 0,0 0-1 0 0,0-1 0 0 0,0 1 1 0 0,-1 0-1 0 0,0-1 1 0 0,0 1-1 0 0,0-1 0 0 0,0 1 1 0 0,0-8-1 0 0,-2 8-36 0 0,1 1 0 0 0,0-1-1 0 0,-1 1 1 0 0,0-1 0 0 0,0 1 0 0 0,0-1-1 0 0,0 1 1 0 0,-1-1 0 0 0,1 1 0 0 0,-1 0-1 0 0,0 0 1 0 0,0 0 0 0 0,0 0 0 0 0,0 0-1 0 0,-1 0 1 0 0,1 1 0 0 0,-1-1 0 0 0,0 1-1 0 0,0-1 1 0 0,1 1 0 0 0,-1 0 0 0 0,-1 0-1 0 0,1 1 1 0 0,0-1 0 0 0,0 0 0 0 0,-6-1-1 0 0,3 1-27 0 0,0 0 1 0 0,-1 0-1 0 0,0 1 0 0 0,1-1 0 0 0,-1 1 0 0 0,0 1 0 0 0,1 0 1 0 0,-1-1-1 0 0,0 2 0 0 0,0-1 0 0 0,1 1 0 0 0,-1 0 0 0 0,-10 3 1 0 0,7 1-21 0 0,1 0 1 0 0,-1 0 0 0 0,1 1-1 0 0,0 0 1 0 0,1 0 0 0 0,0 1 0 0 0,0 0-1 0 0,0 1 1 0 0,1 0 0 0 0,0 0-1 0 0,0 0 1 0 0,1 1 0 0 0,-8 14 0 0 0,10-16-4 0 0,0 0 0 0 0,1 0 0 0 0,-1 0 1 0 0,1 1-1 0 0,1-1 0 0 0,0 1 0 0 0,0 0 0 0 0,0-1 1 0 0,1 1-1 0 0,0 0 0 0 0,0 0 0 0 0,1 0 1 0 0,0 0-1 0 0,1 0 0 0 0,0 0 0 0 0,0 0 0 0 0,0 0 1 0 0,1-1-1 0 0,3 9 0 0 0,-2-10 22 0 0,1-1-1 0 0,0 1 1 0 0,1-1-1 0 0,-1 0 1 0 0,1 0-1 0 0,0 0 1 0 0,0-1-1 0 0,0 0 1 0 0,1 0-1 0 0,-1 0 1 0 0,1-1 0 0 0,0 1-1 0 0,0-1 1 0 0,0-1-1 0 0,1 1 1 0 0,-1-1-1 0 0,1 0 1 0 0,10 1-1 0 0,14 3 23 0 0,-1-1-1 0 0,52 0 0 0 0,-53-4-380 0 0,1-2 0 0 0,0-1 0 0 0,-1-1 0 0 0,0-2 0 0 0,1-1 0 0 0,44-15 0 0 0,-46 12-654 0 0</inkml:trace>
 </inkml:ink>
 </file>
 
@@ -530,7 +530,7 @@
           <inkml:channelProperty channel="OE" name="resolution" value="1000" units="1/deg"/>
         </inkml:channelProperties>
       </inkml:inkSource>
-      <inkml:timestamp xml:id="ts0" timeString="2026-03-19T18:36:06.128"/>
+      <inkml:timestamp xml:id="ts0" timeString="2026-03-19T18:41:15.024"/>
     </inkml:context>
     <inkml:brush xml:id="br0">
       <inkml:brushProperty name="width" value="0.2" units="cm"/>
@@ -538,7 +538,7 @@
       <inkml:brushProperty name="color" value="#FFC114"/>
     </inkml:brush>
   </inkml:definitions>
-  <inkml:trace contextRef="#ctx0" brushRef="#br0">72 377 4940 0 0,'17'115'-1227'0'0,"-5"183"5795"0"0,-17-308-5156 0 0,-2-5 685 0 0,0 1-1 0 0,1-2 0 0 0,0 1 0 0 0,1-1 1 0 0,1 0-1 0 0,1 0 0 0 0,0 0 0 0 0,-1-29 1 0 0,-2-6-42 0 0,-30-242 19 0 0,34 276-67 0 0,-5-96 42 0 0,7 101-100 0 0,1 1-1 0 0,0-1 0 0 0,0 1 0 0 0,4-12 0 0 0,-4 21 39 0 0,-1 0 5 0 0,2-4-9 0 0,0 2-34 0 0,0 1-1 0 0,0 0 1 0 0,1 0 0 0 0,-1 0-1 0 0,1 0 1 0 0,0 0 0 0 0,-1 0-1 0 0,5-3 1 0 0,-5 6 22 0 0,28-21-362 0 0,-23 19 350 0 0,0 1-1 0 0,0 0 1 0 0,0 0 0 0 0,0 1-1 0 0,1 0 1 0 0,-1 0-1 0 0,0 0 1 0 0,0 1 0 0 0,1 0-1 0 0,-1 1 1 0 0,0-1-1 0 0,0 1 1 0 0,0 1 0 0 0,-1-1-1 0 0,1 1 1 0 0,12 8 0 0 0,-9-5 10 0 0,0 0 0 0 0,0 1 0 0 0,-1 0 1 0 0,0 0-1 0 0,0 1 0 0 0,0 0 0 0 0,-1 1 1 0 0,-1 0-1 0 0,1 0 0 0 0,6 13 1 0 0,-11-17 17 0 0,0 0 1 0 0,-1 0 0 0 0,0 0 0 0 0,0 0-1 0 0,0 0 1 0 0,-1 1 0 0 0,1-1 0 0 0,-1 1-1 0 0,0-1 1 0 0,-1 1 0 0 0,0-1 0 0 0,0 1-1 0 0,0-1 1 0 0,0 1 0 0 0,-1-1-1 0 0,0 1 1 0 0,0-1 0 0 0,0 0 0 0 0,-1 1-1 0 0,0-1 1 0 0,0 0 0 0 0,0 0 0 0 0,-1 0-1 0 0,1 0 1 0 0,-5 5 0 0 0,0-2 5 0 0,1 0 1 0 0,-1-1-1 0 0,-1 1 0 0 0,0-2 1 0 0,0 1-1 0 0,0-1 1 0 0,-1 0-1 0 0,1-1 0 0 0,-1 0 1 0 0,-1 0-1 0 0,-18 6 1 0 0,26-10 35 0 0,-5 0 233 0 0,0-1 0 0 0,0 1 0 0 0,0 1 0 0 0,1-1 1 0 0,-13 6-1 0 0,18-7 136 0 0</inkml:trace>
+  <inkml:trace contextRef="#ctx0" brushRef="#br0">346 97 3712 0 0,'0'0'-95'0'0,"10"-30"971"0"0,-12 27-842 0 0,1 0 0 0 0,-1 0 0 0 0,0 0 0 0 0,0 1 0 0 0,-1-1 0 0 0,1 0-1 0 0,-1 1 1 0 0,1 0 0 0 0,-1 0 0 0 0,0 0 0 0 0,1 0 0 0 0,-1 0 0 0 0,0 0 0 0 0,-1 1 0 0 0,1-1 0 0 0,0 1 0 0 0,0 0-1 0 0,0 0 1 0 0,-1 0 0 0 0,1 0 0 0 0,-1 1 0 0 0,1-1 0 0 0,-1 1 0 0 0,1 0 0 0 0,0 0 0 0 0,-1 0 0 0 0,1 1 0 0 0,-4 0-1 0 0,-9 0-27 0 0,1 2 0 0 0,-1 0-1 0 0,1 0 1 0 0,0 1 0 0 0,-17 8 0 0 0,17-6-29 0 0,0 1 1 0 0,1 1 0 0 0,-1 0 0 0 0,-21 18 0 0 0,30-21 3 0 0,0 0-1 0 0,0 0 1 0 0,1 0-1 0 0,0 1 1 0 0,0 0-1 0 0,1 0 0 0 0,-1 1 1 0 0,1-1-1 0 0,1 1 1 0 0,-1 0-1 0 0,1 0 0 0 0,-2 8 1 0 0,4-13 17 0 0,0 0 1 0 0,1 0 0 0 0,-1 0-1 0 0,1 0 1 0 0,-1 0 0 0 0,1 0-1 0 0,0 0 1 0 0,0 0 0 0 0,0 0 0 0 0,0 0-1 0 0,1 1 1 0 0,-1-1 0 0 0,0 0-1 0 0,1 0 1 0 0,-1 0 0 0 0,1 0-1 0 0,0 0 1 0 0,0 0 0 0 0,0-1-1 0 0,0 1 1 0 0,0 0 0 0 0,2 3-1 0 0,0-3 6 0 0,-1 0-1 0 0,1 0 1 0 0,-1-1 0 0 0,1 1-1 0 0,0-1 1 0 0,0 1 0 0 0,0-1-1 0 0,-1 0 1 0 0,1 0 0 0 0,0 0-1 0 0,1-1 1 0 0,-1 1 0 0 0,5 0-1 0 0,2-1 17 0 0,0 0-1 0 0,0 0 1 0 0,-1-1 0 0 0,1 0-1 0 0,0 0 1 0 0,-1-1-1 0 0,1-1 1 0 0,15-6-1 0 0,-16 5-4 0 0,-1-1 0 0 0,0-1 0 0 0,0 1 0 0 0,-1-1 0 0 0,1-1 0 0 0,-1 0 0 0 0,-1 1 0 0 0,10-14 0 0 0,41-70 242 0 0,-10 16 1033 0 0,-36 61-1122 0 0,-12 22-276 0 0,-3 19 51 0 0,4-23 49 0 0,1 0 1 0 0,-1 0 0 0 0,1 1 0 0 0,0-1 0 0 0,1 0-1 0 0,-1 0 1 0 0,1 0 0 0 0,0 0 0 0 0,0-1-1 0 0,1 1 1 0 0,0-1 0 0 0,-1 1 0 0 0,1-1 0 0 0,1 0-1 0 0,-1 0 1 0 0,1 0 0 0 0,-1 0 0 0 0,1-1-1 0 0,0 1 1 0 0,5 2 0 0 0,-3-2-249 0 0,1 1 0 0 0,-1-2-1 0 0,1 1 1 0 0,0-1 0 0 0,0 0 0 0 0,1-1 0 0 0,-1 1-1 0 0,0-2 1 0 0,1 1 0 0 0,-1-1 0 0 0,1 0 0 0 0,0 0-1 0 0,9-1 1 0 0,3-2-1176 0 0</inkml:trace>
 </inkml:ink>
 </file>
 
@@ -562,7 +562,7 @@
           <inkml:channelProperty channel="OE" name="resolution" value="1000" units="1/deg"/>
         </inkml:channelProperties>
       </inkml:inkSource>
-      <inkml:timestamp xml:id="ts0" timeString="2026-03-19T18:36:08.575"/>
+      <inkml:timestamp xml:id="ts0" timeString="2026-03-19T18:41:15.777"/>
     </inkml:context>
     <inkml:brush xml:id="br0">
       <inkml:brushProperty name="width" value="0.2" units="cm"/>
@@ -570,7 +570,7 @@
       <inkml:brushProperty name="color" value="#FFC114"/>
     </inkml:brush>
   </inkml:definitions>
-  <inkml:trace contextRef="#ctx0" brushRef="#br0">228 94 4560 0 0,'0'0'-215'0'0,"-1"-14"-196"0"0,-3 11 451 0 0,1 1-1 0 0,-1-1 1 0 0,0 1-1 0 0,0 0 1 0 0,0 0-1 0 0,0 0 0 0 0,0 1 1 0 0,0-1-1 0 0,-1 1 1 0 0,1 0-1 0 0,0 0 1 0 0,-7 0-1 0 0,8 1 8 0 0,-30 4-31 0 0,27-2-21 0 0,0 0-1 0 0,0 0 0 0 0,1 0 0 0 0,-1 1 0 0 0,1 0 0 0 0,0 0 0 0 0,0 0 0 0 0,0 0 0 0 0,0 1 0 0 0,0 0 0 0 0,1 0 1 0 0,-1 0-1 0 0,1 1 0 0 0,0 0 0 0 0,-3 5 0 0 0,-1 1-23 0 0,2-1-1 0 0,-1 1 1 0 0,2 1 0 0 0,-1-1 0 0 0,1 1-1 0 0,-3 13 1 0 0,5 24-20 0 0,3-44 48 0 0,1 0 1 0 0,-1 0-1 0 0,2 1 1 0 0,-1-1-1 0 0,1 0 0 0 0,-1 0 1 0 0,1 0-1 0 0,0 0 1 0 0,1-1-1 0 0,0 1 1 0 0,-1-1-1 0 0,6 7 1 0 0,40 40 203 0 0,-47-50-161 0 0,0-1-20 0 0,-1 1-1 0 0,0-1 0 0 0,0 0 0 0 0,1 0 1 0 0,-1 1-1 0 0,0-1 0 0 0,1 0 0 0 0,-1 1 0 0 0,0-1 1 0 0,1 0-1 0 0,-1 0 0 0 0,1 0 0 0 0,-1 1 1 0 0,0-1-1 0 0,1 0 0 0 0,-1 0 0 0 0,1 0 1 0 0,-1 0-1 0 0,1 0 0 0 0,-1 0 0 0 0,0 0 0 0 0,1 0 1 0 0,-1 0-1 0 0,1 0 0 0 0,-1 0 0 0 0,1 0 1 0 0,-1 0-1 0 0,0 0 0 0 0,1 0 0 0 0,-1 0 1 0 0,1-1-1 0 0,4-1 13 0 0,0-1 0 0 0,0 0 1 0 0,0-1-1 0 0,-1 1 0 0 0,1-1 1 0 0,-1 0-1 0 0,0 0 0 0 0,0 0 0 0 0,0 0 1 0 0,-1-1-1 0 0,0 1 0 0 0,1-1 1 0 0,-2 0-1 0 0,1 0 0 0 0,0 0 1 0 0,-1 0-1 0 0,2-7 0 0 0,5-15 49 0 0,-1-1-1 0 0,5-31 1 0 0,-12 56-77 0 0,0-1 3 0 0,3-18 322 0 0,0 1 1 0 0,0-27 0 0 0,-4 46-260 0 0,4-26-2 0 0,-10 40-89 0 0,2 1-1 0 0,0-1 1 0 0,0 1 0 0 0,1-1-1 0 0,1 1 1 0 0,0 0-1 0 0,0 0 1 0 0,2 0-1 0 0,-1 0 1 0 0,2 0 0 0 0,0 0-1 0 0,0 0 1 0 0,7 25-1 0 0,-7-34 20 0 0,0 0-1 0 0,0 0 1 0 0,1 1-1 0 0,-1-1 1 0 0,1 0-1 0 0,0-1 1 0 0,0 1-1 0 0,1 0 1 0 0,-1-1-1 0 0,1 1 1 0 0,-1-1-1 0 0,1 1 1 0 0,0-1 0 0 0,7 4-1 0 0,-10-6 1 0 0,2 3-2 0 0,19 11 4 0 0,-19-14 10 0 0,-1 0-2 0 0,1-1-1 0 0,-1 1 1 0 0,0-1 0 0 0,1 0-1 0 0,-1 0 1 0 0,0 1-1 0 0,1-1 1 0 0,-1 0 0 0 0,1 0-1 0 0,-1 0 1 0 0,0-1 0 0 0,1 1-1 0 0,-1 0 1 0 0,1 0 0 0 0,-1-1-1 0 0,0 1 1 0 0,1-1-1 0 0,-1 1 1 0 0,0-1 0 0 0,0 0-1 0 0,1 1 1 0 0,-1-1 0 0 0,2-1-1 0 0,3-7 7 0 0,0 1-1 0 0,0-1 0 0 0,-1 0 0 0 0,0-1 0 0 0,-1 1 0 0 0,0-1 1 0 0,0 0-1 0 0,-1 0 0 0 0,0 0 0 0 0,1-12 0 0 0,2-3-27 0 0,3-27 67 0 0,-9 49-89 0 0,1 0 0 0 0,0-1 1 0 0,0 1-1 0 0,0 0 0 0 0,0 0 0 0 0,1 0 1 0 0,-1 0-1 0 0,1 0 0 0 0,3-5 1 0 0,1-1-50 0 0,-5 8 65 0 0,0-1-61 0 0,0 0 15 0 0,0 1-1 0 0,0-1 1 0 0,0 1 0 0 0,0-1 0 0 0,1 1 0 0 0,-1-1-1 0 0,1 1 1 0 0,-1 0 0 0 0,1 0 0 0 0,0 0 0 0 0,-1 0-1 0 0,3-1 1 0 0,1 7 35 0 0,-1 0 0 0 0,0 1 0 0 0,0-1 0 0 0,-1 1-1 0 0,1 0 1 0 0,-1 0 0 0 0,3 10 0 0 0,-5-12 20 0 0,12 19 5 0 0,-1 1 1 0 0,-1 1-1 0 0,-2 0 1 0 0,0 1-1 0 0,-2-1 1 0 0,8 49 0 0 0,-12-27 2433 0 0,-4-53-2273 0 0,-3-48-143 0 0,3 1 1 0 0,2-1-1 0 0,2 1 1 0 0,13-67-1 0 0,-14 79-90 0 0,-2 40 57 0 0,1-16-17 0 0,-2 17 15 0 0,1-1-1 0 0,0 1 1 0 0,0 0 0 0 0,0-1 0 0 0,0 1 0 0 0,0 0 0 0 0,0-1-1 0 0,0 1 1 0 0,0 0 0 0 0,0-1 0 0 0,0 1 0 0 0,0-1-1 0 0,0 1 1 0 0,0 0 0 0 0,0-1 0 0 0,0 1 0 0 0,0 0 0 0 0,0-1-1 0 0,0 1 1 0 0,0 0 0 0 0,0-1 0 0 0,1 1 0 0 0,-1 0 0 0 0,0 0-1 0 0,0-1 1 0 0,0 1 0 0 0,1 0 0 0 0,-1-1 0 0 0,0 1-1 0 0,0 0 1 0 0,1 0 0 0 0,-1-1 0 0 0,0 1 0 0 0,1 0 0 0 0,-1 0-1 0 0,0 0 1 0 0,0 0 0 0 0,1-1 0 0 0,-1 1 0 0 0,0 0 0 0 0,1 0-1 0 0,-1 0 1 0 0,0 0 0 0 0,1 0 0 0 0,0 0 0 0 0,3 4 20 0 0,-2-1-4 0 0,1-1 1 0 0,0 1 0 0 0,0-1 0 0 0,0 0 0 0 0,1 0 0 0 0,-1 0 0 0 0,0 0-1 0 0,1 0 1 0 0,-1-1 0 0 0,8 3 0 0 0,7 0 15 0 0,0-2-1 0 0,1 1 1 0 0,-1-2-1 0 0,0 0 1 0 0,1-2-1 0 0,-1 0 1 0 0,31-5 0 0 0,-46 5-26 0 0,27 4-572 0 0</inkml:trace>
+  <inkml:trace contextRef="#ctx0" brushRef="#br0">344 509 4504 0 0,'0'0'-78'0'0,"-4"2"-90"0"0,1 2 155 0 0,-3 1-2 0 0,-29-3-5 0 0,19-2 8 0 0,0 0 0 0 0,1 2 0 0 0,-1 0 0 0 0,0 1 0 0 0,1 0 0 0 0,0 1 0 0 0,0 1 0 0 0,0 0 0 0 0,0 2 0 0 0,1-1 0 0 0,0 2 0 0 0,0-1 0 0 0,1 2 0 0 0,0 0 0 0 0,1 1 0 0 0,0 0 0 0 0,-20 21 0 0 0,30-29 6 0 0,0 1 0 0 0,1-1 1 0 0,-1 1-1 0 0,0 0 0 0 0,1-1 1 0 0,0 1-1 0 0,-1 0 0 0 0,1 0 1 0 0,0 0-1 0 0,1 0 0 0 0,-1 0 1 0 0,0 0-1 0 0,1 0 0 0 0,0 0 1 0 0,-1 0-1 0 0,1 0 0 0 0,1 0 1 0 0,-1 0-1 0 0,0 1 0 0 0,1-1 1 0 0,-1 0-1 0 0,1 0 1 0 0,0 0-1 0 0,0 0 0 0 0,0-1 1 0 0,1 1-1 0 0,-1 0 0 0 0,1 0 1 0 0,-1-1-1 0 0,1 1 0 0 0,0-1 1 0 0,0 1-1 0 0,0-1 0 0 0,0 0 1 0 0,0 0-1 0 0,1 0 0 0 0,-1 0 1 0 0,5 3-1 0 0,5 3 17 0 0,-1 0 1 0 0,2-1-1 0 0,-1 0 0 0 0,1-1 1 0 0,0 0-1 0 0,0-1 0 0 0,16 4 1 0 0,-21-7 38 0 0,-1 0 1 0 0,0 0-1 0 0,1-1 0 0 0,-1 0 1 0 0,1-1-1 0 0,-1 1 1 0 0,1-1-1 0 0,-1-1 1 0 0,1 0-1 0 0,-1 0 0 0 0,1 0 1 0 0,-1-1-1 0 0,1 0 1 0 0,-1 0-1 0 0,0-1 1 0 0,0 0-1 0 0,11-6 0 0 0,-9 2 7 0 0,0-1 0 0 0,-1 0-1 0 0,1 0 1 0 0,-2 0-1 0 0,1-1 1 0 0,-1 0 0 0 0,-1-1-1 0 0,1 1 1 0 0,-2-1-1 0 0,9-19 1 0 0,-1-7-3 0 0,-1 0 0 0 0,-2 0 1 0 0,-1-1-1 0 0,-3 0 0 0 0,0-1 0 0 0,-3 0 1 0 0,-1-64-1 0 0,-21-171 1677 0 0,10 231-1405 0 0,9 41-348 0 0,0 1-51 0 0,-1 0 53 0 0,0 1 0 0 0,1-1-1 0 0,-1 1 1 0 0,1-1-1 0 0,-1 1 1 0 0,1-1-1 0 0,-1 1 1 0 0,1 0 0 0 0,-1-1-1 0 0,1 1 1 0 0,-1 0-1 0 0,1-1 1 0 0,0 1 0 0 0,-1 0-1 0 0,1-1 1 0 0,0 1-1 0 0,0 0 1 0 0,-1 0 0 0 0,1-1-1 0 0,0 1 1 0 0,0 0-1 0 0,0 0 1 0 0,0-1 0 0 0,0 1-1 0 0,0 1 1 0 0,0 43-174 0 0,9 44 93 0 0,-1-39 70 0 0,3-1-1 0 0,1-1 1 0 0,3 0 0 0 0,34 76-1 0 0,-14-52-290 0 0,4-1 0 0 0,53 75 1 0 0,-76-131-2028 0 0,-7-10 711 0 0</inkml:trace>
 </inkml:ink>
 </file>
 
@@ -594,7 +594,7 @@
           <inkml:channelProperty channel="OE" name="resolution" value="1000" units="1/deg"/>
         </inkml:channelProperties>
       </inkml:inkSource>
-      <inkml:timestamp xml:id="ts0" timeString="2026-03-19T18:36:29.714"/>
+      <inkml:timestamp xml:id="ts0" timeString="2026-03-19T18:41:16.043"/>
     </inkml:context>
     <inkml:brush xml:id="br0">
       <inkml:brushProperty name="width" value="0.2" units="cm"/>
@@ -602,7 +602,7 @@
       <inkml:brushProperty name="color" value="#FFC114"/>
     </inkml:brush>
   </inkml:definitions>
-  <inkml:trace contextRef="#ctx0" brushRef="#br0">23 36 1580 0 0,'0'0'213'0'0,"-18"-34"6852"0"0,16 33-6861 0 0,1 12-303 0 0,0 0 1 0 0,1 0-1 0 0,0 0 0 0 0,0 0 0 0 0,2 0 1 0 0,4 22-1 0 0,24 75-159 0 0,-12-48 193 0 0,-10-31-200 0 0,-1 0-1 0 0,-1 1 1 0 0,-2 0 0 0 0,0 0 0 0 0,-3 0-1 0 0,0 0 1 0 0,-2 1 0 0 0,-1-1-1 0 0,-2 0 1 0 0,0 0 0 0 0,-17 53-1 0 0,16-68-1258 0 0,2-2 40 0 0</inkml:trace>
+  <inkml:trace contextRef="#ctx0" brushRef="#br0">0 32 5493 0 0,'9'-28'542'0'0,"-9"27"-539"0"0,0 1 0 0 0,0 0 0 0 0,0 0 0 0 0,0 0 0 0 0,0 0 1 0 0,0 0-1 0 0,0 0 0 0 0,0-1 0 0 0,0 1 0 0 0,1 0 0 0 0,-1 0 0 0 0,0 0 0 0 0,0 0 0 0 0,0 0 0 0 0,0 0 0 0 0,0 0 0 0 0,0-1 1 0 0,0 1-1 0 0,0 0 0 0 0,0 0 0 0 0,1 0 0 0 0,-1 0 0 0 0,0 0 0 0 0,0 0 0 0 0,0 0 0 0 0,0 0 0 0 0,0 0 0 0 0,1 0 0 0 0,-1 0 1 0 0,0 0-1 0 0,0 0 0 0 0,0 0 0 0 0,0 0 0 0 0,0 0 0 0 0,0 0 0 0 0,1 0 0 0 0,-1 0 0 0 0,0 0 0 0 0,0 0 0 0 0,0 0 0 0 0,0 0 0 0 0,0 0 1 0 0,1 0-1 0 0,-1 0 0 0 0,0 0 0 0 0,0 0 0 0 0,0 0 0 0 0,0 0 0 0 0,0 1 0 0 0,0-1 0 0 0,0 0 0 0 0,0 0 0 0 0,1 0 0 0 0,-1 0 1 0 0,0 0-1 0 0,0 0 0 0 0,0 0 0 0 0,0 1 0 0 0,0-1 0 0 0,0 0 0 0 0,0 0 0 0 0,0 0 0 0 0,0 0 0 0 0,0 0 0 0 0,0 0 0 0 0,0 1 0 0 0,0-1 1 0 0,9 48-91 0 0,-3-9 67 0 0,60 168-66 0 0,-41-140 130 0 0,26 115 0 0 0,-49-168-330 0 0,1 0 0 0 0,-2 0 0 0 0,0 0 0 0 0,-1 0-1 0 0,0 1 1 0 0,-1-1 0 0 0,-1 0 0 0 0,0 0 0 0 0,-1 0 0 0 0,0 0 0 0 0,-10 23 0 0 0,-5-1-565 0 0</inkml:trace>
 </inkml:ink>
 </file>
 
@@ -626,7 +626,7 @@
           <inkml:channelProperty channel="OE" name="resolution" value="1000" units="1/deg"/>
         </inkml:channelProperties>
       </inkml:inkSource>
-      <inkml:timestamp xml:id="ts0" timeString="2026-03-19T18:36:31.411"/>
+      <inkml:timestamp xml:id="ts0" timeString="2026-03-19T18:41:17.946"/>
     </inkml:context>
     <inkml:brush xml:id="br0">
       <inkml:brushProperty name="width" value="0.2" units="cm"/>
@@ -634,7 +634,7 @@
       <inkml:brushProperty name="color" value="#FFC114"/>
     </inkml:brush>
   </inkml:definitions>
-  <inkml:trace contextRef="#ctx0" brushRef="#br0">25 114 4420 0 0,'-22'-21'-298'0'0,"22"21"301"0"0,-1-1 0 0 0,1 1 0 0 0,0-1 0 0 0,0 1 0 0 0,-1-1 0 0 0,1 1 0 0 0,0-1 0 0 0,0 1 0 0 0,0-1 0 0 0,0 1 0 0 0,0-1 0 0 0,-1 1-1 0 0,1-1 1 0 0,0 0 0 0 0,0 1 0 0 0,0-1 0 0 0,1 1 0 0 0,-1-1 0 0 0,0 1 0 0 0,0-1 0 0 0,0 1 0 0 0,0-1 0 0 0,0 1 0 0 0,1-1 0 0 0,-1 1 0 0 0,1-2 0 0 0,2-1 3 0 0,1 0 1 0 0,0 1 0 0 0,0-1 0 0 0,0 1-1 0 0,0-1 1 0 0,1 1 0 0 0,-1 0 0 0 0,8-1-1 0 0,33-11-54 0 0,0 3-1 0 0,0 1 0 0 0,1 3 1 0 0,86-3-1 0 0,-128 10 44 0 0,20-2-121 0 0,0 1-1 0 0,1 1 0 0 0,-1 1 0 0 0,24 5 0 0 0,-46-5 118 0 0,-1 0-1 0 0,1 0 1 0 0,0-1-1 0 0,-1 1 0 0 0,1 1 1 0 0,0-1-1 0 0,-1 0 1 0 0,0 0-1 0 0,1 1 0 0 0,-1-1 1 0 0,0 0-1 0 0,0 1 1 0 0,1-1-1 0 0,-1 1 1 0 0,0 0-1 0 0,-1-1 0 0 0,1 1 1 0 0,0 0-1 0 0,0 0 1 0 0,-1-1-1 0 0,1 1 0 0 0,-1 0 1 0 0,1 0-1 0 0,-1 0 1 0 0,0 0-1 0 0,0 0 1 0 0,0 0-1 0 0,0-1 0 0 0,0 1 1 0 0,-1 2-1 0 0,-8 64-146 0 0,7-60 133 0 0,-44 192-109 0 0,-24 128-23 0 0,59-256 132 0 0,3 0-1 0 0,3 1 1 0 0,4-1 0 0 0,2 1 0 0 0,4 0-1 0 0,3-1 1 0 0,26 111 0 0 0,69 129 1 0 0,11 49 113 0 0,-110-344-77 0 0,0-1 0 0 0,-2 1 0 0 0,0 0-1 0 0,-1 0 1 0 0,-1 0 0 0 0,-3 33 0 0 0,1-41 14 0 0,0 0 0 0 0,-1 0 0 0 0,0 0 0 0 0,0 0 0 0 0,-1 0 0 0 0,0-1 0 0 0,0 0 0 0 0,-1 1 0 0 0,0-2 0 0 0,0 1 0 0 0,-1-1 1 0 0,0 1-1 0 0,-13 10 0 0 0,9-10 95 0 0,1-1 0 0 0,-1-1 0 0 0,0 0 0 0 0,-1 0 0 0 0,0-1 0 0 0,1 0 1 0 0,-1-1-1 0 0,-1 0 0 0 0,1-1 0 0 0,-1 0 0 0 0,1-1 0 0 0,-1-1 0 0 0,0 1 0 0 0,-12-2 1 0 0,-3 0 336 0 0,-1-1 0 0 0,0-1 0 0 0,1-2 0 0 0,-51-14 0 0 0,76 18-586 0 0,0 0 0 0 0,0-1 1 0 0,0 1-1 0 0,0-1 1 0 0,0 0-1 0 0,0 1 1 0 0,0-1-1 0 0,0 0 0 0 0,0 0 1 0 0,1-1-1 0 0,-1 1 1 0 0,0 0-1 0 0,1 0 0 0 0,-1-1 1 0 0,1 1-1 0 0,-1-1 1 0 0,1 0-1 0 0,0 1 0 0 0,0-1 1 0 0,-1 0-1 0 0,1 0 1 0 0,0 1-1 0 0,1-1 1 0 0,-1 0-1 0 0,0 0 0 0 0,0 0 1 0 0,1 0-1 0 0,-1 0 1 0 0,1-4-1 0 0,0-6-1387 0 0</inkml:trace>
+  <inkml:trace contextRef="#ctx0" brushRef="#br0">33 87 3604 0 0,'-33'-27'2201'0'0,"58"16"-2225"0"0,-3 4 24 0 0,1 1 1 0 0,0 1 0 0 0,-1 1 0 0 0,1 1 0 0 0,43 0 0 0 0,-15 0 1 0 0,20-3-13 0 0,96-5-15 0 0,-163 11 6 0 0,17 4-78 0 0,-19-4 88 0 0,-1 0-1 0 0,0 0 1 0 0,1 0 0 0 0,-1 0-1 0 0,0 1 1 0 0,0-1-1 0 0,1 0 1 0 0,-1 1 0 0 0,0-1-1 0 0,0 1 1 0 0,0-1-1 0 0,0 1 1 0 0,1 0 0 0 0,-1-1-1 0 0,1 2 1 0 0,-1 0 2 0 0,0 0 1 0 0,0 0 0 0 0,-1 0-1 0 0,1 0 1 0 0,-1 1 0 0 0,1-1-1 0 0,-1 0 1 0 0,0 0 0 0 0,0 0-1 0 0,0 0 1 0 0,0 0 0 0 0,0 1-1 0 0,-1 2 1 0 0,-2 35-45 0 0,-15 272-178 0 0,19-253 205 0 0,2-1-1 0 0,2 1 0 0 0,18 76 1 0 0,-7-74 24 0 0,3 0 0 0 0,33 72 0 0 0,66 110 30 0 0,-77-165-3 0 0,-39-73-5 0 0,0-1-1 0 0,0 0 0 0 0,0 0 1 0 0,0 1-1 0 0,0-1 0 0 0,-1 1 1 0 0,0-1-1 0 0,0 1 0 0 0,0 5 0 0 0,-1-8 5 0 0,-1-1 0 0 0,1 1-1 0 0,-1 0 1 0 0,1-1 0 0 0,-1 1-1 0 0,0-1 1 0 0,0 1 0 0 0,0-1-1 0 0,0 1 1 0 0,0-1-1 0 0,0 1 1 0 0,0-1 0 0 0,0 0-1 0 0,0 0 1 0 0,-1 1 0 0 0,1-1-1 0 0,0 0 1 0 0,-1 0-1 0 0,1-1 1 0 0,-1 1 0 0 0,1 0-1 0 0,-1 0 1 0 0,0-1 0 0 0,1 1-1 0 0,-1-1 1 0 0,0 1 0 0 0,-2-1-1 0 0,-13 5 111 0 0,-1-1 0 0 0,0-1 1 0 0,0 0-1 0 0,0-2 0 0 0,0 0 0 0 0,-19-2 0 0 0,-115-15 406 0 0,81 7-317 0 0,-93-11-474 0 0,161 20-147 0 0</inkml:trace>
 </inkml:ink>
 </file>
 
@@ -658,7 +658,7 @@
           <inkml:channelProperty channel="OE" name="resolution" value="1000" units="1/deg"/>
         </inkml:channelProperties>
       </inkml:inkSource>
-      <inkml:timestamp xml:id="ts0" timeString="2026-03-19T18:36:32.520"/>
+      <inkml:timestamp xml:id="ts0" timeString="2026-03-19T18:41:20.569"/>
     </inkml:context>
     <inkml:brush xml:id="br0">
       <inkml:brushProperty name="width" value="0.2" units="cm"/>
@@ -666,7 +666,7 @@
       <inkml:brushProperty name="color" value="#FFC114"/>
     </inkml:brush>
   </inkml:definitions>
-  <inkml:trace contextRef="#ctx0" brushRef="#br0">0 157 4320 0 0,'0'0'-166'0'0,"0"3"-450"0"0,0 6 687 0 0,1 0-115 0 0,3 23-13 0 0,1-1 1 0 0,2 0-1 0 0,1-1 1 0 0,1 0-1 0 0,14 30 1 0 0,6 19 10 0 0,5 12 8 0 0,7 23 206 0 0,-40-113-22 0 0,0 0 0 0 0,-1 0 0 0 0,1 0 1 0 0,-1 0-1 0 0,0 1 0 0 0,1-1 0 0 0,-1 0 1 0 0,0 0-1 0 0,0 0 0 0 0,0 1 1 0 0,1-1-1 0 0,-1 0 0 0 0,-1 0 0 0 0,1 0 1 0 0,0 1-1 0 0,0-1 0 0 0,0 0 0 0 0,-1 0 1 0 0,1 2-1 0 0,-15-17 627 0 0,-18-42-440 0 0,13 9-249 0 0,2 0 1 0 0,3-1-1 0 0,1-1 0 0 0,3 0 1 0 0,-10-93-1 0 0,13-32-554 0 0,8 171 429 0 0,0 0 0 0 0,1 1 0 0 0,0-1 0 0 0,0 0 0 0 0,0 0 0 0 0,0 1 0 0 0,0-1 0 0 0,0 1 0 0 0,0-1 0 0 0,1 1 0 0 0,0-1 0 0 0,-1 1 0 0 0,1 0 0 0 0,0 0 0 0 0,0 0 0 0 0,0 0 0 0 0,0 0 0 0 0,0 0 0 0 0,1 0 0 0 0,-1 1 0 0 0,1-1 0 0 0,-1 1 0 0 0,1 0 0 0 0,-1 0 0 0 0,6-2 0 0 0,3-1-39 0 0,-1 1 1 0 0,1 0-1 0 0,0 1 1 0 0,21-3-1 0 0,-14 5 2 0 0,0 0 0 0 0,0 1-1 0 0,0 1 1 0 0,0 0-1 0 0,0 2 1 0 0,-1 0 0 0 0,1 1-1 0 0,26 11 1 0 0,-30-10 32 0 0,-1 0-1 0 0,1 2 1 0 0,-1-1-1 0 0,0 1 1 0 0,-1 1-1 0 0,0 0 0 0 0,-1 1 1 0 0,1 1-1 0 0,-2-1 1 0 0,16 21-1 0 0,-25-30 45 0 0,0 1-1 0 0,0-1 0 0 0,0 0 0 0 0,-1 1 1 0 0,1-1-1 0 0,0 1 0 0 0,-1-1 0 0 0,1 1 1 0 0,-1-1-1 0 0,1 1 0 0 0,-1-1 0 0 0,0 1 1 0 0,0 0-1 0 0,0-1 0 0 0,0 1 1 0 0,0 0-1 0 0,0-1 0 0 0,0 1 0 0 0,0-1 1 0 0,-1 1-1 0 0,1 0 0 0 0,0-1 0 0 0,-1 1 1 0 0,0-1-1 0 0,0 3 0 0 0,-2-1 3 0 0,1 0 1 0 0,-1 1-1 0 0,0-1 0 0 0,1 0 1 0 0,-1 0-1 0 0,-1-1 0 0 0,1 1 1 0 0,0-1-1 0 0,-8 4 0 0 0,-6 3 56 0 0,0-1 0 0 0,-1-1 0 0 0,-25 6 0 0 0,19-7 397 0 0,1-1 1 0 0,-48 4 0 0 0,68-9-527 0 0,0-3-348 0 0,17-19-3442 0 0</inkml:trace>
+  <inkml:trace contextRef="#ctx0" brushRef="#br0">33 125 4860 0 0,'-13'-63'-507'0'0,"7"24"1841"0"0,-1 16-208 0 0,7 49-1365 0 0,1 2 260 0 0,5 70-77 0 0,4-2 1 0 0,36 155 0 0 0,-23-137 70 0 0,-11-52 11 0 0,30 93-1 0 0,-33-105 4011 0 0,-12-55-3797 0 0,-2-8-220 0 0,0 1 0 0 0,1-1 0 0 0,0 0-1 0 0,1 0 1 0 0,1-1 0 0 0,0 1-1 0 0,1-1 1 0 0,0 1 0 0 0,1-1 0 0 0,0 1-1 0 0,1-1 1 0 0,5-20 0 0 0,-5 26-84 0 0,1-1-1 0 0,0 1 1 0 0,0 0 0 0 0,1-1 0 0 0,0 1 0 0 0,1 1 0 0 0,-1-1-1 0 0,2 0 1 0 0,-1 1 0 0 0,1 0 0 0 0,0 0 0 0 0,0 0-1 0 0,1 1 1 0 0,0-1 0 0 0,0 1 0 0 0,1 1 0 0 0,0-1-1 0 0,0 1 1 0 0,0 1 0 0 0,0-1 0 0 0,12-5 0 0 0,-13 9 7 0 0,1-1 1 0 0,-1 1 0 0 0,0 0 0 0 0,0 1 0 0 0,1-1 0 0 0,-1 1 0 0 0,0 0 0 0 0,1 1 0 0 0,-1 0 0 0 0,0 0 0 0 0,1 0 0 0 0,-1 1 0 0 0,0-1 0 0 0,0 1 0 0 0,0 1 0 0 0,0-1 0 0 0,-1 1 0 0 0,1 0 0 0 0,-1 1-1 0 0,0-1 1 0 0,1 1 0 0 0,-2 0 0 0 0,1 1 0 0 0,8 8 0 0 0,-2-2-30 0 0,-1 1-1 0 0,0 1 1 0 0,0 0-1 0 0,-2 0 1 0 0,1 0-1 0 0,-2 2 0 0 0,1-1 1 0 0,8 27-1 0 0,-13-28 58 0 0,2-1-1 0 0,-1 0 0 0 0,1 0 1 0 0,1 0-1 0 0,0 0 0 0 0,1-1 0 0 0,0 0 1 0 0,1-1-1 0 0,10 13 0 0 0,-11-18 35 0 0,-1 1-1 0 0,1-1 0 0 0,-1 0 0 0 0,1 0 0 0 0,1-1 0 0 0,-1 0 1 0 0,1 0-1 0 0,-1-1 0 0 0,1 0 0 0 0,0-1 0 0 0,0 1 1 0 0,0-1-1 0 0,1-1 0 0 0,-1 1 0 0 0,12-1 0 0 0,-9-1 9 0 0,-1 1-1 0 0,1-2 0 0 0,0 0 1 0 0,-1 0-1 0 0,1-1 0 0 0,-1 0 1 0 0,1-1-1 0 0,-1 0 0 0 0,0 0 1 0 0,0-1-1 0 0,0-1 0 0 0,-1 0 1 0 0,0 0-1 0 0,1-1 0 0 0,-2 0 1 0 0,1 0-1 0 0,-1-1 0 0 0,0 0 1 0 0,11-13-1 0 0,-9 7-12 0 0,0 0 1 0 0,-2-1-1 0 0,1 0 0 0 0,-2 0 1 0 0,0 0-1 0 0,-1-1 0 0 0,0 0 1 0 0,-1-1-1 0 0,-1 1 0 0 0,0-1 1 0 0,-1 0-1 0 0,1-19 0 0 0,-3 29 10 0 0,0-3 26 0 0,-1-1-1 0 0,1 0 0 0 0,-1 0 0 0 0,-1 0 1 0 0,-1-12-1 0 0,1 21-35 0 0,1 0 0 0 0,-1 0 0 0 0,1 0 0 0 0,-1 0 0 0 0,1 0 0 0 0,-1 0 0 0 0,1 0 0 0 0,-1 0 0 0 0,0 0 0 0 0,1 1 0 0 0,-1-1 0 0 0,0 0 0 0 0,0 0 0 0 0,0 1 0 0 0,0-1-1 0 0,0 1 1 0 0,0-1 0 0 0,0 0 0 0 0,0 1 0 0 0,0 0 0 0 0,0-1 0 0 0,0 1 0 0 0,0 0 0 0 0,0-1 0 0 0,0 1 0 0 0,0 0 0 0 0,0 0 0 0 0,0 0 0 0 0,0 0 0 0 0,0 0 0 0 0,0 0 0 0 0,-1 0 0 0 0,1 0 0 0 0,0 1 0 0 0,-1-1 0 0 0,-22 8-25 0 0,17-5 15 0 0,0 1-1 0 0,1-1 0 0 0,0 2 1 0 0,0-1-1 0 0,0 1 1 0 0,0 0-1 0 0,0 0 0 0 0,1 0 1 0 0,0 1-1 0 0,0 0 0 0 0,1 0 1 0 0,0 0-1 0 0,-7 12 1 0 0,3 0-26 0 0,-1 0 0 0 0,2 0 0 0 0,-9 37 0 0 0,13-44 18 0 0,1 0-1 0 0,1 1 1 0 0,0-1-1 0 0,0 1 1 0 0,1-1-1 0 0,1 1 1 0 0,0-1-1 0 0,0 0 0 0 0,1 1 1 0 0,7 19-1 0 0,-1-8 9 0 0,2 0-1 0 0,0-1 1 0 0,27 41-1 0 0,-36-61 35 0 0,0-1 0 0 0,0 1 0 0 0,0 0 0 0 0,1-1 0 0 0,-1 1 0 0 0,1-1 0 0 0,-1 1 0 0 0,1-1 0 0 0,0 0 0 0 0,-1 0-1 0 0,1 0 1 0 0,0 0 0 0 0,0 0 0 0 0,0 0 0 0 0,-1 0 0 0 0,1-1 0 0 0,0 1 0 0 0,0 0 0 0 0,0-1 0 0 0,0 0 0 0 0,0 1 0 0 0,1-1 0 0 0,-1 0 0 0 0,0 0 0 0 0,0 0 0 0 0,0-1 0 0 0,0 1 0 0 0,0 0 0 0 0,0-1 0 0 0,0 1 0 0 0,0-1 0 0 0,0 0-1 0 0,0 0 1 0 0,-1 0 0 0 0,1 1 0 0 0,0-2 0 0 0,0 1 0 0 0,1-2 0 0 0,11-6 2 0 0,-1-1-1 0 0,-1 0 0 0 0,1-1 1 0 0,10-13-1 0 0,-12 13 0 0 0,37-38-84 0 0,10-13-213 0 0,3 4 0 0 0,2 2 1 0 0,92-63-1 0 0,-150 117 217 0 0,0-1 1 0 0,0 1-1 0 0,0 0 0 0 0,0 0 1 0 0,1 1-1 0 0,-1-1 0 0 0,1 1 1 0 0,-1 0-1 0 0,1 1 0 0 0,-1-1 1 0 0,1 1-1 0 0,-1 0 0 0 0,1 1 1 0 0,-1-1-1 0 0,1 1 0 0 0,-1 0 1 0 0,1 1-1 0 0,-1-1 0 0 0,0 1 1 0 0,0 0-1 0 0,0 0 0 0 0,0 1 0 0 0,11 6 1092 0 0,-21-11-994 0 0,-2 0-33 0 0,1 0 0 0 0,-1 1-1 0 0,1-1 1 0 0,-1 1-1 0 0,0 1 1 0 0,1-1 0 0 0,-1 1-1 0 0,0 0 1 0 0,0 1-1 0 0,1-1 1 0 0,-1 2 0 0 0,0-1-1 0 0,-6 3 1 0 0,1 0-9 0 0,0 1 0 0 0,0 0 0 0 0,1 1 1 0 0,0 0-1 0 0,0 0 0 0 0,-16 15 0 0 0,9-6-11 0 0,1 0 0 0 0,1 2-1 0 0,1 0 1 0 0,0 0 0 0 0,2 2 0 0 0,0 0-1 0 0,-18 35 1 0 0,28-50 2 0 0,1 0-1 0 0,0 1 1 0 0,1 0-1 0 0,-1-1 1 0 0,1 1 0 0 0,-1 0-1 0 0,2 0 1 0 0,-1 0-1 0 0,0 0 1 0 0,1 0-1 0 0,0 0 1 0 0,0 0-1 0 0,0 0 1 0 0,1 0-1 0 0,2 9 1 0 0,-2-11 10 0 0,1 0 1 0 0,0 0-1 0 0,-1 0 0 0 0,1-1 1 0 0,0 1-1 0 0,0 0 0 0 0,1-1 1 0 0,-1 1-1 0 0,1-1 0 0 0,-1 0 1 0 0,1 0-1 0 0,0 0 0 0 0,-1 0 1 0 0,1 0-1 0 0,0 0 0 0 0,0-1 1 0 0,1 0-1 0 0,-1 1 0 0 0,0-1 1 0 0,0 0-1 0 0,1-1 0 0 0,-1 1 1 0 0,5 0-1 0 0,-1-1 6 0 0,1 1 0 0 0,-1-2 0 0 0,0 1 1 0 0,0-1-1 0 0,1 0 0 0 0,-1 0 0 0 0,0-1 0 0 0,0 0 0 0 0,0 0 0 0 0,0-1 1 0 0,-1 0-1 0 0,1 0 0 0 0,-1 0 0 0 0,0-1 0 0 0,1 0 0 0 0,5-5 0 0 0,12-11-36 0 0,-1 0 0 0 0,29-33 0 0 0,-43 43 10 0 0,23-27 17 0 0,35-53-1 0 0,-30 38 638 0 0,-42 65-626 0 0,0 0 0 0 0,1 0-1 0 0,0 0 1 0 0,-3 23 0 0 0,5-27-25 0 0,0 1 1 0 0,1 0-1 0 0,0-1 0 0 0,1 1 1 0 0,0-1-1 0 0,1 1 0 0 0,-1 0 1 0 0,2-1-1 0 0,-1 1 0 0 0,6 14 1 0 0,-6-21 19 0 0,1 0 0 0 0,-1 0 1 0 0,1 0-1 0 0,-1 0 0 0 0,1-1 1 0 0,0 1-1 0 0,0-1 0 0 0,0 1 1 0 0,1-1-1 0 0,-1 0 0 0 0,0 0 1 0 0,1 0-1 0 0,0 0 0 0 0,-1 0 1 0 0,1 0-1 0 0,0-1 0 0 0,0 0 1 0 0,0 1-1 0 0,0-1 0 0 0,0 0 1 0 0,0 0-1 0 0,0-1 0 0 0,0 1 1 0 0,0-1-1 0 0,1 1 0 0 0,-1-1 1 0 0,0 0-1 0 0,0 0 0 0 0,1-1 1 0 0,-1 1-1 0 0,0 0 0 0 0,0-1 1 0 0,0 0-1 0 0,0 0 0 0 0,6-2 1 0 0,8-5-15 0 0,0-1 1 0 0,0 0-1 0 0,-1-1 1 0 0,28-23 0 0 0,-26 19-58 0 0,61-47-187 0 0,-33 25-128 0 0,1 1 0 0 0,71-39 0 0 0,-99 67-50 0 0,-29 18 213 0 0,-35 19 195 0 0,25-21 22 0 0,1 1 0 0 0,0 1-1 0 0,1 0 1 0 0,0 2 0 0 0,-30 25 0 0 0,40-31-5 0 0,0 1-1 0 0,1-1 1 0 0,0 1-1 0 0,0 1 1 0 0,1-1-1 0 0,0 1 1 0 0,0 0-1 0 0,1 0 1 0 0,0 1-1 0 0,0 0 1 0 0,1 0-1 0 0,1 0 1 0 0,-5 18-1 0 0,8-23 7 0 0,0-1 0 0 0,-1 0 0 0 0,2 1 0 0 0,-1-1 0 0 0,0 0 0 0 0,1 1 0 0 0,0-1 0 0 0,0 0 0 0 0,0 0 0 0 0,0 1 0 0 0,1-1 0 0 0,0 0 0 0 0,0-1 0 0 0,0 1 0 0 0,0 0 0 0 0,0 0 0 0 0,1-1 0 0 0,0 1 0 0 0,0-1 0 0 0,0 0 0 0 0,0 0 0 0 0,0 0 0 0 0,0 0 0 0 0,1-1 0 0 0,-1 1 0 0 0,8 2 0 0 0,6 3 108 0 0,0 0 0 0 0,0-2 0 0 0,1 0 0 0 0,32 6 0 0 0,-49-12-87 0 0,3 1 45 0 0,-1-1-1 0 0,1 0 0 0 0,0 0 0 0 0,-1 0 0 0 0,1 0 0 0 0,-1-1 0 0 0,1 1 0 0 0,-1-1 0 0 0,1 0 0 0 0,-1 0 0 0 0,0 0 0 0 0,1-1 0 0 0,-1 1 0 0 0,0-1 0 0 0,0 0 0 0 0,0 0 0 0 0,0 0 0 0 0,0 0 0 0 0,-1 0 0 0 0,1-1 0 0 0,0 1 0 0 0,-1-1 0 0 0,0 0 0 0 0,3-3 0 0 0,3-5 51 0 0,0-1 0 0 0,-1 0-1 0 0,0 0 1 0 0,8-21 0 0 0,-1-6-36 0 0,-1-2 0 0 0,-2 0 0 0 0,-2 0 0 0 0,-2-1 0 0 0,2-48 0 0 0,-10-213 252 0 0,-12 146 380 0 0,10 140-1458 0 0,-4 30 581 0 0,-5 36 91 0 0,7 36-25 0 0,4 0 0 0 0,4 0 0 0 0,19 121 0 0 0,-19-185 103 0 0,0 0-1 0 0,2 0 0 0 0,0 0 0 0 0,1 0 1 0 0,1-1-1 0 0,1 0 0 0 0,1 0 0 0 0,1-1 1 0 0,16 25-1 0 0,-20-36-46 0 0,1 1-1 0 0,0-1 1 0 0,1 0 0 0 0,0-1 0 0 0,0 0-1 0 0,0 0 1 0 0,1-1 0 0 0,0 0 0 0 0,0 0 0 0 0,1-1-1 0 0,-1 0 1 0 0,1-1 0 0 0,0 0 0 0 0,1-1 0 0 0,-1 0-1 0 0,0 0 1 0 0,1-1 0 0 0,0 0 0 0 0,0-1 0 0 0,16 0-1 0 0,39-5-2866 0 0,-31-2 879 0 0</inkml:trace>
 </inkml:ink>
 </file>
 
@@ -722,7 +722,7 @@
           <inkml:channelProperty channel="OE" name="resolution" value="1000" units="1/deg"/>
         </inkml:channelProperties>
       </inkml:inkSource>
-      <inkml:timestamp xml:id="ts0" timeString="2026-03-19T18:36:33.442"/>
+      <inkml:timestamp xml:id="ts0" timeString="2026-03-19T18:41:21.054"/>
     </inkml:context>
     <inkml:brush xml:id="br0">
       <inkml:brushProperty name="width" value="0.2" units="cm"/>
@@ -730,7 +730,7 @@
       <inkml:brushProperty name="color" value="#FFC114"/>
     </inkml:brush>
   </inkml:definitions>
-  <inkml:trace contextRef="#ctx0" brushRef="#br0">281 161 3592 0 0,'2'-4'-11'0'0,"0"1"0"0"0,-1-1 0 0 0,1 1-1 0 0,-1-1 1 0 0,1 1 0 0 0,-1-1 0 0 0,-1 0 0 0 0,1 0-1 0 0,0 0 1 0 0,-1 0 0 0 0,0 0 0 0 0,0 1 0 0 0,0-1-1 0 0,0 0 1 0 0,0 0 0 0 0,-1 0 0 0 0,0 0 0 0 0,0 0-1 0 0,0 1 1 0 0,0-1 0 0 0,-1 0 0 0 0,1 1 0 0 0,-1-1-1 0 0,0 1 1 0 0,0 0 0 0 0,0-1 0 0 0,-4-3-1 0 0,3 3 31 0 0,0-1-1 0 0,-1 1 1 0 0,1 1-1 0 0,-1-1 1 0 0,0 0-1 0 0,0 1 0 0 0,0 0 1 0 0,-1 0-1 0 0,1 0 1 0 0,-1 0-1 0 0,0 1 0 0 0,1 0 1 0 0,-1 0-1 0 0,0 0 1 0 0,0 0-1 0 0,-1 1 1 0 0,1 0-1 0 0,0 0 0 0 0,0 0 1 0 0,-1 1-1 0 0,-5 0 1 0 0,4 1-34 0 0,0 1 0 0 0,0 0 0 0 0,0 0 0 0 0,0 0 0 0 0,1 1 0 0 0,-1 0 0 0 0,1 1-1 0 0,0-1 1 0 0,0 1 0 0 0,0 1 0 0 0,0-1 0 0 0,1 1 0 0 0,0 0 0 0 0,-1 0 0 0 0,-6 10 0 0 0,4-5-8 0 0,0 1 0 0 0,1 0-1 0 0,1 0 1 0 0,0 0-1 0 0,0 1 1 0 0,1 0 0 0 0,0 0-1 0 0,-3 18 1 0 0,7-27 20 0 0,1 1 0 0 0,-1 0 1 0 0,1 0-1 0 0,0 1 0 0 0,0-1 0 0 0,1 0 0 0 0,-1 0 1 0 0,1 0-1 0 0,0-1 0 0 0,0 1 0 0 0,0 0 0 0 0,0 0 1 0 0,1 0-1 0 0,-1-1 0 0 0,1 1 0 0 0,0-1 0 0 0,0 1 1 0 0,1-1-1 0 0,-1 0 0 0 0,1 0 0 0 0,-1 0 0 0 0,1 0 1 0 0,3 3-1 0 0,-3-4 18 0 0,-1-1 1 0 0,0 1-1 0 0,1-1 1 0 0,-1 1-1 0 0,1-1 1 0 0,-1 0-1 0 0,1 0 1 0 0,0 0-1 0 0,-1-1 0 0 0,1 1 1 0 0,0 0-1 0 0,0-1 1 0 0,-1 0-1 0 0,1 0 1 0 0,0 0-1 0 0,0 0 1 0 0,0 0-1 0 0,0 0 1 0 0,-1-1-1 0 0,1 1 1 0 0,0-1-1 0 0,-1 0 0 0 0,1 0 1 0 0,0 0-1 0 0,-1 0 1 0 0,1 0-1 0 0,-1-1 1 0 0,1 1-1 0 0,-1-1 1 0 0,0 1-1 0 0,0-1 1 0 0,0 0-1 0 0,0 0 1 0 0,2-2-1 0 0,4-5 50 0 0,0 0 0 0 0,-1 0 1 0 0,-1 0-1 0 0,0-1 0 0 0,0 0 0 0 0,0 0 0 0 0,-2 0 0 0 0,1-1 1 0 0,-1 1-1 0 0,-1-1 0 0 0,3-12 0 0 0,14-38 1126 0 0,-15 56-1155 0 0,-12 37-155 0 0,5-21 102 0 0,0 0 0 0 0,0 0 0 0 0,1 0 0 0 0,1 1 1 0 0,0-1-1 0 0,0 0 0 0 0,1 0 0 0 0,0 0 0 0 0,1 0 1 0 0,1 0-1 0 0,-1 0 0 0 0,2 0 0 0 0,7 17 0 0 0,-9-23-46 0 0,1-1 0 0 0,-1 0 0 0 0,1 1 1 0 0,0-1-1 0 0,0 0 0 0 0,1-1 0 0 0,-1 1 0 0 0,1 0 0 0 0,0-1 0 0 0,-1 0 0 0 0,2 0 0 0 0,-1 0 0 0 0,0 0 0 0 0,0-1 0 0 0,1 0 0 0 0,0 0 0 0 0,-1 0 0 0 0,1 0 0 0 0,0-1 0 0 0,0 0 0 0 0,0 0 0 0 0,0 0 0 0 0,0 0 0 0 0,0-1 0 0 0,0 0 0 0 0,0 0 0 0 0,0 0 0 0 0,0-1 0 0 0,0 0 1 0 0,0 0-1 0 0,0 0 0 0 0,6-2 0 0 0,7-3-900 0 0,1-1 498 0 0</inkml:trace>
+  <inkml:trace contextRef="#ctx0" brushRef="#br0">26 97 5324 0 0,'-19'-25'-184'0'0,"20"21"175"0"0,1 0-1 0 0,0 1 0 0 0,0 0 0 0 0,0-1 0 0 0,0 1 0 0 0,0 0 0 0 0,1 0 0 0 0,0 0 1 0 0,-1 0-1 0 0,1 1 0 0 0,0-1 0 0 0,0 1 0 0 0,1 0 0 0 0,-1 0 0 0 0,0 0 0 0 0,1 0 1 0 0,-1 0-1 0 0,1 1 0 0 0,-1-1 0 0 0,1 1 0 0 0,0 0 0 0 0,5 0 0 0 0,7-4-10 0 0,0 2-1 0 0,0 0 0 0 0,1 1 0 0 0,19-1 0 0 0,-25 3 0 0 0,1 1 0 0 0,-1 0 0 0 0,0 1 0 0 0,0-1 0 0 0,0 2 0 0 0,0 0 0 0 0,-1 0 0 0 0,1 1 0 0 0,14 8 0 0 0,-21-10 17 0 0,0 0-1 0 0,-1 0 1 0 0,1 1-1 0 0,-1 0 1 0 0,1-1-1 0 0,-1 1 1 0 0,0 1-1 0 0,0-1 1 0 0,-1 0-1 0 0,1 1 1 0 0,-1-1-1 0 0,1 1 1 0 0,-1 0-1 0 0,0 0 1 0 0,0 0-1 0 0,-1 0 1 0 0,1 0-1 0 0,-1 0 1 0 0,0 0-1 0 0,0 0 1 0 0,0 1-1 0 0,-1-1 1 0 0,1 0-1 0 0,-1 1 1 0 0,0-1-1 0 0,-1 0 1 0 0,0 7-1 0 0,-4 11-6 0 0,0 0 1 0 0,-2-1-1 0 0,-16 38 0 0 0,14-40-34 0 0,2 1-1 0 0,0-1 0 0 0,1 1 0 0 0,-5 33 0 0 0,10-51 46 0 0,1-1-1 0 0,0 1 1 0 0,0-1-1 0 0,0 1 1 0 0,1 0-1 0 0,-1-1 1 0 0,0 1 0 0 0,1-1-1 0 0,-1 1 1 0 0,1-1-1 0 0,-1 1 1 0 0,1-1-1 0 0,-1 0 1 0 0,1 1-1 0 0,0-1 1 0 0,0 0 0 0 0,0 1-1 0 0,0-1 1 0 0,0 0-1 0 0,0 0 1 0 0,1 1-1 0 0,2 1 6 0 0,-1-1-1 0 0,1 1 0 0 0,-1-1 0 0 0,1 0 0 0 0,0-1 0 0 0,0 1 0 0 0,8 2 0 0 0,4-1 24 0 0,1 0 0 0 0,34 2 0 0 0,327 1-2132 0 0,-329-4 1756 0 0</inkml:trace>
 </inkml:ink>
 </file>
 
@@ -754,7 +754,7 @@
           <inkml:channelProperty channel="OE" name="resolution" value="1000" units="1/deg"/>
         </inkml:channelProperties>
       </inkml:inkSource>
-      <inkml:timestamp xml:id="ts0" timeString="2026-03-19T18:36:34.225"/>
+      <inkml:timestamp xml:id="ts0" timeString="2026-03-19T18:41:22.572"/>
     </inkml:context>
     <inkml:brush xml:id="br0">
       <inkml:brushProperty name="width" value="0.2" units="cm"/>
@@ -762,7 +762,7 @@
       <inkml:brushProperty name="color" value="#FFC114"/>
     </inkml:brush>
   </inkml:definitions>
-  <inkml:trace contextRef="#ctx0" brushRef="#br0">17 28 2800 0 0,'0'0'-101'0'0,"-13"-14"251"0"0,10 5 190 0 0,39 5-475 0 0,-32 4 113 0 0,54 29-210 0 0,-46-18 200 0 0,0 0 0 0 0,-1 0 1 0 0,-1 1-1 0 0,0 0 1 0 0,0 1-1 0 0,-1 0 0 0 0,10 21 1 0 0,-5-7-4 0 0,-2 0 0 0 0,0 1 1 0 0,7 30-1 0 0,-10 11 3401 0 0,-19-104-2441 0 0,-8-75-710 0 0,14 74-143 0 0,-13-52-1 0 0,17 87-103 0 0,-1 0 0 0 0,1 0-1 0 0,-1 0 1 0 0,1 0 0 0 0,-1-1-1 0 0,1 1 1 0 0,0 0-1 0 0,-1 0 1 0 0,1 0 0 0 0,0 0-1 0 0,0 0 1 0 0,0-1 0 0 0,0 1-1 0 0,0 0 1 0 0,0 0 0 0 0,0 0-1 0 0,0 0 1 0 0,0 0 0 0 0,1-1-1 0 0,-1 1 1 0 0,1 0-1 0 0,-1 0 1 0 0,0 0 0 0 0,1 0-1 0 0,0 0 1 0 0,-1 0 0 0 0,1 0-1 0 0,0 0 1 0 0,-1 0 0 0 0,1 0-1 0 0,0 1 1 0 0,0-1 0 0 0,0 0-1 0 0,0 0 1 0 0,-1 1-1 0 0,1-1 1 0 0,0 1 0 0 0,2-2-1 0 0,3 1-80 0 0,-1 1 0 0 0,1 0-1 0 0,-1 0 1 0 0,1 0-1 0 0,-1 0 1 0 0,1 1-1 0 0,5 1 1 0 0,23 2 214 0 0,-17-4-178 0 0,10 0-1115 0 0,46-5-1 0 0,-59 2 522 0 0</inkml:trace>
+  <inkml:trace contextRef="#ctx0" brushRef="#br0">24 60 2748 0 0,'-2'-1'177'0'0,"0"0"0"0"0,0 0 0 0 0,0 0 0 0 0,0-1 0 0 0,0 1 0 0 0,1 0 0 0 0,-1-1 0 0 0,0 1 0 0 0,1-1 0 0 0,0 0 0 0 0,-1 0 0 0 0,-1-2-1 0 0,49-7-139 0 0,0 2-1 0 0,1 3 0 0 0,0 1 1 0 0,62 2-1 0 0,-55 1-8 0 0,-12 0-5 0 0,85 2-34 0 0,-59 4-29 0 0,-65-4-1 0 0,-2 1 35 0 0,0-1 0 0 0,-1 0 0 0 0,1 0-1 0 0,0 0 1 0 0,0 1 0 0 0,0-1 0 0 0,0 0 0 0 0,0 1 0 0 0,-1-1-1 0 0,1 1 1 0 0,0-1 0 0 0,0 1 0 0 0,-1-1 0 0 0,1 1 0 0 0,0-1-1 0 0,-1 1 1 0 0,1 0 0 0 0,-1-1 0 0 0,1 1 0 0 0,-1 0-1 0 0,1 0 1 0 0,0 0 0 0 0,0 14-37 0 0,-1-1 0 0 0,0 0 0 0 0,-1 0 0 0 0,0 0 0 0 0,-2 0 0 0 0,1 0 0 0 0,-7 20-1 0 0,-4 22-26 0 0,4 12 13 0 0,3 1-1 0 0,3-1 1 0 0,3 1-1 0 0,14 115 0 0 0,2-88 56 0 0,4-1-1 0 0,55 160 0 0 0,-11-83 3 0 0,-16-48 54 0 0,31 132 0 0 0,-77-252-32 0 0,-1 0 1 0 0,-1-1 0 0 0,1 1 0 0 0,0 0-1 0 0,-1 0 1 0 0,0 0 0 0 0,0 0-1 0 0,0 0 1 0 0,0-1 0 0 0,-1 1-1 0 0,0 0 1 0 0,1 0 0 0 0,-1 0 0 0 0,-1-1-1 0 0,1 1 1 0 0,0-1 0 0 0,-1 1-1 0 0,0-1 1 0 0,0 1 0 0 0,-3 4-1 0 0,0-4 54 0 0,0 1-1 0 0,0-1 0 0 0,0 0 0 0 0,-1-1 0 0 0,1 1 0 0 0,-1-1 0 0 0,0 0 0 0 0,0-1 0 0 0,0 1 0 0 0,0-1 0 0 0,-10 2 0 0 0,-19 4 160 0 0,-1-2 0 0 0,0-2-1 0 0,-1 0 1 0 0,1-3 0 0 0,-45-3 0 0 0,-181-29 474 0 0,261 31-707 0 0,-68-12 76 0 0,-26-4-621 0 0,35 12-3111 0 0</inkml:trace>
 </inkml:ink>
 </file>
 
@@ -786,7 +786,7 @@
           <inkml:channelProperty channel="OE" name="resolution" value="1000" units="1/deg"/>
         </inkml:channelProperties>
       </inkml:inkSource>
-      <inkml:timestamp xml:id="ts0" timeString="2026-03-19T18:36:34.895"/>
+      <inkml:timestamp xml:id="ts0" timeString="2026-03-19T18:41:30.888"/>
     </inkml:context>
     <inkml:brush xml:id="br0">
       <inkml:brushProperty name="width" value="0.2" units="cm"/>
@@ -794,7 +794,7 @@
       <inkml:brushProperty name="color" value="#FFC114"/>
     </inkml:brush>
   </inkml:definitions>
-  <inkml:trace contextRef="#ctx0" brushRef="#br0">33 53 3136 0 0,'0'0'-118'0'0,"-3"-1"42"0"0,-8-1 45 0 0,9 2 242 0 0,-9 0-86 0 0,6-2 406 0 0,8-2-528 0 0,-1 1-1 0 0,1 0 1 0 0,0 0 0 0 0,0 0 0 0 0,1 0 0 0 0,-1 1 0 0 0,1 0-1 0 0,-1-1 1 0 0,1 1 0 0 0,0 0 0 0 0,-1 1 0 0 0,1-1 0 0 0,0 1-1 0 0,0-1 1 0 0,1 1 0 0 0,5-1 0 0 0,0 0-28 0 0,1 0-1 0 0,-1 0 1 0 0,1 1 0 0 0,-1 0 0 0 0,1 0-1 0 0,15 3 1 0 0,-22-2 16 0 0,1 0 1 0 0,-1 1-1 0 0,0 0 1 0 0,0 0-1 0 0,1 0 1 0 0,-1 1-1 0 0,0-1 1 0 0,0 1-1 0 0,0 0 1 0 0,0 0-1 0 0,-1 0 1 0 0,1 1-1 0 0,-1-1 1 0 0,1 1-1 0 0,-1 0 1 0 0,0 0-1 0 0,0 0 1 0 0,0 0-1 0 0,0 1 1 0 0,0-1-1 0 0,-1 1 1 0 0,0 0-1 0 0,0 0 1 0 0,0-1-1 0 0,0 1 1 0 0,0 1-1 0 0,-1-1 1 0 0,0 0-1 0 0,0 0 1 0 0,0 0-1 0 0,0 1 1 0 0,-1-1-1 0 0,0 0 1 0 0,1 1-1 0 0,-2-1 1 0 0,1 1-1 0 0,0-1 1 0 0,-1 0-1 0 0,0 0 1 0 0,-2 7-1 0 0,-3 14 3 0 0,-2 0 0 0 0,-14 33 0 0 0,13-36-46 0 0,0-1 1 0 0,2 1-1 0 0,-7 37 1 0 0,14-58 53 0 0,0 1 0 0 0,0-1-1 0 0,1 0 1 0 0,-1 1 0 0 0,0-1 0 0 0,1 0 0 0 0,-1 0 0 0 0,1 1 0 0 0,0-1 0 0 0,-1 0 0 0 0,1 0 0 0 0,0 0 0 0 0,0 0 0 0 0,0 0 0 0 0,0 0 0 0 0,0 0 0 0 0,0 0 0 0 0,0 0 0 0 0,0 0 0 0 0,0-1 0 0 0,0 1 0 0 0,0 0 0 0 0,0-1-1 0 0,1 1 1 0 0,-1-1 0 0 0,0 1 0 0 0,0-1 0 0 0,1 0 0 0 0,-1 1 0 0 0,0-1 0 0 0,1 0 0 0 0,-1 0 0 0 0,0 0 0 0 0,1 0 0 0 0,0 0 0 0 0,61 2 53 0 0,-55-3-46 0 0,195-8 78 0 0,74-1-1543 0 0,-210 10 795 0 0</inkml:trace>
+  <inkml:trace contextRef="#ctx0" brushRef="#br0">14 80 3532 0 0,'-6'-39'447'0'0,"-1"0"180"0"0,6 38-644 0 0,2 6-238 0 0,38 325 48 0 0,-5-58 208 0 0,-11-13 79 0 0,-16-164 3765 0 0,-12-102-3804 0 0,1 0 0 0 0,1-1-1 0 0,-1 1 1 0 0,1-1 0 0 0,1 0 0 0 0,-1 0 0 0 0,1 0 0 0 0,1 0 0 0 0,0 0 0 0 0,0 0-1 0 0,0 0 1 0 0,1-1 0 0 0,0 1 0 0 0,1 0 0 0 0,0 0 0 0 0,2-12 0 0 0,1-3-85 0 0,1 0 0 0 0,0 1 0 0 0,2 0 0 0 0,0 0 0 0 0,12-22-1 0 0,-15 36-4 0 0,1 0 0 0 0,0 0-1 0 0,0 1 1 0 0,1 0 0 0 0,0 0-1 0 0,0 0 1 0 0,1 0 0 0 0,0 1-1 0 0,0 0 1 0 0,0 1-1 0 0,1 0 1 0 0,0 0 0 0 0,16-7-1 0 0,-11 6-51 0 0,2 1 0 0 0,-1 1 0 0 0,1 0-1 0 0,-1 1 1 0 0,1 0 0 0 0,0 2 0 0 0,25-1 0 0 0,-36 2 84 0 0,-1 1 1 0 0,1 0 0 0 0,0-1 0 0 0,-1 1-1 0 0,0 1 1 0 0,1-1 0 0 0,-1 0-1 0 0,0 1 1 0 0,0 0 0 0 0,1 0 0 0 0,-1 0-1 0 0,-1 0 1 0 0,1 0 0 0 0,0 0-1 0 0,0 1 1 0 0,-1-1 0 0 0,1 1 0 0 0,-1 0-1 0 0,0 0 1 0 0,0 0 0 0 0,0 0 0 0 0,0 0-1 0 0,-1 0 1 0 0,1 1 0 0 0,0 3-1 0 0,4 7-17 0 0,-1 0-1 0 0,-1 1 0 0 0,0 0 1 0 0,2 20-1 0 0,3 96-150 0 0,-6-114 139 0 0,-2-10 39 0 0,-1-1 0 0 0,2 1 0 0 0,-1-1-1 0 0,1 1 1 0 0,0-1 0 0 0,0 1-1 0 0,1-1 1 0 0,0 0 0 0 0,4 6 0 0 0,-5-10 14 0 0,-1 0 0 0 0,1-1 1 0 0,0 1-1 0 0,0-1 0 0 0,0 1 1 0 0,1-1-1 0 0,-1 0 1 0 0,0 1-1 0 0,0-1 0 0 0,1 0 1 0 0,-1-1-1 0 0,0 1 0 0 0,1 0 1 0 0,-1-1-1 0 0,1 1 1 0 0,-1-1-1 0 0,1 0 0 0 0,3 0 1 0 0,53-5 66 0 0,-44 2-80 0 0,34-6-1088 0 0,-1-2 0 0 0,87-32 0 0 0,-99 30-59 0 0</inkml:trace>
 </inkml:ink>
 </file>
 
@@ -818,7 +818,7 @@
           <inkml:channelProperty channel="OE" name="resolution" value="1000" units="1/deg"/>
         </inkml:channelProperties>
       </inkml:inkSource>
-      <inkml:timestamp xml:id="ts0" timeString="2026-03-19T18:36:36.428"/>
+      <inkml:timestamp xml:id="ts0" timeString="2026-03-19T18:41:33.629"/>
     </inkml:context>
     <inkml:brush xml:id="br0">
       <inkml:brushProperty name="width" value="0.2" units="cm"/>
@@ -826,7 +826,7 @@
       <inkml:brushProperty name="color" value="#FFC114"/>
     </inkml:brush>
   </inkml:definitions>
-  <inkml:trace contextRef="#ctx0" brushRef="#br0">30 55 2496 0 0,'0'0'-31'0'0,"-19"1"67"0"0,8-2 205 0 0,13-2 343 0 0,31-7-572 0 0,0 2 1 0 0,1 1-1 0 0,1 1 1 0 0,-1 2-1 0 0,51 1 1 0 0,10-3-59 0 0,-78 4 49 0 0,15-1-68 0 0,-1 1-1 0 0,62 4 1 0 0,-90-2 34 0 0,1 7-15 0 0,5 13-79 0 0,-10 3 56 0 0,-2-1 0 0 0,0 1 0 0 0,-12 36-1 0 0,-6 44-51 0 0,16-35 62 0 0,3 1 1 0 0,4-1 0 0 0,2 0 0 0 0,26 132-1 0 0,94 263-42 0 0,-50-211 18 0 0,-23-60 102 0 0,41 297 0 0 0,-90-475 17 0 0,-1 0-1 0 0,0 0 1 0 0,-1 0-1 0 0,-1 0 1 0 0,0 0-1 0 0,-1 0 1 0 0,-5 22-1 0 0,5-31 32 0 0,0 0-1 0 0,0 0 1 0 0,-1 0-1 0 0,1 0 0 0 0,-1 0 1 0 0,0-1-1 0 0,0 1 0 0 0,-1-1 1 0 0,0 0-1 0 0,1 0 1 0 0,-1 0-1 0 0,-1 0 0 0 0,1-1 1 0 0,0 0-1 0 0,-1 0 0 0 0,0 0 1 0 0,0 0-1 0 0,0-1 1 0 0,0 0-1 0 0,0 0 0 0 0,0 0 1 0 0,-7 1-1 0 0,-15 3 285 0 0,-1-1 0 0 0,0-2-1 0 0,0 0 1 0 0,-52-4 0 0 0,-115-19 648 0 0,154 15-844 0 0,35 4-197 0 0,-40-8-295 0 0,44 9 152 0 0,0-1 0 0 0,0 1 0 0 0,0-1 0 0 0,0 0-1 0 0,0 0 1 0 0,0 0 0 0 0,1 0 0 0 0,-1 0 0 0 0,0 0 0 0 0,0-1 0 0 0,1 1-1 0 0,-1 0 1 0 0,1-1 0 0 0,-1 1 0 0 0,1-1 0 0 0,0 0 0 0 0,0 1-1 0 0,-2-4 1 0 0,0-7-905 0 0</inkml:trace>
+  <inkml:trace contextRef="#ctx0" brushRef="#br0">120 697 3640 0 0,'0'0'-324'0'0,"11"0"-410"0"0,10 0 825 0 0,1-1 1 0 0,-1-1 0 0 0,0-1 0 0 0,0 0 0 0 0,38-13-1 0 0,-52 14-66 0 0,-1 0-1 0 0,0-1 0 0 0,1 0 0 0 0,-1 0 0 0 0,0 0 0 0 0,-1-1 0 0 0,1 0 0 0 0,-1 0 0 0 0,1 0 0 0 0,-1-1 0 0 0,-1 1 0 0 0,1-1 0 0 0,-1-1 1 0 0,1 1-1 0 0,-2 0 0 0 0,1-1 0 0 0,0 0 0 0 0,-1 0 0 0 0,0 0 0 0 0,-1-1 0 0 0,1 1 0 0 0,-1 0 0 0 0,-1-1 0 0 0,2-7 0 0 0,-2 11-1 0 0,-1 0 1 0 0,0 0-1 0 0,0 1 0 0 0,0-1 0 0 0,0 0 0 0 0,0 0 0 0 0,-1 0 0 0 0,1 0 1 0 0,-1 0-1 0 0,0 1 0 0 0,0-1 0 0 0,0 0 0 0 0,0 1 0 0 0,0-1 1 0 0,-1 0-1 0 0,1 1 0 0 0,-1 0 0 0 0,0-1 0 0 0,-3-3 0 0 0,1 2-2 0 0,0 1 1 0 0,-1-1-1 0 0,0 1 0 0 0,1 0 0 0 0,-1 0 0 0 0,-1 1 1 0 0,1-1-1 0 0,0 1 0 0 0,-9-2 0 0 0,0 0-10 0 0,0 1-1 0 0,0 1 1 0 0,0 0 0 0 0,0 1-1 0 0,-1 0 1 0 0,1 2 0 0 0,-19 1-1 0 0,22 0-16 0 0,1 1-1 0 0,0 0 1 0 0,0 0-1 0 0,0 1 1 0 0,0 1 0 0 0,1-1-1 0 0,0 1 1 0 0,0 1-1 0 0,0 0 1 0 0,0 0-1 0 0,1 1 1 0 0,0 0-1 0 0,0 0 1 0 0,1 1-1 0 0,0 0 1 0 0,1 0-1 0 0,-1 1 1 0 0,1-1-1 0 0,1 1 1 0 0,0 1-1 0 0,-7 16 1 0 0,9-18 1 0 0,1 0 0 0 0,-1 0 0 0 0,1 0 0 0 0,1 0-1 0 0,-1 0 1 0 0,1 1 0 0 0,1-1 0 0 0,0 0 0 0 0,0 1 0 0 0,0-1 0 0 0,1 1 0 0 0,1-1 0 0 0,-1 0 0 0 0,1 0 0 0 0,1 0 0 0 0,-1 0 0 0 0,1 0-1 0 0,1 0 1 0 0,-1-1 0 0 0,1 0 0 0 0,1 1 0 0 0,-1-1 0 0 0,1-1 0 0 0,1 1 0 0 0,-1-1 0 0 0,1 0 0 0 0,11 9 0 0 0,-5-6 16 0 0,0-1 0 0 0,1 0 0 0 0,0-1 0 0 0,17 6 0 0 0,22 13 83 0 0,-46-24-77 0 0,1-1 1 0 0,-1 0-1 0 0,0 0 0 0 0,1-1 0 0 0,-1 1 1 0 0,0-1-1 0 0,1 0 0 0 0,-1-1 1 0 0,0 0-1 0 0,1 0 0 0 0,7-2 1 0 0,-10 2-7 0 0,10-3 2 0 0,-1 1 0 0 0,0-2 1 0 0,-1 0-1 0 0,1 0 0 0 0,-1-1 1 0 0,0-1-1 0 0,0 0 0 0 0,-1 0 1 0 0,16-15-1 0 0,7-9 19 0 0,45-51 0 0 0,-28 27-13 0 0,-8 4-25 0 0,-33 38-6 0 0,-1 1 1 0 0,2 1-1 0 0,-1 0 0 0 0,2 0 1 0 0,-1 1-1 0 0,16-10 0 0 0,-23 18 10 0 0,0 1-1 0 0,0-1 0 0 0,-1 0 1 0 0,2 1-1 0 0,-1 0 0 0 0,0 0 1 0 0,0 0-1 0 0,0 1 0 0 0,0-1 1 0 0,1 1-1 0 0,-1 0 0 0 0,0 0 1 0 0,0 1-1 0 0,0-1 0 0 0,1 1 1 0 0,-1 0-1 0 0,0 0 0 0 0,0 0 0 0 0,0 1 1 0 0,0-1-1 0 0,6 5 0 0 0,47 11-80 0 0,-29-8 1074 0 0,-28-10-990 0 0,-4-2 6 0 0,1-1 0 0 0,-1 1 0 0 0,0 0 0 0 0,0 0 0 0 0,0 1-1 0 0,0-1 1 0 0,0 1 0 0 0,-1 0 0 0 0,1 0 0 0 0,-1 0 0 0 0,1 1-1 0 0,-1-1 1 0 0,0 1 0 0 0,1 0 0 0 0,-1 0 0 0 0,0 1 0 0 0,0 0-1 0 0,0 0 1 0 0,1 0 0 0 0,-7 1 0 0 0,3-1-12 0 0,-1 0-1 0 0,1 0 1 0 0,0 1 0 0 0,-1 0 0 0 0,1 0-1 0 0,0 1 1 0 0,-1 0 0 0 0,1 1 0 0 0,1 0-1 0 0,-1 0 1 0 0,-12 7 0 0 0,5-2-17 0 0,4-1 3 0 0,0 0 0 0 0,0 0 0 0 0,1 1 0 0 0,0 0 0 0 0,1 1 0 0 0,0 0 0 0 0,0 1 0 0 0,1 0 0 0 0,0 0 0 0 0,1 1 0 0 0,0 0 1 0 0,0 0-1 0 0,2 0 0 0 0,-1 1 0 0 0,1 0 0 0 0,1 0 0 0 0,0 1 0 0 0,-3 19 0 0 0,6-27 22 0 0,1 0 0 0 0,0-1 0 0 0,0 1 0 0 0,1 0 0 0 0,-1 0 0 0 0,1 0 0 0 0,0 0 0 0 0,0-1 0 0 0,1 1 0 0 0,-1 0 0 0 0,1-1 0 0 0,0 0 0 0 0,0 1-1 0 0,1-1 1 0 0,-1 0 0 0 0,1 0 0 0 0,0 0 0 0 0,0 0 0 0 0,0-1 0 0 0,8 7 0 0 0,-9-7 8 0 0,1-2-1 0 0,0 1 0 0 0,0 0 1 0 0,0 0-1 0 0,0-1 1 0 0,0 0-1 0 0,0 1 1 0 0,0-1-1 0 0,0 0 0 0 0,1-1 1 0 0,-1 1-1 0 0,0 0 1 0 0,1-1-1 0 0,-1 0 1 0 0,0 0-1 0 0,1 0 0 0 0,-1 0 1 0 0,0 0-1 0 0,1-1 1 0 0,-1 0-1 0 0,0 1 1 0 0,0-1-1 0 0,1 0 0 0 0,-1-1 1 0 0,0 1-1 0 0,0-1 1 0 0,0 1-1 0 0,0-1 1 0 0,-1 0-1 0 0,5-3 1 0 0,2-3 8 0 0,-1-1 0 0 0,0 1 0 0 0,0-2 0 0 0,-1 1 1 0 0,0-1-1 0 0,0 0 0 0 0,-2 0 0 0 0,8-16 1 0 0,-3 2 7 0 0,-1-1 1 0 0,12-46 0 0 0,-8 1 214 0 0,-13 69-250 0 0,-4 5-98 0 0,1 1 99 0 0,-1 0 0 0 0,1 0-1 0 0,0 0 1 0 0,0 1 0 0 0,1-1-1 0 0,0 1 1 0 0,0-1 0 0 0,0 1-1 0 0,0 0 1 0 0,1 0 0 0 0,0 0-1 0 0,0 0 1 0 0,1 0 0 0 0,0 0-1 0 0,1 10 1 0 0,-1 0-2 0 0,1-1-1 0 0,1 1 1 0 0,0 0 0 0 0,1-1 0 0 0,1 0 0 0 0,0 0-1 0 0,11 24 1 0 0,-3-13 47 0 0,2 0-1 0 0,1-2 1 0 0,21 28 0 0 0,-35-51-15 0 0,1 0 1 0 0,-1 0-1 0 0,0 0 1 0 0,0 0-1 0 0,1-1 1 0 0,-1 1 0 0 0,0 0-1 0 0,1-1 1 0 0,-1 1-1 0 0,1-1 1 0 0,-1 1-1 0 0,1-1 1 0 0,-1 0 0 0 0,1 0-1 0 0,-1 0 1 0 0,1 1-1 0 0,-1-1 1 0 0,1-1 0 0 0,-1 1-1 0 0,1 0 1 0 0,-1 0-1 0 0,1 0 1 0 0,-1-1-1 0 0,1 1 1 0 0,-1-1 0 0 0,1 1-1 0 0,-1-1 1 0 0,0 0-1 0 0,3-1 1 0 0,40-26 198 0 0,-9-2-310 0 0,-1-1 0 0 0,52-64 1 0 0,13-14-367 0 0,-86 97 381 0 0,-4 3-8 0 0,0 0 1 0 0,0 0-1 0 0,1 1 1 0 0,0 1-1 0 0,16-9 1 0 0,-22 14 53 0 0,1 0 0 0 0,0 0-1 0 0,1 0 1 0 0,-1 1 0 0 0,0 0 0 0 0,0 0 0 0 0,1 1 0 0 0,-1-1-1 0 0,0 1 1 0 0,1 0 0 0 0,-1 1 0 0 0,0-1 0 0 0,0 1 0 0 0,1 0-1 0 0,-1 0 1 0 0,9 4 0 0 0,65 20-16 0 0,-77-24 327 0 0,-9-23-219 0 0,3 19-61 0 0,1 1-1 0 0,0 0 0 0 0,-1 0 1 0 0,0 0-1 0 0,1 0 1 0 0,-1 0-1 0 0,0 1 1 0 0,0-1-1 0 0,0 1 0 0 0,0 0 1 0 0,0 0-1 0 0,0 1 1 0 0,0-1-1 0 0,-6 1 1 0 0,-2 0-14 0 0,0 2 0 0 0,0-1 0 0 0,1 1 0 0 0,-1 1 0 0 0,1 0 0 0 0,0 1 0 0 0,0 0 0 0 0,0 1 0 0 0,0 0 0 0 0,1 0 0 0 0,0 1 0 0 0,-17 13 0 0 0,14-9-1 0 0,2-3-7 0 0,1 1-1 0 0,0 0 0 0 0,0 0 0 0 0,1 1 0 0 0,0 1 0 0 0,1 0 0 0 0,0 0 0 0 0,1 0 0 0 0,-8 14 1 0 0,13-20 14 0 0,0 0 0 0 0,0 0 1 0 0,1 0-1 0 0,-1 0 1 0 0,1 1-1 0 0,0-1 1 0 0,0 0-1 0 0,1 0 0 0 0,-1 1 1 0 0,1-1-1 0 0,0 1 1 0 0,0-1-1 0 0,1 0 1 0 0,-1 1-1 0 0,1-1 1 0 0,0 0-1 0 0,0 0 0 0 0,0 0 1 0 0,1 1-1 0 0,0-1 1 0 0,-1 0-1 0 0,1-1 1 0 0,1 1-1 0 0,-1 0 0 0 0,0 0 1 0 0,1-1-1 0 0,0 0 1 0 0,0 1-1 0 0,0-1 1 0 0,5 4-1 0 0,1 0 14 0 0,1 1 0 0 0,0-2 0 0 0,0 1 0 0 0,1-1 0 0 0,0-1 0 0 0,0 0 0 0 0,16 5 0 0 0,-22-8 28 0 0,1 0 1 0 0,0-1 0 0 0,-1 0-1 0 0,1 0 1 0 0,0 0-1 0 0,-1 0 1 0 0,1-1-1 0 0,0 0 1 0 0,0 0 0 0 0,-1-1-1 0 0,1 1 1 0 0,0-1-1 0 0,0-1 1 0 0,-1 1-1 0 0,1-1 1 0 0,-1 0 0 0 0,8-3-1 0 0,-6-1 3 0 0,0 0 0 0 0,0 0 0 0 0,-1-1-1 0 0,1 1 1 0 0,-2-1 0 0 0,1-1 0 0 0,-1 1 0 0 0,0-1-1 0 0,0 0 1 0 0,-1 0 0 0 0,0 0 0 0 0,-1-1 0 0 0,4-12-1 0 0,3-17 6 0 0,11-71 0 0 0,-14 67-13 0 0,-1 1-7 0 0,-1 0-1 0 0,-1 0 0 0 0,-3 0 1 0 0,-1-1-1 0 0,-2 1 0 0 0,-2-1 1 0 0,-2 1-1 0 0,-2 1 0 0 0,-24-76 1 0 0,-9-1 238 0 0,41 115-303 0 0,0 3-130 0 0,0 0 167 0 0,0 0 0 0 0,0 0 0 0 0,-1 0 0 0 0,1 0 0 0 0,0 0-1 0 0,0 0 1 0 0,-1 0 0 0 0,1 0 0 0 0,-1 0 0 0 0,1 0 0 0 0,-1 0 0 0 0,1-1 0 0 0,-1 1-1 0 0,1 0 1 0 0,-1 0 0 0 0,0 0 0 0 0,1-1 0 0 0,-2 2 0 0 0,1-2 1 0 0,0 1 0 0 0,0 0-1 0 0,0 0 1 0 0,1 0 0 0 0,-1 0 0 0 0,0 0 0 0 0,1 0 0 0 0,-1 0 0 0 0,0 1-1 0 0,1-1 1 0 0,-1 0 0 0 0,1 0 0 0 0,0 0 0 0 0,-1 1 0 0 0,1-1 0 0 0,0 0-1 0 0,0 0 1 0 0,0 1 0 0 0,0 1 0 0 0,-1 92-98 0 0,0 59 26 0 0,30 263 0 0 0,-27-404 75 0 0,1 0 0 0 0,0 0 0 0 0,0-1 0 0 0,1 1 0 0 0,1-1 0 0 0,0 0 0 0 0,1 0 0 0 0,0 0 0 0 0,14 20 0 0 0,-13-25 10 0 0,-1 0-1 0 0,2 0 1 0 0,-1 0 0 0 0,1-1 0 0 0,0 0-1 0 0,0 0 1 0 0,0-1 0 0 0,1 0 0 0 0,0-1-1 0 0,0 0 1 0 0,0 0 0 0 0,1-1 0 0 0,14 4-1 0 0,11-1-517 0 0,-1-1-1 0 0,1-1 1 0 0,0-2-1 0 0,0-1 1 0 0,0-2-1 0 0,53-9 1 0 0,-51 3-846 0 0</inkml:trace>
 </inkml:ink>
 </file>
 
@@ -850,7 +850,7 @@
           <inkml:channelProperty channel="OE" name="resolution" value="1000" units="1/deg"/>
         </inkml:channelProperties>
       </inkml:inkSource>
-      <inkml:timestamp xml:id="ts0" timeString="2026-03-19T18:36:37.583"/>
+      <inkml:timestamp xml:id="ts0" timeString="2026-03-19T18:41:34.641"/>
     </inkml:context>
     <inkml:brush xml:id="br0">
       <inkml:brushProperty name="width" value="0.2" units="cm"/>
@@ -858,11 +858,11 @@
       <inkml:brushProperty name="color" value="#FFC114"/>
     </inkml:brush>
   </inkml:definitions>
-  <inkml:trace contextRef="#ctx0" brushRef="#br0">84 370 4140 0 0,'-6'-22'319'0'0,"7"47"-349"0"0,10 52-195 0 0,3-26 141 0 0,2 0 0 0 0,24 55 0 0 0,-7-23 155 0 0,-31-69 2603 0 0,-16-30-2080 0 0,-20-41-505 0 0,1-36-147 0 0,-38-184 1 0 0,38 135-24 0 0,30 132 23 0 0,1 0-1 0 0,0 0 1 0 0,1 0-1 0 0,0 0 1 0 0,0-12 0 0 0,1 19 22 0 0,1-1 1 0 0,-1 1 0 0 0,1 0-1 0 0,0 0 1 0 0,0-1 0 0 0,0 1 0 0 0,0 0-1 0 0,1 0 1 0 0,-1 0 0 0 0,1 0-1 0 0,0 0 1 0 0,0 1 0 0 0,0-1 0 0 0,0 0-1 0 0,0 1 1 0 0,1 0 0 0 0,-1-1-1 0 0,1 1 1 0 0,2-2 0 0 0,5-2-33 0 0,-1 1 0 0 0,1 0 0 0 0,0 1 0 0 0,0 0 0 0 0,1 0 0 0 0,-1 1 0 0 0,1 1 1 0 0,0 0-1 0 0,-1 0 0 0 0,1 1 0 0 0,0 0 0 0 0,0 1 0 0 0,0 0 0 0 0,0 1 0 0 0,0 0 0 0 0,0 1 0 0 0,-1 0 0 0 0,15 5 0 0 0,-4-1-25 0 0,-1 1 0 0 0,0 1 0 0 0,0 1 0 0 0,0 1 0 0 0,-2 0-1 0 0,1 2 1 0 0,-1 0 0 0 0,22 19 0 0 0,-39-30 84 0 0,1 1 0 0 0,-1-1 1 0 0,0 0-1 0 0,1 0 0 0 0,-1 1 0 0 0,0-1 1 0 0,0 0-1 0 0,0 1 0 0 0,0-1 0 0 0,0 1 1 0 0,-1 0-1 0 0,1-1 0 0 0,0 1 0 0 0,-1 0 0 0 0,1-1 1 0 0,-1 1-1 0 0,1 0 0 0 0,-1-1 0 0 0,0 1 1 0 0,0 0-1 0 0,0 0 0 0 0,0 0 0 0 0,0-1 0 0 0,-1 4 1 0 0,0-2 3 0 0,0 0 1 0 0,-1 0 0 0 0,1 0 0 0 0,-1 0-1 0 0,0 0 1 0 0,0 0 0 0 0,0-1-1 0 0,0 1 1 0 0,-1 0 0 0 0,1-1 0 0 0,-1 0-1 0 0,-2 3 1 0 0,-11 6 12 0 0,0-1-1 0 0,-1 0 1 0 0,-28 11-1 0 0,43-20-9 0 0,-23 11 213 0 0,0-2 0 0 0,0-1 0 0 0,-42 9 0 0 0,64-17-133 0 0,0-3-406 0 0,-4-1 203 0 0,-1-5-1414 0 0,12-4 713 0 0</inkml:trace>
+  <inkml:trace contextRef="#ctx0" brushRef="#br0">5 87 4012 0 0,'-1'-1'-38'0'0,"1"1"0"0"0,-1-1-1 0 0,1 0 1 0 0,0 1-1 0 0,-1-1 1 0 0,1 0 0 0 0,0 0-1 0 0,0 1 1 0 0,-1-1 0 0 0,1 0-1 0 0,0 0 1 0 0,0 0 0 0 0,0 1-1 0 0,0-1 1 0 0,0 0-1 0 0,0 0 1 0 0,0 0 0 0 0,0 1-1 0 0,0-1 1 0 0,1 0 0 0 0,-1 0-1 0 0,0 1 1 0 0,0-1-1 0 0,1 0 1 0 0,-1 0 0 0 0,0 1-1 0 0,1-1 1 0 0,-1 0 0 0 0,1 1-1 0 0,-1-1 1 0 0,1 0-1 0 0,-1 1 1 0 0,1-1 0 0 0,0 1-1 0 0,0-1 1 0 0,0 0-18 0 0,1-1 42 0 0,0 0 0 0 0,0 0 0 0 0,0 0 0 0 0,0 0 0 0 0,0 1 0 0 0,0-1 0 0 0,0 1 0 0 0,0-1 0 0 0,1 1 0 0 0,-1 0 0 0 0,1 0 0 0 0,-1 0 0 0 0,1 0 0 0 0,2 0 0 0 0,1-1-7 0 0,78-28-5 0 0,-80 28 29 0 0,26-1 0 0 0,-12 2-7 0 0,0 1-1 0 0,0 1 1 0 0,0 0 0 0 0,34 8-1 0 0,-42-6 3 0 0,-1-1 0 0 0,0 1 0 0 0,0 1 0 0 0,0 0 0 0 0,0 0 0 0 0,0 1 0 0 0,-1 0 0 0 0,0 1 0 0 0,0-1 0 0 0,12 13 0 0 0,-19-17 12 0 0,1 1 0 0 0,-1-1 1 0 0,0 1-1 0 0,1-1 0 0 0,-1 1 0 0 0,0 0 1 0 0,0 0-1 0 0,0-1 0 0 0,0 1 1 0 0,-1 0-1 0 0,1 0 0 0 0,0 0 1 0 0,-1 0-1 0 0,1 0 0 0 0,-1 0 1 0 0,0 0-1 0 0,0 0 0 0 0,0 0 1 0 0,0 0-1 0 0,0 0 0 0 0,-1 3 1 0 0,0-1 16 0 0,0 0 0 0 0,0-1 1 0 0,-1 1-1 0 0,0 0 0 0 0,1-1 1 0 0,-1 1-1 0 0,-1-1 1 0 0,1 0-1 0 0,0 1 0 0 0,-5 2 1 0 0,-5 7 85 0 0,-2-1 0 0 0,0-1 0 0 0,-27 17 0 0 0,39-27-107 0 0,-15 11 65 0 0,-7 3 319 0 0,0 0 0 0 0,-49 21 0 0 0,71-35-102 0 0,21 2-260 0 0,0 0 1 0 0,-1 1-1 0 0,1 0 0 0 0,26 12 0 0 0,-30-11-26 0 0,12 5-32 0 0,0 0 1 0 0,32 19-1 0 0,-48-22 18 0 0,0-1 1 0 0,-1 1-1 0 0,0 0 0 0 0,0 1 1 0 0,-1 0-1 0 0,0 1 0 0 0,15 18 1 0 0,-23-26 13 0 0,0 1-1 0 0,1 0 1 0 0,-1 0 0 0 0,0-1 0 0 0,0 1 0 0 0,0 0-1 0 0,0 0 1 0 0,0 0 0 0 0,-1 0 0 0 0,1 0 0 0 0,-1 0-1 0 0,1 0 1 0 0,-1 0 0 0 0,0 0 0 0 0,1 1 0 0 0,-1-1 0 0 0,0 0-1 0 0,0 0 1 0 0,-1 0 0 0 0,1 0 0 0 0,0 0 0 0 0,-1 0-1 0 0,1 0 1 0 0,-1 0 0 0 0,-1 4 0 0 0,-1-3 11 0 0,1 0 1 0 0,-1 0-1 0 0,0 0 1 0 0,0 0-1 0 0,0 0 1 0 0,0 0-1 0 0,-1-1 0 0 0,1 0 1 0 0,-1 1-1 0 0,1-1 1 0 0,-1-1-1 0 0,-5 3 1 0 0,-11 3 66 0 0,0-1 1 0 0,-1-1-1 0 0,0 0 1 0 0,-22 1-1 0 0,27-4 36 0 0,0 0 0 0 0,0-1 0 0 0,-1-1-1 0 0,1 0 1 0 0,-1-1 0 0 0,-25-6 0 0 0,20-7-2953 0 0,20 6 1339 0 0</inkml:trace>
 </inkml:ink>
 </file>
 
-<file path=ppt/ink/ink25.xml><?xml version="1.0" encoding="utf-8"?>
+<file path=ppt/ink/ink3.xml><?xml version="1.0" encoding="utf-8"?>
 <inkml:ink xmlns:inkml="http://www.w3.org/2003/InkML">
   <inkml:definitions>
     <inkml:context xml:id="ctx0">
@@ -882,19 +882,19 @@
           <inkml:channelProperty channel="OE" name="resolution" value="1000" units="1/deg"/>
         </inkml:channelProperties>
       </inkml:inkSource>
-      <inkml:timestamp xml:id="ts0" timeString="2026-03-19T18:36:38.382"/>
+      <inkml:timestamp xml:id="ts0" timeString="2026-09-13T12:18:18.162"/>
     </inkml:context>
     <inkml:brush xml:id="br0">
-      <inkml:brushProperty name="width" value="0.2" units="cm"/>
-      <inkml:brushProperty name="height" value="0.2" units="cm"/>
-      <inkml:brushProperty name="color" value="#FFC114"/>
+      <inkml:brushProperty name="width" value="0.1" units="cm"/>
+      <inkml:brushProperty name="height" value="0.1" units="cm"/>
+      <inkml:brushProperty name="color" value="#66CC00"/>
     </inkml:brush>
   </inkml:definitions>
-  <inkml:trace contextRef="#ctx0" brushRef="#br0">218 104 3492 0 0,'8'-30'236'0'0,"-8"26"-183"0"0,-1 1 0 0 0,0-1 1 0 0,0 0-1 0 0,0 1 1 0 0,0-1-1 0 0,0 1 0 0 0,0-1 1 0 0,-1 1-1 0 0,0-1 0 0 0,0 1 1 0 0,0 0-1 0 0,0 0 0 0 0,0 0 1 0 0,-1 0-1 0 0,1 0 1 0 0,-1 1-1 0 0,0-1 0 0 0,0 1 1 0 0,0 0-1 0 0,0-1 0 0 0,-6-2 1 0 0,8 5-49 0 0,-2-1-12 0 0,-1 0-1 0 0,1 1 1 0 0,0 0-1 0 0,-1 0 1 0 0,1 0-1 0 0,-1 0 0 0 0,1 1 1 0 0,0-1-1 0 0,-1 1 1 0 0,-2 1-1 0 0,2-2 4 0 0,-2 2-13 0 0,1 1 0 0 0,-1 0 0 0 0,1 0 0 0 0,-1 0 0 0 0,1 1 0 0 0,0 0 0 0 0,0 0-1 0 0,1 0 1 0 0,-1 0 0 0 0,-5 9 0 0 0,-34 49-175 0 0,40-54 145 0 0,0 0 0 0 0,0 1 0 0 0,1-1 0 0 0,0 1 0 0 0,-2 13-1 0 0,4-20 34 0 0,0 1 0 0 0,1 0 0 0 0,-1 0 0 0 0,1 0 0 0 0,0 0 0 0 0,0 0 0 0 0,0-1 0 0 0,0 1-1 0 0,0 0 1 0 0,0 0 0 0 0,1 0 0 0 0,0 0 0 0 0,-1 0 0 0 0,1-1 0 0 0,0 1 0 0 0,0 0-1 0 0,1-1 1 0 0,-1 1 0 0 0,1-1 0 0 0,1 4 0 0 0,-1-5 17 0 0,0 0 0 0 0,0 0 0 0 0,0 0 1 0 0,0 0-1 0 0,0-1 0 0 0,0 1 0 0 0,0 0 0 0 0,0-1 0 0 0,0 0 1 0 0,0 1-1 0 0,0-1 0 0 0,0 0 0 0 0,0 0 0 0 0,0 0 0 0 0,0 0 0 0 0,0 0 1 0 0,0-1-1 0 0,0 1 0 0 0,0-1 0 0 0,0 1 0 0 0,0-1 0 0 0,0 0 0 0 0,3-2 1 0 0,44-25 93 0 0,-30 12-40 0 0,-1-1-1 0 0,-1-1 0 0 0,26-34 0 0 0,-24 28 443 0 0,37-35-1 0 0,-55 58-538 0 0,-1 10-122 0 0,0 1 126 0 0,1-1-1 0 0,0 1 1 0 0,1-1-1 0 0,0 0 1 0 0,1 1-1 0 0,0-1 1 0 0,0 0-1 0 0,1-1 1 0 0,0 1-1 0 0,0-1 1 0 0,1 1 0 0 0,8 10-1 0 0,-8-13-94 0 0,0-1-1 0 0,1 1 1 0 0,-1-1-1 0 0,1 0 1 0 0,0-1-1 0 0,0 1 1 0 0,1-1 0 0 0,-1 0-1 0 0,1-1 1 0 0,0 0-1 0 0,0 0 1 0 0,0 0-1 0 0,0-1 1 0 0,1 0 0 0 0,-1 0-1 0 0,0-1 1 0 0,12 1-1 0 0,0-2-226 0 0</inkml:trace>
+  <inkml:trace contextRef="#ctx0" brushRef="#br0">0 142 532 0 0,'0'0'7037'0'0,"7"-2"-6986"0"0,62-20 125 0 0,31-11-279 0 0,0 5 1 0 0,138-21-1 0 0,-120 41-162 0 0,-114 8 251 0 0,1 0 0 0 0,85 6-120 0 0,-38-2 109 0 0,1 2 0 0 0,65 17 1 0 0,9 10-28 0 0,-102-27 33 0 0,-14-3 18 0 0,16 8-17 0 0,81 28 8 0 0,-39-16-24 0 0,71 37 0 0 0,-91-41 9 0 0,-32-13 30 0 0,-1 0 0 0 0,0 1 0 0 0,26 16 1 0 0,26 11-6 0 0,-42-22-23 0 0,40 25 0 0 0,-34-13 5 0 0,29 14 16 0 0,-31-21 2 0 0,-1 1 0 0 0,-1 2-1 0 0,32 29 1 0 0,-12 3 16 0 0,-35-36-7 0 0,0 0 0 0 0,1-2 0 0 0,1 1 1 0 0,23 16-1 0 0,-20-20-14 0 0,-2 1-1 0 0,0 0 1 0 0,17 18 0 0 0,-3-3 5 0 0,-17-17 101 0 0,-1 1-3074 0 0,-48-31 768 0 0</inkml:trace>
 </inkml:ink>
 </file>
 
-<file path=ppt/ink/ink26.xml><?xml version="1.0" encoding="utf-8"?>
+<file path=ppt/ink/ink4.xml><?xml version="1.0" encoding="utf-8"?>
 <inkml:ink xmlns:inkml="http://www.w3.org/2003/InkML">
   <inkml:definitions>
     <inkml:context xml:id="ctx0">
@@ -914,115 +914,19 @@
           <inkml:channelProperty channel="OE" name="resolution" value="1000" units="1/deg"/>
         </inkml:channelProperties>
       </inkml:inkSource>
-      <inkml:timestamp xml:id="ts0" timeString="2026-03-19T18:36:39.024"/>
+      <inkml:timestamp xml:id="ts0" timeString="2026-09-13T12:18:19.731"/>
     </inkml:context>
     <inkml:brush xml:id="br0">
-      <inkml:brushProperty name="width" value="0.2" units="cm"/>
-      <inkml:brushProperty name="height" value="0.2" units="cm"/>
-      <inkml:brushProperty name="color" value="#FFC114"/>
+      <inkml:brushProperty name="width" value="0.1" units="cm"/>
+      <inkml:brushProperty name="height" value="0.1" units="cm"/>
+      <inkml:brushProperty name="color" value="#66CC00"/>
     </inkml:brush>
   </inkml:definitions>
-  <inkml:trace contextRef="#ctx0" brushRef="#br0">5 18 2732 0 0,'0'0'-110'0'0,"0"-1"-173"0"0,0 1 277 0 0,0 0 0 0 0,0 0 0 0 0,0 0 1 0 0,0-1-1 0 0,0 1 0 0 0,0 0 0 0 0,0 0 0 0 0,0 0 1 0 0,0 0-1 0 0,0 0 0 0 0,0 0 0 0 0,0-1 1 0 0,0 1-1 0 0,0 0 0 0 0,0 0 0 0 0,0 0 1 0 0,0 0-1 0 0,0 0 0 0 0,0 0 0 0 0,0 0 0 0 0,0-1 1 0 0,-1 1-1 0 0,1 0 0 0 0,0 0 0 0 0,0 0 1 0 0,0 0-1 0 0,0 0 0 0 0,0 0 0 0 0,0 0 0 0 0,0 0 1 0 0,-1 0-1 0 0,1 0 0 0 0,0 0 0 0 0,0-1 1 0 0,0 1-1 0 0,0 0 0 0 0,0 0 0 0 0,0 0 0 0 0,-1 0 1 0 0,1 0-1 0 0,0 0 0 0 0,0 0 0 0 0,0 0 1 0 0,0 0-1 0 0,0 0 0 0 0,-1 0 0 0 0,1 1 0 0 0,0-1 1 0 0,0 0-1 0 0,0 0 0 0 0,0 0 0 0 0,0 0 1 0 0,-1 0-1 0 0,7-2-20 0 0,-1-1-1 0 0,1 1 1 0 0,0 1 0 0 0,-1-1-1 0 0,1 1 1 0 0,0 0 0 0 0,0 0-1 0 0,0 1 1 0 0,0 0 0 0 0,0 0-1 0 0,0 0 1 0 0,6 2 0 0 0,0 0-5 0 0,1 1 0 0 0,-1 0 0 0 0,0 1 0 0 0,0 1 0 0 0,14 7 0 0 0,6 6-1 0 0,0 2 0 0 0,-2 1 0 0 0,30 25 0 0 0,-57-43 28 0 0,5 3-6 0 0,0 0 1 0 0,-1 0-1 0 0,1 1 1 0 0,-1 0 0 0 0,-1 0-1 0 0,1 1 1 0 0,-1-1-1 0 0,-1 2 1 0 0,0-1-1 0 0,7 13 1 0 0,-12-19 15 0 0,0 0 0 0 0,0 0 1 0 0,0 0-1 0 0,0 0 0 0 0,0 0 1 0 0,0 0-1 0 0,-1 0 0 0 0,1 0 1 0 0,-1-1-1 0 0,1 1 0 0 0,-1 0 1 0 0,0 0-1 0 0,1 0 0 0 0,-1 0 1 0 0,0-1-1 0 0,0 1 0 0 0,0 0 1 0 0,-1-1-1 0 0,1 1 0 0 0,0-1 1 0 0,-1 1-1 0 0,1-1 0 0 0,-1 1 1 0 0,1-1-1 0 0,-1 0 1 0 0,1 0-1 0 0,-1 0 0 0 0,-3 1 1 0 0,-54 24 385 0 0,53-23-273 0 0,1-2 66 0 0,1 1 0 0 0,-1-1-1 0 0,1 0 1 0 0,-1 0 0 0 0,0 0-1 0 0,1-1 1 0 0,-1 0 0 0 0,0 0 0 0 0,1 0-1 0 0,-1 0 1 0 0,0-1 0 0 0,-7-1-1 0 0,11 1-167 0 0,0 1 0 0 0,-1-1 0 0 0,1 0-1 0 0,0 0 1 0 0,-1 1 0 0 0,1-1 0 0 0,0 0-1 0 0,0 0 1 0 0,0 0 0 0 0,0 0 0 0 0,0-1-1 0 0,0 1 1 0 0,0 0 0 0 0,0 0 0 0 0,0-1-1 0 0,0 1 1 0 0,1 0 0 0 0,-1-1 0 0 0,1 1-1 0 0,-1-1 1 0 0,1 1 0 0 0,-1 0-1 0 0,1-1 1 0 0,0 1 0 0 0,0-1 0 0 0,0 0-1 0 0,-1 1 1 0 0,2-1 0 0 0,-1 1 0 0 0,0-1-1 0 0,0 1 1 0 0,0-1 0 0 0,1 1 0 0 0,-1-1-1 0 0,1 1 1 0 0,-1 0 0 0 0,1-1 0 0 0,-1 1-1 0 0,1-1 1 0 0,1-1 0 0 0,3-8-111 0 0,1 0 0 0 0,0 0 0 0 0,1 1 1 0 0,0-1-1 0 0,0 2 0 0 0,1-1 0 0 0,16-14 1 0 0,-1 3-447 0 0,48-32 1 0 0,-47 42-1209 0 0</inkml:trace>
+  <inkml:trace contextRef="#ctx0" brushRef="#br0">356 7 120 0 0,'-1'-7'6821'0'0,"11"28"-6849"0"0,-7-16-4 0 0,9 46-83 0 0,-1 30 46 0 0,-1-19 48 0 0,14 59 127 0 0,-16-76-43 0 0,-8-44-45 0 0,0 0 173 0 0,2 11-637 0 0,-1-12 499 0 0,-1 0 1 0 0,0 1-1 0 0,0-1 0 0 0,0 0 0 0 0,0 0 0 0 0,0 0 1 0 0,0 1-1 0 0,0-1 0 0 0,0 0 0 0 0,0 0 0 0 0,0 0 1 0 0,0 1-1 0 0,0-1 0 0 0,0 0 0 0 0,0 0 0 0 0,0 0 1 0 0,0 1-1 0 0,0-1 0 0 0,0 0 0 0 0,0 0 0 0 0,0 0 1 0 0,0 1-1 0 0,0-1 0 0 0,-1 0 0 0 0,1 0 0 0 0,0 0 1 0 0,0 0-1 0 0,0 1 0 0 0,0-1 0 0 0,0 0 0 0 0,0 0 1 0 0,-1 0-1 0 0,1 0 0 0 0,0 0 0 0 0,0 1 0 0 0,0-1 0 0 0,0 0 1 0 0,-1 0-1 0 0,1 0 0 0 0,0 0 0 0 0,0 0 0 0 0,0 0 1 0 0,-1 0-1 0 0,1 0 0 0 0,0 0 0 0 0,0 0 0 0 0,0 0 1 0 0,-1 0-1 0 0,1 0 0 0 0,0 0 0 0 0,0 0 0 0 0,0 0 1 0 0,-1 0-1 0 0,-32-13 181 0 0,-1 1 0 0 0,-58-11 0 0 0,-121-5-67 0 0,210 27-163 0 0,1 0 3 0 0,0 1 1 0 0,-1-1 0 0 0,1 0-1 0 0,0 0 1 0 0,0 1 0 0 0,-1-1-1 0 0,1 1 1 0 0,0 0 0 0 0,-1 0-1 0 0,1 0 1 0 0,-4 0 0 0 0,-9-1-942 0 0,7-2 543 0 0</inkml:trace>
 </inkml:ink>
 </file>
 
-<file path=ppt/ink/ink27.xml><?xml version="1.0" encoding="utf-8"?>
-<inkml:ink xmlns:inkml="http://www.w3.org/2003/InkML">
-  <inkml:definitions>
-    <inkml:context xml:id="ctx0">
-      <inkml:inkSource xml:id="inkSrc0">
-        <inkml:traceFormat>
-          <inkml:channel name="X" type="integer" min="-2.14748E9" max="2.14748E9" units="cm"/>
-          <inkml:channel name="Y" type="integer" min="-2.14748E9" max="2.14748E9" units="cm"/>
-          <inkml:channel name="F" type="integer" max="32767" units="dev"/>
-          <inkml:channel name="OA" type="integer" max="360" units="deg"/>
-          <inkml:channel name="OE" type="integer" max="90" units="deg"/>
-        </inkml:traceFormat>
-        <inkml:channelProperties>
-          <inkml:channelProperty channel="X" name="resolution" value="1000" units="1/cm"/>
-          <inkml:channelProperty channel="Y" name="resolution" value="1000" units="1/cm"/>
-          <inkml:channelProperty channel="F" name="resolution" value="0" units="1/dev"/>
-          <inkml:channelProperty channel="OA" name="resolution" value="1000" units="1/deg"/>
-          <inkml:channelProperty channel="OE" name="resolution" value="1000" units="1/deg"/>
-        </inkml:channelProperties>
-      </inkml:inkSource>
-      <inkml:timestamp xml:id="ts0" timeString="2026-03-19T18:36:39.793"/>
-    </inkml:context>
-    <inkml:brush xml:id="br0">
-      <inkml:brushProperty name="width" value="0.2" units="cm"/>
-      <inkml:brushProperty name="height" value="0.2" units="cm"/>
-      <inkml:brushProperty name="color" value="#FFC114"/>
-    </inkml:brush>
-  </inkml:definitions>
-  <inkml:trace contextRef="#ctx0" brushRef="#br0">211 46 1924 0 0,'0'0'-38'0'0,"-26"-5"301"0"0,8 0 1898 0 0,18 5-2081 0 0,0 0-77 0 0,0 0 0 0 0,-1 0 0 0 0,1 0 0 0 0,0 0 0 0 0,0 0-1 0 0,0-1 1 0 0,0 1 0 0 0,-1 0 0 0 0,1 0 0 0 0,0 0 0 0 0,0 0 0 0 0,0 0 0 0 0,0-1 0 0 0,0 1 0 0 0,-1 0-1 0 0,1 0 1 0 0,0 0 0 0 0,0 0 0 0 0,0-1 0 0 0,0 1 0 0 0,0 0 0 0 0,0 0 0 0 0,0 0 0 0 0,0-1-1 0 0,0 1 1 0 0,0 0 0 0 0,0 0 0 0 0,0 0 0 0 0,0-1 0 0 0,0 1 0 0 0,0 0 0 0 0,0 0 0 0 0,0 0 0 0 0,0-1-1 0 0,0 1 1 0 0,0 0 0 0 0,0 0 0 0 0,0 0 0 0 0,0 0 0 0 0,0-1 0 0 0,0 1 0 0 0,1 0 0 0 0,-1 0-1 0 0,0 0 1 0 0,0 0 0 0 0,0-1 0 0 0,0 1 0 0 0,0 0 0 0 0,1 0 0 0 0,-1 0 0 0 0,0 0 0 0 0,0 0 0 0 0,0-1-1 0 0,20-5-2 0 0,-1 0 1 0 0,1 1-1 0 0,24-2 0 0 0,-39 6-26 0 0,1 0-1 0 0,0 0 1 0 0,0 1 0 0 0,0 0 0 0 0,0 0 0 0 0,-1 1 0 0 0,1 0 0 0 0,0 0-1 0 0,0 0 1 0 0,0 0 0 0 0,-1 1 0 0 0,1 0 0 0 0,-1 0 0 0 0,0 1 0 0 0,1-1 0 0 0,7 7-1 0 0,-12-7 18 0 0,1 0 0 0 0,0 0-1 0 0,-1 0 1 0 0,0 1 0 0 0,1-1-1 0 0,-1 1 1 0 0,0-1-1 0 0,0 1 1 0 0,-1-1 0 0 0,1 1-1 0 0,0 0 1 0 0,-1-1 0 0 0,0 1-1 0 0,0 0 1 0 0,1 0 0 0 0,-1-1-1 0 0,-1 1 1 0 0,1 0 0 0 0,0 0-1 0 0,-1-1 1 0 0,1 1-1 0 0,-1-1 1 0 0,-2 5 0 0 0,-2 10-15 0 0,-2 0 0 0 0,-12 24 1 0 0,8-19-28 0 0,9-17 31 0 0,-1 0 0 0 0,1 1 1 0 0,0-1-1 0 0,0 1 0 0 0,1-1 0 0 0,0 1 1 0 0,0 0-1 0 0,0 0 0 0 0,0-1 1 0 0,1 1-1 0 0,0 0 0 0 0,1 0 0 0 0,-1 0 1 0 0,2 6-1 0 0,1-5 0 0 0,-1-1 0 0 0,1 1-1 0 0,1-1 1 0 0,-1 0 0 0 0,1 0 0 0 0,1 0 0 0 0,-1 0-1 0 0,1-1 1 0 0,-1 0 0 0 0,2 0 0 0 0,5 5 0 0 0,-3-2-6 0 0,11 8-72 0 0,0 1-1 0 0,-2 1 1 0 0,0 0 0 0 0,19 28-1 0 0,-36-44 101 0 0,1-1 1 0 0,-1 1-1 0 0,0 0 0 0 0,1-1 0 0 0,-1 1 0 0 0,0-1 1 0 0,0 1-1 0 0,0 0 0 0 0,0-1 0 0 0,0 1 0 0 0,0-1 1 0 0,-1 1-1 0 0,1 0 0 0 0,0-1 0 0 0,-1 1 0 0 0,1-1 1 0 0,-1 1-1 0 0,0-1 0 0 0,0 1 0 0 0,1-1 0 0 0,-1 0 1 0 0,0 1-1 0 0,0-1 0 0 0,0 0 0 0 0,0 0 1 0 0,0 1-1 0 0,-1-1 0 0 0,1 0 0 0 0,0 0 0 0 0,0 0 1 0 0,-3 0-1 0 0,-48 35 91 0 0,44-32-89 0 0,-38 23 52 0 0,-1-3 0 0 0,-1-2 0 0 0,-1-1 0 0 0,-92 23 0 0 0,136-42-129 0 0,0-1-83 0 0,0 0-1 0 0,0 0 1 0 0,0 0 0 0 0,0 0-1 0 0,0-1 1 0 0,0 0-1 0 0,0 0 1 0 0,0 0 0 0 0,0 0-1 0 0,-7-3 1 0 0,-9-3-331 0 0</inkml:trace>
-</inkml:ink>
-</file>
-
-<file path=ppt/ink/ink28.xml><?xml version="1.0" encoding="utf-8"?>
-<inkml:ink xmlns:inkml="http://www.w3.org/2003/InkML">
-  <inkml:definitions>
-    <inkml:context xml:id="ctx0">
-      <inkml:inkSource xml:id="inkSrc0">
-        <inkml:traceFormat>
-          <inkml:channel name="X" type="integer" min="-2.14748E9" max="2.14748E9" units="cm"/>
-          <inkml:channel name="Y" type="integer" min="-2.14748E9" max="2.14748E9" units="cm"/>
-          <inkml:channel name="F" type="integer" max="32767" units="dev"/>
-          <inkml:channel name="OA" type="integer" max="360" units="deg"/>
-          <inkml:channel name="OE" type="integer" max="90" units="deg"/>
-        </inkml:traceFormat>
-        <inkml:channelProperties>
-          <inkml:channelProperty channel="X" name="resolution" value="1000" units="1/cm"/>
-          <inkml:channelProperty channel="Y" name="resolution" value="1000" units="1/cm"/>
-          <inkml:channelProperty channel="F" name="resolution" value="0" units="1/dev"/>
-          <inkml:channelProperty channel="OA" name="resolution" value="1000" units="1/deg"/>
-          <inkml:channelProperty channel="OE" name="resolution" value="1000" units="1/deg"/>
-        </inkml:channelProperties>
-      </inkml:inkSource>
-      <inkml:timestamp xml:id="ts0" timeString="2026-03-19T18:41:11.109"/>
-    </inkml:context>
-    <inkml:brush xml:id="br0">
-      <inkml:brushProperty name="width" value="0.2" units="cm"/>
-      <inkml:brushProperty name="height" value="0.2" units="cm"/>
-      <inkml:brushProperty name="color" value="#FFC114"/>
-    </inkml:brush>
-  </inkml:definitions>
-  <inkml:trace contextRef="#ctx0" brushRef="#br0">174 1 5461 0 0,'0'0'-290'0'0,"-23"0"429"0"0,265 2 168 0 0,-179 0-349 0 0,-60-1 30 0 0,1-1-18 0 0,10 0 14 0 0,-10 0 5 0 0,-1 0-6 0 0,8 0 12 0 0,-9 0 1 0 0,38 6-304 0 0,-39-5 264 0 0,5 32-98 0 0,-11 3 117 0 0,-44 391-123 0 0,45-345 148 0 0,3 0 1 0 0,4-1 0 0 0,17 106-1 0 0,29 53 36 0 0,4 29 111 0 0,-46-229-122 0 0,-3-20 96 0 0,0 0 0 0 0,0 29 437 0 0,-5-48-509 0 0,1 0-1 0 0,-1 1 0 0 0,0-1 0 0 0,1 0 1 0 0,-1 0-1 0 0,0 1 0 0 0,0-1 1 0 0,0 0-1 0 0,0 0 0 0 0,0 0 1 0 0,0 0-1 0 0,0 0 0 0 0,0 0 1 0 0,-1-1-1 0 0,1 1 0 0 0,0 0 1 0 0,0 0-1 0 0,-1-1 0 0 0,1 1 1 0 0,-1-1-1 0 0,1 1 0 0 0,0-1 1 0 0,-4 1-1 0 0,-41 3 264 0 0,24-3-161 0 0,-380 35 605 0 0,309-31-851 0 0,57-11-3985 0 0</inkml:trace>
-</inkml:ink>
-</file>
-
-<file path=ppt/ink/ink29.xml><?xml version="1.0" encoding="utf-8"?>
-<inkml:ink xmlns:inkml="http://www.w3.org/2003/InkML">
-  <inkml:definitions>
-    <inkml:context xml:id="ctx0">
-      <inkml:inkSource xml:id="inkSrc0">
-        <inkml:traceFormat>
-          <inkml:channel name="X" type="integer" min="-2.14748E9" max="2.14748E9" units="cm"/>
-          <inkml:channel name="Y" type="integer" min="-2.14748E9" max="2.14748E9" units="cm"/>
-          <inkml:channel name="F" type="integer" max="32767" units="dev"/>
-          <inkml:channel name="OA" type="integer" max="360" units="deg"/>
-          <inkml:channel name="OE" type="integer" max="90" units="deg"/>
-        </inkml:traceFormat>
-        <inkml:channelProperties>
-          <inkml:channelProperty channel="X" name="resolution" value="1000" units="1/cm"/>
-          <inkml:channelProperty channel="Y" name="resolution" value="1000" units="1/cm"/>
-          <inkml:channelProperty channel="F" name="resolution" value="0" units="1/dev"/>
-          <inkml:channelProperty channel="OA" name="resolution" value="1000" units="1/deg"/>
-          <inkml:channelProperty channel="OE" name="resolution" value="1000" units="1/deg"/>
-        </inkml:channelProperties>
-      </inkml:inkSource>
-      <inkml:timestamp xml:id="ts0" timeString="2026-03-19T18:41:13.712"/>
-    </inkml:context>
-    <inkml:brush xml:id="br0">
-      <inkml:brushProperty name="width" value="0.2" units="cm"/>
-      <inkml:brushProperty name="height" value="0.2" units="cm"/>
-      <inkml:brushProperty name="color" value="#FFC114"/>
-    </inkml:brush>
-  </inkml:definitions>
-  <inkml:trace contextRef="#ctx0" brushRef="#br0">3 30 5240 0 0,'0'0'-166'0'0,"-2"-19"226"0"0,1 9 215 0 0,105 457-1020 0 0,-22-161 837 0 0,-73-237 3693 0 0,-12-54-3568 0 0,0-5-183 0 0,-1 0 0 0 0,2 0 0 0 0,-1 0-1 0 0,1 0 1 0 0,1-1 0 0 0,0 1 0 0 0,0-1 0 0 0,1 1-1 0 0,0-1 1 0 0,1 1 0 0 0,0-1 0 0 0,1 1 0 0 0,0 0 0 0 0,1 0-1 0 0,0-1 1 0 0,5-10 0 0 0,-5 12-101 0 0,1 0 1 0 0,1 0-1 0 0,-1 0 1 0 0,1 1-1 0 0,1 0 1 0 0,0 0 0 0 0,0 0-1 0 0,0 0 1 0 0,1 1-1 0 0,0 0 1 0 0,1 1-1 0 0,0 0 1 0 0,0 0-1 0 0,0 0 1 0 0,0 1-1 0 0,1 0 1 0 0,17-6-1 0 0,-18 8 14 0 0,1 0-1 0 0,1 1 1 0 0,-1 0 0 0 0,0 0-1 0 0,0 1 1 0 0,1 0 0 0 0,-1 1-1 0 0,1 0 1 0 0,-1 1-1 0 0,0 0 1 0 0,1 0 0 0 0,-1 1-1 0 0,0 0 1 0 0,0 0 0 0 0,0 1-1 0 0,0 1 1 0 0,0-1 0 0 0,-1 1-1 0 0,0 1 1 0 0,1 0 0 0 0,-2 0-1 0 0,1 0 1 0 0,-1 1-1 0 0,1 0 1 0 0,-1 1 0 0 0,-1-1-1 0 0,0 1 1 0 0,0 1 0 0 0,5 7-1 0 0,5 12-17 0 0,-1 0 1 0 0,-1 1-1 0 0,-2 1 0 0 0,13 40 0 0 0,-7-16 8 0 0,-12-35 106 0 0,1 5-160 0 0</inkml:trace>
-</inkml:ink>
-</file>
-
-<file path=ppt/ink/ink3.xml><?xml version="1.0" encoding="utf-8"?>
+<file path=ppt/ink/ink5.xml><?xml version="1.0" encoding="utf-8"?>
 <inkml:ink xmlns:inkml="http://www.w3.org/2003/InkML">
   <inkml:definitions>
     <inkml:context xml:id="ctx0">
@@ -1054,455 +958,7 @@
 </inkml:ink>
 </file>
 
-<file path=ppt/ink/ink30.xml><?xml version="1.0" encoding="utf-8"?>
-<inkml:ink xmlns:inkml="http://www.w3.org/2003/InkML">
-  <inkml:definitions>
-    <inkml:context xml:id="ctx0">
-      <inkml:inkSource xml:id="inkSrc0">
-        <inkml:traceFormat>
-          <inkml:channel name="X" type="integer" min="-2.14748E9" max="2.14748E9" units="cm"/>
-          <inkml:channel name="Y" type="integer" min="-2.14748E9" max="2.14748E9" units="cm"/>
-          <inkml:channel name="F" type="integer" max="32767" units="dev"/>
-          <inkml:channel name="OA" type="integer" max="360" units="deg"/>
-          <inkml:channel name="OE" type="integer" max="90" units="deg"/>
-        </inkml:traceFormat>
-        <inkml:channelProperties>
-          <inkml:channelProperty channel="X" name="resolution" value="1000" units="1/cm"/>
-          <inkml:channelProperty channel="Y" name="resolution" value="1000" units="1/cm"/>
-          <inkml:channelProperty channel="F" name="resolution" value="0" units="1/dev"/>
-          <inkml:channelProperty channel="OA" name="resolution" value="1000" units="1/deg"/>
-          <inkml:channelProperty channel="OE" name="resolution" value="1000" units="1/deg"/>
-        </inkml:channelProperties>
-      </inkml:inkSource>
-      <inkml:timestamp xml:id="ts0" timeString="2026-03-19T18:41:14.294"/>
-    </inkml:context>
-    <inkml:brush xml:id="br0">
-      <inkml:brushProperty name="width" value="0.2" units="cm"/>
-      <inkml:brushProperty name="height" value="0.2" units="cm"/>
-      <inkml:brushProperty name="color" value="#FFC114"/>
-    </inkml:brush>
-  </inkml:definitions>
-  <inkml:trace contextRef="#ctx0" brushRef="#br0">57 252 3800 0 0,'0'0'-186'0'0,"15"4"-342"0"0,9-9 567 0 0,1-1 1 0 0,-1-2 0 0 0,-1 0 0 0 0,29-14 0 0 0,-43 17 46 0 0,-1 0-1 0 0,0 0 1 0 0,0 0 0 0 0,-1-1 0 0 0,0 0-1 0 0,11-12 1 0 0,-15 15-17 0 0,0-1-1 0 0,-1 1 0 0 0,1-1 1 0 0,-1 0-1 0 0,0 0 1 0 0,0 0-1 0 0,0-1 0 0 0,0 1 1 0 0,-1 0-1 0 0,0-1 1 0 0,0 1-1 0 0,0-1 0 0 0,0 1 1 0 0,0-8-1 0 0,-2 8-36 0 0,1 1 0 0 0,0-1-1 0 0,-1 1 1 0 0,0-1 0 0 0,0 1 0 0 0,0-1-1 0 0,0 1 1 0 0,-1-1 0 0 0,1 1 0 0 0,-1 0-1 0 0,0 0 1 0 0,0 0 0 0 0,0 0 0 0 0,0 0-1 0 0,-1 0 1 0 0,1 1 0 0 0,-1-1 0 0 0,0 1-1 0 0,0-1 1 0 0,1 1 0 0 0,-1 0 0 0 0,-1 0-1 0 0,1 1 1 0 0,0-1 0 0 0,0 0 0 0 0,-6-1-1 0 0,3 1-27 0 0,0 0 1 0 0,-1 0-1 0 0,0 1 0 0 0,1-1 0 0 0,-1 1 0 0 0,0 1 0 0 0,1 0 1 0 0,-1-1-1 0 0,0 2 0 0 0,0-1 0 0 0,1 1 0 0 0,-1 0 0 0 0,-10 3 1 0 0,7 1-21 0 0,1 0 1 0 0,-1 0 0 0 0,1 1-1 0 0,0 0 1 0 0,1 0 0 0 0,0 1 0 0 0,0 0-1 0 0,0 1 1 0 0,1 0 0 0 0,0 0-1 0 0,0 0 1 0 0,1 1 0 0 0,-8 14 0 0 0,10-16-4 0 0,0 0 0 0 0,1 0 0 0 0,-1 0 1 0 0,1 1-1 0 0,1-1 0 0 0,0 1 0 0 0,0 0 0 0 0,0-1 1 0 0,1 1-1 0 0,0 0 0 0 0,0 0 0 0 0,1 0 1 0 0,0 0-1 0 0,1 0 0 0 0,0 0 0 0 0,0 0 0 0 0,0 0 1 0 0,1-1-1 0 0,3 9 0 0 0,-2-10 22 0 0,1-1-1 0 0,0 1 1 0 0,1-1-1 0 0,-1 0 1 0 0,1 0-1 0 0,0 0 1 0 0,0-1-1 0 0,0 0 1 0 0,1 0-1 0 0,-1 0 1 0 0,1-1 0 0 0,0 1-1 0 0,0-1 1 0 0,0-1-1 0 0,1 1 1 0 0,-1-1-1 0 0,1 0 1 0 0,10 1-1 0 0,14 3 23 0 0,-1-1-1 0 0,52 0 0 0 0,-53-4-380 0 0,1-2 0 0 0,0-1 0 0 0,-1-1 0 0 0,0-2 0 0 0,1-1 0 0 0,44-15 0 0 0,-46 12-654 0 0</inkml:trace>
-</inkml:ink>
-</file>
-
-<file path=ppt/ink/ink31.xml><?xml version="1.0" encoding="utf-8"?>
-<inkml:ink xmlns:inkml="http://www.w3.org/2003/InkML">
-  <inkml:definitions>
-    <inkml:context xml:id="ctx0">
-      <inkml:inkSource xml:id="inkSrc0">
-        <inkml:traceFormat>
-          <inkml:channel name="X" type="integer" min="-2.14748E9" max="2.14748E9" units="cm"/>
-          <inkml:channel name="Y" type="integer" min="-2.14748E9" max="2.14748E9" units="cm"/>
-          <inkml:channel name="F" type="integer" max="32767" units="dev"/>
-          <inkml:channel name="OA" type="integer" max="360" units="deg"/>
-          <inkml:channel name="OE" type="integer" max="90" units="deg"/>
-        </inkml:traceFormat>
-        <inkml:channelProperties>
-          <inkml:channelProperty channel="X" name="resolution" value="1000" units="1/cm"/>
-          <inkml:channelProperty channel="Y" name="resolution" value="1000" units="1/cm"/>
-          <inkml:channelProperty channel="F" name="resolution" value="0" units="1/dev"/>
-          <inkml:channelProperty channel="OA" name="resolution" value="1000" units="1/deg"/>
-          <inkml:channelProperty channel="OE" name="resolution" value="1000" units="1/deg"/>
-        </inkml:channelProperties>
-      </inkml:inkSource>
-      <inkml:timestamp xml:id="ts0" timeString="2026-03-19T18:41:15.024"/>
-    </inkml:context>
-    <inkml:brush xml:id="br0">
-      <inkml:brushProperty name="width" value="0.2" units="cm"/>
-      <inkml:brushProperty name="height" value="0.2" units="cm"/>
-      <inkml:brushProperty name="color" value="#FFC114"/>
-    </inkml:brush>
-  </inkml:definitions>
-  <inkml:trace contextRef="#ctx0" brushRef="#br0">346 97 3712 0 0,'0'0'-95'0'0,"10"-30"971"0"0,-12 27-842 0 0,1 0 0 0 0,-1 0 0 0 0,0 0 0 0 0,0 1 0 0 0,-1-1 0 0 0,1 0-1 0 0,-1 1 1 0 0,1 0 0 0 0,-1 0 0 0 0,0 0 0 0 0,1 0 0 0 0,-1 0 0 0 0,0 0 0 0 0,-1 1 0 0 0,1-1 0 0 0,0 1 0 0 0,0 0-1 0 0,0 0 1 0 0,-1 0 0 0 0,1 0 0 0 0,-1 1 0 0 0,1-1 0 0 0,-1 1 0 0 0,1 0 0 0 0,0 0 0 0 0,-1 0 0 0 0,1 1 0 0 0,-4 0-1 0 0,-9 0-27 0 0,1 2 0 0 0,-1 0-1 0 0,1 0 1 0 0,0 1 0 0 0,-17 8 0 0 0,17-6-29 0 0,0 1 1 0 0,1 1 0 0 0,-1 0 0 0 0,-21 18 0 0 0,30-21 3 0 0,0 0-1 0 0,0 0 1 0 0,1 0-1 0 0,0 1 1 0 0,0 0-1 0 0,1 0 0 0 0,-1 1 1 0 0,1-1-1 0 0,1 1 1 0 0,-1 0-1 0 0,1 0 0 0 0,-2 8 1 0 0,4-13 17 0 0,0 0 1 0 0,1 0 0 0 0,-1 0-1 0 0,1 0 1 0 0,-1 0 0 0 0,1 0-1 0 0,0 0 1 0 0,0 0 0 0 0,0 0 0 0 0,0 0-1 0 0,1 1 1 0 0,-1-1 0 0 0,0 0-1 0 0,1 0 1 0 0,-1 0 0 0 0,1 0-1 0 0,0 0 1 0 0,0 0 0 0 0,0-1-1 0 0,0 1 1 0 0,0 0 0 0 0,2 3-1 0 0,0-3 6 0 0,-1 0-1 0 0,1 0 1 0 0,-1-1 0 0 0,1 1-1 0 0,0-1 1 0 0,0 1 0 0 0,0-1-1 0 0,-1 0 1 0 0,1 0 0 0 0,0 0-1 0 0,1-1 1 0 0,-1 1 0 0 0,5 0-1 0 0,2-1 17 0 0,0 0-1 0 0,0 0 1 0 0,-1-1 0 0 0,1 0-1 0 0,0 0 1 0 0,-1-1-1 0 0,1-1 1 0 0,15-6-1 0 0,-16 5-4 0 0,-1-1 0 0 0,0-1 0 0 0,0 1 0 0 0,-1-1 0 0 0,1-1 0 0 0,-1 0 0 0 0,-1 1 0 0 0,10-14 0 0 0,41-70 242 0 0,-10 16 1033 0 0,-36 61-1122 0 0,-12 22-276 0 0,-3 19 51 0 0,4-23 49 0 0,1 0 1 0 0,-1 0 0 0 0,1 1 0 0 0,0-1 0 0 0,1 0-1 0 0,-1 0 1 0 0,1 0 0 0 0,0 0 0 0 0,0-1-1 0 0,1 1 1 0 0,0-1 0 0 0,-1 1 0 0 0,1-1 0 0 0,1 0-1 0 0,-1 0 1 0 0,1 0 0 0 0,-1 0 0 0 0,1-1-1 0 0,0 1 1 0 0,5 2 0 0 0,-3-2-249 0 0,1 1 0 0 0,-1-2-1 0 0,1 1 1 0 0,0-1 0 0 0,0 0 0 0 0,1-1 0 0 0,-1 1-1 0 0,0-2 1 0 0,1 1 0 0 0,-1-1 0 0 0,1 0 0 0 0,0 0-1 0 0,9-1 1 0 0,3-2-1176 0 0</inkml:trace>
-</inkml:ink>
-</file>
-
-<file path=ppt/ink/ink32.xml><?xml version="1.0" encoding="utf-8"?>
-<inkml:ink xmlns:inkml="http://www.w3.org/2003/InkML">
-  <inkml:definitions>
-    <inkml:context xml:id="ctx0">
-      <inkml:inkSource xml:id="inkSrc0">
-        <inkml:traceFormat>
-          <inkml:channel name="X" type="integer" min="-2.14748E9" max="2.14748E9" units="cm"/>
-          <inkml:channel name="Y" type="integer" min="-2.14748E9" max="2.14748E9" units="cm"/>
-          <inkml:channel name="F" type="integer" max="32767" units="dev"/>
-          <inkml:channel name="OA" type="integer" max="360" units="deg"/>
-          <inkml:channel name="OE" type="integer" max="90" units="deg"/>
-        </inkml:traceFormat>
-        <inkml:channelProperties>
-          <inkml:channelProperty channel="X" name="resolution" value="1000" units="1/cm"/>
-          <inkml:channelProperty channel="Y" name="resolution" value="1000" units="1/cm"/>
-          <inkml:channelProperty channel="F" name="resolution" value="0" units="1/dev"/>
-          <inkml:channelProperty channel="OA" name="resolution" value="1000" units="1/deg"/>
-          <inkml:channelProperty channel="OE" name="resolution" value="1000" units="1/deg"/>
-        </inkml:channelProperties>
-      </inkml:inkSource>
-      <inkml:timestamp xml:id="ts0" timeString="2026-03-19T18:41:15.777"/>
-    </inkml:context>
-    <inkml:brush xml:id="br0">
-      <inkml:brushProperty name="width" value="0.2" units="cm"/>
-      <inkml:brushProperty name="height" value="0.2" units="cm"/>
-      <inkml:brushProperty name="color" value="#FFC114"/>
-    </inkml:brush>
-  </inkml:definitions>
-  <inkml:trace contextRef="#ctx0" brushRef="#br0">344 509 4504 0 0,'0'0'-78'0'0,"-4"2"-90"0"0,1 2 155 0 0,-3 1-2 0 0,-29-3-5 0 0,19-2 8 0 0,0 0 0 0 0,1 2 0 0 0,-1 0 0 0 0,0 1 0 0 0,1 0 0 0 0,0 1 0 0 0,0 1 0 0 0,0 0 0 0 0,0 2 0 0 0,1-1 0 0 0,0 2 0 0 0,0-1 0 0 0,1 2 0 0 0,0 0 0 0 0,1 1 0 0 0,0 0 0 0 0,-20 21 0 0 0,30-29 6 0 0,0 1 0 0 0,1-1 1 0 0,-1 1-1 0 0,0 0 0 0 0,1-1 1 0 0,0 1-1 0 0,-1 0 0 0 0,1 0 1 0 0,0 0-1 0 0,1 0 0 0 0,-1 0 1 0 0,0 0-1 0 0,1 0 0 0 0,0 0 1 0 0,-1 0-1 0 0,1 0 0 0 0,1 0 1 0 0,-1 0-1 0 0,0 1 0 0 0,1-1 1 0 0,-1 0-1 0 0,1 0 1 0 0,0 0-1 0 0,0 0 0 0 0,0-1 1 0 0,1 1-1 0 0,-1 0 0 0 0,1 0 1 0 0,-1-1-1 0 0,1 1 0 0 0,0-1 1 0 0,0 1-1 0 0,0-1 0 0 0,0 0 1 0 0,0 0-1 0 0,1 0 0 0 0,-1 0 1 0 0,5 3-1 0 0,5 3 17 0 0,-1 0 1 0 0,2-1-1 0 0,-1 0 0 0 0,1-1 1 0 0,0 0-1 0 0,0-1 0 0 0,16 4 1 0 0,-21-7 38 0 0,-1 0 1 0 0,0 0-1 0 0,1-1 0 0 0,-1 0 1 0 0,1-1-1 0 0,-1 1 1 0 0,1-1-1 0 0,-1-1 1 0 0,1 0-1 0 0,-1 0 0 0 0,1 0 1 0 0,-1-1-1 0 0,1 0 1 0 0,-1 0-1 0 0,0-1 1 0 0,0 0-1 0 0,11-6 0 0 0,-9 2 7 0 0,0-1 0 0 0,-1 0-1 0 0,1 0 1 0 0,-2 0-1 0 0,1-1 1 0 0,-1 0 0 0 0,-1-1-1 0 0,1 1 1 0 0,-2-1-1 0 0,9-19 1 0 0,-1-7-3 0 0,-1 0 0 0 0,-2 0 1 0 0,-1-1-1 0 0,-3 0 0 0 0,0-1 0 0 0,-3 0 1 0 0,-1-64-1 0 0,-21-171 1677 0 0,10 231-1405 0 0,9 41-348 0 0,0 1-51 0 0,-1 0 53 0 0,0 1 0 0 0,1-1-1 0 0,-1 1 1 0 0,1-1-1 0 0,-1 1 1 0 0,1-1-1 0 0,-1 1 1 0 0,1 0 0 0 0,-1-1-1 0 0,1 1 1 0 0,-1 0-1 0 0,1-1 1 0 0,0 1 0 0 0,-1 0-1 0 0,1-1 1 0 0,0 1-1 0 0,0 0 1 0 0,-1 0 0 0 0,1-1-1 0 0,0 1 1 0 0,0 0-1 0 0,0 0 1 0 0,0-1 0 0 0,0 1-1 0 0,0 1 1 0 0,0 43-174 0 0,9 44 93 0 0,-1-39 70 0 0,3-1-1 0 0,1-1 1 0 0,3 0 0 0 0,34 76-1 0 0,-14-52-290 0 0,4-1 0 0 0,53 75 1 0 0,-76-131-2028 0 0,-7-10 711 0 0</inkml:trace>
-</inkml:ink>
-</file>
-
-<file path=ppt/ink/ink33.xml><?xml version="1.0" encoding="utf-8"?>
-<inkml:ink xmlns:inkml="http://www.w3.org/2003/InkML">
-  <inkml:definitions>
-    <inkml:context xml:id="ctx0">
-      <inkml:inkSource xml:id="inkSrc0">
-        <inkml:traceFormat>
-          <inkml:channel name="X" type="integer" min="-2.14748E9" max="2.14748E9" units="cm"/>
-          <inkml:channel name="Y" type="integer" min="-2.14748E9" max="2.14748E9" units="cm"/>
-          <inkml:channel name="F" type="integer" max="32767" units="dev"/>
-          <inkml:channel name="OA" type="integer" max="360" units="deg"/>
-          <inkml:channel name="OE" type="integer" max="90" units="deg"/>
-        </inkml:traceFormat>
-        <inkml:channelProperties>
-          <inkml:channelProperty channel="X" name="resolution" value="1000" units="1/cm"/>
-          <inkml:channelProperty channel="Y" name="resolution" value="1000" units="1/cm"/>
-          <inkml:channelProperty channel="F" name="resolution" value="0" units="1/dev"/>
-          <inkml:channelProperty channel="OA" name="resolution" value="1000" units="1/deg"/>
-          <inkml:channelProperty channel="OE" name="resolution" value="1000" units="1/deg"/>
-        </inkml:channelProperties>
-      </inkml:inkSource>
-      <inkml:timestamp xml:id="ts0" timeString="2026-03-19T18:41:16.043"/>
-    </inkml:context>
-    <inkml:brush xml:id="br0">
-      <inkml:brushProperty name="width" value="0.2" units="cm"/>
-      <inkml:brushProperty name="height" value="0.2" units="cm"/>
-      <inkml:brushProperty name="color" value="#FFC114"/>
-    </inkml:brush>
-  </inkml:definitions>
-  <inkml:trace contextRef="#ctx0" brushRef="#br0">0 32 5493 0 0,'9'-28'542'0'0,"-9"27"-539"0"0,0 1 0 0 0,0 0 0 0 0,0 0 0 0 0,0 0 0 0 0,0 0 1 0 0,0 0-1 0 0,0 0 0 0 0,0-1 0 0 0,0 1 0 0 0,1 0 0 0 0,-1 0 0 0 0,0 0 0 0 0,0 0 0 0 0,0 0 0 0 0,0 0 0 0 0,0 0 0 0 0,0-1 1 0 0,0 1-1 0 0,0 0 0 0 0,0 0 0 0 0,1 0 0 0 0,-1 0 0 0 0,0 0 0 0 0,0 0 0 0 0,0 0 0 0 0,0 0 0 0 0,0 0 0 0 0,1 0 0 0 0,-1 0 1 0 0,0 0-1 0 0,0 0 0 0 0,0 0 0 0 0,0 0 0 0 0,0 0 0 0 0,0 0 0 0 0,1 0 0 0 0,-1 0 0 0 0,0 0 0 0 0,0 0 0 0 0,0 0 0 0 0,0 0 0 0 0,0 0 1 0 0,1 0-1 0 0,-1 0 0 0 0,0 0 0 0 0,0 0 0 0 0,0 0 0 0 0,0 0 0 0 0,0 1 0 0 0,0-1 0 0 0,0 0 0 0 0,0 0 0 0 0,1 0 0 0 0,-1 0 1 0 0,0 0-1 0 0,0 0 0 0 0,0 0 0 0 0,0 1 0 0 0,0-1 0 0 0,0 0 0 0 0,0 0 0 0 0,0 0 0 0 0,0 0 0 0 0,0 0 0 0 0,0 0 0 0 0,0 1 0 0 0,0-1 1 0 0,9 48-91 0 0,-3-9 67 0 0,60 168-66 0 0,-41-140 130 0 0,26 115 0 0 0,-49-168-330 0 0,1 0 0 0 0,-2 0 0 0 0,0 0 0 0 0,-1 0-1 0 0,0 1 1 0 0,-1-1 0 0 0,-1 0 0 0 0,0 0 0 0 0,-1 0 0 0 0,0 0 0 0 0,-10 23 0 0 0,-5-1-565 0 0</inkml:trace>
-</inkml:ink>
-</file>
-
-<file path=ppt/ink/ink34.xml><?xml version="1.0" encoding="utf-8"?>
-<inkml:ink xmlns:inkml="http://www.w3.org/2003/InkML">
-  <inkml:definitions>
-    <inkml:context xml:id="ctx0">
-      <inkml:inkSource xml:id="inkSrc0">
-        <inkml:traceFormat>
-          <inkml:channel name="X" type="integer" min="-2.14748E9" max="2.14748E9" units="cm"/>
-          <inkml:channel name="Y" type="integer" min="-2.14748E9" max="2.14748E9" units="cm"/>
-          <inkml:channel name="F" type="integer" max="32767" units="dev"/>
-          <inkml:channel name="OA" type="integer" max="360" units="deg"/>
-          <inkml:channel name="OE" type="integer" max="90" units="deg"/>
-        </inkml:traceFormat>
-        <inkml:channelProperties>
-          <inkml:channelProperty channel="X" name="resolution" value="1000" units="1/cm"/>
-          <inkml:channelProperty channel="Y" name="resolution" value="1000" units="1/cm"/>
-          <inkml:channelProperty channel="F" name="resolution" value="0" units="1/dev"/>
-          <inkml:channelProperty channel="OA" name="resolution" value="1000" units="1/deg"/>
-          <inkml:channelProperty channel="OE" name="resolution" value="1000" units="1/deg"/>
-        </inkml:channelProperties>
-      </inkml:inkSource>
-      <inkml:timestamp xml:id="ts0" timeString="2026-03-19T18:41:17.946"/>
-    </inkml:context>
-    <inkml:brush xml:id="br0">
-      <inkml:brushProperty name="width" value="0.2" units="cm"/>
-      <inkml:brushProperty name="height" value="0.2" units="cm"/>
-      <inkml:brushProperty name="color" value="#FFC114"/>
-    </inkml:brush>
-  </inkml:definitions>
-  <inkml:trace contextRef="#ctx0" brushRef="#br0">33 87 3604 0 0,'-33'-27'2201'0'0,"58"16"-2225"0"0,-3 4 24 0 0,1 1 1 0 0,0 1 0 0 0,-1 1 0 0 0,1 1 0 0 0,43 0 0 0 0,-15 0 1 0 0,20-3-13 0 0,96-5-15 0 0,-163 11 6 0 0,17 4-78 0 0,-19-4 88 0 0,-1 0-1 0 0,0 0 1 0 0,1 0 0 0 0,-1 0-1 0 0,0 1 1 0 0,0-1-1 0 0,1 0 1 0 0,-1 1 0 0 0,0-1-1 0 0,0 1 1 0 0,0-1-1 0 0,0 1 1 0 0,1 0 0 0 0,-1-1-1 0 0,1 2 1 0 0,-1 0 2 0 0,0 0 1 0 0,0 0 0 0 0,-1 0-1 0 0,1 0 1 0 0,-1 1 0 0 0,1-1-1 0 0,-1 0 1 0 0,0 0 0 0 0,0 0-1 0 0,0 0 1 0 0,0 0 0 0 0,0 1-1 0 0,-1 2 1 0 0,-2 35-45 0 0,-15 272-178 0 0,19-253 205 0 0,2-1-1 0 0,2 1 0 0 0,18 76 1 0 0,-7-74 24 0 0,3 0 0 0 0,33 72 0 0 0,66 110 30 0 0,-77-165-3 0 0,-39-73-5 0 0,0-1-1 0 0,0 0 0 0 0,0 0 1 0 0,0 1-1 0 0,0-1 0 0 0,-1 1 1 0 0,0-1-1 0 0,0 1 0 0 0,0 5 0 0 0,-1-8 5 0 0,-1-1 0 0 0,1 1-1 0 0,-1 0 1 0 0,1-1 0 0 0,-1 1-1 0 0,0-1 1 0 0,0 1 0 0 0,0-1-1 0 0,0 1 1 0 0,0-1-1 0 0,0 1 1 0 0,0-1 0 0 0,0 0-1 0 0,0 0 1 0 0,-1 1 0 0 0,1-1-1 0 0,0 0 1 0 0,-1 0-1 0 0,1-1 1 0 0,-1 1 0 0 0,1 0-1 0 0,-1 0 1 0 0,0-1 0 0 0,1 1-1 0 0,-1-1 1 0 0,0 1 0 0 0,-2-1-1 0 0,-13 5 111 0 0,-1-1 0 0 0,0-1 1 0 0,0 0-1 0 0,0-2 0 0 0,0 0 0 0 0,-19-2 0 0 0,-115-15 406 0 0,81 7-317 0 0,-93-11-474 0 0,161 20-147 0 0</inkml:trace>
-</inkml:ink>
-</file>
-
-<file path=ppt/ink/ink35.xml><?xml version="1.0" encoding="utf-8"?>
-<inkml:ink xmlns:inkml="http://www.w3.org/2003/InkML">
-  <inkml:definitions>
-    <inkml:context xml:id="ctx0">
-      <inkml:inkSource xml:id="inkSrc0">
-        <inkml:traceFormat>
-          <inkml:channel name="X" type="integer" min="-2.14748E9" max="2.14748E9" units="cm"/>
-          <inkml:channel name="Y" type="integer" min="-2.14748E9" max="2.14748E9" units="cm"/>
-          <inkml:channel name="F" type="integer" max="32767" units="dev"/>
-          <inkml:channel name="OA" type="integer" max="360" units="deg"/>
-          <inkml:channel name="OE" type="integer" max="90" units="deg"/>
-        </inkml:traceFormat>
-        <inkml:channelProperties>
-          <inkml:channelProperty channel="X" name="resolution" value="1000" units="1/cm"/>
-          <inkml:channelProperty channel="Y" name="resolution" value="1000" units="1/cm"/>
-          <inkml:channelProperty channel="F" name="resolution" value="0" units="1/dev"/>
-          <inkml:channelProperty channel="OA" name="resolution" value="1000" units="1/deg"/>
-          <inkml:channelProperty channel="OE" name="resolution" value="1000" units="1/deg"/>
-        </inkml:channelProperties>
-      </inkml:inkSource>
-      <inkml:timestamp xml:id="ts0" timeString="2026-03-19T18:41:20.569"/>
-    </inkml:context>
-    <inkml:brush xml:id="br0">
-      <inkml:brushProperty name="width" value="0.2" units="cm"/>
-      <inkml:brushProperty name="height" value="0.2" units="cm"/>
-      <inkml:brushProperty name="color" value="#FFC114"/>
-    </inkml:brush>
-  </inkml:definitions>
-  <inkml:trace contextRef="#ctx0" brushRef="#br0">33 125 4860 0 0,'-13'-63'-507'0'0,"7"24"1841"0"0,-1 16-208 0 0,7 49-1365 0 0,1 2 260 0 0,5 70-77 0 0,4-2 1 0 0,36 155 0 0 0,-23-137 70 0 0,-11-52 11 0 0,30 93-1 0 0,-33-105 4011 0 0,-12-55-3797 0 0,-2-8-220 0 0,0 1 0 0 0,1-1 0 0 0,0 0-1 0 0,1 0 1 0 0,1-1 0 0 0,0 1-1 0 0,1-1 1 0 0,0 1 0 0 0,1-1 0 0 0,0 1-1 0 0,1-1 1 0 0,5-20 0 0 0,-5 26-84 0 0,1-1-1 0 0,0 1 1 0 0,0 0 0 0 0,1-1 0 0 0,0 1 0 0 0,1 1 0 0 0,-1-1-1 0 0,2 0 1 0 0,-1 1 0 0 0,1 0 0 0 0,0 0 0 0 0,0 0-1 0 0,1 1 1 0 0,0-1 0 0 0,0 1 0 0 0,1 1 0 0 0,0-1-1 0 0,0 1 1 0 0,0 1 0 0 0,0-1 0 0 0,12-5 0 0 0,-13 9 7 0 0,1-1 1 0 0,-1 1 0 0 0,0 0 0 0 0,0 1 0 0 0,1-1 0 0 0,-1 1 0 0 0,0 0 0 0 0,1 1 0 0 0,-1 0 0 0 0,0 0 0 0 0,1 0 0 0 0,-1 1 0 0 0,0-1 0 0 0,0 1 0 0 0,0 1 0 0 0,0-1 0 0 0,-1 1 0 0 0,1 0 0 0 0,-1 1-1 0 0,0-1 1 0 0,1 1 0 0 0,-2 0 0 0 0,1 1 0 0 0,8 8 0 0 0,-2-2-30 0 0,-1 1-1 0 0,0 1 1 0 0,0 0-1 0 0,-2 0 1 0 0,1 0-1 0 0,-2 2 0 0 0,1-1 1 0 0,8 27-1 0 0,-13-28 58 0 0,2-1-1 0 0,-1 0 0 0 0,1 0 1 0 0,1 0-1 0 0,0 0 0 0 0,1-1 0 0 0,0 0 1 0 0,1-1-1 0 0,10 13 0 0 0,-11-18 35 0 0,-1 1-1 0 0,1-1 0 0 0,-1 0 0 0 0,1 0 0 0 0,1-1 0 0 0,-1 0 1 0 0,1 0-1 0 0,-1-1 0 0 0,1 0 0 0 0,0-1 0 0 0,0 1 1 0 0,0-1-1 0 0,1-1 0 0 0,-1 1 0 0 0,12-1 0 0 0,-9-1 9 0 0,-1 1-1 0 0,1-2 0 0 0,0 0 1 0 0,-1 0-1 0 0,1-1 0 0 0,-1 0 1 0 0,1-1-1 0 0,-1 0 0 0 0,0 0 1 0 0,0-1-1 0 0,0-1 0 0 0,-1 0 1 0 0,0 0-1 0 0,1-1 0 0 0,-2 0 1 0 0,1 0-1 0 0,-1-1 0 0 0,0 0 1 0 0,11-13-1 0 0,-9 7-12 0 0,0 0 1 0 0,-2-1-1 0 0,1 0 0 0 0,-2 0 1 0 0,0 0-1 0 0,-1-1 0 0 0,0 0 1 0 0,-1-1-1 0 0,-1 1 0 0 0,0-1 1 0 0,-1 0-1 0 0,1-19 0 0 0,-3 29 10 0 0,0-3 26 0 0,-1-1-1 0 0,1 0 0 0 0,-1 0 0 0 0,-1 0 1 0 0,-1-12-1 0 0,1 21-35 0 0,1 0 0 0 0,-1 0 0 0 0,1 0 0 0 0,-1 0 0 0 0,1 0 0 0 0,-1 0 0 0 0,1 0 0 0 0,-1 0 0 0 0,0 0 0 0 0,1 1 0 0 0,-1-1 0 0 0,0 0 0 0 0,0 0 0 0 0,0 1 0 0 0,0-1-1 0 0,0 1 1 0 0,0-1 0 0 0,0 0 0 0 0,0 1 0 0 0,0 0 0 0 0,0-1 0 0 0,0 1 0 0 0,0 0 0 0 0,0-1 0 0 0,0 1 0 0 0,0 0 0 0 0,0 0 0 0 0,0 0 0 0 0,0 0 0 0 0,0 0 0 0 0,0 0 0 0 0,-1 0 0 0 0,1 0 0 0 0,0 1 0 0 0,-1-1 0 0 0,-22 8-25 0 0,17-5 15 0 0,0 1-1 0 0,1-1 0 0 0,0 2 1 0 0,0-1-1 0 0,0 1 1 0 0,0 0-1 0 0,0 0 0 0 0,1 0 1 0 0,0 1-1 0 0,0 0 0 0 0,1 0 1 0 0,0 0-1 0 0,-7 12 1 0 0,3 0-26 0 0,-1 0 0 0 0,2 0 0 0 0,-9 37 0 0 0,13-44 18 0 0,1 0-1 0 0,1 1 1 0 0,0-1-1 0 0,0 1 1 0 0,1-1-1 0 0,1 1 1 0 0,0-1-1 0 0,0 0 0 0 0,1 1 1 0 0,7 19-1 0 0,-1-8 9 0 0,2 0-1 0 0,0-1 1 0 0,27 41-1 0 0,-36-61 35 0 0,0-1 0 0 0,0 1 0 0 0,0 0 0 0 0,1-1 0 0 0,-1 1 0 0 0,1-1 0 0 0,-1 1 0 0 0,1-1 0 0 0,0 0 0 0 0,-1 0-1 0 0,1 0 1 0 0,0 0 0 0 0,0 0 0 0 0,0 0 0 0 0,-1 0 0 0 0,1-1 0 0 0,0 1 0 0 0,0 0 0 0 0,0-1 0 0 0,0 0 0 0 0,0 1 0 0 0,1-1 0 0 0,-1 0 0 0 0,0 0 0 0 0,0 0 0 0 0,0-1 0 0 0,0 1 0 0 0,0 0 0 0 0,0-1 0 0 0,0 1 0 0 0,0-1 0 0 0,0 0-1 0 0,0 0 1 0 0,-1 0 0 0 0,1 1 0 0 0,0-2 0 0 0,0 1 0 0 0,1-2 0 0 0,11-6 2 0 0,-1-1-1 0 0,-1 0 0 0 0,1-1 1 0 0,10-13-1 0 0,-12 13 0 0 0,37-38-84 0 0,10-13-213 0 0,3 4 0 0 0,2 2 1 0 0,92-63-1 0 0,-150 117 217 0 0,0-1 1 0 0,0 1-1 0 0,0 0 0 0 0,0 0 1 0 0,1 1-1 0 0,-1-1 0 0 0,1 1 1 0 0,-1 0-1 0 0,1 1 0 0 0,-1-1 1 0 0,1 1-1 0 0,-1 0 0 0 0,1 1 1 0 0,-1-1-1 0 0,1 1 0 0 0,-1 0 1 0 0,1 1-1 0 0,-1-1 0 0 0,0 1 1 0 0,0 0-1 0 0,0 0 0 0 0,0 1 0 0 0,11 6 1092 0 0,-21-11-994 0 0,-2 0-33 0 0,1 0 0 0 0,-1 1-1 0 0,1-1 1 0 0,-1 1-1 0 0,0 1 1 0 0,1-1 0 0 0,-1 1-1 0 0,0 0 1 0 0,0 1-1 0 0,1-1 1 0 0,-1 2 0 0 0,0-1-1 0 0,-6 3 1 0 0,1 0-9 0 0,0 1 0 0 0,0 0 0 0 0,1 1 1 0 0,0 0-1 0 0,0 0 0 0 0,-16 15 0 0 0,9-6-11 0 0,1 0 0 0 0,1 2-1 0 0,1 0 1 0 0,0 0 0 0 0,2 2 0 0 0,0 0-1 0 0,-18 35 1 0 0,28-50 2 0 0,1 0-1 0 0,0 1 1 0 0,1 0-1 0 0,-1-1 1 0 0,1 1 0 0 0,-1 0-1 0 0,2 0 1 0 0,-1 0-1 0 0,0 0 1 0 0,1 0-1 0 0,0 0 1 0 0,0 0-1 0 0,0 0 1 0 0,1 0-1 0 0,2 9 1 0 0,-2-11 10 0 0,1 0 1 0 0,0 0-1 0 0,-1 0 0 0 0,1-1 1 0 0,0 1-1 0 0,0 0 0 0 0,1-1 1 0 0,-1 1-1 0 0,1-1 0 0 0,-1 0 1 0 0,1 0-1 0 0,0 0 0 0 0,-1 0 1 0 0,1 0-1 0 0,0 0 0 0 0,0-1 1 0 0,1 0-1 0 0,-1 1 0 0 0,0-1 1 0 0,0 0-1 0 0,1-1 0 0 0,-1 1 1 0 0,5 0-1 0 0,-1-1 6 0 0,1 1 0 0 0,-1-2 0 0 0,0 1 1 0 0,0-1-1 0 0,1 0 0 0 0,-1 0 0 0 0,0-1 0 0 0,0 0 0 0 0,0 0 0 0 0,0-1 1 0 0,-1 0-1 0 0,1 0 0 0 0,-1 0 0 0 0,0-1 0 0 0,1 0 0 0 0,5-5 0 0 0,12-11-36 0 0,-1 0 0 0 0,29-33 0 0 0,-43 43 10 0 0,23-27 17 0 0,35-53-1 0 0,-30 38 638 0 0,-42 65-626 0 0,0 0 0 0 0,1 0-1 0 0,0 0 1 0 0,-3 23 0 0 0,5-27-25 0 0,0 1 1 0 0,1 0-1 0 0,0-1 0 0 0,1 1 1 0 0,0-1-1 0 0,1 1 0 0 0,-1 0 1 0 0,2-1-1 0 0,-1 1 0 0 0,6 14 1 0 0,-6-21 19 0 0,1 0 0 0 0,-1 0 1 0 0,1 0-1 0 0,-1 0 0 0 0,1-1 1 0 0,0 1-1 0 0,0-1 0 0 0,0 1 1 0 0,1-1-1 0 0,-1 0 0 0 0,0 0 1 0 0,1 0-1 0 0,0 0 0 0 0,-1 0 1 0 0,1 0-1 0 0,0-1 0 0 0,0 0 1 0 0,0 1-1 0 0,0-1 0 0 0,0 0 1 0 0,0 0-1 0 0,0-1 0 0 0,0 1 1 0 0,0-1-1 0 0,1 1 0 0 0,-1-1 1 0 0,0 0-1 0 0,0 0 0 0 0,1-1 1 0 0,-1 1-1 0 0,0 0 0 0 0,0-1 1 0 0,0 0-1 0 0,0 0 0 0 0,6-2 1 0 0,8-5-15 0 0,0-1 1 0 0,0 0-1 0 0,-1-1 1 0 0,28-23 0 0 0,-26 19-58 0 0,61-47-187 0 0,-33 25-128 0 0,1 1 0 0 0,71-39 0 0 0,-99 67-50 0 0,-29 18 213 0 0,-35 19 195 0 0,25-21 22 0 0,1 1 0 0 0,0 1-1 0 0,1 0 1 0 0,0 2 0 0 0,-30 25 0 0 0,40-31-5 0 0,0 1-1 0 0,1-1 1 0 0,0 1-1 0 0,0 1 1 0 0,1-1-1 0 0,0 1 1 0 0,0 0-1 0 0,1 0 1 0 0,0 1-1 0 0,0 0 1 0 0,1 0-1 0 0,1 0 1 0 0,-5 18-1 0 0,8-23 7 0 0,0-1 0 0 0,-1 0 0 0 0,2 1 0 0 0,-1-1 0 0 0,0 0 0 0 0,1 1 0 0 0,0-1 0 0 0,0 0 0 0 0,0 0 0 0 0,0 1 0 0 0,1-1 0 0 0,0 0 0 0 0,0-1 0 0 0,0 1 0 0 0,0 0 0 0 0,0 0 0 0 0,1-1 0 0 0,0 1 0 0 0,0-1 0 0 0,0 0 0 0 0,0 0 0 0 0,0 0 0 0 0,0 0 0 0 0,1-1 0 0 0,-1 1 0 0 0,8 2 0 0 0,6 3 108 0 0,0 0 0 0 0,0-2 0 0 0,1 0 0 0 0,32 6 0 0 0,-49-12-87 0 0,3 1 45 0 0,-1-1-1 0 0,1 0 0 0 0,0 0 0 0 0,-1 0 0 0 0,1 0 0 0 0,-1-1 0 0 0,1 1 0 0 0,-1-1 0 0 0,1 0 0 0 0,-1 0 0 0 0,0 0 0 0 0,1-1 0 0 0,-1 1 0 0 0,0-1 0 0 0,0 0 0 0 0,0 0 0 0 0,0 0 0 0 0,0 0 0 0 0,-1 0 0 0 0,1-1 0 0 0,0 1 0 0 0,-1-1 0 0 0,0 0 0 0 0,3-3 0 0 0,3-5 51 0 0,0-1 0 0 0,-1 0-1 0 0,0 0 1 0 0,8-21 0 0 0,-1-6-36 0 0,-1-2 0 0 0,-2 0 0 0 0,-2 0 0 0 0,-2-1 0 0 0,2-48 0 0 0,-10-213 252 0 0,-12 146 380 0 0,10 140-1458 0 0,-4 30 581 0 0,-5 36 91 0 0,7 36-25 0 0,4 0 0 0 0,4 0 0 0 0,19 121 0 0 0,-19-185 103 0 0,0 0-1 0 0,2 0 0 0 0,0 0 0 0 0,1 0 1 0 0,1-1-1 0 0,1 0 0 0 0,1 0 0 0 0,1-1 1 0 0,16 25-1 0 0,-20-36-46 0 0,1 1-1 0 0,0-1 1 0 0,1 0 0 0 0,0-1 0 0 0,0 0-1 0 0,0 0 1 0 0,1-1 0 0 0,0 0 0 0 0,0 0 0 0 0,1-1-1 0 0,-1 0 1 0 0,1-1 0 0 0,0 0 0 0 0,1-1 0 0 0,-1 0-1 0 0,0 0 1 0 0,1-1 0 0 0,0 0 0 0 0,0-1 0 0 0,16 0-1 0 0,39-5-2866 0 0,-31-2 879 0 0</inkml:trace>
-</inkml:ink>
-</file>
-
-<file path=ppt/ink/ink36.xml><?xml version="1.0" encoding="utf-8"?>
-<inkml:ink xmlns:inkml="http://www.w3.org/2003/InkML">
-  <inkml:definitions>
-    <inkml:context xml:id="ctx0">
-      <inkml:inkSource xml:id="inkSrc0">
-        <inkml:traceFormat>
-          <inkml:channel name="X" type="integer" min="-2.14748E9" max="2.14748E9" units="cm"/>
-          <inkml:channel name="Y" type="integer" min="-2.14748E9" max="2.14748E9" units="cm"/>
-          <inkml:channel name="F" type="integer" max="32767" units="dev"/>
-          <inkml:channel name="OA" type="integer" max="360" units="deg"/>
-          <inkml:channel name="OE" type="integer" max="90" units="deg"/>
-        </inkml:traceFormat>
-        <inkml:channelProperties>
-          <inkml:channelProperty channel="X" name="resolution" value="1000" units="1/cm"/>
-          <inkml:channelProperty channel="Y" name="resolution" value="1000" units="1/cm"/>
-          <inkml:channelProperty channel="F" name="resolution" value="0" units="1/dev"/>
-          <inkml:channelProperty channel="OA" name="resolution" value="1000" units="1/deg"/>
-          <inkml:channelProperty channel="OE" name="resolution" value="1000" units="1/deg"/>
-        </inkml:channelProperties>
-      </inkml:inkSource>
-      <inkml:timestamp xml:id="ts0" timeString="2026-03-19T18:41:21.054"/>
-    </inkml:context>
-    <inkml:brush xml:id="br0">
-      <inkml:brushProperty name="width" value="0.2" units="cm"/>
-      <inkml:brushProperty name="height" value="0.2" units="cm"/>
-      <inkml:brushProperty name="color" value="#FFC114"/>
-    </inkml:brush>
-  </inkml:definitions>
-  <inkml:trace contextRef="#ctx0" brushRef="#br0">26 97 5324 0 0,'-19'-25'-184'0'0,"20"21"175"0"0,1 0-1 0 0,0 1 0 0 0,0 0 0 0 0,0-1 0 0 0,0 1 0 0 0,0 0 0 0 0,1 0 0 0 0,0 0 1 0 0,-1 0-1 0 0,1 1 0 0 0,0-1 0 0 0,0 1 0 0 0,1 0 0 0 0,-1 0 0 0 0,0 0 0 0 0,1 0 1 0 0,-1 0-1 0 0,1 1 0 0 0,-1-1 0 0 0,1 1 0 0 0,0 0 0 0 0,5 0 0 0 0,7-4-10 0 0,0 2-1 0 0,0 0 0 0 0,1 1 0 0 0,19-1 0 0 0,-25 3 0 0 0,1 1 0 0 0,-1 0 0 0 0,0 1 0 0 0,0-1 0 0 0,0 2 0 0 0,0 0 0 0 0,-1 0 0 0 0,1 1 0 0 0,14 8 0 0 0,-21-10 17 0 0,0 0-1 0 0,-1 0 1 0 0,1 1-1 0 0,-1 0 1 0 0,1-1-1 0 0,-1 1 1 0 0,0 1-1 0 0,0-1 1 0 0,-1 0-1 0 0,1 1 1 0 0,-1-1-1 0 0,1 1 1 0 0,-1 0-1 0 0,0 0 1 0 0,0 0-1 0 0,-1 0 1 0 0,1 0-1 0 0,-1 0 1 0 0,0 0-1 0 0,0 0 1 0 0,0 1-1 0 0,-1-1 1 0 0,1 0-1 0 0,-1 1 1 0 0,0-1-1 0 0,-1 0 1 0 0,0 7-1 0 0,-4 11-6 0 0,0 0 1 0 0,-2-1-1 0 0,-16 38 0 0 0,14-40-34 0 0,2 1-1 0 0,0-1 0 0 0,1 1 0 0 0,-5 33 0 0 0,10-51 46 0 0,1-1-1 0 0,0 1 1 0 0,0-1-1 0 0,0 1 1 0 0,1 0-1 0 0,-1-1 1 0 0,0 1 0 0 0,1-1-1 0 0,-1 1 1 0 0,1-1-1 0 0,-1 1 1 0 0,1-1-1 0 0,-1 0 1 0 0,1 1-1 0 0,0-1 1 0 0,0 0 0 0 0,0 1-1 0 0,0-1 1 0 0,0 0-1 0 0,0 0 1 0 0,1 1-1 0 0,2 1 6 0 0,-1-1-1 0 0,1 1 0 0 0,-1-1 0 0 0,1 0 0 0 0,0-1 0 0 0,0 1 0 0 0,8 2 0 0 0,4-1 24 0 0,1 0 0 0 0,34 2 0 0 0,327 1-2132 0 0,-329-4 1756 0 0</inkml:trace>
-</inkml:ink>
-</file>
-
-<file path=ppt/ink/ink37.xml><?xml version="1.0" encoding="utf-8"?>
-<inkml:ink xmlns:inkml="http://www.w3.org/2003/InkML">
-  <inkml:definitions>
-    <inkml:context xml:id="ctx0">
-      <inkml:inkSource xml:id="inkSrc0">
-        <inkml:traceFormat>
-          <inkml:channel name="X" type="integer" min="-2.14748E9" max="2.14748E9" units="cm"/>
-          <inkml:channel name="Y" type="integer" min="-2.14748E9" max="2.14748E9" units="cm"/>
-          <inkml:channel name="F" type="integer" max="32767" units="dev"/>
-          <inkml:channel name="OA" type="integer" max="360" units="deg"/>
-          <inkml:channel name="OE" type="integer" max="90" units="deg"/>
-        </inkml:traceFormat>
-        <inkml:channelProperties>
-          <inkml:channelProperty channel="X" name="resolution" value="1000" units="1/cm"/>
-          <inkml:channelProperty channel="Y" name="resolution" value="1000" units="1/cm"/>
-          <inkml:channelProperty channel="F" name="resolution" value="0" units="1/dev"/>
-          <inkml:channelProperty channel="OA" name="resolution" value="1000" units="1/deg"/>
-          <inkml:channelProperty channel="OE" name="resolution" value="1000" units="1/deg"/>
-        </inkml:channelProperties>
-      </inkml:inkSource>
-      <inkml:timestamp xml:id="ts0" timeString="2026-03-19T18:41:22.572"/>
-    </inkml:context>
-    <inkml:brush xml:id="br0">
-      <inkml:brushProperty name="width" value="0.2" units="cm"/>
-      <inkml:brushProperty name="height" value="0.2" units="cm"/>
-      <inkml:brushProperty name="color" value="#FFC114"/>
-    </inkml:brush>
-  </inkml:definitions>
-  <inkml:trace contextRef="#ctx0" brushRef="#br0">24 60 2748 0 0,'-2'-1'177'0'0,"0"0"0"0"0,0 0 0 0 0,0 0 0 0 0,0-1 0 0 0,0 1 0 0 0,1 0 0 0 0,-1-1 0 0 0,0 1 0 0 0,1-1 0 0 0,0 0 0 0 0,-1 0 0 0 0,-1-2-1 0 0,49-7-139 0 0,0 2-1 0 0,1 3 0 0 0,0 1 1 0 0,62 2-1 0 0,-55 1-8 0 0,-12 0-5 0 0,85 2-34 0 0,-59 4-29 0 0,-65-4-1 0 0,-2 1 35 0 0,0-1 0 0 0,-1 0 0 0 0,1 0-1 0 0,0 0 1 0 0,0 1 0 0 0,0-1 0 0 0,0 0 0 0 0,0 1 0 0 0,-1-1-1 0 0,1 1 1 0 0,0-1 0 0 0,0 1 0 0 0,-1-1 0 0 0,1 1 0 0 0,0-1-1 0 0,-1 1 1 0 0,1 0 0 0 0,-1-1 0 0 0,1 1 0 0 0,-1 0-1 0 0,1 0 1 0 0,0 0 0 0 0,0 14-37 0 0,-1-1 0 0 0,0 0 0 0 0,-1 0 0 0 0,0 0 0 0 0,-2 0 0 0 0,1 0 0 0 0,-7 20-1 0 0,-4 22-26 0 0,4 12 13 0 0,3 1-1 0 0,3-1 1 0 0,3 1-1 0 0,14 115 0 0 0,2-88 56 0 0,4-1-1 0 0,55 160 0 0 0,-11-83 3 0 0,-16-48 54 0 0,31 132 0 0 0,-77-252-32 0 0,-1 0 1 0 0,-1-1 0 0 0,1 1 0 0 0,0 0-1 0 0,-1 0 1 0 0,0 0 0 0 0,0 0-1 0 0,0 0 1 0 0,0-1 0 0 0,-1 1-1 0 0,0 0 1 0 0,1 0 0 0 0,-1 0 0 0 0,-1-1-1 0 0,1 1 1 0 0,0-1 0 0 0,-1 1-1 0 0,0-1 1 0 0,0 1 0 0 0,-3 4-1 0 0,0-4 54 0 0,0 1-1 0 0,0-1 0 0 0,0 0 0 0 0,-1-1 0 0 0,1 1 0 0 0,-1-1 0 0 0,0 0 0 0 0,0-1 0 0 0,0 1 0 0 0,0-1 0 0 0,-10 2 0 0 0,-19 4 160 0 0,-1-2 0 0 0,0-2-1 0 0,-1 0 1 0 0,1-3 0 0 0,-45-3 0 0 0,-181-29 474 0 0,261 31-707 0 0,-68-12 76 0 0,-26-4-621 0 0,35 12-3111 0 0</inkml:trace>
-</inkml:ink>
-</file>
-
-<file path=ppt/ink/ink38.xml><?xml version="1.0" encoding="utf-8"?>
-<inkml:ink xmlns:inkml="http://www.w3.org/2003/InkML">
-  <inkml:definitions>
-    <inkml:context xml:id="ctx0">
-      <inkml:inkSource xml:id="inkSrc0">
-        <inkml:traceFormat>
-          <inkml:channel name="X" type="integer" min="-2.14748E9" max="2.14748E9" units="cm"/>
-          <inkml:channel name="Y" type="integer" min="-2.14748E9" max="2.14748E9" units="cm"/>
-          <inkml:channel name="F" type="integer" max="32767" units="dev"/>
-          <inkml:channel name="OA" type="integer" max="360" units="deg"/>
-          <inkml:channel name="OE" type="integer" max="90" units="deg"/>
-        </inkml:traceFormat>
-        <inkml:channelProperties>
-          <inkml:channelProperty channel="X" name="resolution" value="1000" units="1/cm"/>
-          <inkml:channelProperty channel="Y" name="resolution" value="1000" units="1/cm"/>
-          <inkml:channelProperty channel="F" name="resolution" value="0" units="1/dev"/>
-          <inkml:channelProperty channel="OA" name="resolution" value="1000" units="1/deg"/>
-          <inkml:channelProperty channel="OE" name="resolution" value="1000" units="1/deg"/>
-        </inkml:channelProperties>
-      </inkml:inkSource>
-      <inkml:timestamp xml:id="ts0" timeString="2026-03-19T18:41:30.888"/>
-    </inkml:context>
-    <inkml:brush xml:id="br0">
-      <inkml:brushProperty name="width" value="0.2" units="cm"/>
-      <inkml:brushProperty name="height" value="0.2" units="cm"/>
-      <inkml:brushProperty name="color" value="#FFC114"/>
-    </inkml:brush>
-  </inkml:definitions>
-  <inkml:trace contextRef="#ctx0" brushRef="#br0">14 80 3532 0 0,'-6'-39'447'0'0,"-1"0"180"0"0,6 38-644 0 0,2 6-238 0 0,38 325 48 0 0,-5-58 208 0 0,-11-13 79 0 0,-16-164 3765 0 0,-12-102-3804 0 0,1 0 0 0 0,1-1-1 0 0,-1 1 1 0 0,1-1 0 0 0,1 0 0 0 0,-1 0 0 0 0,1 0 0 0 0,1 0 0 0 0,0 0 0 0 0,0 0-1 0 0,0 0 1 0 0,1-1 0 0 0,0 1 0 0 0,1 0 0 0 0,0 0 0 0 0,2-12 0 0 0,1-3-85 0 0,1 0 0 0 0,0 1 0 0 0,2 0 0 0 0,0 0 0 0 0,12-22-1 0 0,-15 36-4 0 0,1 0 0 0 0,0 0-1 0 0,0 1 1 0 0,1 0 0 0 0,0 0-1 0 0,0 0 1 0 0,1 0 0 0 0,0 1-1 0 0,0 0 1 0 0,0 1-1 0 0,1 0 1 0 0,0 0 0 0 0,16-7-1 0 0,-11 6-51 0 0,2 1 0 0 0,-1 1 0 0 0,1 0-1 0 0,-1 1 1 0 0,1 0 0 0 0,0 2 0 0 0,25-1 0 0 0,-36 2 84 0 0,-1 1 1 0 0,1 0 0 0 0,0-1 0 0 0,-1 1-1 0 0,0 1 1 0 0,1-1 0 0 0,-1 0-1 0 0,0 1 1 0 0,0 0 0 0 0,1 0 0 0 0,-1 0-1 0 0,-1 0 1 0 0,1 0 0 0 0,0 0-1 0 0,0 1 1 0 0,-1-1 0 0 0,1 1 0 0 0,-1 0-1 0 0,0 0 1 0 0,0 0 0 0 0,0 0 0 0 0,0 0-1 0 0,-1 0 1 0 0,1 1 0 0 0,0 3-1 0 0,4 7-17 0 0,-1 0-1 0 0,-1 1 0 0 0,0 0 1 0 0,2 20-1 0 0,3 96-150 0 0,-6-114 139 0 0,-2-10 39 0 0,-1-1 0 0 0,2 1 0 0 0,-1-1-1 0 0,1 1 1 0 0,0-1 0 0 0,0 1-1 0 0,1-1 1 0 0,0 0 0 0 0,4 6 0 0 0,-5-10 14 0 0,-1 0 0 0 0,1-1 1 0 0,0 1-1 0 0,0-1 0 0 0,0 1 1 0 0,1-1-1 0 0,-1 0 1 0 0,0 1-1 0 0,0-1 0 0 0,1 0 1 0 0,-1-1-1 0 0,0 1 0 0 0,1 0 1 0 0,-1-1-1 0 0,1 1 1 0 0,-1-1-1 0 0,1 0 0 0 0,3 0 1 0 0,53-5 66 0 0,-44 2-80 0 0,34-6-1088 0 0,-1-2 0 0 0,87-32 0 0 0,-99 30-59 0 0</inkml:trace>
-</inkml:ink>
-</file>
-
-<file path=ppt/ink/ink39.xml><?xml version="1.0" encoding="utf-8"?>
-<inkml:ink xmlns:inkml="http://www.w3.org/2003/InkML">
-  <inkml:definitions>
-    <inkml:context xml:id="ctx0">
-      <inkml:inkSource xml:id="inkSrc0">
-        <inkml:traceFormat>
-          <inkml:channel name="X" type="integer" min="-2.14748E9" max="2.14748E9" units="cm"/>
-          <inkml:channel name="Y" type="integer" min="-2.14748E9" max="2.14748E9" units="cm"/>
-          <inkml:channel name="F" type="integer" max="32767" units="dev"/>
-          <inkml:channel name="OA" type="integer" max="360" units="deg"/>
-          <inkml:channel name="OE" type="integer" max="90" units="deg"/>
-        </inkml:traceFormat>
-        <inkml:channelProperties>
-          <inkml:channelProperty channel="X" name="resolution" value="1000" units="1/cm"/>
-          <inkml:channelProperty channel="Y" name="resolution" value="1000" units="1/cm"/>
-          <inkml:channelProperty channel="F" name="resolution" value="0" units="1/dev"/>
-          <inkml:channelProperty channel="OA" name="resolution" value="1000" units="1/deg"/>
-          <inkml:channelProperty channel="OE" name="resolution" value="1000" units="1/deg"/>
-        </inkml:channelProperties>
-      </inkml:inkSource>
-      <inkml:timestamp xml:id="ts0" timeString="2026-03-19T18:41:33.629"/>
-    </inkml:context>
-    <inkml:brush xml:id="br0">
-      <inkml:brushProperty name="width" value="0.2" units="cm"/>
-      <inkml:brushProperty name="height" value="0.2" units="cm"/>
-      <inkml:brushProperty name="color" value="#FFC114"/>
-    </inkml:brush>
-  </inkml:definitions>
-  <inkml:trace contextRef="#ctx0" brushRef="#br0">120 697 3640 0 0,'0'0'-324'0'0,"11"0"-410"0"0,10 0 825 0 0,1-1 1 0 0,-1-1 0 0 0,0-1 0 0 0,0 0 0 0 0,38-13-1 0 0,-52 14-66 0 0,-1 0-1 0 0,0-1 0 0 0,1 0 0 0 0,-1 0 0 0 0,0 0 0 0 0,-1-1 0 0 0,1 0 0 0 0,-1 0 0 0 0,1 0 0 0 0,-1-1 0 0 0,-1 1 0 0 0,1-1 0 0 0,-1-1 1 0 0,1 1-1 0 0,-2 0 0 0 0,1-1 0 0 0,0 0 0 0 0,-1 0 0 0 0,0 0 0 0 0,-1-1 0 0 0,1 1 0 0 0,-1 0 0 0 0,-1-1 0 0 0,2-7 0 0 0,-2 11-1 0 0,-1 0 1 0 0,0 0-1 0 0,0 1 0 0 0,0-1 0 0 0,0 0 0 0 0,0 0 0 0 0,-1 0 0 0 0,1 0 1 0 0,-1 0-1 0 0,0 1 0 0 0,0-1 0 0 0,0 0 0 0 0,0 1 0 0 0,0-1 1 0 0,-1 0-1 0 0,1 1 0 0 0,-1 0 0 0 0,0-1 0 0 0,-3-3 0 0 0,1 2-2 0 0,0 1 1 0 0,-1-1-1 0 0,0 1 0 0 0,1 0 0 0 0,-1 0 0 0 0,-1 1 1 0 0,1-1-1 0 0,0 1 0 0 0,-9-2 0 0 0,0 0-10 0 0,0 1-1 0 0,0 1 1 0 0,0 0 0 0 0,0 1-1 0 0,-1 0 1 0 0,1 2 0 0 0,-19 1-1 0 0,22 0-16 0 0,1 1-1 0 0,0 0 1 0 0,0 0-1 0 0,0 1 1 0 0,0 1 0 0 0,1-1-1 0 0,0 1 1 0 0,0 1-1 0 0,0 0 1 0 0,0 0-1 0 0,1 1 1 0 0,0 0-1 0 0,0 0 1 0 0,1 1-1 0 0,0 0 1 0 0,1 0-1 0 0,-1 1 1 0 0,1-1-1 0 0,1 1 1 0 0,0 1-1 0 0,-7 16 1 0 0,9-18 1 0 0,1 0 0 0 0,-1 0 0 0 0,1 0 0 0 0,1 0-1 0 0,-1 0 1 0 0,1 1 0 0 0,1-1 0 0 0,0 0 0 0 0,0 1 0 0 0,0-1 0 0 0,1 1 0 0 0,1-1 0 0 0,-1 0 0 0 0,1 0 0 0 0,1 0 0 0 0,-1 0 0 0 0,1 0-1 0 0,1 0 1 0 0,-1-1 0 0 0,1 0 0 0 0,1 1 0 0 0,-1-1 0 0 0,1-1 0 0 0,1 1 0 0 0,-1-1 0 0 0,1 0 0 0 0,11 9 0 0 0,-5-6 16 0 0,0-1 0 0 0,1 0 0 0 0,0-1 0 0 0,17 6 0 0 0,22 13 83 0 0,-46-24-77 0 0,1-1 1 0 0,-1 0-1 0 0,0 0 0 0 0,1-1 0 0 0,-1 1 1 0 0,0-1-1 0 0,1 0 0 0 0,-1-1 1 0 0,0 0-1 0 0,1 0 0 0 0,7-2 1 0 0,-10 2-7 0 0,10-3 2 0 0,-1 1 0 0 0,0-2 1 0 0,-1 0-1 0 0,1 0 0 0 0,-1-1 1 0 0,0-1-1 0 0,0 0 0 0 0,-1 0 1 0 0,16-15-1 0 0,7-9 19 0 0,45-51 0 0 0,-28 27-13 0 0,-8 4-25 0 0,-33 38-6 0 0,-1 1 1 0 0,2 1-1 0 0,-1 0 0 0 0,2 0 1 0 0,-1 1-1 0 0,16-10 0 0 0,-23 18 10 0 0,0 1-1 0 0,0-1 0 0 0,-1 0 1 0 0,2 1-1 0 0,-1 0 0 0 0,0 0 1 0 0,0 0-1 0 0,0 1 0 0 0,0-1 1 0 0,1 1-1 0 0,-1 0 0 0 0,0 0 1 0 0,0 1-1 0 0,0-1 0 0 0,1 1 1 0 0,-1 0-1 0 0,0 0 0 0 0,0 0 0 0 0,0 1 1 0 0,0-1-1 0 0,6 5 0 0 0,47 11-80 0 0,-29-8 1074 0 0,-28-10-990 0 0,-4-2 6 0 0,1-1 0 0 0,-1 1 0 0 0,0 0 0 0 0,0 0 0 0 0,0 1-1 0 0,0-1 1 0 0,0 1 0 0 0,-1 0 0 0 0,1 0 0 0 0,-1 0 0 0 0,1 1-1 0 0,-1-1 1 0 0,0 1 0 0 0,1 0 0 0 0,-1 0 0 0 0,0 1 0 0 0,0 0-1 0 0,0 0 1 0 0,1 0 0 0 0,-7 1 0 0 0,3-1-12 0 0,-1 0-1 0 0,1 0 1 0 0,0 1 0 0 0,-1 0 0 0 0,1 0-1 0 0,0 1 1 0 0,-1 0 0 0 0,1 1 0 0 0,1 0-1 0 0,-1 0 1 0 0,-12 7 0 0 0,5-2-17 0 0,4-1 3 0 0,0 0 0 0 0,0 0 0 0 0,1 1 0 0 0,0 0 0 0 0,1 1 0 0 0,0 0 0 0 0,0 1 0 0 0,1 0 0 0 0,0 0 0 0 0,1 1 0 0 0,0 0 1 0 0,0 0-1 0 0,2 0 0 0 0,-1 1 0 0 0,1 0 0 0 0,1 0 0 0 0,0 1 0 0 0,-3 19 0 0 0,6-27 22 0 0,1 0 0 0 0,0-1 0 0 0,0 1 0 0 0,1 0 0 0 0,-1 0 0 0 0,1 0 0 0 0,0 0 0 0 0,0-1 0 0 0,1 1 0 0 0,-1 0 0 0 0,1-1 0 0 0,0 0 0 0 0,0 1-1 0 0,1-1 1 0 0,-1 0 0 0 0,1 0 0 0 0,0 0 0 0 0,0 0 0 0 0,0-1 0 0 0,8 7 0 0 0,-9-7 8 0 0,1-2-1 0 0,0 1 0 0 0,0 0 1 0 0,0 0-1 0 0,0-1 1 0 0,0 0-1 0 0,0 1 1 0 0,0-1-1 0 0,0 0 0 0 0,1-1 1 0 0,-1 1-1 0 0,0 0 1 0 0,1-1-1 0 0,-1 0 1 0 0,0 0-1 0 0,1 0 0 0 0,-1 0 1 0 0,0 0-1 0 0,1-1 1 0 0,-1 0-1 0 0,0 1 1 0 0,0-1-1 0 0,1 0 0 0 0,-1-1 1 0 0,0 1-1 0 0,0-1 1 0 0,0 1-1 0 0,0-1 1 0 0,-1 0-1 0 0,5-3 1 0 0,2-3 8 0 0,-1-1 0 0 0,0 1 0 0 0,0-2 0 0 0,-1 1 1 0 0,0-1-1 0 0,0 0 0 0 0,-2 0 0 0 0,8-16 1 0 0,-3 2 7 0 0,-1-1 1 0 0,12-46 0 0 0,-8 1 214 0 0,-13 69-250 0 0,-4 5-98 0 0,1 1 99 0 0,-1 0 0 0 0,1 0-1 0 0,0 0 1 0 0,0 1 0 0 0,1-1-1 0 0,0 1 1 0 0,0-1 0 0 0,0 1-1 0 0,0 0 1 0 0,1 0 0 0 0,0 0-1 0 0,0 0 1 0 0,1 0 0 0 0,0 0-1 0 0,1 10 1 0 0,-1 0-2 0 0,1-1-1 0 0,1 1 1 0 0,0 0 0 0 0,1-1 0 0 0,1 0 0 0 0,0 0-1 0 0,11 24 1 0 0,-3-13 47 0 0,2 0-1 0 0,1-2 1 0 0,21 28 0 0 0,-35-51-15 0 0,1 0 1 0 0,-1 0-1 0 0,0 0 1 0 0,0 0-1 0 0,1-1 1 0 0,-1 1 0 0 0,0 0-1 0 0,1-1 1 0 0,-1 1-1 0 0,1-1 1 0 0,-1 1-1 0 0,1-1 1 0 0,-1 0 0 0 0,1 0-1 0 0,-1 0 1 0 0,1 1-1 0 0,-1-1 1 0 0,1-1 0 0 0,-1 1-1 0 0,1 0 1 0 0,-1 0-1 0 0,1 0 1 0 0,-1-1-1 0 0,1 1 1 0 0,-1-1 0 0 0,1 1-1 0 0,-1-1 1 0 0,0 0-1 0 0,3-1 1 0 0,40-26 198 0 0,-9-2-310 0 0,-1-1 0 0 0,52-64 1 0 0,13-14-367 0 0,-86 97 381 0 0,-4 3-8 0 0,0 0 1 0 0,0 0-1 0 0,1 1 1 0 0,0 1-1 0 0,16-9 1 0 0,-22 14 53 0 0,1 0 0 0 0,0 0-1 0 0,1 0 1 0 0,-1 1 0 0 0,0 0 0 0 0,0 0 0 0 0,1 1 0 0 0,-1-1-1 0 0,0 1 1 0 0,1 0 0 0 0,-1 1 0 0 0,0-1 0 0 0,0 1 0 0 0,1 0-1 0 0,-1 0 1 0 0,9 4 0 0 0,65 20-16 0 0,-77-24 327 0 0,-9-23-219 0 0,3 19-61 0 0,1 1-1 0 0,0 0 0 0 0,-1 0 1 0 0,0 0-1 0 0,1 0 1 0 0,-1 0-1 0 0,0 1 1 0 0,0-1-1 0 0,0 1 0 0 0,0 0 1 0 0,0 0-1 0 0,0 1 1 0 0,0-1-1 0 0,-6 1 1 0 0,-2 0-14 0 0,0 2 0 0 0,0-1 0 0 0,1 1 0 0 0,-1 1 0 0 0,1 0 0 0 0,0 1 0 0 0,0 0 0 0 0,0 1 0 0 0,0 0 0 0 0,1 0 0 0 0,0 1 0 0 0,-17 13 0 0 0,14-9-1 0 0,2-3-7 0 0,1 1-1 0 0,0 0 0 0 0,0 0 0 0 0,1 1 0 0 0,0 1 0 0 0,1 0 0 0 0,0 0 0 0 0,1 0 0 0 0,-8 14 1 0 0,13-20 14 0 0,0 0 0 0 0,0 0 1 0 0,1 0-1 0 0,-1 0 1 0 0,1 1-1 0 0,0-1 1 0 0,0 0-1 0 0,1 0 0 0 0,-1 1 1 0 0,1-1-1 0 0,0 1 1 0 0,0-1-1 0 0,1 0 1 0 0,-1 1-1 0 0,1-1 1 0 0,0 0-1 0 0,0 0 0 0 0,0 0 1 0 0,1 1-1 0 0,0-1 1 0 0,-1 0-1 0 0,1-1 1 0 0,1 1-1 0 0,-1 0 0 0 0,0 0 1 0 0,1-1-1 0 0,0 0 1 0 0,0 1-1 0 0,0-1 1 0 0,5 4-1 0 0,1 0 14 0 0,1 1 0 0 0,0-2 0 0 0,0 1 0 0 0,1-1 0 0 0,0-1 0 0 0,0 0 0 0 0,16 5 0 0 0,-22-8 28 0 0,1 0 1 0 0,0-1 0 0 0,-1 0-1 0 0,1 0 1 0 0,0 0-1 0 0,-1 0 1 0 0,1-1-1 0 0,0 0 1 0 0,0 0 0 0 0,-1-1-1 0 0,1 1 1 0 0,0-1-1 0 0,0-1 1 0 0,-1 1-1 0 0,1-1 1 0 0,-1 0 0 0 0,8-3-1 0 0,-6-1 3 0 0,0 0 0 0 0,0 0 0 0 0,-1-1-1 0 0,1 1 1 0 0,-2-1 0 0 0,1-1 0 0 0,-1 1 0 0 0,0-1-1 0 0,0 0 1 0 0,-1 0 0 0 0,0 0 0 0 0,-1-1 0 0 0,4-12-1 0 0,3-17 6 0 0,11-71 0 0 0,-14 67-13 0 0,-1 1-7 0 0,-1 0-1 0 0,-1 0 0 0 0,-3 0 1 0 0,-1-1-1 0 0,-2 1 0 0 0,-2-1 1 0 0,-2 1-1 0 0,-2 1 0 0 0,-24-76 1 0 0,-9-1 238 0 0,41 115-303 0 0,0 3-130 0 0,0 0 167 0 0,0 0 0 0 0,0 0 0 0 0,-1 0 0 0 0,1 0 0 0 0,0 0-1 0 0,0 0 1 0 0,-1 0 0 0 0,1 0 0 0 0,-1 0 0 0 0,1 0 0 0 0,-1 0 0 0 0,1-1 0 0 0,-1 1-1 0 0,1 0 1 0 0,-1 0 0 0 0,0 0 0 0 0,1-1 0 0 0,-2 2 0 0 0,1-2 1 0 0,0 1 0 0 0,0 0-1 0 0,0 0 1 0 0,1 0 0 0 0,-1 0 0 0 0,0 0 0 0 0,1 0 0 0 0,-1 0 0 0 0,0 1-1 0 0,1-1 1 0 0,-1 0 0 0 0,1 0 0 0 0,0 0 0 0 0,-1 1 0 0 0,1-1 0 0 0,0 0-1 0 0,0 0 1 0 0,0 1 0 0 0,0 1 0 0 0,-1 92-98 0 0,0 59 26 0 0,30 263 0 0 0,-27-404 75 0 0,1 0 0 0 0,0 0 0 0 0,0-1 0 0 0,1 1 0 0 0,1-1 0 0 0,0 0 0 0 0,1 0 0 0 0,0 0 0 0 0,14 20 0 0 0,-13-25 10 0 0,-1 0-1 0 0,2 0 1 0 0,-1 0 0 0 0,1-1 0 0 0,0 0-1 0 0,0 0 1 0 0,0-1 0 0 0,1 0 0 0 0,0-1-1 0 0,0 0 1 0 0,0 0 0 0 0,1-1 0 0 0,14 4-1 0 0,11-1-517 0 0,-1-1-1 0 0,1-1 1 0 0,0-2-1 0 0,0-1 1 0 0,0-2-1 0 0,53-9 1 0 0,-51 3-846 0 0</inkml:trace>
-</inkml:ink>
-</file>
-
-<file path=ppt/ink/ink4.xml><?xml version="1.0" encoding="utf-8"?>
-<inkml:ink xmlns:inkml="http://www.w3.org/2003/InkML">
-  <inkml:definitions>
-    <inkml:context xml:id="ctx0">
-      <inkml:inkSource xml:id="inkSrc0">
-        <inkml:traceFormat>
-          <inkml:channel name="X" type="integer" min="-2.14748E9" max="2.14748E9" units="cm"/>
-          <inkml:channel name="Y" type="integer" min="-2.14748E9" max="2.14748E9" units="cm"/>
-          <inkml:channel name="F" type="integer" max="32767" units="dev"/>
-          <inkml:channel name="OA" type="integer" max="360" units="deg"/>
-          <inkml:channel name="OE" type="integer" max="90" units="deg"/>
-        </inkml:traceFormat>
-        <inkml:channelProperties>
-          <inkml:channelProperty channel="X" name="resolution" value="1000" units="1/cm"/>
-          <inkml:channelProperty channel="Y" name="resolution" value="1000" units="1/cm"/>
-          <inkml:channelProperty channel="F" name="resolution" value="0" units="1/dev"/>
-          <inkml:channelProperty channel="OA" name="resolution" value="1000" units="1/deg"/>
-          <inkml:channelProperty channel="OE" name="resolution" value="1000" units="1/deg"/>
-        </inkml:channelProperties>
-      </inkml:inkSource>
-      <inkml:timestamp xml:id="ts0" timeString="2026-03-19T18:27:57.472"/>
-    </inkml:context>
-    <inkml:brush xml:id="br0">
-      <inkml:brushProperty name="width" value="0.2" units="cm"/>
-      <inkml:brushProperty name="height" value="0.2" units="cm"/>
-      <inkml:brushProperty name="color" value="#66CC00"/>
-    </inkml:brush>
-  </inkml:definitions>
-  <inkml:trace contextRef="#ctx0" brushRef="#br0">482 46 5757 0 0,'0'0'-281'0'0,"-6"-14"950"0"0,0 10-641 0 0,0 0 0 0 0,0 1 0 0 0,-1-1-1 0 0,1 1 1 0 0,-1 1 0 0 0,0-1 0 0 0,0 1 0 0 0,1 0-1 0 0,-2 1 1 0 0,1 0 0 0 0,0 0 0 0 0,0 0 0 0 0,0 1-1 0 0,0 0 1 0 0,-1 0 0 0 0,1 1 0 0 0,0 0 0 0 0,0 0-1 0 0,-11 4 1 0 0,-2 1-67 0 0,0 1 0 0 0,1 0 0 0 0,0 1 0 0 0,1 1 0 0 0,0 1 0 0 0,0 1 0 0 0,1 0 0 0 0,0 1 0 0 0,1 1 0 0 0,1 1 0 0 0,0 0 0 0 0,0 1 0 0 0,2 0 0 0 0,0 1 0 0 0,-15 26 0 0 0,21-31 14 0 0,0 1 1 0 0,1 1-1 0 0,1-1 0 0 0,0 1 0 0 0,1 0 0 0 0,1 0 1 0 0,0 0-1 0 0,0 0 0 0 0,1 1 0 0 0,0 20 0 0 0,2-27 24 0 0,1 0-1 0 0,-1-1 0 0 0,1 1 0 0 0,1 0 0 0 0,-1-1 0 0 0,1 1 0 0 0,0-1 0 0 0,1 1 0 0 0,-1-1 0 0 0,1 0 0 0 0,1 0 1 0 0,-1 0-1 0 0,1-1 0 0 0,0 1 0 0 0,0-1 0 0 0,1 0 0 0 0,-1 0 0 0 0,1 0 0 0 0,0 0 0 0 0,0-1 0 0 0,1 0 0 0 0,10 6 1 0 0,9 2 12 0 0,0-1 1 0 0,0-1 0 0 0,1-1-1 0 0,0-2 1 0 0,1 0 0 0 0,41 4-1 0 0,169 5 93 0 0,-208-16-89 0 0,225 13 432 0 0,-251-13-394 0 0,36 0 227 0 0,-17-10-3740 0 0</inkml:trace>
-</inkml:ink>
-</file>
-
-<file path=ppt/ink/ink40.xml><?xml version="1.0" encoding="utf-8"?>
-<inkml:ink xmlns:inkml="http://www.w3.org/2003/InkML">
-  <inkml:definitions>
-    <inkml:context xml:id="ctx0">
-      <inkml:inkSource xml:id="inkSrc0">
-        <inkml:traceFormat>
-          <inkml:channel name="X" type="integer" min="-2.14748E9" max="2.14748E9" units="cm"/>
-          <inkml:channel name="Y" type="integer" min="-2.14748E9" max="2.14748E9" units="cm"/>
-          <inkml:channel name="F" type="integer" max="32767" units="dev"/>
-          <inkml:channel name="OA" type="integer" max="360" units="deg"/>
-          <inkml:channel name="OE" type="integer" max="90" units="deg"/>
-        </inkml:traceFormat>
-        <inkml:channelProperties>
-          <inkml:channelProperty channel="X" name="resolution" value="1000" units="1/cm"/>
-          <inkml:channelProperty channel="Y" name="resolution" value="1000" units="1/cm"/>
-          <inkml:channelProperty channel="F" name="resolution" value="0" units="1/dev"/>
-          <inkml:channelProperty channel="OA" name="resolution" value="1000" units="1/deg"/>
-          <inkml:channelProperty channel="OE" name="resolution" value="1000" units="1/deg"/>
-        </inkml:channelProperties>
-      </inkml:inkSource>
-      <inkml:timestamp xml:id="ts0" timeString="2026-03-19T18:41:34.641"/>
-    </inkml:context>
-    <inkml:brush xml:id="br0">
-      <inkml:brushProperty name="width" value="0.2" units="cm"/>
-      <inkml:brushProperty name="height" value="0.2" units="cm"/>
-      <inkml:brushProperty name="color" value="#FFC114"/>
-    </inkml:brush>
-  </inkml:definitions>
-  <inkml:trace contextRef="#ctx0" brushRef="#br0">5 87 4012 0 0,'-1'-1'-38'0'0,"1"1"0"0"0,-1-1-1 0 0,1 0 1 0 0,0 1-1 0 0,-1-1 1 0 0,1 0 0 0 0,0 0-1 0 0,0 1 1 0 0,-1-1 0 0 0,1 0-1 0 0,0 0 1 0 0,0 0 0 0 0,0 1-1 0 0,0-1 1 0 0,0 0-1 0 0,0 0 1 0 0,0 0 0 0 0,0 1-1 0 0,0-1 1 0 0,1 0 0 0 0,-1 0-1 0 0,0 1 1 0 0,0-1-1 0 0,1 0 1 0 0,-1 0 0 0 0,0 1-1 0 0,1-1 1 0 0,-1 0 0 0 0,1 1-1 0 0,-1-1 1 0 0,1 0-1 0 0,-1 1 1 0 0,1-1 0 0 0,0 1-1 0 0,0-1 1 0 0,0 0-18 0 0,1-1 42 0 0,0 0 0 0 0,0 0 0 0 0,0 0 0 0 0,0 0 0 0 0,0 1 0 0 0,0-1 0 0 0,0 1 0 0 0,0-1 0 0 0,1 1 0 0 0,-1 0 0 0 0,1 0 0 0 0,-1 0 0 0 0,1 0 0 0 0,2 0 0 0 0,1-1-7 0 0,78-28-5 0 0,-80 28 29 0 0,26-1 0 0 0,-12 2-7 0 0,0 1-1 0 0,0 1 1 0 0,0 0 0 0 0,34 8-1 0 0,-42-6 3 0 0,-1-1 0 0 0,0 1 0 0 0,0 1 0 0 0,0 0 0 0 0,0 0 0 0 0,0 1 0 0 0,-1 0 0 0 0,0 1 0 0 0,0-1 0 0 0,12 13 0 0 0,-19-17 12 0 0,1 1 0 0 0,-1-1 1 0 0,0 1-1 0 0,1-1 0 0 0,-1 1 0 0 0,0 0 1 0 0,0 0-1 0 0,0-1 0 0 0,0 1 1 0 0,-1 0-1 0 0,1 0 0 0 0,0 0 1 0 0,-1 0-1 0 0,1 0 0 0 0,-1 0 1 0 0,0 0-1 0 0,0 0 0 0 0,0 0 1 0 0,0 0-1 0 0,0 0 0 0 0,-1 3 1 0 0,0-1 16 0 0,0 0 0 0 0,0-1 1 0 0,-1 1-1 0 0,0 0 0 0 0,1-1 1 0 0,-1 1-1 0 0,-1-1 1 0 0,1 0-1 0 0,0 1 0 0 0,-5 2 1 0 0,-5 7 85 0 0,-2-1 0 0 0,0-1 0 0 0,-27 17 0 0 0,39-27-107 0 0,-15 11 65 0 0,-7 3 319 0 0,0 0 0 0 0,-49 21 0 0 0,71-35-102 0 0,21 2-260 0 0,0 0 1 0 0,-1 1-1 0 0,1 0 0 0 0,26 12 0 0 0,-30-11-26 0 0,12 5-32 0 0,0 0 1 0 0,32 19-1 0 0,-48-22 18 0 0,0-1 1 0 0,-1 1-1 0 0,0 0 0 0 0,0 1 1 0 0,-1 0-1 0 0,0 1 0 0 0,15 18 1 0 0,-23-26 13 0 0,0 1-1 0 0,1 0 1 0 0,-1 0 0 0 0,0-1 0 0 0,0 1 0 0 0,0 0-1 0 0,0 0 1 0 0,0 0 0 0 0,-1 0 0 0 0,1 0 0 0 0,-1 0-1 0 0,1 0 1 0 0,-1 0 0 0 0,0 0 0 0 0,1 1 0 0 0,-1-1 0 0 0,0 0-1 0 0,0 0 1 0 0,-1 0 0 0 0,1 0 0 0 0,0 0 0 0 0,-1 0-1 0 0,1 0 1 0 0,-1 0 0 0 0,-1 4 0 0 0,-1-3 11 0 0,1 0 1 0 0,-1 0-1 0 0,0 0 1 0 0,0 0-1 0 0,0 0 1 0 0,0 0-1 0 0,-1-1 0 0 0,1 0 1 0 0,-1 1-1 0 0,1-1 1 0 0,-1-1-1 0 0,-5 3 1 0 0,-11 3 66 0 0,0-1 1 0 0,-1-1-1 0 0,0 0 1 0 0,-22 1-1 0 0,27-4 36 0 0,0 0 0 0 0,0-1 0 0 0,-1-1-1 0 0,1 0 1 0 0,-1-1 0 0 0,-25-6 0 0 0,20-7-2953 0 0,20 6 1339 0 0</inkml:trace>
-</inkml:ink>
-</file>
-
-<file path=ppt/ink/ink5.xml><?xml version="1.0" encoding="utf-8"?>
-<inkml:ink xmlns:inkml="http://www.w3.org/2003/InkML">
-  <inkml:definitions>
-    <inkml:context xml:id="ctx0">
-      <inkml:inkSource xml:id="inkSrc0">
-        <inkml:traceFormat>
-          <inkml:channel name="X" type="integer" min="-2.14748E9" max="2.14748E9" units="cm"/>
-          <inkml:channel name="Y" type="integer" min="-2.14748E9" max="2.14748E9" units="cm"/>
-          <inkml:channel name="F" type="integer" max="32767" units="dev"/>
-          <inkml:channel name="OA" type="integer" max="360" units="deg"/>
-          <inkml:channel name="OE" type="integer" max="90" units="deg"/>
-        </inkml:traceFormat>
-        <inkml:channelProperties>
-          <inkml:channelProperty channel="X" name="resolution" value="1000" units="1/cm"/>
-          <inkml:channelProperty channel="Y" name="resolution" value="1000" units="1/cm"/>
-          <inkml:channelProperty channel="F" name="resolution" value="0" units="1/dev"/>
-          <inkml:channelProperty channel="OA" name="resolution" value="1000" units="1/deg"/>
-          <inkml:channelProperty channel="OE" name="resolution" value="1000" units="1/deg"/>
-        </inkml:channelProperties>
-      </inkml:inkSource>
-      <inkml:timestamp xml:id="ts0" timeString="2026-03-19T18:28:01.528"/>
-    </inkml:context>
-    <inkml:brush xml:id="br0">
-      <inkml:brushProperty name="width" value="0.2" units="cm"/>
-      <inkml:brushProperty name="height" value="0.2" units="cm"/>
-      <inkml:brushProperty name="color" value="#66CC00"/>
-    </inkml:brush>
-  </inkml:definitions>
-  <inkml:trace contextRef="#ctx0" brushRef="#br0">9 45 4216 0 0,'1'-4'127'0'0,"-1"0"0"0"0,0 0 1 0 0,-1 0-1 0 0,1 0 0 0 0,-1 0 0 0 0,0 0 0 0 0,0 0 0 0 0,-4-9 1099 0 0,5 18-1882 0 0,0 38 577 0 0,2 0 0 0 0,2 0 0 0 0,2 0 0 0 0,15 54 0 0 0,-9-41 67 0 0,6 26 37 0 0,4 0 0 0 0,52 126 0 0 0,-61-175 1 0 0,15 53 0 0 0,-20-65 1420 0 0,-8-42 1292 0 0,1-17-2494 0 0,1 25-198 0 0,3-23-80 0 0,15-49-1 0 0,-16 73-55 0 0,0 1 0 0 0,0 0 1 0 0,1 0-1 0 0,1 0 0 0 0,0 1 0 0 0,1-1 1 0 0,-1 2-1 0 0,12-13 0 0 0,-10 14-198 0 0,0 0 1 0 0,1 1-1 0 0,0 0 0 0 0,16-9 0 0 0,-23 15 158 0 0,41 9-536 0 0,-37-4 620 0 0,0-1 0 0 0,0 0 0 0 0,0 1 0 0 0,0 0 0 0 0,-1 1 0 0 0,0-1-1 0 0,0 1 1 0 0,0 0 0 0 0,0 0 0 0 0,-1 1 0 0 0,0-1 0 0 0,0 1 0 0 0,0 0 0 0 0,-1 0-1 0 0,5 12 1 0 0,0 6-9 0 0,0 0-1 0 0,-2 0 0 0 0,3 29 1 0 0,8 26-73 0 0,-16-71 140 0 0,1 0 0 0 0,0-1 1 0 0,1 1-1 0 0,-1-1 1 0 0,2 0-1 0 0,-1 1 1 0 0,1-2-1 0 0,0 1 1 0 0,0 0-1 0 0,1-1 1 0 0,0 0-1 0 0,0 0 1 0 0,0 0-1 0 0,1-1 0 0 0,0 1 1 0 0,0-1-1 0 0,0-1 1 0 0,1 1-1 0 0,0-1 1 0 0,-1 0-1 0 0,2-1 1 0 0,-1 0-1 0 0,0 0 1 0 0,1 0-1 0 0,12 2 1 0 0,-16-4 6 0 0,1-1 0 0 0,-1 1 0 0 0,1-1 0 0 0,-1 0 0 0 0,1 0 0 0 0,-1 0 0 0 0,0-1 1 0 0,1 1-1 0 0,-1-1 0 0 0,1 0 0 0 0,-1-1 0 0 0,0 1 0 0 0,0-1 0 0 0,1 0 0 0 0,-1 0 1 0 0,0 0-1 0 0,-1 0 0 0 0,1-1 0 0 0,0 1 0 0 0,-1-1 0 0 0,1 0 0 0 0,-1 0 0 0 0,0 0 1 0 0,0-1-1 0 0,0 1 0 0 0,-1-1 0 0 0,5-6 0 0 0,6-12 43 0 0,-1 0 1 0 0,-1-1-1 0 0,15-42 1 0 0,-16 39-24 0 0,-2 4 191 0 0,0 1 0 0 0,-2-1 0 0 0,0 0-1 0 0,-2-1 1 0 0,3-26 0 0 0,-7 47-181 0 0,5-29 88 0 0,-4 30-164 0 0,0-5-9 0 0,0 3-50 0 0,-2 7-439 0 0,-3 19 452 0 0,1 0 0 0 0,1 0 0 0 0,0 0 1 0 0,2 0-1 0 0,1 0 0 0 0,7 44 0 0 0,-7-59 77 0 0,1 0 1 0 0,0 0-1 0 0,1 0 0 0 0,0 0 0 0 0,0 0 1 0 0,0-1-1 0 0,1 1 0 0 0,1-1 0 0 0,-1 0 1 0 0,1 0-1 0 0,0-1 0 0 0,1 1 0 0 0,-1-1 1 0 0,1 0-1 0 0,0-1 0 0 0,1 1 0 0 0,-1-1 1 0 0,1-1-1 0 0,0 1 0 0 0,1-1 0 0 0,-1 0 1 0 0,15 5-1 0 0,-18-8 8 0 0,1 1-1 0 0,0-1 1 0 0,0 0-1 0 0,0-1 0 0 0,0 1 1 0 0,0-1-1 0 0,0 0 1 0 0,0 0-1 0 0,-1-1 1 0 0,1 1-1 0 0,0-1 1 0 0,0 0-1 0 0,0 0 1 0 0,0-1-1 0 0,6-2 1 0 0,-3 0-5 0 0,0-1-1 0 0,0 0 1 0 0,-1 0 0 0 0,0 0-1 0 0,0-1 1 0 0,0 0 0 0 0,11-14 0 0 0,-2 1-19 0 0,-2-1 0 0 0,-1-1 1 0 0,-1 0-1 0 0,0-1 1 0 0,11-30-1 0 0,23-85 401 0 0,-45 134-802 0 0,-3 13 184 0 0,-2 12 155 0 0,0 1 1 0 0,-1 40 0 0 0,7-41 34 0 0,1 0 0 0 0,8 28 0 0 0,-9-43 35 0 0,1 1 0 0 0,0-1 0 0 0,0 1 0 0 0,1-1 0 0 0,0 0 0 0 0,0 0 0 0 0,1 0 0 0 0,0-1 1 0 0,9 11-1 0 0,-3-7 23 0 0,0 1 0 0 0,1-1 0 0 0,0-1 0 0 0,0 0 0 0 0,1-1 0 0 0,0 0 0 0 0,27 12 0 0 0,-35-19-5 0 0,-1 1-1 0 0,1-1 0 0 0,-1 0 0 0 0,1 0 0 0 0,-1 0 0 0 0,1-1 0 0 0,-1 1 0 0 0,1-1 0 0 0,0-1 1 0 0,-1 1-1 0 0,1 0 0 0 0,0-1 0 0 0,-1 0 0 0 0,1 0 0 0 0,-1-1 0 0 0,0 1 0 0 0,1-1 1 0 0,-1 0-1 0 0,0 0 0 0 0,0 0 0 0 0,0 0 0 0 0,0-1 0 0 0,0 0 0 0 0,-1 0 0 0 0,1 0 0 0 0,-1 0 1 0 0,0 0-1 0 0,0-1 0 0 0,0 1 0 0 0,3-7 0 0 0,2-2 3 0 0,-1 0 0 0 0,-1-1-1 0 0,0 0 1 0 0,0 0 0 0 0,-2 0 0 0 0,0-1-1 0 0,3-14 1 0 0,12-103 216 0 0,-14 87 8 0 0,1-29 48 0 0,-6 72-305 0 0,7 143-1474 0 0,18 49 1283 0 0,-22-174 187 0 0,6 34 487 0 0,-9-50-218 0 0,1-23 2753 0 0,3-5-3126 0 0,15-45 1 0 0,-9 48-50 0 0,1 0 0 0 0,2 1 0 0 0,0 0 0 0 0,16-21 0 0 0,-23 36 45 0 0,0 1 1 0 0,0-1-1 0 0,1 1 1 0 0,0 0-1 0 0,0 1 1 0 0,1 0-1 0 0,-1 0 1 0 0,1 0-1 0 0,1 1 0 0 0,-1 0 1 0 0,1 1-1 0 0,0 0 1 0 0,17-6-1 0 0,-25 10-53 0 0,24 5-154 0 0,-22-4 298 0 0,-1 0 1 0 0,1 1-1 0 0,0-1 0 0 0,0 1 0 0 0,-1 0 0 0 0,1 0 0 0 0,-1 0 0 0 0,0 0 1 0 0,1 0-1 0 0,-1 0 0 0 0,0 0 0 0 0,0 1 0 0 0,0-1 0 0 0,-1 1 0 0 0,1 0 1 0 0,-1-1-1 0 0,1 1 0 0 0,-1 0 0 0 0,0 0 0 0 0,0 0 0 0 0,1 6 0 0 0,2 7-64 0 0,-1 0-1 0 0,1 31 1 0 0,-3-28 16 0 0,0-9 77 0 0,0 0 0 0 0,1 0 0 0 0,0-1 1 0 0,0 1-1 0 0,1-1 0 0 0,0 1 1 0 0,1-1-1 0 0,0 0 0 0 0,0 0 1 0 0,1 0-1 0 0,0-1 0 0 0,1 0 1 0 0,0 0-1 0 0,0 0 0 0 0,1-1 0 0 0,0 0 1 0 0,0 0-1 0 0,0 0 0 0 0,1-1 1 0 0,0 0-1 0 0,0-1 0 0 0,1 0 1 0 0,0 0-1 0 0,10 4 0 0 0,-11-6 5 0 0,13 7 73 0 0,1-1 1 0 0,35 10-1 0 0,-51-18-10 0 0,-1 0 0 0 0,0 1 1 0 0,1-2-1 0 0,-1 1 0 0 0,0-1 1 0 0,1 0-1 0 0,-1 0 0 0 0,1 0 0 0 0,-1-1 1 0 0,0 1-1 0 0,1-1 0 0 0,-1-1 1 0 0,0 1-1 0 0,1-1 0 0 0,-1 0 0 0 0,0 0 1 0 0,5-4-1 0 0,-4 1-21 0 0,-1 0 0 0 0,0 0-1 0 0,0-1 1 0 0,0 1 0 0 0,-1-1 0 0 0,1 0 0 0 0,-2-1 0 0 0,1 1-1 0 0,-1-1 1 0 0,0 0 0 0 0,0 0 0 0 0,0 0 0 0 0,1-11 0 0 0,4-16 261 0 0,5-56 1 0 0,-9 57-248 0 0,7-58-103 0 0,-3 0 0 0 0,-4-1 1 0 0,-11-123-1 0 0,2 162 170 0 0,2 20-142 0 0,-1 1 0 0 0,-9-38 1 0 0,13 68-64 0 0,-2 39-317 0 0,1 28 212 0 0,19 77 96 0 0,6 0 0 0 0,60 195 1 0 0,-41-207 238 0 0,-39-117 2299 0 0,-11-32-1589 0 0,-2-22-829 0 0,3 0 1 0 0,2 0 0 0 0,1-1-1 0 0,2 1 1 0 0,2-1 0 0 0,8-58 0 0 0,-9 96-95 0 0,1-1 0 0 0,0 0 0 0 0,-1 0 0 0 0,1 0 0 0 0,1 1 0 0 0,-1-1 0 0 0,1 0 0 0 0,0 1 0 0 0,0-1 0 0 0,0 1 0 0 0,0 0 1 0 0,1 0-1 0 0,0 0 0 0 0,0 0 0 0 0,5-6 0 0 0,-2 7-20 0 0,-1 0 1 0 0,0 0-1 0 0,1 0 1 0 0,-1 1 0 0 0,1 0-1 0 0,0 0 1 0 0,0 0-1 0 0,0 1 1 0 0,0 0-1 0 0,0 0 1 0 0,0 1-1 0 0,8-1 1 0 0,3 1-75 0 0,-1 0 0 0 0,1 1 0 0 0,-1 1 0 0 0,32 7 0 0 0,-41-8 91 0 0,1 1-1 0 0,-1 0 0 0 0,0 1 1 0 0,0 0-1 0 0,0 0 1 0 0,0 0-1 0 0,-1 1 0 0 0,0 0 1 0 0,1 1-1 0 0,-1-1 1 0 0,0 1-1 0 0,9 10 1 0 0,-14-13 65 0 0,0-1 0 0 0,-1 0 0 0 0,1 1 0 0 0,0-1 0 0 0,-1 0 0 0 0,1 1 0 0 0,-1-1 0 0 0,0 1 0 0 0,1-1 1 0 0,-1 1-1 0 0,0-1 0 0 0,0 0 0 0 0,0 1 0 0 0,0-1 0 0 0,0 1 0 0 0,0-1 0 0 0,0 1 0 0 0,-1-1 0 0 0,1 1 1 0 0,0-1-1 0 0,-1 0 0 0 0,1 1 0 0 0,-1-1 0 0 0,0 1 0 0 0,1-1 0 0 0,-1 0 0 0 0,0 0 0 0 0,0 0 0 0 0,0 1 1 0 0,0-1-1 0 0,0 0 0 0 0,0 0 0 0 0,0 0 0 0 0,0 0 0 0 0,0 0 0 0 0,-1-1 0 0 0,1 1 0 0 0,-2 1 0 0 0,-8 5-16 0 0,0-1 0 0 0,0 0-1 0 0,-18 6 1 0 0,18-7-2 0 0,-29 10 163 0 0,-2-2 1 0 0,1-2 0 0 0,-58 7 0 0 0,75-13 798 0 0,31-3-921 0 0,32 9-32 0 0,0 3 0 0 0,-2 1 0 0 0,1 2 0 0 0,-2 1 0 0 0,-1 2 0 0 0,0 2 0 0 0,-1 1-1 0 0,-2 1 1 0 0,0 2 0 0 0,42 45 0 0 0,-31-29-153 0 0,-42-41 110 0 0,3 3 203 0 0</inkml:trace>
-</inkml:ink>
-</file>
-
 <file path=ppt/ink/ink6.xml><?xml version="1.0" encoding="utf-8"?>
-<inkml:ink xmlns:inkml="http://www.w3.org/2003/InkML">
-  <inkml:definitions>
-    <inkml:context xml:id="ctx0">
-      <inkml:inkSource xml:id="inkSrc0">
-        <inkml:traceFormat>
-          <inkml:channel name="X" type="integer" min="-2.14748E9" max="2.14748E9" units="cm"/>
-          <inkml:channel name="Y" type="integer" min="-2.14748E9" max="2.14748E9" units="cm"/>
-          <inkml:channel name="F" type="integer" max="32767" units="dev"/>
-          <inkml:channel name="OA" type="integer" max="360" units="deg"/>
-          <inkml:channel name="OE" type="integer" max="90" units="deg"/>
-        </inkml:traceFormat>
-        <inkml:channelProperties>
-          <inkml:channelProperty channel="X" name="resolution" value="1000" units="1/cm"/>
-          <inkml:channelProperty channel="Y" name="resolution" value="1000" units="1/cm"/>
-          <inkml:channelProperty channel="F" name="resolution" value="0" units="1/dev"/>
-          <inkml:channelProperty channel="OA" name="resolution" value="1000" units="1/deg"/>
-          <inkml:channelProperty channel="OE" name="resolution" value="1000" units="1/deg"/>
-        </inkml:channelProperties>
-      </inkml:inkSource>
-      <inkml:timestamp xml:id="ts0" timeString="2026-03-19T18:28:01.871"/>
-    </inkml:context>
-    <inkml:brush xml:id="br0">
-      <inkml:brushProperty name="width" value="0.2" units="cm"/>
-      <inkml:brushProperty name="height" value="0.2" units="cm"/>
-      <inkml:brushProperty name="color" value="#66CC00"/>
-    </inkml:brush>
-  </inkml:definitions>
-  <inkml:trace contextRef="#ctx0" brushRef="#br0">10 1 4732 0 0,'0'0'-256'0'0,"-6"19"-1744"0"0,4-5 1919 0 0,1 1 1 0 0,1-1 0 0 0,0 1-1 0 0,1-1 1 0 0,3 18 0 0 0,0 3-14 0 0,7 56 6 0 0,4-1 1 0 0,44 148-1 0 0,-53-217 114 0 0,-1 0 0 0 0,-1 1 0 0 0,3 39 0 0 0</inkml:trace>
-</inkml:ink>
-</file>
-
-<file path=ppt/ink/ink7.xml><?xml version="1.0" encoding="utf-8"?>
 <inkml:ink xmlns:inkml="http://www.w3.org/2003/InkML">
   <inkml:definitions>
     <inkml:context xml:id="ctx0">
@@ -1534,7 +990,7 @@
 </inkml:ink>
 </file>
 
-<file path=ppt/ink/ink8.xml><?xml version="1.0" encoding="utf-8"?>
+<file path=ppt/ink/ink7.xml><?xml version="1.0" encoding="utf-8"?>
 <inkml:ink xmlns:inkml="http://www.w3.org/2003/InkML">
   <inkml:definitions>
     <inkml:context xml:id="ctx0">
@@ -1554,7 +1010,7 @@
           <inkml:channelProperty channel="OE" name="resolution" value="1000" units="1/deg"/>
         </inkml:channelProperties>
       </inkml:inkSource>
-      <inkml:timestamp xml:id="ts0" timeString="2026-03-19T18:28:10.298"/>
+      <inkml:timestamp xml:id="ts0" timeString="2026-03-19T18:28:13.133"/>
     </inkml:context>
     <inkml:brush xml:id="br0">
       <inkml:brushProperty name="width" value="0.2" units="cm"/>
@@ -1562,7 +1018,35 @@
       <inkml:brushProperty name="color" value="#66CC00"/>
     </inkml:brush>
   </inkml:definitions>
-  <inkml:trace contextRef="#ctx0" brushRef="#br0">629 394 4756 0 0,'0'0'-199'0'0,"1"-2"-99"0"0,0 2 283 0 0,-1-1 0 0 0,0 1 0 0 0,0-1 0 0 0,0 1-1 0 0,0-1 1 0 0,0 1 0 0 0,1 0 0 0 0,-1-1-1 0 0,0 1 1 0 0,0-1 0 0 0,0 1 0 0 0,0-1-1 0 0,-1 1 1 0 0,1-1 0 0 0,0 1 0 0 0,0-1 0 0 0,0 1-1 0 0,0 0 1 0 0,0-1 0 0 0,0 1 0 0 0,-1-1-1 0 0,-3-3 9 0 0,0 1 0 0 0,-1 0-1 0 0,1 0 1 0 0,-1 0-1 0 0,0 1 1 0 0,1-1 0 0 0,-1 1-1 0 0,0 0 1 0 0,0 1 0 0 0,-1-1-1 0 0,1 1 1 0 0,0 0-1 0 0,0 0 1 0 0,-1 1 0 0 0,1 0-1 0 0,0-1 1 0 0,-1 2 0 0 0,1-1-1 0 0,-9 2 1 0 0,0-1-8 0 0,-15 3-2 0 0,-1 0 0 0 0,0 2 0 0 0,1 1 0 0 0,1 1 0 0 0,-1 2 0 0 0,1 1 0 0 0,1 1 0 0 0,-36 21 0 0 0,46-23 18 0 0,0 1 0 0 0,1 0 0 0 0,0 1 0 0 0,1 1 0 0 0,0 0 0 0 0,1 1 0 0 0,1 0 0 0 0,0 2 0 0 0,1-1 0 0 0,1 1 0 0 0,0 1 0 0 0,1 0 0 0 0,1 1 0 0 0,-7 18 0 0 0,14-31 1 0 0,0 1-1 0 0,1-1 1 0 0,-1 0 0 0 0,1 1 0 0 0,1-1 0 0 0,-1 1 0 0 0,1 0 0 0 0,0-1 0 0 0,0 1 0 0 0,1-1 0 0 0,-1 1 0 0 0,1-1-1 0 0,1 1 1 0 0,-1-1 0 0 0,1 1 0 0 0,2 5 0 0 0,0-4 1 0 0,0 0 1 0 0,1 0-1 0 0,-1-1 0 0 0,1 0 1 0 0,1 0-1 0 0,-1 0 0 0 0,1-1 1 0 0,0 1-1 0 0,0-1 0 0 0,9 5 1 0 0,10 4 8 0 0,1 0 0 0 0,1-2 0 0 0,0-1 0 0 0,0-1 0 0 0,30 6 1 0 0,9 1 27 0 0,119 15 1 0 0,-153-29 19 0 0,1-1-1 0 0,0-1 0 0 0,-1-2 0 0 0,1-2 1 0 0,58-11-1 0 0,-79 10-7 0 0,-1 0-1 0 0,0 0 0 0 0,0-1 1 0 0,-1-1-1 0 0,1 0 1 0 0,-1 0-1 0 0,0-1 1 0 0,-1 0-1 0 0,1-1 1 0 0,-2 0-1 0 0,1 0 1 0 0,-1-1-1 0 0,0 0 1 0 0,-1-1-1 0 0,0 0 1 0 0,0 0-1 0 0,-1 0 0 0 0,-1-1 1 0 0,0 1-1 0 0,7-20 1 0 0,-2-2 15 0 0,-1-1 0 0 0,-1 0-1 0 0,-2 0 1 0 0,-1 0 0 0 0,-2-1 0 0 0,-1-40 0 0 0,-5 20 86 0 0,-3 0-1 0 0,-3 1 1 0 0,-1-1 0 0 0,-3 2-1 0 0,-3-1 1 0 0,-23-54 0 0 0,30 88 46 0 0,-8-32 192 0 0,10 37-623 0 0,2 19-83 0 0,-4 27-94 0 0,7-25 475 0 0,-1 14-109 0 0,0 0-1 0 0,2 0 1 0 0,0 0-1 0 0,2-1 1 0 0,3 29-1 0 0,-1-9 18 0 0,68 584-125 0 0,-62-573 377 0 0,-11-33 3667 0 0,-1-28-3888 0 0,1 0 0 0 0,1 0 1 0 0,-1 0-1 0 0,2 0 0 0 0,-1-1 1 0 0,1 1-1 0 0,1 0 0 0 0,0-1 1 0 0,1 1-1 0 0,0 0 0 0 0,0 0 1 0 0,1 0-1 0 0,0 0 0 0 0,1 1 1 0 0,0-1-1 0 0,9-14 0 0 0,-9 15-111 0 0,1 1-1 0 0,1 0 1 0 0,-1 0-1 0 0,1 0 1 0 0,1 0-1 0 0,0 1 1 0 0,0 0-1 0 0,0 1 1 0 0,1 0-1 0 0,-1 0 1 0 0,2 0-1 0 0,-1 1 1 0 0,1 0-1 0 0,-1 1 1 0 0,1 0-1 0 0,0 0 1 0 0,19-5-1 0 0,-23 9 45 0 0,0-1 0 0 0,0 0 0 0 0,0 1-1 0 0,0 0 1 0 0,0 0 0 0 0,0 1 0 0 0,0-1 0 0 0,-1 1-1 0 0,1 0 1 0 0,0 1 0 0 0,0-1 0 0 0,0 1-1 0 0,-1 0 1 0 0,1 0 0 0 0,-1 0 0 0 0,1 0-1 0 0,-1 1 1 0 0,0 0 0 0 0,0 0 0 0 0,0 0-1 0 0,-1 0 1 0 0,1 1 0 0 0,-1-1 0 0 0,1 1-1 0 0,2 5 1 0 0,1 1 1 0 0,-1 0-1 0 0,-1 1 1 0 0,0 0-1 0 0,0-1 1 0 0,-1 2-1 0 0,0-1 1 0 0,-1 0 0 0 0,-1 1-1 0 0,3 14 1 0 0,-5-20 49 0 0,1 1 1 0 0,1-1-1 0 0,-1 0 1 0 0,1 0 0 0 0,0-1-1 0 0,1 1 1 0 0,-1 0-1 0 0,1-1 1 0 0,0 1 0 0 0,0-1-1 0 0,1 0 1 0 0,0 0-1 0 0,0 0 1 0 0,0-1 0 0 0,6 6-1 0 0,-2-4 17 0 0,0 0 1 0 0,0-1-1 0 0,0 0 0 0 0,1-1 0 0 0,-1 1 1 0 0,1-2-1 0 0,0 1 0 0 0,1-1 0 0 0,10 2 1 0 0,1-2 17 0 0,0 0 1 0 0,1-1-1 0 0,-1-1 1 0 0,1-1-1 0 0,-1-1 0 0 0,1 0 1 0 0,-1-2-1 0 0,28-7 1 0 0,-37 6-26 0 0,0 0 1 0 0,0-1-1 0 0,-1 0 0 0 0,0-1 1 0 0,1 0-1 0 0,-2 0 0 0 0,1-2 1 0 0,-1 1-1 0 0,0-1 0 0 0,-1-1 1 0 0,17-18-1 0 0,-15 13 56 0 0,0-1 0 0 0,-1 0 0 0 0,-1 0 0 0 0,0-1-1 0 0,-1 0 1 0 0,-1 0 0 0 0,10-34 0 0 0,-12 31 496 0 0,1-1 0 0 0,12-23 0 0 0,-18 42-547 0 0,0 1-1 0 0,0-1 0 0 0,-1 1 1 0 0,1-1-1 0 0,0 0 0 0 0,0 1 0 0 0,0-1 1 0 0,-1 1-1 0 0,1-1 0 0 0,0 1 0 0 0,0-1 1 0 0,-1 1-1 0 0,1-1 0 0 0,0 1 1 0 0,-1-1-1 0 0,1 1 0 0 0,-1-1 0 0 0,1 1 1 0 0,-1 0-1 0 0,1-1 0 0 0,-1 1 1 0 0,1 0-1 0 0,-1-1 0 0 0,1 1 0 0 0,-1 0 1 0 0,1-1-1 0 0,-1 1 0 0 0,0 0 0 0 0,1 0 1 0 0,-1 0-1 0 0,1 0 0 0 0,-1 0 1 0 0,0 0-1 0 0,1 0 0 0 0,-1 0 0 0 0,1 0 1 0 0,-1 0-1 0 0,0 0 0 0 0,1 0 1 0 0,-1 0-1 0 0,1 0 0 0 0,-1 0 0 0 0,0 1 1 0 0,1-1-1 0 0,-1 0 0 0 0,1 0 0 0 0,-1 1 1 0 0,1-1-1 0 0,-1 0 0 0 0,1 1 1 0 0,-1-1-1 0 0,0 1 0 0 0,-5 4-23 0 0,1 1 0 0 0,-1-1 0 0 0,1 1 0 0 0,0 1 0 0 0,0-1 0 0 0,1 0 0 0 0,-1 1 0 0 0,2 0-1 0 0,-1 0 1 0 0,1 1 0 0 0,0-1 0 0 0,0 0 0 0 0,1 1 0 0 0,0 0 0 0 0,0 0 0 0 0,1-1 0 0 0,-1 11 0 0 0,2-12-2 0 0,0 0 0 0 0,0 0 0 0 0,0 0 0 0 0,1 0 0 0 0,0 0 1 0 0,0-1-1 0 0,0 1 0 0 0,1 0 0 0 0,0 0 0 0 0,0-1 0 0 0,1 1 0 0 0,-1-1 1 0 0,1 1-1 0 0,0-1 0 0 0,0 0 0 0 0,1 0 0 0 0,0-1 0 0 0,0 1 0 0 0,0-1 0 0 0,0 0 1 0 0,1 0-1 0 0,-1 0 0 0 0,10 6 0 0 0,-1-3-19 0 0,1 0 0 0 0,0 0 1 0 0,0-1-1 0 0,0-1 0 0 0,0-1 0 0 0,1 0 0 0 0,0-1 1 0 0,-1 0-1 0 0,1-1 0 0 0,19 0 0 0 0,-22-2 12 0 0,0-1-1 0 0,-1 0 1 0 0,1-1 0 0 0,0-1-1 0 0,-1 1 1 0 0,1-2 0 0 0,-1 0-1 0 0,0 0 1 0 0,0-1 0 0 0,0 0-1 0 0,-1-1 1 0 0,0 0 0 0 0,13-11-1 0 0,-9 6-10 0 0,-2-1 0 0 0,1 0 0 0 0,-2-1 0 0 0,0 0 0 0 0,0-1 0 0 0,13-23 0 0 0,39-93 724 0 0,-47 93-35 0 0,-14 34-622 0 0,2-2-10 0 0,-3 3-8 0 0,-5 7-78 0 0,0 1 51 0 0,-1 2 1 0 0,2-1-1 0 0,-1 0 1 0 0,1 1 0 0 0,0-1-1 0 0,0 1 1 0 0,1 0-1 0 0,0 0 1 0 0,0 0 0 0 0,1 1-1 0 0,0-1 1 0 0,0 0-1 0 0,1 0 1 0 0,0 1-1 0 0,1-1 1 0 0,0 0 0 0 0,0 0-1 0 0,5 14 1 0 0,-3-7-10 0 0,2-2 1 0 0,0 1 0 0 0,1 0-1 0 0,0-1 1 0 0,1 0-1 0 0,0-1 1 0 0,1 1 0 0 0,0-1-1 0 0,1-1 1 0 0,12 12-1 0 0,-6-8-11 0 0,2-1-1 0 0,-1-1 1 0 0,2 0 0 0 0,0-2-1 0 0,35 18 1 0 0,-41-23 36 0 0,0-1 0 0 0,0 0 0 0 0,1-1 0 0 0,-1-1 0 0 0,1 0 0 0 0,0-1-1 0 0,0 0 1 0 0,0-1 0 0 0,0 0 0 0 0,25-2 0 0 0,-33-1 9 0 0,1 1 0 0 0,0-1-1 0 0,-1 0 1 0 0,1 0 0 0 0,-1 0 0 0 0,0-1-1 0 0,1 0 1 0 0,-1 0 0 0 0,0 0-1 0 0,-1-1 1 0 0,1 0 0 0 0,-1 1-1 0 0,0-2 1 0 0,1 1 0 0 0,-2 0 0 0 0,1-1-1 0 0,0 0 1 0 0,-1 0 0 0 0,0 0-1 0 0,0 0 1 0 0,-1 0 0 0 0,4-10-1 0 0,3-11 83 0 0,-1-1-1 0 0,0 0 0 0 0,4-43 0 0 0,-6 37 125 0 0,-1-2 419 0 0,-2 1 0 0 0,0-42 1 0 0,-3 74-601 0 0,4-14 152 0 0,26 186-3305 0 0,-12-33 2882 0 0,-13-107 1378 0 0,-3-40 919 0 0,4-42-1629 0 0,0 31-508 0 0,1 0 0 0 0,1 1 1 0 0,0 0-1 0 0,2 0 1 0 0,14-21-1 0 0,-17 30-47 0 0,0 0 1 0 0,1 1-1 0 0,1 0 0 0 0,-1 0 0 0 0,1 0 1 0 0,1 2-1 0 0,0-1 0 0 0,0 1 0 0 0,23-13 1 0 0,-30 19 86 0 0,-1 0 0 0 0,1 1 0 0 0,0 0 1 0 0,-1-1-1 0 0,1 1 0 0 0,0 0 0 0 0,0 1 0 0 0,0-1 1 0 0,0 0-1 0 0,0 1 0 0 0,0-1 0 0 0,-1 1 1 0 0,1 0-1 0 0,0 0 0 0 0,0 0 0 0 0,0 1 0 0 0,0-1 1 0 0,0 1-1 0 0,0 0 0 0 0,0-1 0 0 0,0 1 1 0 0,0 0-1 0 0,-1 1 0 0 0,1-1 0 0 0,0 0 0 0 0,-1 1 1 0 0,1 0-1 0 0,-1-1 0 0 0,0 1 0 0 0,1 0 1 0 0,-1 0-1 0 0,0 0 0 0 0,0 1 0 0 0,0-1 0 0 0,0 0 1 0 0,-1 1-1 0 0,1-1 0 0 0,-1 1 0 0 0,0 0 1 0 0,1-1-1 0 0,0 5 0 0 0,2 5-29 0 0,0 0 0 0 0,-1 1 0 0 0,0 0 0 0 0,-1 0 0 0 0,0 0 0 0 0,-1 0 0 0 0,0 0 0 0 0,-2 16 0 0 0,0-16 12 0 0,0 1 0 0 0,1 0 0 0 0,1-1 0 0 0,0 1 0 0 0,1-1 0 0 0,0 1 0 0 0,8 22 0 0 0,-7-30 52 0 0,-1 0-1 0 0,1 1 0 0 0,1-1 1 0 0,-1 0-1 0 0,1-1 1 0 0,0 1-1 0 0,1-1 1 0 0,-1 1-1 0 0,1-1 0 0 0,0 0 1 0 0,0-1-1 0 0,0 1 1 0 0,1-1-1 0 0,0 0 1 0 0,0-1-1 0 0,11 6 0 0 0,11 3 9 0 0,0-2 0 0 0,53 14 0 0 0,-68-21 110 0 0,1-1 0 0 0,0 0 0 0 0,0-1-1 0 0,0 0 1 0 0,-1-1 0 0 0,1-1 0 0 0,0 0 0 0 0,18-4 0 0 0,-26 3-51 0 0,-1 0-1 0 0,0 0 0 0 0,0 0 1 0 0,0-1-1 0 0,0 0 0 0 0,0 0 1 0 0,-1 0-1 0 0,1-1 0 0 0,-1 0 1 0 0,0 0-1 0 0,0 0 0 0 0,0 0 1 0 0,-1 0-1 0 0,1-1 0 0 0,-1 1 1 0 0,0-1-1 0 0,0 0 0 0 0,-1 0 1 0 0,0 0-1 0 0,0-1 0 0 0,0 1 1 0 0,0 0-1 0 0,-1-1 0 0 0,0 1 1 0 0,1-11-1 0 0,1-13 69 0 0,-1-1-1 0 0,-1 1 1 0 0,-6-49 0 0 0,3 60-93 0 0,-52-510 1045 0 0,49 486-782 0 0,2 13-102 0 0,-10-47 0 0 0,12 74-368 0 0,13 137-2534 0 0,81 490 1928 0 0,-83-567 736 0 0,-8-49 46 0 0,6 39 41 0 0,26 83-1 0 0,-32-118 2616 0 0,-15-52-1763 0 0,5-7-712 0 0,2 0 0 0 0,0-78 0 0 0,6 100-295 0 0,2 0-1 0 0,1 0 1 0 0,0 0 0 0 0,2 1 0 0 0,1-1-1 0 0,1 1 1 0 0,10-24 0 0 0,-13 40 9 0 0,-1-1 0 0 0,1 1 0 0 0,1 0 0 0 0,-1 0 0 0 0,1 0 0 0 0,1 1-1 0 0,-1 0 1 0 0,1 0 0 0 0,0 0 0 0 0,1 1 0 0 0,-1-1 0 0 0,1 2 0 0 0,13-8 0 0 0,-9 7 6 0 0,0 0 0 0 0,1 1-1 0 0,0 0 1 0 0,0 1 0 0 0,0 0 0 0 0,0 1 0 0 0,0 0-1 0 0,19 1 1 0 0,-1 2-56 0 0,0 1-1 0 0,0 2 1 0 0,-1 1-1 0 0,1 1 1 0 0,-1 1-1 0 0,53 22 1 0 0,-79-28 125 0 0,0 0 0 0 0,0 0 1 0 0,0 1-1 0 0,0-1 0 0 0,-1 1 1 0 0,1-1-1 0 0,0 1 0 0 0,-1 0 1 0 0,0 0-1 0 0,1 0 0 0 0,-1 0 1 0 0,0 0-1 0 0,0 1 0 0 0,0-1 1 0 0,0 1-1 0 0,0-1 0 0 0,-1 1 1 0 0,2 3-1 0 0,-3-4 18 0 0,0 0-1 0 0,0 0 0 0 0,0-1 1 0 0,0 1-1 0 0,-1 0 1 0 0,1 0-1 0 0,0 0 1 0 0,-1 0-1 0 0,0 0 1 0 0,1 0-1 0 0,-1-1 1 0 0,0 1-1 0 0,0 0 1 0 0,0 0-1 0 0,0-1 1 0 0,0 1-1 0 0,0-1 1 0 0,-1 1-1 0 0,1-1 0 0 0,-1 0 1 0 0,1 1-1 0 0,-1-1 1 0 0,1 0-1 0 0,-1 0 1 0 0,1 0-1 0 0,-1 0 1 0 0,0 0-1 0 0,0 0 1 0 0,-2 0-1 0 0,-19 10-23 0 0,0 0-1 0 0,0-2 0 0 0,-1-1 1 0 0,0-1-1 0 0,-30 6 1 0 0,-126 9 443 0 0,104-14 735 0 0,75-8-1108 0 0,0 0-1 0 0,-1 0 0 0 0,1 0 1 0 0,-1 0-1 0 0,1 0 0 0 0,-1 0 0 0 0,1-1 1 0 0,0 1-1 0 0,-1 0 0 0 0,1-1 1 0 0,0 1-1 0 0,-1-1 0 0 0,1 1 1 0 0,-2-2-1 0 0,-11-3 500 0 0,14 5-538 0 0,1 0-1 0 0,0 0 1 0 0,-1 0-1 0 0,1 0 1 0 0,-1 0-1 0 0,1 0 1 0 0,-1 0-1 0 0,1 0 1 0 0,-1-1-1 0 0,1 1 1 0 0,-1 0 0 0 0,1 0-1 0 0,-1-1 1 0 0,1 1-1 0 0,-1 0 1 0 0,1 0-1 0 0,-1-1 1 0 0,1 1-1 0 0,-1-1 1 0 0,1 1-1 0 0,-1 0 1 0 0,0-1-1 0 0,1 1 1 0 0,-1-2 0 0 0,1 2-2 0 0,-1-1 1 0 0,1 1 0 0 0,-1-1-1 0 0,1 0 1 0 0,-1 1 0 0 0,1-1 0 0 0,-1 1-1 0 0,1-1 1 0 0,0 1 0 0 0,-1 0-1 0 0,1-1 1 0 0,-1 1 0 0 0,1 0 0 0 0,0-1-1 0 0,0 1 1 0 0,-1 0 0 0 0,1 0 0 0 0,0-1-1 0 0,-1 1 1 0 0,1 0 0 0 0,0 0-1 0 0,0 0 1 0 0,-1 0 0 0 0,1 0 0 0 0,0 0-1 0 0,0 0 1 0 0,-1 0 0 0 0,2 1-1 0 0,14 1-38 0 0,-1 2-1 0 0,1-1 0 0 0,-1 2 0 0 0,1 0 0 0 0,-2 1 0 0 0,1 1 1 0 0,-1 0-1 0 0,22 14 0 0 0,8 9-187 0 0,51 45 0 0 0,96 103-916 0 0,-188-174 919 0 0,4 4 489 0 0,26-25-4876 0 0</inkml:trace>
+  <inkml:trace contextRef="#ctx0" brushRef="#br0">81 28 3796 0 0,'-61'-19'1876'0'0,"58"19"-1519"0"0,-5-3-94 0 0,-1 0 230 0 0,10 1-478 0 0,728 26-326 0 0,-629-14 246 0 0,-98-9 43 0 0,43 15-426 0 0,-43-15 407 0 0,3 44-175 0 0,-7-6 113 0 0,-13 68 1 0 0,-1 4 10 0 0,9 79 29 0 0,25 277 1 0 0,-3-216 44 0 0,37 376-66 0 0,-18-438 109 0 0,59 187-1 0 0,-82-303 891 0 0,-10-71-603 0 0,-28 9 752 0 0,-10-11-757 0 0,0-1 0 0 0,-40-8 0 0 0,4 1-102 0 0,-432-25 541 0 0,397 24-630 0 0,105 8-159 0 0,-4 0-200 0 0,-14-4-1097 0 0</inkml:trace>
+</inkml:ink>
+</file>
+
+<file path=ppt/ink/ink8.xml><?xml version="1.0" encoding="utf-8"?>
+<inkml:ink xmlns:inkml="http://www.w3.org/2003/InkML">
+  <inkml:definitions>
+    <inkml:context xml:id="ctx0">
+      <inkml:inkSource xml:id="inkSrc0">
+        <inkml:traceFormat>
+          <inkml:channel name="X" type="integer" min="-2.14748E9" max="2.14748E9" units="cm"/>
+          <inkml:channel name="Y" type="integer" min="-2.14748E9" max="2.14748E9" units="cm"/>
+          <inkml:channel name="F" type="integer" max="32767" units="dev"/>
+        </inkml:traceFormat>
+        <inkml:channelProperties>
+          <inkml:channelProperty channel="X" name="resolution" value="1000" units="1/cm"/>
+          <inkml:channelProperty channel="Y" name="resolution" value="1000" units="1/cm"/>
+          <inkml:channelProperty channel="F" name="resolution" value="0" units="1/dev"/>
+        </inkml:channelProperties>
+      </inkml:inkSource>
+      <inkml:timestamp xml:id="ts0" timeString="2026-09-13T12:23:07.137"/>
+    </inkml:context>
+    <inkml:brush xml:id="br0">
+      <inkml:brushProperty name="width" value="0.1" units="cm"/>
+      <inkml:brushProperty name="height" value="0.1" units="cm"/>
+      <inkml:brushProperty name="color" value="#66CC00"/>
+    </inkml:brush>
+  </inkml:definitions>
+  <inkml:trace contextRef="#ctx0" brushRef="#br0">0 0 24575,'0'0'-8191</inkml:trace>
 </inkml:ink>
 </file>
 
@@ -1586,15 +1070,15 @@
           <inkml:channelProperty channel="OE" name="resolution" value="1000" units="1/deg"/>
         </inkml:channelProperties>
       </inkml:inkSource>
-      <inkml:timestamp xml:id="ts0" timeString="2026-03-19T18:28:11.015"/>
+      <inkml:timestamp xml:id="ts0" timeString="2026-03-19T18:36:03.247"/>
     </inkml:context>
     <inkml:brush xml:id="br0">
       <inkml:brushProperty name="width" value="0.2" units="cm"/>
       <inkml:brushProperty name="height" value="0.2" units="cm"/>
-      <inkml:brushProperty name="color" value="#66CC00"/>
+      <inkml:brushProperty name="color" value="#FFC114"/>
     </inkml:brush>
   </inkml:definitions>
-  <inkml:trace contextRef="#ctx0" brushRef="#br0">17 133 4136 0 0,'-16'-29'88'0'0,"17"25"-86"0"0,0 0 1 0 0,0 1 0 0 0,1-1-1 0 0,-1 0 1 0 0,1 0-1 0 0,0 1 1 0 0,0 0 0 0 0,1-1-1 0 0,-1 1 1 0 0,0 0-1 0 0,1 0 1 0 0,0 0 0 0 0,0 0-1 0 0,0 1 1 0 0,0-1-1 0 0,0 1 1 0 0,1 0 0 0 0,-1-1-1 0 0,1 2 1 0 0,7-4-1 0 0,2-2 0 0 0,1 1 0 0 0,0 0-1 0 0,0 2 1 0 0,20-6-1 0 0,-23 8-23 0 0,0 1-1 0 0,-1 0 1 0 0,1 1-1 0 0,0 0 1 0 0,0 0-1 0 0,0 1 1 0 0,-1 1-1 0 0,1 0 1 0 0,-1 0-1 0 0,1 1 1 0 0,-1 0-1 0 0,15 7 1 0 0,-21-8 12 0 0,0 1-1 0 0,0-1 1 0 0,0 1 0 0 0,-1 0 0 0 0,1-1-1 0 0,-1 1 1 0 0,1 1 0 0 0,-1-1-1 0 0,0 1 1 0 0,0-1 0 0 0,-1 1 0 0 0,1 0-1 0 0,-1 0 1 0 0,0 0 0 0 0,0 0-1 0 0,0 0 1 0 0,0 0 0 0 0,-1 1 0 0 0,0-1-1 0 0,0 1 1 0 0,0-1 0 0 0,0 1 0 0 0,-1-1-1 0 0,1 1 1 0 0,-1-1 0 0 0,0 1-1 0 0,-1 0 1 0 0,1-1 0 0 0,-1 1 0 0 0,0-1-1 0 0,-2 7 1 0 0,-4 11-27 0 0,-1-1 1 0 0,-1 0-1 0 0,-1 0 0 0 0,-1-1 1 0 0,0 0-1 0 0,-2-1 1 0 0,0 0-1 0 0,-23 24 0 0 0,-138 128 304 0 0,158-157-123 0 0,16-14-118 0 0,0 0-1 0 0,-1 0 0 0 0,1 0 0 0 0,0 0 0 0 0,0 1 0 0 0,0-1 1 0 0,-1 0-1 0 0,1 0 0 0 0,0 0 0 0 0,0 1 0 0 0,-1-1 1 0 0,1 0-1 0 0,0 0 0 0 0,0 0 0 0 0,0 1 0 0 0,0-1 0 0 0,0 0 1 0 0,-1 0-1 0 0,1 1 0 0 0,0-1 0 0 0,0 0 0 0 0,0 1 0 0 0,0-1 1 0 0,0 0-1 0 0,0 0 0 0 0,0 1 0 0 0,0-1 0 0 0,0 0 1 0 0,0 0-1 0 0,0 1 0 0 0,0-1 0 0 0,0 0 0 0 0,0 1 0 0 0,0-1 1 0 0,0 0-1 0 0,0 0 0 0 0,1 1 0 0 0,-1-1 0 0 0,0 0 1 0 0,0 0-1 0 0,0 1 0 0 0,1-1 0 0 0,14 5 217 0 0,25-5-163 0 0,68-8 190 0 0,26-3 23 0 0,236 10 1 0 0,-362 1-335 0 0,14 1-29 0 0</inkml:trace>
+  <inkml:trace contextRef="#ctx0" brushRef="#br0">285 50 5813 0 0,'0'0'-226'0'0,"-4"-2"70"0"0,0 19 309 0 0,4 34 85 0 0,0-115 131 0 0,7 63-408 0 0,75-14 55 0 0,120-18 37 0 0,-137 30-623 0 0,-62 3 575 0 0,-1 24-421 0 0,-7-4 410 0 0,1 1 1 0 0,-2 26-1 0 0,0 2-7 0 0,-3 1-17 0 0,2 1 1 0 0,1 54 0 0 0,1-46-49 0 0,4-58 78 0 0,-1 40-17 0 0,2-40 6 0 0,0 34-62 0 0,-14 320-10 0 0,11-45 7 0 0,-2-103 14 0 0,-11 44 126 0 0,-3 33-110 0 0,16-239 35 0 0,2 1 0 0 0,7 52 0 0 0,-1 18 5 0 0,11 100 7 0 0,4-68-5 0 0,-17-103 88 0 0,-3-43-63 0 0,0-1 0 0 0,0 1-1 0 0,0-1 1 0 0,0 0 0 0 0,0 1-1 0 0,0-1 1 0 0,0 0 0 0 0,0 1-1 0 0,-1-1 1 0 0,1 1-1 0 0,-1-1 1 0 0,1 0 0 0 0,-1 1-1 0 0,1-1 1 0 0,-1 0 0 0 0,0 0-1 0 0,1 0 1 0 0,-1 1-1 0 0,0-1 1 0 0,0 0 0 0 0,0 0-1 0 0,-1 1 1 0 0,-37 6 696 0 0,33-7-691 0 0,-375 23 1630 0 0,280-26-905 0 0,98 2-613 0 0,0 0-114 0 0,-12 0-2 0 0,12 0 134 0 0,-10 2-112 0 0</inkml:trace>
 </inkml:ink>
 </file>
 
@@ -1680,7 +1164,7 @@
           <a:p>
             <a:fld id="{CB233BD1-3BA8-448D-9D08-7846095EA517}" type="datetimeFigureOut">
               <a:rPr lang="en-US" smtClean="0"/>
-              <a:t>9/5/2026</a:t>
+              <a:t>9/13/2026</a:t>
             </a:fld>
             <a:endParaRPr lang="en-US"/>
           </a:p>
@@ -2094,7 +1578,7 @@
           <a:p>
             <a:fld id="{6383FAE1-13DE-4511-8C1B-C8AFB720664C}" type="datetimeFigureOut">
               <a:rPr lang="en-US" smtClean="0"/>
-              <a:t>9/5/2026</a:t>
+              <a:t>9/13/2026</a:t>
             </a:fld>
             <a:endParaRPr lang="en-US"/>
           </a:p>
@@ -2292,7 +1776,7 @@
           <a:p>
             <a:fld id="{6383FAE1-13DE-4511-8C1B-C8AFB720664C}" type="datetimeFigureOut">
               <a:rPr lang="en-US" smtClean="0"/>
-              <a:t>9/5/2026</a:t>
+              <a:t>9/13/2026</a:t>
             </a:fld>
             <a:endParaRPr lang="en-US"/>
           </a:p>
@@ -2500,7 +1984,7 @@
           <a:p>
             <a:fld id="{6383FAE1-13DE-4511-8C1B-C8AFB720664C}" type="datetimeFigureOut">
               <a:rPr lang="en-US" smtClean="0"/>
-              <a:t>9/5/2026</a:t>
+              <a:t>9/13/2026</a:t>
             </a:fld>
             <a:endParaRPr lang="en-US"/>
           </a:p>
@@ -2698,7 +2182,7 @@
           <a:p>
             <a:fld id="{6383FAE1-13DE-4511-8C1B-C8AFB720664C}" type="datetimeFigureOut">
               <a:rPr lang="en-US" smtClean="0"/>
-              <a:t>9/5/2026</a:t>
+              <a:t>9/13/2026</a:t>
             </a:fld>
             <a:endParaRPr lang="en-US"/>
           </a:p>
@@ -2973,7 +2457,7 @@
           <a:p>
             <a:fld id="{6383FAE1-13DE-4511-8C1B-C8AFB720664C}" type="datetimeFigureOut">
               <a:rPr lang="en-US" smtClean="0"/>
-              <a:t>9/5/2026</a:t>
+              <a:t>9/13/2026</a:t>
             </a:fld>
             <a:endParaRPr lang="en-US"/>
           </a:p>
@@ -3238,7 +2722,7 @@
           <a:p>
             <a:fld id="{6383FAE1-13DE-4511-8C1B-C8AFB720664C}" type="datetimeFigureOut">
               <a:rPr lang="en-US" smtClean="0"/>
-              <a:t>9/5/2026</a:t>
+              <a:t>9/13/2026</a:t>
             </a:fld>
             <a:endParaRPr lang="en-US"/>
           </a:p>
@@ -3650,7 +3134,7 @@
           <a:p>
             <a:fld id="{6383FAE1-13DE-4511-8C1B-C8AFB720664C}" type="datetimeFigureOut">
               <a:rPr lang="en-US" smtClean="0"/>
-              <a:t>9/5/2026</a:t>
+              <a:t>9/13/2026</a:t>
             </a:fld>
             <a:endParaRPr lang="en-US"/>
           </a:p>
@@ -3791,7 +3275,7 @@
           <a:p>
             <a:fld id="{6383FAE1-13DE-4511-8C1B-C8AFB720664C}" type="datetimeFigureOut">
               <a:rPr lang="en-US" smtClean="0"/>
-              <a:t>9/5/2026</a:t>
+              <a:t>9/13/2026</a:t>
             </a:fld>
             <a:endParaRPr lang="en-US"/>
           </a:p>
@@ -3904,7 +3388,7 @@
           <a:p>
             <a:fld id="{6383FAE1-13DE-4511-8C1B-C8AFB720664C}" type="datetimeFigureOut">
               <a:rPr lang="en-US" smtClean="0"/>
-              <a:t>9/5/2026</a:t>
+              <a:t>9/13/2026</a:t>
             </a:fld>
             <a:endParaRPr lang="en-US"/>
           </a:p>
@@ -4215,7 +3699,7 @@
           <a:p>
             <a:fld id="{6383FAE1-13DE-4511-8C1B-C8AFB720664C}" type="datetimeFigureOut">
               <a:rPr lang="en-US" smtClean="0"/>
-              <a:t>9/5/2026</a:t>
+              <a:t>9/13/2026</a:t>
             </a:fld>
             <a:endParaRPr lang="en-US"/>
           </a:p>
@@ -4506,7 +3990,7 @@
           <a:p>
             <a:fld id="{6383FAE1-13DE-4511-8C1B-C8AFB720664C}" type="datetimeFigureOut">
               <a:rPr lang="en-US" smtClean="0"/>
-              <a:t>9/5/2026</a:t>
+              <a:t>9/13/2026</a:t>
             </a:fld>
             <a:endParaRPr lang="en-US"/>
           </a:p>
@@ -4750,7 +4234,7 @@
           <a:p>
             <a:fld id="{6383FAE1-13DE-4511-8C1B-C8AFB720664C}" type="datetimeFigureOut">
               <a:rPr lang="en-US" smtClean="0"/>
-              <a:t>9/5/2026</a:t>
+              <a:t>9/13/2026</a:t>
             </a:fld>
             <a:endParaRPr lang="en-US"/>
           </a:p>
@@ -5454,7 +4938,7 @@
                   </a:schemeClr>
                 </a:solidFill>
               </a:rPr>
-              <a:t>Sometimes, a large text cannot fit in vector DB. So, we perform chunking.</a:t>
+              <a:t>Sometimes, a large text cannot fit in vector DB. </a:t>
             </a:r>
           </a:p>
           <a:p>
@@ -5470,7 +4954,29 @@
                   </a:schemeClr>
                 </a:solidFill>
               </a:rPr>
-              <a:t>It refers to splitting large text into smaller pieces and then storing these small chunks into vector DB</a:t>
+              <a:t>So, we perform </a:t>
+            </a:r>
+            <a:r>
+              <a:rPr lang="en-US" sz="2400" b="1" i="1" dirty="0">
+                <a:solidFill>
+                  <a:schemeClr val="accent6">
+                    <a:lumMod val="60000"/>
+                    <a:lumOff val="40000"/>
+                  </a:schemeClr>
+                </a:solidFill>
+              </a:rPr>
+              <a:t>chunking</a:t>
+            </a:r>
+            <a:r>
+              <a:rPr lang="en-US" sz="2400" dirty="0">
+                <a:solidFill>
+                  <a:schemeClr val="accent6">
+                    <a:lumMod val="60000"/>
+                    <a:lumOff val="40000"/>
+                  </a:schemeClr>
+                </a:solidFill>
+              </a:rPr>
+              <a:t> - Splitting large text into smaller pieces and then storing these small chunks into vector DB</a:t>
             </a:r>
           </a:p>
         </p:txBody>
@@ -5940,7 +5446,7 @@
         <p:spPr>
           <a:xfrm>
             <a:off x="477520" y="158724"/>
-            <a:ext cx="10292080" cy="1200329"/>
+            <a:ext cx="10292080" cy="1384995"/>
           </a:xfrm>
           <a:prstGeom prst="rect">
             <a:avLst/>
@@ -5958,7 +5464,7 @@
               <a:buChar char="•"/>
             </a:pPr>
             <a:r>
-              <a:rPr lang="en-US" sz="2400" b="1" dirty="0">
+              <a:rPr lang="en-US" sz="2800" b="1" dirty="0">
                 <a:solidFill>
                   <a:schemeClr val="accent6">
                     <a:lumMod val="60000"/>
@@ -5974,7 +5480,7 @@
               <a:buFont typeface="Arial" panose="020B0604020202020204" pitchFamily="34" charset="0"/>
               <a:buChar char="•"/>
             </a:pPr>
-            <a:endParaRPr lang="en-US" sz="2400" dirty="0">
+            <a:endParaRPr lang="en-US" sz="2800" dirty="0">
               <a:solidFill>
                 <a:schemeClr val="accent6">
                   <a:lumMod val="60000"/>
@@ -5985,7 +5491,7 @@
           </a:p>
           <a:p>
             <a:r>
-              <a:rPr lang="en-US" sz="2400" dirty="0">
+              <a:rPr lang="en-US" sz="2800" dirty="0">
                 <a:solidFill>
                   <a:schemeClr val="accent6">
                     <a:lumMod val="60000"/>
@@ -6327,14 +5833,17 @@
             </a:endParaRPr>
           </a:p>
           <a:p>
-            <a:endParaRPr lang="en-US" sz="2400" dirty="0">
-              <a:solidFill>
-                <a:schemeClr val="accent6">
-                  <a:lumMod val="60000"/>
-                  <a:lumOff val="40000"/>
-                </a:schemeClr>
-              </a:solidFill>
-            </a:endParaRPr>
+            <a:r>
+              <a:rPr lang="en-US" sz="2400" dirty="0">
+                <a:solidFill>
+                  <a:schemeClr val="accent6">
+                    <a:lumMod val="60000"/>
+                    <a:lumOff val="40000"/>
+                  </a:schemeClr>
+                </a:solidFill>
+              </a:rPr>
+              <a:t>Word overlaps between chunks</a:t>
+            </a:r>
           </a:p>
         </p:txBody>
       </p:sp>
@@ -6368,8 +5877,8 @@
           </a:prstGeom>
         </p:spPr>
       </p:pic>
-      <mc:AlternateContent xmlns:mc="http://schemas.openxmlformats.org/markup-compatibility/2006" xmlns:p14="http://schemas.microsoft.com/office/powerpoint/2010/main">
-        <mc:Choice Requires="p14">
+      <mc:AlternateContent xmlns:mc="http://schemas.openxmlformats.org/markup-compatibility/2006">
+        <mc:Choice xmlns:p14="http://schemas.microsoft.com/office/powerpoint/2010/main" Requires="p14">
           <p:contentPart p14:bwMode="auto" r:id="rId3">
             <p14:nvContentPartPr>
               <p14:cNvPr id="4" name="Ink 3">
@@ -6383,12 +5892,12 @@
               <p14:nvPr/>
             </p14:nvContentPartPr>
             <p14:xfrm>
-              <a:off x="324864" y="2525256"/>
+              <a:off x="304557" y="2448715"/>
               <a:ext cx="10285200" cy="2217960"/>
             </p14:xfrm>
           </p:contentPart>
         </mc:Choice>
-        <mc:Fallback xmlns="">
+        <mc:Fallback>
           <p:pic>
             <p:nvPicPr>
               <p:cNvPr id="4" name="Ink 3">
@@ -6409,7 +5918,7 @@
             </p:blipFill>
             <p:spPr>
               <a:xfrm>
-                <a:off x="289224" y="2489616"/>
+                <a:off x="268557" y="2412715"/>
                 <a:ext cx="10356840" cy="2289600"/>
               </a:xfrm>
               <a:prstGeom prst="rect">
@@ -6470,6 +5979,171 @@
           </p:pic>
         </mc:Fallback>
       </mc:AlternateContent>
+      <p:sp>
+        <p:nvSpPr>
+          <p:cNvPr id="6" name="TextBox 5">
+            <a:extLst>
+              <a:ext uri="{FF2B5EF4-FFF2-40B4-BE49-F238E27FC236}">
+                <a16:creationId xmlns:a16="http://schemas.microsoft.com/office/drawing/2014/main" id="{FA21F400-8A02-DDF4-57EF-B3727B7371BE}"/>
+              </a:ext>
+            </a:extLst>
+          </p:cNvPr>
+          <p:cNvSpPr txBox="1"/>
+          <p:nvPr/>
+        </p:nvSpPr>
+        <p:spPr>
+          <a:xfrm>
+            <a:off x="10438704" y="4829035"/>
+            <a:ext cx="1955826" cy="461665"/>
+          </a:xfrm>
+          <a:prstGeom prst="rect">
+            <a:avLst/>
+          </a:prstGeom>
+          <a:noFill/>
+        </p:spPr>
+        <p:txBody>
+          <a:bodyPr wrap="square">
+            <a:spAutoFit/>
+          </a:bodyPr>
+          <a:lstStyle/>
+          <a:p>
+            <a:r>
+              <a:rPr lang="en-US" sz="2400" b="1" dirty="0">
+                <a:solidFill>
+                  <a:schemeClr val="accent6">
+                    <a:lumMod val="60000"/>
+                    <a:lumOff val="40000"/>
+                  </a:schemeClr>
+                </a:solidFill>
+              </a:rPr>
+              <a:t>Overlap</a:t>
+            </a:r>
+          </a:p>
+        </p:txBody>
+      </p:sp>
+      <p:grpSp>
+        <p:nvGrpSpPr>
+          <p:cNvPr id="12" name="Group 11">
+            <a:extLst>
+              <a:ext uri="{FF2B5EF4-FFF2-40B4-BE49-F238E27FC236}">
+                <a16:creationId xmlns:a16="http://schemas.microsoft.com/office/drawing/2014/main" id="{40427DA9-4C41-7B5C-9069-E61E1467D667}"/>
+              </a:ext>
+            </a:extLst>
+          </p:cNvPr>
+          <p:cNvGrpSpPr/>
+          <p:nvPr/>
+        </p:nvGrpSpPr>
+        <p:grpSpPr>
+          <a:xfrm>
+            <a:off x="10082664" y="4405896"/>
+            <a:ext cx="828000" cy="309240"/>
+            <a:chOff x="10082664" y="4405896"/>
+            <a:chExt cx="828000" cy="309240"/>
+          </a:xfrm>
+        </p:grpSpPr>
+        <mc:AlternateContent xmlns:mc="http://schemas.openxmlformats.org/markup-compatibility/2006">
+          <mc:Choice xmlns:p14="http://schemas.microsoft.com/office/powerpoint/2010/main" Requires="p14">
+            <p:contentPart p14:bwMode="auto" r:id="rId7">
+              <p14:nvContentPartPr>
+                <p14:cNvPr id="10" name="Ink 9">
+                  <a:extLst>
+                    <a:ext uri="{FF2B5EF4-FFF2-40B4-BE49-F238E27FC236}">
+                      <a16:creationId xmlns:a16="http://schemas.microsoft.com/office/drawing/2014/main" id="{B3A0C361-6BA8-C454-9FD3-4C2E597BED5D}"/>
+                    </a:ext>
+                  </a:extLst>
+                </p14:cNvPr>
+                <p14:cNvContentPartPr/>
+                <p14:nvPr/>
+              </p14:nvContentPartPr>
+              <p14:xfrm>
+                <a:off x="10082664" y="4405896"/>
+                <a:ext cx="821160" cy="281160"/>
+              </p14:xfrm>
+            </p:contentPart>
+          </mc:Choice>
+          <mc:Fallback>
+            <p:pic>
+              <p:nvPicPr>
+                <p:cNvPr id="10" name="Ink 9">
+                  <a:extLst>
+                    <a:ext uri="{FF2B5EF4-FFF2-40B4-BE49-F238E27FC236}">
+                      <a16:creationId xmlns:a16="http://schemas.microsoft.com/office/drawing/2014/main" id="{B3A0C361-6BA8-C454-9FD3-4C2E597BED5D}"/>
+                    </a:ext>
+                  </a:extLst>
+                </p:cNvPr>
+                <p:cNvPicPr/>
+                <p:nvPr/>
+              </p:nvPicPr>
+              <p:blipFill>
+                <a:blip r:embed="rId8"/>
+                <a:stretch>
+                  <a:fillRect/>
+                </a:stretch>
+              </p:blipFill>
+              <p:spPr>
+                <a:xfrm>
+                  <a:off x="10064664" y="4387896"/>
+                  <a:ext cx="856800" cy="316800"/>
+                </a:xfrm>
+                <a:prstGeom prst="rect">
+                  <a:avLst/>
+                </a:prstGeom>
+              </p:spPr>
+            </p:pic>
+          </mc:Fallback>
+        </mc:AlternateContent>
+        <mc:AlternateContent xmlns:mc="http://schemas.openxmlformats.org/markup-compatibility/2006">
+          <mc:Choice xmlns:p14="http://schemas.microsoft.com/office/powerpoint/2010/main" Requires="p14">
+            <p:contentPart p14:bwMode="auto" r:id="rId9">
+              <p14:nvContentPartPr>
+                <p14:cNvPr id="11" name="Ink 10">
+                  <a:extLst>
+                    <a:ext uri="{FF2B5EF4-FFF2-40B4-BE49-F238E27FC236}">
+                      <a16:creationId xmlns:a16="http://schemas.microsoft.com/office/drawing/2014/main" id="{26C9B3FE-C9B7-58DD-56EB-8B64DADB81AC}"/>
+                    </a:ext>
+                  </a:extLst>
+                </p14:cNvPr>
+                <p14:cNvContentPartPr/>
+                <p14:nvPr/>
+              </p14:nvContentPartPr>
+              <p14:xfrm>
+                <a:off x="10753344" y="4568256"/>
+                <a:ext cx="157320" cy="146880"/>
+              </p14:xfrm>
+            </p:contentPart>
+          </mc:Choice>
+          <mc:Fallback>
+            <p:pic>
+              <p:nvPicPr>
+                <p:cNvPr id="11" name="Ink 10">
+                  <a:extLst>
+                    <a:ext uri="{FF2B5EF4-FFF2-40B4-BE49-F238E27FC236}">
+                      <a16:creationId xmlns:a16="http://schemas.microsoft.com/office/drawing/2014/main" id="{26C9B3FE-C9B7-58DD-56EB-8B64DADB81AC}"/>
+                    </a:ext>
+                  </a:extLst>
+                </p:cNvPr>
+                <p:cNvPicPr/>
+                <p:nvPr/>
+              </p:nvPicPr>
+              <p:blipFill>
+                <a:blip r:embed="rId10"/>
+                <a:stretch>
+                  <a:fillRect/>
+                </a:stretch>
+              </p:blipFill>
+              <p:spPr>
+                <a:xfrm>
+                  <a:off x="10735704" y="4550256"/>
+                  <a:ext cx="192960" cy="182520"/>
+                </a:xfrm>
+                <a:prstGeom prst="rect">
+                  <a:avLst/>
+                </a:prstGeom>
+              </p:spPr>
+            </p:pic>
+          </mc:Fallback>
+        </mc:AlternateContent>
+      </p:grpSp>
     </p:spTree>
     <p:extLst>
       <p:ext uri="{BB962C8B-B14F-4D97-AF65-F5344CB8AC3E}">
@@ -6567,7 +6241,7 @@
         <p:spPr>
           <a:xfrm>
             <a:off x="393192" y="870448"/>
-            <a:ext cx="9317736" cy="4893647"/>
+            <a:ext cx="9317736" cy="5632311"/>
           </a:xfrm>
           <a:prstGeom prst="rect">
             <a:avLst/>
@@ -6591,11 +6265,10 @@
           </a:p>
           <a:p>
             <a:r>
-              <a:rPr lang="en-US" sz="2400" dirty="0">
+              <a:rPr lang="en-US" sz="2400" i="1" dirty="0">
                 <a:solidFill>
-                  <a:schemeClr val="accent6">
-                    <a:lumMod val="60000"/>
-                    <a:lumOff val="40000"/>
+                  <a:schemeClr val="accent4">
+                    <a:lumMod val="75000"/>
                   </a:schemeClr>
                 </a:solidFill>
               </a:rPr>
@@ -6604,34 +6277,40 @@
           </a:p>
           <a:p>
             <a:r>
-              <a:rPr lang="en-US" sz="2400" dirty="0">
+              <a:rPr lang="en-US" sz="2400" i="1" dirty="0">
                 <a:solidFill>
-                  <a:schemeClr val="accent6">
-                    <a:lumMod val="60000"/>
-                    <a:lumOff val="40000"/>
+                  <a:schemeClr val="accent4">
+                    <a:lumMod val="75000"/>
                   </a:schemeClr>
                 </a:solidFill>
               </a:rPr>
-              <a:t>Doctors use AI to diagnose diseases.</a:t>
-            </a:r>
-          </a:p>
-          <a:p>
-            <a:endParaRPr lang="en-US" sz="2400" dirty="0">
+              <a:t>Doctors use AI to diagnose diseases. They are using it to detect cancer.</a:t>
+            </a:r>
+          </a:p>
+          <a:p>
+            <a:endParaRPr lang="en-US" sz="2400" i="1" dirty="0">
               <a:solidFill>
-                <a:schemeClr val="accent6">
-                  <a:lumMod val="60000"/>
-                  <a:lumOff val="40000"/>
+                <a:schemeClr val="accent4">
+                  <a:lumMod val="75000"/>
                 </a:schemeClr>
               </a:solidFill>
             </a:endParaRPr>
           </a:p>
           <a:p>
-            <a:r>
-              <a:rPr lang="en-US" sz="2400" dirty="0">
+            <a:endParaRPr lang="en-US" sz="2400" i="1" dirty="0">
+              <a:solidFill>
+                <a:schemeClr val="accent4">
+                  <a:lumMod val="75000"/>
+                </a:schemeClr>
+              </a:solidFill>
+            </a:endParaRPr>
+          </a:p>
+          <a:p>
+            <a:r>
+              <a:rPr lang="en-US" sz="2400" i="1" dirty="0">
                 <a:solidFill>
-                  <a:schemeClr val="accent6">
-                    <a:lumMod val="60000"/>
-                    <a:lumOff val="40000"/>
+                  <a:schemeClr val="accent4">
+                    <a:lumMod val="75000"/>
                   </a:schemeClr>
                 </a:solidFill>
               </a:rPr>
@@ -6640,11 +6319,10 @@
           </a:p>
           <a:p>
             <a:r>
-              <a:rPr lang="en-US" sz="2400" dirty="0">
+              <a:rPr lang="en-US" sz="2400" i="1" dirty="0">
                 <a:solidFill>
-                  <a:schemeClr val="accent6">
-                    <a:lumMod val="60000"/>
-                    <a:lumOff val="40000"/>
+                  <a:schemeClr val="accent4">
+                    <a:lumMod val="75000"/>
                   </a:schemeClr>
                 </a:solidFill>
               </a:rPr>
@@ -6652,22 +6330,29 @@
             </a:r>
           </a:p>
           <a:p>
-            <a:endParaRPr lang="en-US" sz="2400" dirty="0">
+            <a:endParaRPr lang="en-US" sz="2400" i="1" dirty="0">
               <a:solidFill>
-                <a:schemeClr val="accent6">
-                  <a:lumMod val="60000"/>
-                  <a:lumOff val="40000"/>
+                <a:schemeClr val="accent4">
+                  <a:lumMod val="75000"/>
                 </a:schemeClr>
               </a:solidFill>
             </a:endParaRPr>
           </a:p>
           <a:p>
-            <a:r>
-              <a:rPr lang="en-US" sz="2400" dirty="0">
+            <a:endParaRPr lang="en-US" sz="2400" i="1" dirty="0">
+              <a:solidFill>
+                <a:schemeClr val="accent4">
+                  <a:lumMod val="75000"/>
+                </a:schemeClr>
+              </a:solidFill>
+            </a:endParaRPr>
+          </a:p>
+          <a:p>
+            <a:r>
+              <a:rPr lang="en-US" sz="2400" i="1" dirty="0">
                 <a:solidFill>
-                  <a:schemeClr val="accent6">
-                    <a:lumMod val="60000"/>
-                    <a:lumOff val="40000"/>
+                  <a:schemeClr val="accent4">
+                    <a:lumMod val="75000"/>
                   </a:schemeClr>
                 </a:solidFill>
               </a:rPr>
@@ -6675,245 +6360,70 @@
             </a:r>
           </a:p>
           <a:p>
-            <a:endParaRPr lang="en-US" sz="2400" dirty="0">
+            <a:endParaRPr lang="en-US" sz="2400" i="1" dirty="0">
               <a:solidFill>
-                <a:schemeClr val="accent6">
-                  <a:lumMod val="60000"/>
-                  <a:lumOff val="40000"/>
+                <a:schemeClr val="accent4">
+                  <a:lumMod val="75000"/>
                 </a:schemeClr>
               </a:solidFill>
             </a:endParaRPr>
           </a:p>
         </p:txBody>
       </p:sp>
-      <p:grpSp>
-        <p:nvGrpSpPr>
-          <p:cNvPr id="10" name="Group 9">
-            <a:extLst>
-              <a:ext uri="{FF2B5EF4-FFF2-40B4-BE49-F238E27FC236}">
-                <a16:creationId xmlns:a16="http://schemas.microsoft.com/office/drawing/2014/main" id="{2E134ECC-2864-3B14-6B18-2ACB404FF98A}"/>
-              </a:ext>
-            </a:extLst>
-          </p:cNvPr>
-          <p:cNvGrpSpPr/>
-          <p:nvPr/>
-        </p:nvGrpSpPr>
-        <p:grpSpPr>
-          <a:xfrm>
-            <a:off x="8625024" y="1274616"/>
-            <a:ext cx="2339280" cy="1077840"/>
-            <a:chOff x="8625024" y="1274616"/>
-            <a:chExt cx="2339280" cy="1077840"/>
-          </a:xfrm>
-        </p:grpSpPr>
-        <mc:AlternateContent xmlns:mc="http://schemas.openxmlformats.org/markup-compatibility/2006" xmlns:p14="http://schemas.microsoft.com/office/powerpoint/2010/main">
-          <mc:Choice Requires="p14">
-            <p:contentPart p14:bwMode="auto" r:id="rId2">
-              <p14:nvContentPartPr>
-                <p14:cNvPr id="4" name="Ink 3">
-                  <a:extLst>
-                    <a:ext uri="{FF2B5EF4-FFF2-40B4-BE49-F238E27FC236}">
-                      <a16:creationId xmlns:a16="http://schemas.microsoft.com/office/drawing/2014/main" id="{3929C50E-F0A6-2C42-E104-F738A22A15BD}"/>
-                    </a:ext>
-                  </a:extLst>
-                </p14:cNvPr>
-                <p14:cNvContentPartPr/>
-                <p14:nvPr/>
-              </p14:nvContentPartPr>
-              <p14:xfrm>
-                <a:off x="8625024" y="1274616"/>
-                <a:ext cx="340200" cy="1077840"/>
-              </p14:xfrm>
-            </p:contentPart>
-          </mc:Choice>
-          <mc:Fallback xmlns="">
-            <p:pic>
-              <p:nvPicPr>
-                <p:cNvPr id="4" name="Ink 3">
-                  <a:extLst>
-                    <a:ext uri="{FF2B5EF4-FFF2-40B4-BE49-F238E27FC236}">
-                      <a16:creationId xmlns:a16="http://schemas.microsoft.com/office/drawing/2014/main" id="{3929C50E-F0A6-2C42-E104-F738A22A15BD}"/>
-                    </a:ext>
-                  </a:extLst>
-                </p:cNvPr>
-                <p:cNvPicPr/>
-                <p:nvPr/>
-              </p:nvPicPr>
-              <p:blipFill>
-                <a:blip r:embed="rId3"/>
-                <a:stretch>
-                  <a:fillRect/>
-                </a:stretch>
-              </p:blipFill>
-              <p:spPr>
-                <a:xfrm>
-                  <a:off x="8589024" y="1238976"/>
-                  <a:ext cx="411840" cy="1149480"/>
-                </a:xfrm>
-                <a:prstGeom prst="rect">
-                  <a:avLst/>
-                </a:prstGeom>
-              </p:spPr>
-            </p:pic>
-          </mc:Fallback>
-        </mc:AlternateContent>
-        <mc:AlternateContent xmlns:mc="http://schemas.openxmlformats.org/markup-compatibility/2006" xmlns:p14="http://schemas.microsoft.com/office/powerpoint/2010/main">
-          <mc:Choice Requires="p14">
-            <p:contentPart p14:bwMode="auto" r:id="rId4">
-              <p14:nvContentPartPr>
-                <p14:cNvPr id="5" name="Ink 4">
-                  <a:extLst>
-                    <a:ext uri="{FF2B5EF4-FFF2-40B4-BE49-F238E27FC236}">
-                      <a16:creationId xmlns:a16="http://schemas.microsoft.com/office/drawing/2014/main" id="{A2C1602C-CC3D-31F8-BD17-AD6139F30DFF}"/>
-                    </a:ext>
-                  </a:extLst>
-                </p14:cNvPr>
-                <p14:cNvContentPartPr/>
-                <p14:nvPr/>
-              </p14:nvContentPartPr>
-              <p14:xfrm>
-                <a:off x="9423144" y="1535616"/>
-                <a:ext cx="319680" cy="221040"/>
-              </p14:xfrm>
-            </p:contentPart>
-          </mc:Choice>
-          <mc:Fallback xmlns="">
-            <p:pic>
-              <p:nvPicPr>
-                <p:cNvPr id="5" name="Ink 4">
-                  <a:extLst>
-                    <a:ext uri="{FF2B5EF4-FFF2-40B4-BE49-F238E27FC236}">
-                      <a16:creationId xmlns:a16="http://schemas.microsoft.com/office/drawing/2014/main" id="{A2C1602C-CC3D-31F8-BD17-AD6139F30DFF}"/>
-                    </a:ext>
-                  </a:extLst>
-                </p:cNvPr>
-                <p:cNvPicPr/>
-                <p:nvPr/>
-              </p:nvPicPr>
-              <p:blipFill>
-                <a:blip r:embed="rId5"/>
-                <a:stretch>
-                  <a:fillRect/>
-                </a:stretch>
-              </p:blipFill>
-              <p:spPr>
-                <a:xfrm>
-                  <a:off x="9387144" y="1499976"/>
-                  <a:ext cx="391320" cy="292680"/>
-                </a:xfrm>
-                <a:prstGeom prst="rect">
-                  <a:avLst/>
-                </a:prstGeom>
-              </p:spPr>
-            </p:pic>
-          </mc:Fallback>
-        </mc:AlternateContent>
-        <mc:AlternateContent xmlns:mc="http://schemas.openxmlformats.org/markup-compatibility/2006" xmlns:p14="http://schemas.microsoft.com/office/powerpoint/2010/main">
-          <mc:Choice Requires="p14">
-            <p:contentPart p14:bwMode="auto" r:id="rId6">
-              <p14:nvContentPartPr>
-                <p14:cNvPr id="6" name="Ink 5">
-                  <a:extLst>
-                    <a:ext uri="{FF2B5EF4-FFF2-40B4-BE49-F238E27FC236}">
-                      <a16:creationId xmlns:a16="http://schemas.microsoft.com/office/drawing/2014/main" id="{C3105E3A-A6AC-25FA-9667-1D597868EE5E}"/>
-                    </a:ext>
-                  </a:extLst>
-                </p14:cNvPr>
-                <p14:cNvContentPartPr/>
-                <p14:nvPr/>
-              </p14:nvContentPartPr>
-              <p14:xfrm>
-                <a:off x="9724464" y="1433016"/>
-                <a:ext cx="1118880" cy="345960"/>
-              </p14:xfrm>
-            </p:contentPart>
-          </mc:Choice>
-          <mc:Fallback xmlns="">
-            <p:pic>
-              <p:nvPicPr>
-                <p:cNvPr id="6" name="Ink 5">
-                  <a:extLst>
-                    <a:ext uri="{FF2B5EF4-FFF2-40B4-BE49-F238E27FC236}">
-                      <a16:creationId xmlns:a16="http://schemas.microsoft.com/office/drawing/2014/main" id="{C3105E3A-A6AC-25FA-9667-1D597868EE5E}"/>
-                    </a:ext>
-                  </a:extLst>
-                </p:cNvPr>
-                <p:cNvPicPr/>
-                <p:nvPr/>
-              </p:nvPicPr>
-              <p:blipFill>
-                <a:blip r:embed="rId7"/>
-                <a:stretch>
-                  <a:fillRect/>
-                </a:stretch>
-              </p:blipFill>
-              <p:spPr>
-                <a:xfrm>
-                  <a:off x="9688824" y="1397016"/>
-                  <a:ext cx="1190520" cy="417600"/>
-                </a:xfrm>
-                <a:prstGeom prst="rect">
-                  <a:avLst/>
-                </a:prstGeom>
-              </p:spPr>
-            </p:pic>
-          </mc:Fallback>
-        </mc:AlternateContent>
-        <mc:AlternateContent xmlns:mc="http://schemas.openxmlformats.org/markup-compatibility/2006" xmlns:p14="http://schemas.microsoft.com/office/powerpoint/2010/main">
-          <mc:Choice Requires="p14">
-            <p:contentPart p14:bwMode="auto" r:id="rId8">
-              <p14:nvContentPartPr>
-                <p14:cNvPr id="7" name="Ink 6">
-                  <a:extLst>
-                    <a:ext uri="{FF2B5EF4-FFF2-40B4-BE49-F238E27FC236}">
-                      <a16:creationId xmlns:a16="http://schemas.microsoft.com/office/drawing/2014/main" id="{329110BD-7811-4C44-70D7-0A0A7BB8ACB2}"/>
-                    </a:ext>
-                  </a:extLst>
-                </p14:cNvPr>
-                <p14:cNvContentPartPr/>
-                <p14:nvPr/>
-              </p14:nvContentPartPr>
-              <p14:xfrm>
-                <a:off x="10921824" y="1512936"/>
-                <a:ext cx="42480" cy="253080"/>
-              </p14:xfrm>
-            </p:contentPart>
-          </mc:Choice>
-          <mc:Fallback xmlns="">
-            <p:pic>
-              <p:nvPicPr>
-                <p:cNvPr id="7" name="Ink 6">
-                  <a:extLst>
-                    <a:ext uri="{FF2B5EF4-FFF2-40B4-BE49-F238E27FC236}">
-                      <a16:creationId xmlns:a16="http://schemas.microsoft.com/office/drawing/2014/main" id="{329110BD-7811-4C44-70D7-0A0A7BB8ACB2}"/>
-                    </a:ext>
-                  </a:extLst>
-                </p:cNvPr>
-                <p:cNvPicPr/>
-                <p:nvPr/>
-              </p:nvPicPr>
-              <p:blipFill>
-                <a:blip r:embed="rId9"/>
-                <a:stretch>
-                  <a:fillRect/>
-                </a:stretch>
-              </p:blipFill>
-              <p:spPr>
-                <a:xfrm>
-                  <a:off x="10886184" y="1477296"/>
-                  <a:ext cx="114120" cy="324720"/>
-                </a:xfrm>
-                <a:prstGeom prst="rect">
-                  <a:avLst/>
-                </a:prstGeom>
-              </p:spPr>
-            </p:pic>
-          </mc:Fallback>
-        </mc:AlternateContent>
-      </p:grpSp>
-      <mc:AlternateContent xmlns:mc="http://schemas.openxmlformats.org/markup-compatibility/2006" xmlns:p14="http://schemas.microsoft.com/office/powerpoint/2010/main">
-        <mc:Choice Requires="p14">
-          <p:contentPart p14:bwMode="auto" r:id="rId10">
+      <mc:AlternateContent xmlns:mc="http://schemas.openxmlformats.org/markup-compatibility/2006">
+        <mc:Choice xmlns:p14="http://schemas.microsoft.com/office/powerpoint/2010/main" Requires="p14">
+          <p:contentPart p14:bwMode="auto" r:id="rId2">
+            <p14:nvContentPartPr>
+              <p14:cNvPr id="4" name="Ink 3">
+                <a:extLst>
+                  <a:ext uri="{FF2B5EF4-FFF2-40B4-BE49-F238E27FC236}">
+                    <a16:creationId xmlns:a16="http://schemas.microsoft.com/office/drawing/2014/main" id="{3929C50E-F0A6-2C42-E104-F738A22A15BD}"/>
+                  </a:ext>
+                </a:extLst>
+              </p14:cNvPr>
+              <p14:cNvContentPartPr/>
+              <p14:nvPr/>
+            </p14:nvContentPartPr>
+            <p14:xfrm>
+              <a:off x="9159372" y="1286519"/>
+              <a:ext cx="340200" cy="1077840"/>
+            </p14:xfrm>
+          </p:contentPart>
+        </mc:Choice>
+        <mc:Fallback>
+          <p:pic>
+            <p:nvPicPr>
+              <p:cNvPr id="4" name="Ink 3">
+                <a:extLst>
+                  <a:ext uri="{FF2B5EF4-FFF2-40B4-BE49-F238E27FC236}">
+                    <a16:creationId xmlns:a16="http://schemas.microsoft.com/office/drawing/2014/main" id="{3929C50E-F0A6-2C42-E104-F738A22A15BD}"/>
+                  </a:ext>
+                </a:extLst>
+              </p:cNvPr>
+              <p:cNvPicPr/>
+              <p:nvPr/>
+            </p:nvPicPr>
+            <p:blipFill>
+              <a:blip r:embed="rId3"/>
+              <a:stretch>
+                <a:fillRect/>
+              </a:stretch>
+            </p:blipFill>
+            <p:spPr>
+              <a:xfrm>
+                <a:off x="9123372" y="1250507"/>
+                <a:ext cx="411840" cy="1149504"/>
+              </a:xfrm>
+              <a:prstGeom prst="rect">
+                <a:avLst/>
+              </a:prstGeom>
+            </p:spPr>
+          </p:pic>
+        </mc:Fallback>
+      </mc:AlternateContent>
+      <mc:AlternateContent xmlns:mc="http://schemas.openxmlformats.org/markup-compatibility/2006">
+        <mc:Choice xmlns:p14="http://schemas.microsoft.com/office/powerpoint/2010/main" Requires="p14">
+          <p:contentPart p14:bwMode="auto" r:id="rId4">
             <p14:nvContentPartPr>
               <p14:cNvPr id="11" name="Ink 10">
                 <a:extLst>
@@ -6926,12 +6436,12 @@
               <p14:nvPr/>
             </p14:nvContentPartPr>
             <p14:xfrm>
-              <a:off x="8482464" y="2718576"/>
+              <a:off x="8624772" y="2887200"/>
               <a:ext cx="534600" cy="1083600"/>
             </p14:xfrm>
           </p:contentPart>
         </mc:Choice>
-        <mc:Fallback xmlns="">
+        <mc:Fallback>
           <p:pic>
             <p:nvPicPr>
               <p:cNvPr id="11" name="Ink 10">
@@ -6945,15 +6455,15 @@
               <p:nvPr/>
             </p:nvPicPr>
             <p:blipFill>
-              <a:blip r:embed="rId11"/>
+              <a:blip r:embed="rId5"/>
               <a:stretch>
                 <a:fillRect/>
               </a:stretch>
             </p:blipFill>
             <p:spPr>
               <a:xfrm>
-                <a:off x="8446824" y="2682576"/>
-                <a:ext cx="606240" cy="1155240"/>
+                <a:off x="8588772" y="2851212"/>
+                <a:ext cx="606240" cy="1155216"/>
               </a:xfrm>
               <a:prstGeom prst="rect">
                 <a:avLst/>
@@ -6962,132 +6472,9 @@
           </p:pic>
         </mc:Fallback>
       </mc:AlternateContent>
-      <p:grpSp>
-        <p:nvGrpSpPr>
-          <p:cNvPr id="14" name="Group 13">
-            <a:extLst>
-              <a:ext uri="{FF2B5EF4-FFF2-40B4-BE49-F238E27FC236}">
-                <a16:creationId xmlns:a16="http://schemas.microsoft.com/office/drawing/2014/main" id="{9D702D75-767F-5071-92D7-1CF09D0EB519}"/>
-              </a:ext>
-            </a:extLst>
-          </p:cNvPr>
-          <p:cNvGrpSpPr/>
-          <p:nvPr/>
-        </p:nvGrpSpPr>
-        <p:grpSpPr>
-          <a:xfrm>
-            <a:off x="9263304" y="2871936"/>
-            <a:ext cx="1985760" cy="384840"/>
-            <a:chOff x="9263304" y="2871936"/>
-            <a:chExt cx="1985760" cy="384840"/>
-          </a:xfrm>
-        </p:grpSpPr>
-        <mc:AlternateContent xmlns:mc="http://schemas.openxmlformats.org/markup-compatibility/2006" xmlns:p14="http://schemas.microsoft.com/office/powerpoint/2010/main">
-          <mc:Choice Requires="p14">
-            <p:contentPart p14:bwMode="auto" r:id="rId12">
-              <p14:nvContentPartPr>
-                <p14:cNvPr id="12" name="Ink 11">
-                  <a:extLst>
-                    <a:ext uri="{FF2B5EF4-FFF2-40B4-BE49-F238E27FC236}">
-                      <a16:creationId xmlns:a16="http://schemas.microsoft.com/office/drawing/2014/main" id="{C0DE76FF-474D-384D-E1DE-987B310CEE83}"/>
-                    </a:ext>
-                  </a:extLst>
-                </p14:cNvPr>
-                <p14:cNvContentPartPr/>
-                <p14:nvPr/>
-              </p14:nvContentPartPr>
-              <p14:xfrm>
-                <a:off x="9263304" y="2871936"/>
-                <a:ext cx="1594080" cy="384840"/>
-              </p14:xfrm>
-            </p:contentPart>
-          </mc:Choice>
-          <mc:Fallback xmlns="">
-            <p:pic>
-              <p:nvPicPr>
-                <p:cNvPr id="12" name="Ink 11">
-                  <a:extLst>
-                    <a:ext uri="{FF2B5EF4-FFF2-40B4-BE49-F238E27FC236}">
-                      <a16:creationId xmlns:a16="http://schemas.microsoft.com/office/drawing/2014/main" id="{C0DE76FF-474D-384D-E1DE-987B310CEE83}"/>
-                    </a:ext>
-                  </a:extLst>
-                </p:cNvPr>
-                <p:cNvPicPr/>
-                <p:nvPr/>
-              </p:nvPicPr>
-              <p:blipFill>
-                <a:blip r:embed="rId13"/>
-                <a:stretch>
-                  <a:fillRect/>
-                </a:stretch>
-              </p:blipFill>
-              <p:spPr>
-                <a:xfrm>
-                  <a:off x="9227664" y="2836296"/>
-                  <a:ext cx="1665720" cy="456480"/>
-                </a:xfrm>
-                <a:prstGeom prst="rect">
-                  <a:avLst/>
-                </a:prstGeom>
-              </p:spPr>
-            </p:pic>
-          </mc:Fallback>
-        </mc:AlternateContent>
-        <mc:AlternateContent xmlns:mc="http://schemas.openxmlformats.org/markup-compatibility/2006" xmlns:p14="http://schemas.microsoft.com/office/powerpoint/2010/main">
-          <mc:Choice Requires="p14">
-            <p:contentPart p14:bwMode="auto" r:id="rId14">
-              <p14:nvContentPartPr>
-                <p14:cNvPr id="13" name="Ink 12">
-                  <a:extLst>
-                    <a:ext uri="{FF2B5EF4-FFF2-40B4-BE49-F238E27FC236}">
-                      <a16:creationId xmlns:a16="http://schemas.microsoft.com/office/drawing/2014/main" id="{3404CAD1-6B11-727F-06E3-9EF54EADC9D3}"/>
-                    </a:ext>
-                  </a:extLst>
-                </p14:cNvPr>
-                <p14:cNvContentPartPr/>
-                <p14:nvPr/>
-              </p14:nvContentPartPr>
-              <p14:xfrm>
-                <a:off x="10981584" y="3029616"/>
-                <a:ext cx="267480" cy="201960"/>
-              </p14:xfrm>
-            </p:contentPart>
-          </mc:Choice>
-          <mc:Fallback xmlns="">
-            <p:pic>
-              <p:nvPicPr>
-                <p:cNvPr id="13" name="Ink 12">
-                  <a:extLst>
-                    <a:ext uri="{FF2B5EF4-FFF2-40B4-BE49-F238E27FC236}">
-                      <a16:creationId xmlns:a16="http://schemas.microsoft.com/office/drawing/2014/main" id="{3404CAD1-6B11-727F-06E3-9EF54EADC9D3}"/>
-                    </a:ext>
-                  </a:extLst>
-                </p:cNvPr>
-                <p:cNvPicPr/>
-                <p:nvPr/>
-              </p:nvPicPr>
-              <p:blipFill>
-                <a:blip r:embed="rId15"/>
-                <a:stretch>
-                  <a:fillRect/>
-                </a:stretch>
-              </p:blipFill>
-              <p:spPr>
-                <a:xfrm>
-                  <a:off x="10945944" y="2993976"/>
-                  <a:ext cx="339120" cy="273600"/>
-                </a:xfrm>
-                <a:prstGeom prst="rect">
-                  <a:avLst/>
-                </a:prstGeom>
-              </p:spPr>
-            </p:pic>
-          </mc:Fallback>
-        </mc:AlternateContent>
-      </p:grpSp>
-      <mc:AlternateContent xmlns:mc="http://schemas.openxmlformats.org/markup-compatibility/2006" xmlns:p14="http://schemas.microsoft.com/office/powerpoint/2010/main">
-        <mc:Choice Requires="p14">
-          <p:contentPart p14:bwMode="auto" r:id="rId16">
+      <mc:AlternateContent xmlns:mc="http://schemas.openxmlformats.org/markup-compatibility/2006">
+        <mc:Choice xmlns:p14="http://schemas.microsoft.com/office/powerpoint/2010/main" Requires="p14">
+          <p:contentPart p14:bwMode="auto" r:id="rId6">
             <p14:nvContentPartPr>
               <p14:cNvPr id="15" name="Ink 14">
                 <a:extLst>
@@ -7100,12 +6487,12 @@
               <p14:nvPr/>
             </p14:nvContentPartPr>
             <p14:xfrm>
-              <a:off x="9387864" y="4160736"/>
+              <a:off x="9664043" y="4871476"/>
               <a:ext cx="384840" cy="915120"/>
             </p14:xfrm>
           </p:contentPart>
         </mc:Choice>
-        <mc:Fallback xmlns="">
+        <mc:Fallback>
           <p:pic>
             <p:nvPicPr>
               <p:cNvPr id="15" name="Ink 14">
@@ -7119,15 +6506,15 @@
               <p:nvPr/>
             </p:nvPicPr>
             <p:blipFill>
-              <a:blip r:embed="rId17"/>
+              <a:blip r:embed="rId7"/>
               <a:stretch>
                 <a:fillRect/>
               </a:stretch>
             </p:blipFill>
             <p:spPr>
               <a:xfrm>
-                <a:off x="9351864" y="4125096"/>
-                <a:ext cx="456480" cy="986760"/>
+                <a:off x="9628043" y="4835462"/>
+                <a:ext cx="456480" cy="986788"/>
               </a:xfrm>
               <a:prstGeom prst="rect">
                 <a:avLst/>
@@ -7136,129 +6523,183 @@
           </p:pic>
         </mc:Fallback>
       </mc:AlternateContent>
-      <p:grpSp>
-        <p:nvGrpSpPr>
-          <p:cNvPr id="18" name="Group 17">
-            <a:extLst>
-              <a:ext uri="{FF2B5EF4-FFF2-40B4-BE49-F238E27FC236}">
-                <a16:creationId xmlns:a16="http://schemas.microsoft.com/office/drawing/2014/main" id="{C6943104-E8FE-9B8D-E801-CFF64BA3A3A0}"/>
-              </a:ext>
-            </a:extLst>
-          </p:cNvPr>
-          <p:cNvGrpSpPr/>
+      <p:sp>
+        <p:nvSpPr>
+          <p:cNvPr id="8" name="TextBox 7">
+            <a:extLst>
+              <a:ext uri="{FF2B5EF4-FFF2-40B4-BE49-F238E27FC236}">
+                <a16:creationId xmlns:a16="http://schemas.microsoft.com/office/drawing/2014/main" id="{49E71BB7-A841-F9C1-F155-BD33CA801AF2}"/>
+              </a:ext>
+            </a:extLst>
+          </p:cNvPr>
+          <p:cNvSpPr txBox="1"/>
           <p:nvPr/>
-        </p:nvGrpSpPr>
-        <p:grpSpPr>
+        </p:nvSpPr>
+        <p:spPr>
           <a:xfrm>
-            <a:off x="9862344" y="4238136"/>
-            <a:ext cx="1707120" cy="492840"/>
-            <a:chOff x="9862344" y="4238136"/>
-            <a:chExt cx="1707120" cy="492840"/>
+            <a:off x="10303750" y="1494637"/>
+            <a:ext cx="1608356" cy="461665"/>
           </a:xfrm>
-        </p:grpSpPr>
-        <mc:AlternateContent xmlns:mc="http://schemas.openxmlformats.org/markup-compatibility/2006" xmlns:p14="http://schemas.microsoft.com/office/powerpoint/2010/main">
-          <mc:Choice Requires="p14">
-            <p:contentPart p14:bwMode="auto" r:id="rId18">
-              <p14:nvContentPartPr>
-                <p14:cNvPr id="16" name="Ink 15">
-                  <a:extLst>
-                    <a:ext uri="{FF2B5EF4-FFF2-40B4-BE49-F238E27FC236}">
-                      <a16:creationId xmlns:a16="http://schemas.microsoft.com/office/drawing/2014/main" id="{F17DB707-20F4-3B79-5B0E-04256A57EF02}"/>
-                    </a:ext>
-                  </a:extLst>
-                </p14:cNvPr>
-                <p14:cNvContentPartPr/>
-                <p14:nvPr/>
-              </p14:nvContentPartPr>
-              <p14:xfrm>
-                <a:off x="9862344" y="4238136"/>
-                <a:ext cx="1421640" cy="492840"/>
-              </p14:xfrm>
-            </p:contentPart>
-          </mc:Choice>
-          <mc:Fallback xmlns="">
-            <p:pic>
-              <p:nvPicPr>
-                <p:cNvPr id="16" name="Ink 15">
-                  <a:extLst>
-                    <a:ext uri="{FF2B5EF4-FFF2-40B4-BE49-F238E27FC236}">
-                      <a16:creationId xmlns:a16="http://schemas.microsoft.com/office/drawing/2014/main" id="{F17DB707-20F4-3B79-5B0E-04256A57EF02}"/>
-                    </a:ext>
-                  </a:extLst>
-                </p:cNvPr>
-                <p:cNvPicPr/>
-                <p:nvPr/>
-              </p:nvPicPr>
-              <p:blipFill>
-                <a:blip r:embed="rId19"/>
-                <a:stretch>
-                  <a:fillRect/>
-                </a:stretch>
-              </p:blipFill>
-              <p:spPr>
-                <a:xfrm>
-                  <a:off x="9826704" y="4202496"/>
-                  <a:ext cx="1493280" cy="564480"/>
-                </a:xfrm>
-                <a:prstGeom prst="rect">
-                  <a:avLst/>
-                </a:prstGeom>
-              </p:spPr>
-            </p:pic>
-          </mc:Fallback>
-        </mc:AlternateContent>
-        <mc:AlternateContent xmlns:mc="http://schemas.openxmlformats.org/markup-compatibility/2006" xmlns:p14="http://schemas.microsoft.com/office/powerpoint/2010/main">
-          <mc:Choice Requires="p14">
-            <p:contentPart p14:bwMode="auto" r:id="rId20">
-              <p14:nvContentPartPr>
-                <p14:cNvPr id="17" name="Ink 16">
-                  <a:extLst>
-                    <a:ext uri="{FF2B5EF4-FFF2-40B4-BE49-F238E27FC236}">
-                      <a16:creationId xmlns:a16="http://schemas.microsoft.com/office/drawing/2014/main" id="{60E77DF2-976B-8749-5E17-B2C82D354243}"/>
-                    </a:ext>
-                  </a:extLst>
-                </p14:cNvPr>
-                <p14:cNvContentPartPr/>
-                <p14:nvPr/>
-              </p14:nvContentPartPr>
-              <p14:xfrm>
-                <a:off x="11369664" y="4453776"/>
-                <a:ext cx="199800" cy="221400"/>
-              </p14:xfrm>
-            </p:contentPart>
-          </mc:Choice>
-          <mc:Fallback xmlns="">
-            <p:pic>
-              <p:nvPicPr>
-                <p:cNvPr id="17" name="Ink 16">
-                  <a:extLst>
-                    <a:ext uri="{FF2B5EF4-FFF2-40B4-BE49-F238E27FC236}">
-                      <a16:creationId xmlns:a16="http://schemas.microsoft.com/office/drawing/2014/main" id="{60E77DF2-976B-8749-5E17-B2C82D354243}"/>
-                    </a:ext>
-                  </a:extLst>
-                </p:cNvPr>
-                <p:cNvPicPr/>
-                <p:nvPr/>
-              </p:nvPicPr>
-              <p:blipFill>
-                <a:blip r:embed="rId21"/>
-                <a:stretch>
-                  <a:fillRect/>
-                </a:stretch>
-              </p:blipFill>
-              <p:spPr>
-                <a:xfrm>
-                  <a:off x="11334024" y="4418136"/>
-                  <a:ext cx="271440" cy="293040"/>
-                </a:xfrm>
-                <a:prstGeom prst="rect">
-                  <a:avLst/>
-                </a:prstGeom>
-              </p:spPr>
-            </p:pic>
-          </mc:Fallback>
-        </mc:AlternateContent>
-      </p:grpSp>
+          <a:prstGeom prst="rect">
+            <a:avLst/>
+          </a:prstGeom>
+          <a:noFill/>
+        </p:spPr>
+        <p:txBody>
+          <a:bodyPr wrap="square">
+            <a:spAutoFit/>
+          </a:bodyPr>
+          <a:lstStyle/>
+          <a:p>
+            <a:r>
+              <a:rPr lang="en-US" sz="2400" b="1" dirty="0">
+                <a:solidFill>
+                  <a:schemeClr val="accent4">
+                    <a:lumMod val="60000"/>
+                    <a:lumOff val="40000"/>
+                  </a:schemeClr>
+                </a:solidFill>
+              </a:rPr>
+              <a:t> Chunk 1</a:t>
+            </a:r>
+          </a:p>
+        </p:txBody>
+      </p:sp>
+      <p:sp>
+        <p:nvSpPr>
+          <p:cNvPr id="20" name="TextBox 19">
+            <a:extLst>
+              <a:ext uri="{FF2B5EF4-FFF2-40B4-BE49-F238E27FC236}">
+                <a16:creationId xmlns:a16="http://schemas.microsoft.com/office/drawing/2014/main" id="{EF4BC2B3-5C25-EA2C-BD3B-487E120C1D68}"/>
+              </a:ext>
+            </a:extLst>
+          </p:cNvPr>
+          <p:cNvSpPr txBox="1"/>
+          <p:nvPr/>
+        </p:nvSpPr>
+        <p:spPr>
+          <a:xfrm>
+            <a:off x="10303750" y="2848320"/>
+            <a:ext cx="1608356" cy="461665"/>
+          </a:xfrm>
+          <a:prstGeom prst="rect">
+            <a:avLst/>
+          </a:prstGeom>
+          <a:noFill/>
+        </p:spPr>
+        <p:txBody>
+          <a:bodyPr wrap="square">
+            <a:spAutoFit/>
+          </a:bodyPr>
+          <a:lstStyle/>
+          <a:p>
+            <a:r>
+              <a:rPr lang="en-US" sz="2400" b="1" dirty="0">
+                <a:solidFill>
+                  <a:schemeClr val="accent4">
+                    <a:lumMod val="60000"/>
+                    <a:lumOff val="40000"/>
+                  </a:schemeClr>
+                </a:solidFill>
+              </a:rPr>
+              <a:t> Chunk 2</a:t>
+            </a:r>
+          </a:p>
+        </p:txBody>
+      </p:sp>
+      <p:sp>
+        <p:nvSpPr>
+          <p:cNvPr id="22" name="TextBox 21">
+            <a:extLst>
+              <a:ext uri="{FF2B5EF4-FFF2-40B4-BE49-F238E27FC236}">
+                <a16:creationId xmlns:a16="http://schemas.microsoft.com/office/drawing/2014/main" id="{E16DC992-583C-A62A-B41E-D752FAA5ED17}"/>
+              </a:ext>
+            </a:extLst>
+          </p:cNvPr>
+          <p:cNvSpPr txBox="1"/>
+          <p:nvPr/>
+        </p:nvSpPr>
+        <p:spPr>
+          <a:xfrm>
+            <a:off x="10303750" y="5098203"/>
+            <a:ext cx="1608356" cy="461665"/>
+          </a:xfrm>
+          <a:prstGeom prst="rect">
+            <a:avLst/>
+          </a:prstGeom>
+          <a:noFill/>
+        </p:spPr>
+        <p:txBody>
+          <a:bodyPr wrap="square">
+            <a:spAutoFit/>
+          </a:bodyPr>
+          <a:lstStyle/>
+          <a:p>
+            <a:r>
+              <a:rPr lang="en-US" sz="2400" b="1" dirty="0">
+                <a:solidFill>
+                  <a:schemeClr val="accent4">
+                    <a:lumMod val="60000"/>
+                    <a:lumOff val="40000"/>
+                  </a:schemeClr>
+                </a:solidFill>
+              </a:rPr>
+              <a:t> Chunk 3</a:t>
+            </a:r>
+          </a:p>
+        </p:txBody>
+      </p:sp>
+      <mc:AlternateContent xmlns:mc="http://schemas.openxmlformats.org/markup-compatibility/2006">
+        <mc:Choice xmlns:p14="http://schemas.microsoft.com/office/powerpoint/2010/main" Requires="p14">
+          <p:contentPart p14:bwMode="auto" r:id="rId8">
+            <p14:nvContentPartPr>
+              <p14:cNvPr id="23" name="Ink 22">
+                <a:extLst>
+                  <a:ext uri="{FF2B5EF4-FFF2-40B4-BE49-F238E27FC236}">
+                    <a16:creationId xmlns:a16="http://schemas.microsoft.com/office/drawing/2014/main" id="{A42F0A1D-3F7F-87BD-D0BC-33A4E4078337}"/>
+                  </a:ext>
+                </a:extLst>
+              </p14:cNvPr>
+              <p14:cNvContentPartPr/>
+              <p14:nvPr/>
+            </p14:nvContentPartPr>
+            <p14:xfrm>
+              <a:off x="10213704" y="4270176"/>
+              <a:ext cx="360" cy="360"/>
+            </p14:xfrm>
+          </p:contentPart>
+        </mc:Choice>
+        <mc:Fallback>
+          <p:pic>
+            <p:nvPicPr>
+              <p:cNvPr id="23" name="Ink 22">
+                <a:extLst>
+                  <a:ext uri="{FF2B5EF4-FFF2-40B4-BE49-F238E27FC236}">
+                    <a16:creationId xmlns:a16="http://schemas.microsoft.com/office/drawing/2014/main" id="{A42F0A1D-3F7F-87BD-D0BC-33A4E4078337}"/>
+                  </a:ext>
+                </a:extLst>
+              </p:cNvPr>
+              <p:cNvPicPr/>
+              <p:nvPr/>
+            </p:nvPicPr>
+            <p:blipFill>
+              <a:blip r:embed="rId9"/>
+              <a:stretch>
+                <a:fillRect/>
+              </a:stretch>
+            </p:blipFill>
+            <p:spPr>
+              <a:xfrm>
+                <a:off x="10195704" y="4252176"/>
+                <a:ext cx="36000" cy="36000"/>
+              </a:xfrm>
+              <a:prstGeom prst="rect">
+                <a:avLst/>
+              </a:prstGeom>
+            </p:spPr>
+          </p:pic>
+        </mc:Fallback>
+      </mc:AlternateContent>
     </p:spTree>
     <p:extLst>
       <p:ext uri="{BB962C8B-B14F-4D97-AF65-F5344CB8AC3E}">
@@ -7615,14 +7056,14 @@
           </p:pic>
         </mc:Fallback>
       </mc:AlternateContent>
-      <mc:AlternateContent xmlns:mc="http://schemas.openxmlformats.org/markup-compatibility/2006" xmlns:p14="http://schemas.microsoft.com/office/powerpoint/2010/main">
-        <mc:Choice Requires="p14">
+      <mc:AlternateContent xmlns:mc="http://schemas.openxmlformats.org/markup-compatibility/2006">
+        <mc:Choice xmlns:p14="http://schemas.microsoft.com/office/powerpoint/2010/main" Requires="p14">
           <p:contentPart p14:bwMode="auto" r:id="rId4">
             <p14:nvContentPartPr>
-              <p14:cNvPr id="5" name="Ink 4">
+              <p14:cNvPr id="22" name="Ink 21">
                 <a:extLst>
                   <a:ext uri="{FF2B5EF4-FFF2-40B4-BE49-F238E27FC236}">
-                    <a16:creationId xmlns:a16="http://schemas.microsoft.com/office/drawing/2014/main" id="{ED8CCD4C-AA02-7991-9155-2E9D745D292C}"/>
+                    <a16:creationId xmlns:a16="http://schemas.microsoft.com/office/drawing/2014/main" id="{3744D8FA-F8AE-3F1B-08FE-AE0324DB712E}"/>
                   </a:ext>
                 </a:extLst>
               </p14:cNvPr>
@@ -7630,18 +7071,18 @@
               <p14:nvPr/>
             </p14:nvContentPartPr>
             <p14:xfrm>
-              <a:off x="10702224" y="2431296"/>
-              <a:ext cx="360" cy="360"/>
+              <a:off x="10306224" y="3541536"/>
+              <a:ext cx="238680" cy="851040"/>
             </p14:xfrm>
           </p:contentPart>
         </mc:Choice>
-        <mc:Fallback xmlns="">
+        <mc:Fallback>
           <p:pic>
             <p:nvPicPr>
-              <p:cNvPr id="5" name="Ink 4">
+              <p:cNvPr id="22" name="Ink 21">
                 <a:extLst>
                   <a:ext uri="{FF2B5EF4-FFF2-40B4-BE49-F238E27FC236}">
-                    <a16:creationId xmlns:a16="http://schemas.microsoft.com/office/drawing/2014/main" id="{ED8CCD4C-AA02-7991-9155-2E9D745D292C}"/>
+                    <a16:creationId xmlns:a16="http://schemas.microsoft.com/office/drawing/2014/main" id="{3744D8FA-F8AE-3F1B-08FE-AE0324DB712E}"/>
                   </a:ext>
                 </a:extLst>
               </p:cNvPr>
@@ -7656,8 +7097,8 @@
             </p:blipFill>
             <p:spPr>
               <a:xfrm>
-                <a:off x="10666584" y="2395296"/>
-                <a:ext cx="72000" cy="72000"/>
+                <a:off x="10270224" y="3505536"/>
+                <a:ext cx="310320" cy="922680"/>
               </a:xfrm>
               <a:prstGeom prst="rect">
                 <a:avLst/>
@@ -7666,14 +7107,14 @@
           </p:pic>
         </mc:Fallback>
       </mc:AlternateContent>
-      <mc:AlternateContent xmlns:mc="http://schemas.openxmlformats.org/markup-compatibility/2006" xmlns:p14="http://schemas.microsoft.com/office/powerpoint/2010/main">
-        <mc:Choice Requires="p14">
+      <mc:AlternateContent xmlns:mc="http://schemas.openxmlformats.org/markup-compatibility/2006">
+        <mc:Choice xmlns:p14="http://schemas.microsoft.com/office/powerpoint/2010/main" Requires="p14">
           <p:contentPart p14:bwMode="auto" r:id="rId6">
             <p14:nvContentPartPr>
-              <p14:cNvPr id="6" name="Ink 5">
+              <p14:cNvPr id="27" name="Ink 26">
                 <a:extLst>
                   <a:ext uri="{FF2B5EF4-FFF2-40B4-BE49-F238E27FC236}">
-                    <a16:creationId xmlns:a16="http://schemas.microsoft.com/office/drawing/2014/main" id="{32DC7754-B133-2D4D-B0FA-BD60AEEB4389}"/>
+                    <a16:creationId xmlns:a16="http://schemas.microsoft.com/office/drawing/2014/main" id="{87A6D330-7597-2D51-0580-D31A2C06EAD8}"/>
                   </a:ext>
                 </a:extLst>
               </p14:cNvPr>
@@ -7681,18 +7122,18 @@
               <p14:nvPr/>
             </p14:nvContentPartPr>
             <p14:xfrm>
-              <a:off x="10679544" y="2310696"/>
-              <a:ext cx="116640" cy="284400"/>
+              <a:off x="10342944" y="4811616"/>
+              <a:ext cx="313920" cy="851400"/>
             </p14:xfrm>
           </p:contentPart>
         </mc:Choice>
-        <mc:Fallback xmlns="">
+        <mc:Fallback>
           <p:pic>
             <p:nvPicPr>
-              <p:cNvPr id="6" name="Ink 5">
+              <p:cNvPr id="27" name="Ink 26">
                 <a:extLst>
                   <a:ext uri="{FF2B5EF4-FFF2-40B4-BE49-F238E27FC236}">
-                    <a16:creationId xmlns:a16="http://schemas.microsoft.com/office/drawing/2014/main" id="{32DC7754-B133-2D4D-B0FA-BD60AEEB4389}"/>
+                    <a16:creationId xmlns:a16="http://schemas.microsoft.com/office/drawing/2014/main" id="{87A6D330-7597-2D51-0580-D31A2C06EAD8}"/>
                   </a:ext>
                 </a:extLst>
               </p:cNvPr>
@@ -7707,8 +7148,8 @@
             </p:blipFill>
             <p:spPr>
               <a:xfrm>
-                <a:off x="10643544" y="2275056"/>
-                <a:ext cx="188280" cy="356040"/>
+                <a:off x="10306944" y="4775616"/>
+                <a:ext cx="385560" cy="923040"/>
               </a:xfrm>
               <a:prstGeom prst="rect">
                 <a:avLst/>
@@ -7717,660 +7158,132 @@
           </p:pic>
         </mc:Fallback>
       </mc:AlternateContent>
-      <mc:AlternateContent xmlns:mc="http://schemas.openxmlformats.org/markup-compatibility/2006" xmlns:p14="http://schemas.microsoft.com/office/powerpoint/2010/main">
-        <mc:Choice Requires="p14">
-          <p:contentPart p14:bwMode="auto" r:id="rId8">
-            <p14:nvContentPartPr>
-              <p14:cNvPr id="7" name="Ink 6">
-                <a:extLst>
-                  <a:ext uri="{FF2B5EF4-FFF2-40B4-BE49-F238E27FC236}">
-                    <a16:creationId xmlns:a16="http://schemas.microsoft.com/office/drawing/2014/main" id="{2C53D4B5-5D2D-C619-1F91-7F6007759F66}"/>
-                  </a:ext>
-                </a:extLst>
-              </p14:cNvPr>
-              <p14:cNvContentPartPr/>
-              <p14:nvPr/>
-            </p14:nvContentPartPr>
-            <p14:xfrm>
-              <a:off x="10801944" y="2434896"/>
-              <a:ext cx="283680" cy="148680"/>
-            </p14:xfrm>
-          </p:contentPart>
-        </mc:Choice>
-        <mc:Fallback xmlns="">
-          <p:pic>
-            <p:nvPicPr>
-              <p:cNvPr id="7" name="Ink 6">
-                <a:extLst>
-                  <a:ext uri="{FF2B5EF4-FFF2-40B4-BE49-F238E27FC236}">
-                    <a16:creationId xmlns:a16="http://schemas.microsoft.com/office/drawing/2014/main" id="{2C53D4B5-5D2D-C619-1F91-7F6007759F66}"/>
-                  </a:ext>
-                </a:extLst>
-              </p:cNvPr>
-              <p:cNvPicPr/>
-              <p:nvPr/>
-            </p:nvPicPr>
-            <p:blipFill>
-              <a:blip r:embed="rId9"/>
-              <a:stretch>
-                <a:fillRect/>
-              </a:stretch>
-            </p:blipFill>
-            <p:spPr>
-              <a:xfrm>
-                <a:off x="10766304" y="2399256"/>
-                <a:ext cx="355320" cy="220320"/>
-              </a:xfrm>
-              <a:prstGeom prst="rect">
-                <a:avLst/>
-              </a:prstGeom>
-            </p:spPr>
-          </p:pic>
-        </mc:Fallback>
-      </mc:AlternateContent>
-      <mc:AlternateContent xmlns:mc="http://schemas.openxmlformats.org/markup-compatibility/2006" xmlns:p14="http://schemas.microsoft.com/office/powerpoint/2010/main">
-        <mc:Choice Requires="p14">
-          <p:contentPart p14:bwMode="auto" r:id="rId10">
-            <p14:nvContentPartPr>
-              <p14:cNvPr id="21" name="Ink 20">
-                <a:extLst>
-                  <a:ext uri="{FF2B5EF4-FFF2-40B4-BE49-F238E27FC236}">
-                    <a16:creationId xmlns:a16="http://schemas.microsoft.com/office/drawing/2014/main" id="{FBF247BA-CD4A-0D8E-60FE-A158253DD699}"/>
-                  </a:ext>
-                </a:extLst>
-              </p14:cNvPr>
-              <p14:cNvContentPartPr/>
-              <p14:nvPr/>
-            </p14:nvContentPartPr>
-            <p14:xfrm>
-              <a:off x="11246904" y="2440656"/>
-              <a:ext cx="31680" cy="254880"/>
-            </p14:xfrm>
-          </p:contentPart>
-        </mc:Choice>
-        <mc:Fallback xmlns="">
-          <p:pic>
-            <p:nvPicPr>
-              <p:cNvPr id="21" name="Ink 20">
-                <a:extLst>
-                  <a:ext uri="{FF2B5EF4-FFF2-40B4-BE49-F238E27FC236}">
-                    <a16:creationId xmlns:a16="http://schemas.microsoft.com/office/drawing/2014/main" id="{FBF247BA-CD4A-0D8E-60FE-A158253DD699}"/>
-                  </a:ext>
-                </a:extLst>
-              </p:cNvPr>
-              <p:cNvPicPr/>
-              <p:nvPr/>
-            </p:nvPicPr>
-            <p:blipFill>
-              <a:blip r:embed="rId11"/>
-              <a:stretch>
-                <a:fillRect/>
-              </a:stretch>
-            </p:blipFill>
-            <p:spPr>
-              <a:xfrm>
-                <a:off x="11211264" y="2405016"/>
-                <a:ext cx="103320" cy="326520"/>
-              </a:xfrm>
-              <a:prstGeom prst="rect">
-                <a:avLst/>
-              </a:prstGeom>
-            </p:spPr>
-          </p:pic>
-        </mc:Fallback>
-      </mc:AlternateContent>
-      <p:grpSp>
-        <p:nvGrpSpPr>
-          <p:cNvPr id="33" name="Group 32">
-            <a:extLst>
-              <a:ext uri="{FF2B5EF4-FFF2-40B4-BE49-F238E27FC236}">
-                <a16:creationId xmlns:a16="http://schemas.microsoft.com/office/drawing/2014/main" id="{FC6671D0-C8DA-30FC-0B27-C5A32AB3F4E2}"/>
-              </a:ext>
-            </a:extLst>
-          </p:cNvPr>
-          <p:cNvGrpSpPr/>
+      <p:sp>
+        <p:nvSpPr>
+          <p:cNvPr id="8" name="TextBox 7">
+            <a:extLst>
+              <a:ext uri="{FF2B5EF4-FFF2-40B4-BE49-F238E27FC236}">
+                <a16:creationId xmlns:a16="http://schemas.microsoft.com/office/drawing/2014/main" id="{D04C8875-21A5-B2DF-E6AB-D5ED42179333}"/>
+              </a:ext>
+            </a:extLst>
+          </p:cNvPr>
+          <p:cNvSpPr txBox="1"/>
           <p:nvPr/>
-        </p:nvGrpSpPr>
-        <p:grpSpPr>
+        </p:nvSpPr>
+        <p:spPr>
           <a:xfrm>
-            <a:off x="10306224" y="3541536"/>
-            <a:ext cx="1262160" cy="851040"/>
-            <a:chOff x="10306224" y="3541536"/>
-            <a:chExt cx="1262160" cy="851040"/>
+            <a:off x="10476576" y="2247505"/>
+            <a:ext cx="1419768" cy="461665"/>
           </a:xfrm>
-        </p:grpSpPr>
-        <mc:AlternateContent xmlns:mc="http://schemas.openxmlformats.org/markup-compatibility/2006" xmlns:p14="http://schemas.microsoft.com/office/powerpoint/2010/main">
-          <mc:Choice Requires="p14">
-            <p:contentPart p14:bwMode="auto" r:id="rId12">
-              <p14:nvContentPartPr>
-                <p14:cNvPr id="22" name="Ink 21">
-                  <a:extLst>
-                    <a:ext uri="{FF2B5EF4-FFF2-40B4-BE49-F238E27FC236}">
-                      <a16:creationId xmlns:a16="http://schemas.microsoft.com/office/drawing/2014/main" id="{3744D8FA-F8AE-3F1B-08FE-AE0324DB712E}"/>
-                    </a:ext>
-                  </a:extLst>
-                </p14:cNvPr>
-                <p14:cNvContentPartPr/>
-                <p14:nvPr/>
-              </p14:nvContentPartPr>
-              <p14:xfrm>
-                <a:off x="10306224" y="3541536"/>
-                <a:ext cx="238680" cy="851040"/>
-              </p14:xfrm>
-            </p:contentPart>
-          </mc:Choice>
-          <mc:Fallback xmlns="">
-            <p:pic>
-              <p:nvPicPr>
-                <p:cNvPr id="22" name="Ink 21">
-                  <a:extLst>
-                    <a:ext uri="{FF2B5EF4-FFF2-40B4-BE49-F238E27FC236}">
-                      <a16:creationId xmlns:a16="http://schemas.microsoft.com/office/drawing/2014/main" id="{3744D8FA-F8AE-3F1B-08FE-AE0324DB712E}"/>
-                    </a:ext>
-                  </a:extLst>
-                </p:cNvPr>
-                <p:cNvPicPr/>
-                <p:nvPr/>
-              </p:nvPicPr>
-              <p:blipFill>
-                <a:blip r:embed="rId13"/>
-                <a:stretch>
-                  <a:fillRect/>
-                </a:stretch>
-              </p:blipFill>
-              <p:spPr>
-                <a:xfrm>
-                  <a:off x="10270224" y="3505536"/>
-                  <a:ext cx="310320" cy="922680"/>
-                </a:xfrm>
-                <a:prstGeom prst="rect">
-                  <a:avLst/>
-                </a:prstGeom>
-              </p:spPr>
-            </p:pic>
-          </mc:Fallback>
-        </mc:AlternateContent>
-        <mc:AlternateContent xmlns:mc="http://schemas.openxmlformats.org/markup-compatibility/2006" xmlns:p14="http://schemas.microsoft.com/office/powerpoint/2010/main">
-          <mc:Choice Requires="p14">
-            <p:contentPart p14:bwMode="auto" r:id="rId14">
-              <p14:nvContentPartPr>
-                <p14:cNvPr id="23" name="Ink 22">
-                  <a:extLst>
-                    <a:ext uri="{FF2B5EF4-FFF2-40B4-BE49-F238E27FC236}">
-                      <a16:creationId xmlns:a16="http://schemas.microsoft.com/office/drawing/2014/main" id="{BF047AB2-25D8-1CDA-9D49-C7B45477C2ED}"/>
-                    </a:ext>
-                  </a:extLst>
-                </p14:cNvPr>
-                <p14:cNvContentPartPr/>
-                <p14:nvPr/>
-              </p14:nvContentPartPr>
-              <p14:xfrm>
-                <a:off x="10679544" y="3780936"/>
-                <a:ext cx="172080" cy="252360"/>
-              </p14:xfrm>
-            </p:contentPart>
-          </mc:Choice>
-          <mc:Fallback xmlns="">
-            <p:pic>
-              <p:nvPicPr>
-                <p:cNvPr id="23" name="Ink 22">
-                  <a:extLst>
-                    <a:ext uri="{FF2B5EF4-FFF2-40B4-BE49-F238E27FC236}">
-                      <a16:creationId xmlns:a16="http://schemas.microsoft.com/office/drawing/2014/main" id="{BF047AB2-25D8-1CDA-9D49-C7B45477C2ED}"/>
-                    </a:ext>
-                  </a:extLst>
-                </p:cNvPr>
-                <p:cNvPicPr/>
-                <p:nvPr/>
-              </p:nvPicPr>
-              <p:blipFill>
-                <a:blip r:embed="rId15"/>
-                <a:stretch>
-                  <a:fillRect/>
-                </a:stretch>
-              </p:blipFill>
-              <p:spPr>
-                <a:xfrm>
-                  <a:off x="10643544" y="3745296"/>
-                  <a:ext cx="243720" cy="324000"/>
-                </a:xfrm>
-                <a:prstGeom prst="rect">
-                  <a:avLst/>
-                </a:prstGeom>
-              </p:spPr>
-            </p:pic>
-          </mc:Fallback>
-        </mc:AlternateContent>
-        <mc:AlternateContent xmlns:mc="http://schemas.openxmlformats.org/markup-compatibility/2006" xmlns:p14="http://schemas.microsoft.com/office/powerpoint/2010/main">
-          <mc:Choice Requires="p14">
-            <p:contentPart p14:bwMode="auto" r:id="rId16">
-              <p14:nvContentPartPr>
-                <p14:cNvPr id="24" name="Ink 23">
-                  <a:extLst>
-                    <a:ext uri="{FF2B5EF4-FFF2-40B4-BE49-F238E27FC236}">
-                      <a16:creationId xmlns:a16="http://schemas.microsoft.com/office/drawing/2014/main" id="{0324FD2E-B944-8ADE-EA17-2E28D7C02CDF}"/>
-                    </a:ext>
-                  </a:extLst>
-                </p14:cNvPr>
-                <p14:cNvContentPartPr/>
-                <p14:nvPr/>
-              </p14:nvContentPartPr>
-              <p14:xfrm>
-                <a:off x="10864944" y="3911256"/>
-                <a:ext cx="148680" cy="122760"/>
-              </p14:xfrm>
-            </p:contentPart>
-          </mc:Choice>
-          <mc:Fallback xmlns="">
-            <p:pic>
-              <p:nvPicPr>
-                <p:cNvPr id="24" name="Ink 23">
-                  <a:extLst>
-                    <a:ext uri="{FF2B5EF4-FFF2-40B4-BE49-F238E27FC236}">
-                      <a16:creationId xmlns:a16="http://schemas.microsoft.com/office/drawing/2014/main" id="{0324FD2E-B944-8ADE-EA17-2E28D7C02CDF}"/>
-                    </a:ext>
-                  </a:extLst>
-                </p:cNvPr>
-                <p:cNvPicPr/>
-                <p:nvPr/>
-              </p:nvPicPr>
-              <p:blipFill>
-                <a:blip r:embed="rId17"/>
-                <a:stretch>
-                  <a:fillRect/>
-                </a:stretch>
-              </p:blipFill>
-              <p:spPr>
-                <a:xfrm>
-                  <a:off x="10828944" y="3875616"/>
-                  <a:ext cx="220320" cy="194400"/>
-                </a:xfrm>
-                <a:prstGeom prst="rect">
-                  <a:avLst/>
-                </a:prstGeom>
-              </p:spPr>
-            </p:pic>
-          </mc:Fallback>
-        </mc:AlternateContent>
-        <mc:AlternateContent xmlns:mc="http://schemas.openxmlformats.org/markup-compatibility/2006" xmlns:p14="http://schemas.microsoft.com/office/powerpoint/2010/main">
-          <mc:Choice Requires="p14">
-            <p:contentPart p14:bwMode="auto" r:id="rId18">
-              <p14:nvContentPartPr>
-                <p14:cNvPr id="25" name="Ink 24">
-                  <a:extLst>
-                    <a:ext uri="{FF2B5EF4-FFF2-40B4-BE49-F238E27FC236}">
-                      <a16:creationId xmlns:a16="http://schemas.microsoft.com/office/drawing/2014/main" id="{F5ECD2AE-8C3B-4CF7-7EE9-5C58091D07B5}"/>
-                    </a:ext>
-                  </a:extLst>
-                </p14:cNvPr>
-                <p14:cNvContentPartPr/>
-                <p14:nvPr/>
-              </p14:nvContentPartPr>
-              <p14:xfrm>
-                <a:off x="11029104" y="3904776"/>
-                <a:ext cx="157320" cy="128160"/>
-              </p14:xfrm>
-            </p:contentPart>
-          </mc:Choice>
-          <mc:Fallback xmlns="">
-            <p:pic>
-              <p:nvPicPr>
-                <p:cNvPr id="25" name="Ink 24">
-                  <a:extLst>
-                    <a:ext uri="{FF2B5EF4-FFF2-40B4-BE49-F238E27FC236}">
-                      <a16:creationId xmlns:a16="http://schemas.microsoft.com/office/drawing/2014/main" id="{F5ECD2AE-8C3B-4CF7-7EE9-5C58091D07B5}"/>
-                    </a:ext>
-                  </a:extLst>
-                </p:cNvPr>
-                <p:cNvPicPr/>
-                <p:nvPr/>
-              </p:nvPicPr>
-              <p:blipFill>
-                <a:blip r:embed="rId19"/>
-                <a:stretch>
-                  <a:fillRect/>
-                </a:stretch>
-              </p:blipFill>
-              <p:spPr>
-                <a:xfrm>
-                  <a:off x="10993464" y="3869136"/>
-                  <a:ext cx="228960" cy="199800"/>
-                </a:xfrm>
-                <a:prstGeom prst="rect">
-                  <a:avLst/>
-                </a:prstGeom>
-              </p:spPr>
-            </p:pic>
-          </mc:Fallback>
-        </mc:AlternateContent>
-        <mc:AlternateContent xmlns:mc="http://schemas.openxmlformats.org/markup-compatibility/2006" xmlns:p14="http://schemas.microsoft.com/office/powerpoint/2010/main">
-          <mc:Choice Requires="p14">
-            <p:contentPart p14:bwMode="auto" r:id="rId20">
-              <p14:nvContentPartPr>
-                <p14:cNvPr id="26" name="Ink 25">
-                  <a:extLst>
-                    <a:ext uri="{FF2B5EF4-FFF2-40B4-BE49-F238E27FC236}">
-                      <a16:creationId xmlns:a16="http://schemas.microsoft.com/office/drawing/2014/main" id="{14FDC7ED-9C5A-8312-2C3E-00651EA03D0E}"/>
-                    </a:ext>
-                  </a:extLst>
-                </p14:cNvPr>
-                <p14:cNvContentPartPr/>
-                <p14:nvPr/>
-              </p14:nvContentPartPr>
-              <p14:xfrm>
-                <a:off x="11272104" y="3872016"/>
-                <a:ext cx="296280" cy="142560"/>
-              </p14:xfrm>
-            </p:contentPart>
-          </mc:Choice>
-          <mc:Fallback xmlns="">
-            <p:pic>
-              <p:nvPicPr>
-                <p:cNvPr id="26" name="Ink 25">
-                  <a:extLst>
-                    <a:ext uri="{FF2B5EF4-FFF2-40B4-BE49-F238E27FC236}">
-                      <a16:creationId xmlns:a16="http://schemas.microsoft.com/office/drawing/2014/main" id="{14FDC7ED-9C5A-8312-2C3E-00651EA03D0E}"/>
-                    </a:ext>
-                  </a:extLst>
-                </p:cNvPr>
-                <p:cNvPicPr/>
-                <p:nvPr/>
-              </p:nvPicPr>
-              <p:blipFill>
-                <a:blip r:embed="rId21"/>
-                <a:stretch>
-                  <a:fillRect/>
-                </a:stretch>
-              </p:blipFill>
-              <p:spPr>
-                <a:xfrm>
-                  <a:off x="11236464" y="3836016"/>
-                  <a:ext cx="367920" cy="214200"/>
-                </a:xfrm>
-                <a:prstGeom prst="rect">
-                  <a:avLst/>
-                </a:prstGeom>
-              </p:spPr>
-            </p:pic>
-          </mc:Fallback>
-        </mc:AlternateContent>
-      </p:grpSp>
-      <p:grpSp>
-        <p:nvGrpSpPr>
-          <p:cNvPr id="32" name="Group 31">
-            <a:extLst>
-              <a:ext uri="{FF2B5EF4-FFF2-40B4-BE49-F238E27FC236}">
-                <a16:creationId xmlns:a16="http://schemas.microsoft.com/office/drawing/2014/main" id="{A100B755-FA9E-3117-8FAF-D9DD95ADAD4B}"/>
-              </a:ext>
-            </a:extLst>
-          </p:cNvPr>
-          <p:cNvGrpSpPr/>
+          <a:prstGeom prst="rect">
+            <a:avLst/>
+          </a:prstGeom>
+          <a:noFill/>
+        </p:spPr>
+        <p:txBody>
+          <a:bodyPr wrap="square">
+            <a:spAutoFit/>
+          </a:bodyPr>
+          <a:lstStyle/>
+          <a:p>
+            <a:r>
+              <a:rPr lang="en-US" sz="2400" b="1" dirty="0">
+                <a:solidFill>
+                  <a:schemeClr val="accent4">
+                    <a:lumMod val="60000"/>
+                    <a:lumOff val="40000"/>
+                  </a:schemeClr>
+                </a:solidFill>
+              </a:rPr>
+              <a:t> Chunk 1</a:t>
+            </a:r>
+          </a:p>
+        </p:txBody>
+      </p:sp>
+      <p:sp>
+        <p:nvSpPr>
+          <p:cNvPr id="11" name="TextBox 10">
+            <a:extLst>
+              <a:ext uri="{FF2B5EF4-FFF2-40B4-BE49-F238E27FC236}">
+                <a16:creationId xmlns:a16="http://schemas.microsoft.com/office/drawing/2014/main" id="{395D2EE0-5D8E-7FD6-F8A9-5DA3D83822FD}"/>
+              </a:ext>
+            </a:extLst>
+          </p:cNvPr>
+          <p:cNvSpPr txBox="1"/>
           <p:nvPr/>
-        </p:nvGrpSpPr>
-        <p:grpSpPr>
+        </p:nvSpPr>
+        <p:spPr>
           <a:xfrm>
-            <a:off x="10342944" y="4811616"/>
-            <a:ext cx="1135800" cy="851400"/>
-            <a:chOff x="10342944" y="4811616"/>
-            <a:chExt cx="1135800" cy="851400"/>
+            <a:off x="10656864" y="3736223"/>
+            <a:ext cx="1419768" cy="461665"/>
           </a:xfrm>
-        </p:grpSpPr>
-        <mc:AlternateContent xmlns:mc="http://schemas.openxmlformats.org/markup-compatibility/2006" xmlns:p14="http://schemas.microsoft.com/office/powerpoint/2010/main">
-          <mc:Choice Requires="p14">
-            <p:contentPart p14:bwMode="auto" r:id="rId22">
-              <p14:nvContentPartPr>
-                <p14:cNvPr id="27" name="Ink 26">
-                  <a:extLst>
-                    <a:ext uri="{FF2B5EF4-FFF2-40B4-BE49-F238E27FC236}">
-                      <a16:creationId xmlns:a16="http://schemas.microsoft.com/office/drawing/2014/main" id="{87A6D330-7597-2D51-0580-D31A2C06EAD8}"/>
-                    </a:ext>
-                  </a:extLst>
-                </p14:cNvPr>
-                <p14:cNvContentPartPr/>
-                <p14:nvPr/>
-              </p14:nvContentPartPr>
-              <p14:xfrm>
-                <a:off x="10342944" y="4811616"/>
-                <a:ext cx="313920" cy="851400"/>
-              </p14:xfrm>
-            </p:contentPart>
-          </mc:Choice>
-          <mc:Fallback xmlns="">
-            <p:pic>
-              <p:nvPicPr>
-                <p:cNvPr id="27" name="Ink 26">
-                  <a:extLst>
-                    <a:ext uri="{FF2B5EF4-FFF2-40B4-BE49-F238E27FC236}">
-                      <a16:creationId xmlns:a16="http://schemas.microsoft.com/office/drawing/2014/main" id="{87A6D330-7597-2D51-0580-D31A2C06EAD8}"/>
-                    </a:ext>
-                  </a:extLst>
-                </p:cNvPr>
-                <p:cNvPicPr/>
-                <p:nvPr/>
-              </p:nvPicPr>
-              <p:blipFill>
-                <a:blip r:embed="rId23"/>
-                <a:stretch>
-                  <a:fillRect/>
-                </a:stretch>
-              </p:blipFill>
-              <p:spPr>
-                <a:xfrm>
-                  <a:off x="10306944" y="4775976"/>
-                  <a:ext cx="385560" cy="923040"/>
-                </a:xfrm>
-                <a:prstGeom prst="rect">
-                  <a:avLst/>
-                </a:prstGeom>
-              </p:spPr>
-            </p:pic>
-          </mc:Fallback>
-        </mc:AlternateContent>
-        <mc:AlternateContent xmlns:mc="http://schemas.openxmlformats.org/markup-compatibility/2006" xmlns:p14="http://schemas.microsoft.com/office/powerpoint/2010/main">
-          <mc:Choice Requires="p14">
-            <p:contentPart p14:bwMode="auto" r:id="rId24">
-              <p14:nvContentPartPr>
-                <p14:cNvPr id="28" name="Ink 27">
-                  <a:extLst>
-                    <a:ext uri="{FF2B5EF4-FFF2-40B4-BE49-F238E27FC236}">
-                      <a16:creationId xmlns:a16="http://schemas.microsoft.com/office/drawing/2014/main" id="{C4928523-60E7-B425-17F4-67C11D2E130F}"/>
-                    </a:ext>
-                  </a:extLst>
-                </p14:cNvPr>
-                <p14:cNvContentPartPr/>
-                <p14:nvPr/>
-              </p14:nvContentPartPr>
-              <p14:xfrm>
-                <a:off x="10711584" y="4885776"/>
-                <a:ext cx="166320" cy="272160"/>
-              </p14:xfrm>
-            </p:contentPart>
-          </mc:Choice>
-          <mc:Fallback xmlns="">
-            <p:pic>
-              <p:nvPicPr>
-                <p:cNvPr id="28" name="Ink 27">
-                  <a:extLst>
-                    <a:ext uri="{FF2B5EF4-FFF2-40B4-BE49-F238E27FC236}">
-                      <a16:creationId xmlns:a16="http://schemas.microsoft.com/office/drawing/2014/main" id="{C4928523-60E7-B425-17F4-67C11D2E130F}"/>
-                    </a:ext>
-                  </a:extLst>
-                </p:cNvPr>
-                <p:cNvPicPr/>
-                <p:nvPr/>
-              </p:nvPicPr>
-              <p:blipFill>
-                <a:blip r:embed="rId25"/>
-                <a:stretch>
-                  <a:fillRect/>
-                </a:stretch>
-              </p:blipFill>
-              <p:spPr>
-                <a:xfrm>
-                  <a:off x="10675584" y="4849776"/>
-                  <a:ext cx="237960" cy="343800"/>
-                </a:xfrm>
-                <a:prstGeom prst="rect">
-                  <a:avLst/>
-                </a:prstGeom>
-              </p:spPr>
-            </p:pic>
-          </mc:Fallback>
-        </mc:AlternateContent>
-        <mc:AlternateContent xmlns:mc="http://schemas.openxmlformats.org/markup-compatibility/2006" xmlns:p14="http://schemas.microsoft.com/office/powerpoint/2010/main">
-          <mc:Choice Requires="p14">
-            <p:contentPart p14:bwMode="auto" r:id="rId26">
-              <p14:nvContentPartPr>
-                <p14:cNvPr id="29" name="Ink 28">
-                  <a:extLst>
-                    <a:ext uri="{FF2B5EF4-FFF2-40B4-BE49-F238E27FC236}">
-                      <a16:creationId xmlns:a16="http://schemas.microsoft.com/office/drawing/2014/main" id="{B22FA997-7F95-D1DB-3E0E-AD9C0EE3864B}"/>
-                    </a:ext>
-                  </a:extLst>
-                </p14:cNvPr>
-                <p14:cNvContentPartPr/>
-                <p14:nvPr/>
-              </p14:nvContentPartPr>
-              <p14:xfrm>
-                <a:off x="10874664" y="5040216"/>
-                <a:ext cx="172440" cy="88920"/>
-              </p14:xfrm>
-            </p:contentPart>
-          </mc:Choice>
-          <mc:Fallback xmlns="">
-            <p:pic>
-              <p:nvPicPr>
-                <p:cNvPr id="29" name="Ink 28">
-                  <a:extLst>
-                    <a:ext uri="{FF2B5EF4-FFF2-40B4-BE49-F238E27FC236}">
-                      <a16:creationId xmlns:a16="http://schemas.microsoft.com/office/drawing/2014/main" id="{B22FA997-7F95-D1DB-3E0E-AD9C0EE3864B}"/>
-                    </a:ext>
-                  </a:extLst>
-                </p:cNvPr>
-                <p:cNvPicPr/>
-                <p:nvPr/>
-              </p:nvPicPr>
-              <p:blipFill>
-                <a:blip r:embed="rId27"/>
-                <a:stretch>
-                  <a:fillRect/>
-                </a:stretch>
-              </p:blipFill>
-              <p:spPr>
-                <a:xfrm>
-                  <a:off x="10839024" y="5004576"/>
-                  <a:ext cx="244080" cy="160560"/>
-                </a:xfrm>
-                <a:prstGeom prst="rect">
-                  <a:avLst/>
-                </a:prstGeom>
-              </p:spPr>
-            </p:pic>
-          </mc:Fallback>
-        </mc:AlternateContent>
-        <mc:AlternateContent xmlns:mc="http://schemas.openxmlformats.org/markup-compatibility/2006" xmlns:p14="http://schemas.microsoft.com/office/powerpoint/2010/main">
-          <mc:Choice Requires="p14">
-            <p:contentPart p14:bwMode="auto" r:id="rId28">
-              <p14:nvContentPartPr>
-                <p14:cNvPr id="30" name="Ink 29">
-                  <a:extLst>
-                    <a:ext uri="{FF2B5EF4-FFF2-40B4-BE49-F238E27FC236}">
-                      <a16:creationId xmlns:a16="http://schemas.microsoft.com/office/drawing/2014/main" id="{992566E5-EEC4-2933-007D-582934950ABF}"/>
-                    </a:ext>
-                  </a:extLst>
-                </p14:cNvPr>
-                <p14:cNvContentPartPr/>
-                <p14:nvPr/>
-              </p14:nvContentPartPr>
-              <p14:xfrm>
-                <a:off x="11061144" y="5038056"/>
-                <a:ext cx="150120" cy="114480"/>
-              </p14:xfrm>
-            </p:contentPart>
-          </mc:Choice>
-          <mc:Fallback xmlns="">
-            <p:pic>
-              <p:nvPicPr>
-                <p:cNvPr id="30" name="Ink 29">
-                  <a:extLst>
-                    <a:ext uri="{FF2B5EF4-FFF2-40B4-BE49-F238E27FC236}">
-                      <a16:creationId xmlns:a16="http://schemas.microsoft.com/office/drawing/2014/main" id="{992566E5-EEC4-2933-007D-582934950ABF}"/>
-                    </a:ext>
-                  </a:extLst>
-                </p:cNvPr>
-                <p:cNvPicPr/>
-                <p:nvPr/>
-              </p:nvPicPr>
-              <p:blipFill>
-                <a:blip r:embed="rId29"/>
-                <a:stretch>
-                  <a:fillRect/>
-                </a:stretch>
-              </p:blipFill>
-              <p:spPr>
-                <a:xfrm>
-                  <a:off x="11025144" y="5002416"/>
-                  <a:ext cx="221760" cy="186120"/>
-                </a:xfrm>
-                <a:prstGeom prst="rect">
-                  <a:avLst/>
-                </a:prstGeom>
-              </p:spPr>
-            </p:pic>
-          </mc:Fallback>
-        </mc:AlternateContent>
-        <mc:AlternateContent xmlns:mc="http://schemas.openxmlformats.org/markup-compatibility/2006" xmlns:p14="http://schemas.microsoft.com/office/powerpoint/2010/main">
-          <mc:Choice Requires="p14">
-            <p:contentPart p14:bwMode="auto" r:id="rId30">
-              <p14:nvContentPartPr>
-                <p14:cNvPr id="31" name="Ink 30">
-                  <a:extLst>
-                    <a:ext uri="{FF2B5EF4-FFF2-40B4-BE49-F238E27FC236}">
-                      <a16:creationId xmlns:a16="http://schemas.microsoft.com/office/drawing/2014/main" id="{57FF3DBC-27C8-D531-1AF1-7D7F6C06CF5F}"/>
-                    </a:ext>
-                  </a:extLst>
-                </p14:cNvPr>
-                <p14:cNvContentPartPr/>
-                <p14:nvPr/>
-              </p14:nvContentPartPr>
-              <p14:xfrm>
-                <a:off x="11298744" y="4959576"/>
-                <a:ext cx="180000" cy="254880"/>
-              </p14:xfrm>
-            </p:contentPart>
-          </mc:Choice>
-          <mc:Fallback xmlns="">
-            <p:pic>
-              <p:nvPicPr>
-                <p:cNvPr id="31" name="Ink 30">
-                  <a:extLst>
-                    <a:ext uri="{FF2B5EF4-FFF2-40B4-BE49-F238E27FC236}">
-                      <a16:creationId xmlns:a16="http://schemas.microsoft.com/office/drawing/2014/main" id="{57FF3DBC-27C8-D531-1AF1-7D7F6C06CF5F}"/>
-                    </a:ext>
-                  </a:extLst>
-                </p:cNvPr>
-                <p:cNvPicPr/>
-                <p:nvPr/>
-              </p:nvPicPr>
-              <p:blipFill>
-                <a:blip r:embed="rId31"/>
-                <a:stretch>
-                  <a:fillRect/>
-                </a:stretch>
-              </p:blipFill>
-              <p:spPr>
-                <a:xfrm>
-                  <a:off x="11262744" y="4923576"/>
-                  <a:ext cx="251640" cy="326520"/>
-                </a:xfrm>
-                <a:prstGeom prst="rect">
-                  <a:avLst/>
-                </a:prstGeom>
-              </p:spPr>
-            </p:pic>
-          </mc:Fallback>
-        </mc:AlternateContent>
-      </p:grpSp>
+          <a:prstGeom prst="rect">
+            <a:avLst/>
+          </a:prstGeom>
+          <a:noFill/>
+        </p:spPr>
+        <p:txBody>
+          <a:bodyPr wrap="square">
+            <a:spAutoFit/>
+          </a:bodyPr>
+          <a:lstStyle/>
+          <a:p>
+            <a:r>
+              <a:rPr lang="en-US" sz="2400" b="1" dirty="0">
+                <a:solidFill>
+                  <a:schemeClr val="accent4">
+                    <a:lumMod val="60000"/>
+                    <a:lumOff val="40000"/>
+                  </a:schemeClr>
+                </a:solidFill>
+              </a:rPr>
+              <a:t> Chunk 2</a:t>
+            </a:r>
+          </a:p>
+        </p:txBody>
+      </p:sp>
+      <p:sp>
+        <p:nvSpPr>
+          <p:cNvPr id="13" name="TextBox 12">
+            <a:extLst>
+              <a:ext uri="{FF2B5EF4-FFF2-40B4-BE49-F238E27FC236}">
+                <a16:creationId xmlns:a16="http://schemas.microsoft.com/office/drawing/2014/main" id="{180479F2-2951-65D7-17EA-C1A0FC4AF726}"/>
+              </a:ext>
+            </a:extLst>
+          </p:cNvPr>
+          <p:cNvSpPr txBox="1"/>
+          <p:nvPr/>
+        </p:nvSpPr>
+        <p:spPr>
+          <a:xfrm>
+            <a:off x="10656864" y="4994108"/>
+            <a:ext cx="1419768" cy="461665"/>
+          </a:xfrm>
+          <a:prstGeom prst="rect">
+            <a:avLst/>
+          </a:prstGeom>
+          <a:noFill/>
+        </p:spPr>
+        <p:txBody>
+          <a:bodyPr wrap="square">
+            <a:spAutoFit/>
+          </a:bodyPr>
+          <a:lstStyle/>
+          <a:p>
+            <a:r>
+              <a:rPr lang="en-US" sz="2400" b="1" dirty="0">
+                <a:solidFill>
+                  <a:schemeClr val="accent4">
+                    <a:lumMod val="60000"/>
+                    <a:lumOff val="40000"/>
+                  </a:schemeClr>
+                </a:solidFill>
+              </a:rPr>
+              <a:t> Chunk 3</a:t>
+            </a:r>
+          </a:p>
+        </p:txBody>
+      </p:sp>
     </p:spTree>
     <p:extLst>
       <p:ext uri="{BB962C8B-B14F-4D97-AF65-F5344CB8AC3E}">
@@ -8484,9 +7397,8 @@
             <a:r>
               <a:rPr lang="en-US" sz="2400" b="1" i="1" u="sng" dirty="0">
                 <a:solidFill>
-                  <a:schemeClr val="accent6">
-                    <a:lumMod val="60000"/>
-                    <a:lumOff val="40000"/>
+                  <a:schemeClr val="accent4">
+                    <a:lumMod val="75000"/>
                   </a:schemeClr>
                 </a:solidFill>
               </a:rPr>
@@ -8494,9 +7406,8 @@
             </a:r>
             <a:endParaRPr lang="en-US" sz="2000" b="1" i="1" u="sng" dirty="0">
               <a:solidFill>
-                <a:schemeClr val="accent6">
-                  <a:lumMod val="60000"/>
-                  <a:lumOff val="40000"/>
+                <a:schemeClr val="accent4">
+                  <a:lumMod val="75000"/>
                 </a:schemeClr>
               </a:solidFill>
             </a:endParaRPr>
@@ -8505,9 +7416,8 @@
             <a:r>
               <a:rPr lang="en-US" sz="2000" dirty="0">
                 <a:solidFill>
-                  <a:schemeClr val="accent6">
-                    <a:lumMod val="60000"/>
-                    <a:lumOff val="40000"/>
+                  <a:schemeClr val="accent4">
+                    <a:lumMod val="75000"/>
                   </a:schemeClr>
                 </a:solidFill>
               </a:rPr>
@@ -8517,9 +7427,8 @@
           <a:p>
             <a:endParaRPr lang="en-US" sz="2000" dirty="0">
               <a:solidFill>
-                <a:schemeClr val="accent6">
-                  <a:lumMod val="60000"/>
-                  <a:lumOff val="40000"/>
+                <a:schemeClr val="accent4">
+                  <a:lumMod val="75000"/>
                 </a:schemeClr>
               </a:solidFill>
             </a:endParaRPr>
@@ -8528,9 +7437,8 @@
             <a:r>
               <a:rPr lang="en-US" sz="2400" b="1" i="1" u="sng" dirty="0">
                 <a:solidFill>
-                  <a:schemeClr val="accent6">
-                    <a:lumMod val="60000"/>
-                    <a:lumOff val="40000"/>
+                  <a:schemeClr val="accent4">
+                    <a:lumMod val="75000"/>
                   </a:schemeClr>
                 </a:solidFill>
               </a:rPr>
@@ -8538,9 +7446,8 @@
             </a:r>
             <a:endParaRPr lang="en-US" sz="2000" b="1" i="1" u="sng" dirty="0">
               <a:solidFill>
-                <a:schemeClr val="accent6">
-                  <a:lumMod val="60000"/>
-                  <a:lumOff val="40000"/>
+                <a:schemeClr val="accent4">
+                  <a:lumMod val="75000"/>
                 </a:schemeClr>
               </a:solidFill>
             </a:endParaRPr>
@@ -8549,9 +7456,8 @@
             <a:r>
               <a:rPr lang="en-US" sz="2000" dirty="0">
                 <a:solidFill>
-                  <a:schemeClr val="accent6">
-                    <a:lumMod val="60000"/>
-                    <a:lumOff val="40000"/>
+                  <a:schemeClr val="accent4">
+                    <a:lumMod val="75000"/>
                   </a:schemeClr>
                 </a:solidFill>
               </a:rPr>
@@ -8562,9 +7468,8 @@
             <a:r>
               <a:rPr lang="en-US" sz="2000" dirty="0">
                 <a:solidFill>
-                  <a:schemeClr val="accent6">
-                    <a:lumMod val="60000"/>
-                    <a:lumOff val="40000"/>
+                  <a:schemeClr val="accent4">
+                    <a:lumMod val="75000"/>
                   </a:schemeClr>
                 </a:solidFill>
               </a:rPr>
@@ -8574,9 +7479,8 @@
           <a:p>
             <a:endParaRPr lang="en-US" sz="2000" dirty="0">
               <a:solidFill>
-                <a:schemeClr val="accent6">
-                  <a:lumMod val="60000"/>
-                  <a:lumOff val="40000"/>
+                <a:schemeClr val="accent4">
+                  <a:lumMod val="75000"/>
                 </a:schemeClr>
               </a:solidFill>
             </a:endParaRPr>
@@ -8585,9 +7489,8 @@
             <a:r>
               <a:rPr lang="en-US" sz="2400" b="1" i="1" u="sng" dirty="0">
                 <a:solidFill>
-                  <a:schemeClr val="accent6">
-                    <a:lumMod val="60000"/>
-                    <a:lumOff val="40000"/>
+                  <a:schemeClr val="accent4">
+                    <a:lumMod val="75000"/>
                   </a:schemeClr>
                 </a:solidFill>
               </a:rPr>
@@ -8595,9 +7498,8 @@
             </a:r>
             <a:endParaRPr lang="en-US" sz="2000" b="1" i="1" u="sng" dirty="0">
               <a:solidFill>
-                <a:schemeClr val="accent6">
-                  <a:lumMod val="60000"/>
-                  <a:lumOff val="40000"/>
+                <a:schemeClr val="accent4">
+                  <a:lumMod val="75000"/>
                 </a:schemeClr>
               </a:solidFill>
             </a:endParaRPr>
@@ -8606,9 +7508,8 @@
             <a:r>
               <a:rPr lang="en-US" sz="2000" dirty="0">
                 <a:solidFill>
-                  <a:schemeClr val="accent6">
-                    <a:lumMod val="60000"/>
-                    <a:lumOff val="40000"/>
+                  <a:schemeClr val="accent4">
+                    <a:lumMod val="75000"/>
                   </a:schemeClr>
                 </a:solidFill>
               </a:rPr>
@@ -8944,8 +7845,8 @@
           </mc:Fallback>
         </mc:AlternateContent>
       </p:grpSp>
-      <mc:AlternateContent xmlns:mc="http://schemas.openxmlformats.org/markup-compatibility/2006">
-        <mc:Choice xmlns:p14="http://schemas.microsoft.com/office/powerpoint/2010/main" Requires="p14">
+      <mc:AlternateContent xmlns:mc="http://schemas.openxmlformats.org/markup-compatibility/2006" xmlns:p14="http://schemas.microsoft.com/office/powerpoint/2010/main">
+        <mc:Choice Requires="p14">
           <p:contentPart p14:bwMode="auto" r:id="rId14">
             <p14:nvContentPartPr>
               <p14:cNvPr id="12" name="Ink 11">
@@ -8964,7 +7865,7 @@
             </p14:xfrm>
           </p:contentPart>
         </mc:Choice>
-        <mc:Fallback>
+        <mc:Fallback xmlns="">
           <p:pic>
             <p:nvPicPr>
               <p:cNvPr id="12" name="Ink 11">
@@ -8995,8 +7896,8 @@
           </p:pic>
         </mc:Fallback>
       </mc:AlternateContent>
-      <mc:AlternateContent xmlns:mc="http://schemas.openxmlformats.org/markup-compatibility/2006">
-        <mc:Choice xmlns:p14="http://schemas.microsoft.com/office/powerpoint/2010/main" Requires="p14">
+      <mc:AlternateContent xmlns:mc="http://schemas.openxmlformats.org/markup-compatibility/2006" xmlns:p14="http://schemas.microsoft.com/office/powerpoint/2010/main">
+        <mc:Choice Requires="p14">
           <p:contentPart p14:bwMode="auto" r:id="rId16">
             <p14:nvContentPartPr>
               <p14:cNvPr id="13" name="Ink 12">
@@ -9015,7 +7916,7 @@
             </p14:xfrm>
           </p:contentPart>
         </mc:Choice>
-        <mc:Fallback>
+        <mc:Fallback xmlns="">
           <p:pic>
             <p:nvPicPr>
               <p:cNvPr id="13" name="Ink 12">
@@ -9046,8 +7947,8 @@
           </p:pic>
         </mc:Fallback>
       </mc:AlternateContent>
-      <mc:AlternateContent xmlns:mc="http://schemas.openxmlformats.org/markup-compatibility/2006">
-        <mc:Choice xmlns:p14="http://schemas.microsoft.com/office/powerpoint/2010/main" Requires="p14">
+      <mc:AlternateContent xmlns:mc="http://schemas.openxmlformats.org/markup-compatibility/2006" xmlns:p14="http://schemas.microsoft.com/office/powerpoint/2010/main">
+        <mc:Choice Requires="p14">
           <p:contentPart p14:bwMode="auto" r:id="rId18">
             <p14:nvContentPartPr>
               <p14:cNvPr id="14" name="Ink 13">
@@ -9066,7 +7967,7 @@
             </p14:xfrm>
           </p:contentPart>
         </mc:Choice>
-        <mc:Fallback>
+        <mc:Fallback xmlns="">
           <p:pic>
             <p:nvPicPr>
               <p:cNvPr id="14" name="Ink 13">
@@ -9097,8 +7998,8 @@
           </p:pic>
         </mc:Fallback>
       </mc:AlternateContent>
-      <mc:AlternateContent xmlns:mc="http://schemas.openxmlformats.org/markup-compatibility/2006">
-        <mc:Choice xmlns:p14="http://schemas.microsoft.com/office/powerpoint/2010/main" Requires="p14">
+      <mc:AlternateContent xmlns:mc="http://schemas.openxmlformats.org/markup-compatibility/2006" xmlns:p14="http://schemas.microsoft.com/office/powerpoint/2010/main">
+        <mc:Choice Requires="p14">
           <p:contentPart p14:bwMode="auto" r:id="rId20">
             <p14:nvContentPartPr>
               <p14:cNvPr id="15" name="Ink 14">
@@ -9117,7 +8018,7 @@
             </p14:xfrm>
           </p:contentPart>
         </mc:Choice>
-        <mc:Fallback>
+        <mc:Fallback xmlns="">
           <p:pic>
             <p:nvPicPr>
               <p:cNvPr id="15" name="Ink 14">
@@ -9358,168 +8259,6 @@
           <a:chExt cx="0" cy="0"/>
         </a:xfrm>
       </p:grpSpPr>
-      <p:sp>
-        <p:nvSpPr>
-          <p:cNvPr id="2" name="Title 1">
-            <a:extLst>
-              <a:ext uri="{FF2B5EF4-FFF2-40B4-BE49-F238E27FC236}">
-                <a16:creationId xmlns:a16="http://schemas.microsoft.com/office/drawing/2014/main" id="{795E1B75-886E-0812-B2FD-DD250C225521}"/>
-              </a:ext>
-            </a:extLst>
-          </p:cNvPr>
-          <p:cNvSpPr>
-            <a:spLocks noGrp="1"/>
-          </p:cNvSpPr>
-          <p:nvPr>
-            <p:ph type="title"/>
-          </p:nvPr>
-        </p:nvSpPr>
-        <p:spPr>
-          <a:xfrm>
-            <a:off x="274320" y="136525"/>
-            <a:ext cx="11466576" cy="832739"/>
-          </a:xfrm>
-        </p:spPr>
-        <p:txBody>
-          <a:bodyPr>
-            <a:normAutofit/>
-          </a:bodyPr>
-          <a:lstStyle/>
-          <a:p>
-            <a:r>
-              <a:rPr lang="en-US" sz="3600" dirty="0"/>
-              <a:t>EXTRA</a:t>
-            </a:r>
-          </a:p>
-        </p:txBody>
-      </p:sp>
-      <p:sp>
-        <p:nvSpPr>
-          <p:cNvPr id="4" name="TextBox 3">
-            <a:extLst>
-              <a:ext uri="{FF2B5EF4-FFF2-40B4-BE49-F238E27FC236}">
-                <a16:creationId xmlns:a16="http://schemas.microsoft.com/office/drawing/2014/main" id="{902F8BE4-9CEA-0DAD-0357-E0A8215F169D}"/>
-              </a:ext>
-            </a:extLst>
-          </p:cNvPr>
-          <p:cNvSpPr txBox="1"/>
-          <p:nvPr/>
-        </p:nvSpPr>
-        <p:spPr>
-          <a:xfrm>
-            <a:off x="274320" y="933117"/>
-            <a:ext cx="11658600" cy="1477328"/>
-          </a:xfrm>
-          <a:prstGeom prst="rect">
-            <a:avLst/>
-          </a:prstGeom>
-          <a:noFill/>
-        </p:spPr>
-        <p:txBody>
-          <a:bodyPr wrap="square">
-            <a:spAutoFit/>
-          </a:bodyPr>
-          <a:lstStyle/>
-          <a:p>
-            <a:pPr marL="0" indent="0">
-              <a:buNone/>
-            </a:pPr>
-            <a:r>
-              <a:rPr lang="en-US" dirty="0" err="1">
-                <a:solidFill>
-                  <a:schemeClr val="accent6">
-                    <a:lumMod val="60000"/>
-                    <a:lumOff val="40000"/>
-                  </a:schemeClr>
-                </a:solidFill>
-              </a:rPr>
-              <a:t>Ffnbksdfd</a:t>
-            </a:r>
-            <a:endParaRPr lang="en-US" dirty="0">
-              <a:solidFill>
-                <a:schemeClr val="accent6">
-                  <a:lumMod val="60000"/>
-                  <a:lumOff val="40000"/>
-                </a:schemeClr>
-              </a:solidFill>
-            </a:endParaRPr>
-          </a:p>
-          <a:p>
-            <a:pPr marL="0" indent="0">
-              <a:buNone/>
-            </a:pPr>
-            <a:r>
-              <a:rPr lang="en-US" dirty="0" err="1">
-                <a:solidFill>
-                  <a:schemeClr val="accent6">
-                    <a:lumMod val="60000"/>
-                    <a:lumOff val="40000"/>
-                  </a:schemeClr>
-                </a:solidFill>
-              </a:rPr>
-              <a:t>Fdslj;f</a:t>
-            </a:r>
-            <a:endParaRPr lang="en-US" dirty="0">
-              <a:solidFill>
-                <a:schemeClr val="accent6">
-                  <a:lumMod val="60000"/>
-                  <a:lumOff val="40000"/>
-                </a:schemeClr>
-              </a:solidFill>
-            </a:endParaRPr>
-          </a:p>
-          <a:p>
-            <a:pPr marL="0" indent="0">
-              <a:buNone/>
-            </a:pPr>
-            <a:endParaRPr lang="en-US" dirty="0">
-              <a:solidFill>
-                <a:schemeClr val="accent6">
-                  <a:lumMod val="60000"/>
-                  <a:lumOff val="40000"/>
-                </a:schemeClr>
-              </a:solidFill>
-            </a:endParaRPr>
-          </a:p>
-          <a:p>
-            <a:pPr marL="0" indent="0">
-              <a:buNone/>
-            </a:pPr>
-            <a:r>
-              <a:rPr lang="en-US" dirty="0" err="1">
-                <a:solidFill>
-                  <a:schemeClr val="accent6">
-                    <a:lumMod val="60000"/>
-                    <a:lumOff val="40000"/>
-                  </a:schemeClr>
-                </a:solidFill>
-              </a:rPr>
-              <a:t>Fl;ds</a:t>
-            </a:r>
-            <a:endParaRPr lang="en-US" dirty="0">
-              <a:solidFill>
-                <a:schemeClr val="accent6">
-                  <a:lumMod val="60000"/>
-                  <a:lumOff val="40000"/>
-                </a:schemeClr>
-              </a:solidFill>
-            </a:endParaRPr>
-          </a:p>
-          <a:p>
-            <a:pPr marL="0" indent="0">
-              <a:buNone/>
-            </a:pPr>
-            <a:endParaRPr lang="en-US" dirty="0">
-              <a:solidFill>
-                <a:schemeClr val="accent6">
-                  <a:lumMod val="60000"/>
-                  <a:lumOff val="40000"/>
-                </a:schemeClr>
-              </a:solidFill>
-            </a:endParaRPr>
-          </a:p>
-        </p:txBody>
-      </p:sp>
     </p:spTree>
     <p:extLst>
       <p:ext uri="{BB962C8B-B14F-4D97-AF65-F5344CB8AC3E}">
